--- a/deliverables/NAVIS_SIH2026_NamasteByte_FINAL.pptx
+++ b/deliverables/NAVIS_SIH2026_NamasteByte_FINAL.pptx
@@ -2,18 +2,18 @@
 <file path=ppt/presentation.xml><?xml version="1.0" encoding="utf-8"?>
 <p:presentation xmlns:p="http://schemas.openxmlformats.org/presentationml/2006/main">
   <p:sldMasterIdLst>
-    <p:sldMasterId xmlns:r="http://schemas.openxmlformats.org/officeDocument/2006/relationships" id="2147483648" r:id="Re85ba2aa83854a96"/>
+    <p:sldMasterId xmlns:r="http://schemas.openxmlformats.org/officeDocument/2006/relationships" id="2147483648" r:id="Rc8da03cc165c4402"/>
   </p:sldMasterIdLst>
   <p:notesMasterIdLst>
-    <p:notesMasterId xmlns:r="http://schemas.openxmlformats.org/officeDocument/2006/relationships" r:id="Rcd67294243b54ca1"/>
+    <p:notesMasterId xmlns:r="http://schemas.openxmlformats.org/officeDocument/2006/relationships" r:id="R4e93ff1e9f49489c"/>
   </p:notesMasterIdLst>
   <p:sldIdLst>
-    <p:sldId xmlns:r="http://schemas.openxmlformats.org/officeDocument/2006/relationships" id="256" r:id="Rac6c6573db6c42cf"/>
-    <p:sldId xmlns:r="http://schemas.openxmlformats.org/officeDocument/2006/relationships" id="257" r:id="Rc1f7b7c8192444c4"/>
-    <p:sldId xmlns:r="http://schemas.openxmlformats.org/officeDocument/2006/relationships" id="258" r:id="Rc8be60e0fe0541bd"/>
-    <p:sldId xmlns:r="http://schemas.openxmlformats.org/officeDocument/2006/relationships" id="259" r:id="R46ed5279d2b54cf8"/>
-    <p:sldId xmlns:r="http://schemas.openxmlformats.org/officeDocument/2006/relationships" id="260" r:id="Rfd16f21fa85a4401"/>
-    <p:sldId xmlns:r="http://schemas.openxmlformats.org/officeDocument/2006/relationships" id="261" r:id="R0a3b9c035d024cfd"/>
+    <p:sldId xmlns:r="http://schemas.openxmlformats.org/officeDocument/2006/relationships" id="256" r:id="Rf07e37acde2d4823"/>
+    <p:sldId xmlns:r="http://schemas.openxmlformats.org/officeDocument/2006/relationships" id="257" r:id="R64e0e34c726147ad"/>
+    <p:sldId xmlns:r="http://schemas.openxmlformats.org/officeDocument/2006/relationships" id="258" r:id="R02aad59003974a64"/>
+    <p:sldId xmlns:r="http://schemas.openxmlformats.org/officeDocument/2006/relationships" id="259" r:id="Rd3f1ada75a6d430e"/>
+    <p:sldId xmlns:r="http://schemas.openxmlformats.org/officeDocument/2006/relationships" id="260" r:id="R6e9322772c474d3c"/>
+    <p:sldId xmlns:r="http://schemas.openxmlformats.org/officeDocument/2006/relationships" id="261" r:id="R9b9432f817634bb8"/>
   </p:sldIdLst>
   <p:sldSz cx="12192000" cy="6858000"/>
   <p:notesSz cx="6858000" cy="9144000"/>
@@ -1085,7 +1085,7 @@
           <p:cNvPr id="2" name="Title 1">
             <a:extLst xmlns:a="http://schemas.openxmlformats.org/drawingml/2006/main">
               <a:ext uri="{FF2B5EF4-FFF2-40B4-BE49-F238E27FC236}">
-                <a16:creationId xmlns:a16="http://schemas.microsoft.com/office/drawing/2014/main" id="{9382B93B-E853-455D-8075-D0AB3051F869}"/>
+                <a16:creationId xmlns:a16="http://schemas.microsoft.com/office/drawing/2014/main" id="{665A57F7-2F3C-4E1F-9502-E26C0E19C5BC}"/>
               </a:ext>
             </a:extLst>
           </p:cNvPr>
@@ -1117,7 +1117,7 @@
           <p:cNvPr id="3" name="Subtitle 2">
             <a:extLst xmlns:a="http://schemas.openxmlformats.org/drawingml/2006/main">
               <a:ext uri="{FF2B5EF4-FFF2-40B4-BE49-F238E27FC236}">
-                <a16:creationId xmlns:a16="http://schemas.microsoft.com/office/drawing/2014/main" id="{8E5B1B3E-F7AE-44C4-B529-70E5D856919F}"/>
+                <a16:creationId xmlns:a16="http://schemas.microsoft.com/office/drawing/2014/main" id="{0B552106-9163-4266-84CF-7EC5DFC3FDD9}"/>
               </a:ext>
             </a:extLst>
           </p:cNvPr>
@@ -1240,7 +1240,7 @@
           <p:cNvPr id="4" name="Date Placeholder 3">
             <a:extLst xmlns:a="http://schemas.openxmlformats.org/drawingml/2006/main">
               <a:ext uri="{FF2B5EF4-FFF2-40B4-BE49-F238E27FC236}">
-                <a16:creationId xmlns:a16="http://schemas.microsoft.com/office/drawing/2014/main" id="{BF9D1413-0F24-49DE-B18A-25CFD18647B7}"/>
+                <a16:creationId xmlns:a16="http://schemas.microsoft.com/office/drawing/2014/main" id="{12CE80B8-E245-4E98-BAB9-51FE225140D5}"/>
               </a:ext>
             </a:extLst>
           </p:cNvPr>
@@ -1273,7 +1273,7 @@
           <p:cNvPr id="5" name="Footer Placeholder 4">
             <a:extLst xmlns:a="http://schemas.openxmlformats.org/drawingml/2006/main">
               <a:ext uri="{FF2B5EF4-FFF2-40B4-BE49-F238E27FC236}">
-                <a16:creationId xmlns:a16="http://schemas.microsoft.com/office/drawing/2014/main" id="{27C7194D-15BC-41A8-8231-E2029D5FBE1C}"/>
+                <a16:creationId xmlns:a16="http://schemas.microsoft.com/office/drawing/2014/main" id="{1FCCA019-71C3-4C81-829A-ABBBECD51800}"/>
               </a:ext>
             </a:extLst>
           </p:cNvPr>
@@ -1308,7 +1308,7 @@
           <p:cNvPr id="6" name="Slide Number Placeholder 5">
             <a:extLst xmlns:a="http://schemas.openxmlformats.org/drawingml/2006/main">
               <a:ext uri="{FF2B5EF4-FFF2-40B4-BE49-F238E27FC236}">
-                <a16:creationId xmlns:a16="http://schemas.microsoft.com/office/drawing/2014/main" id="{D3BD1736-4635-4CF1-9339-24893AE7FB6E}"/>
+                <a16:creationId xmlns:a16="http://schemas.microsoft.com/office/drawing/2014/main" id="{C094CE2A-C447-4CEB-990B-6BD5CFF7C140}"/>
               </a:ext>
             </a:extLst>
           </p:cNvPr>
@@ -1358,7 +1358,7 @@
           <p:cNvPr id="2" name="Title 1">
             <a:extLst xmlns:a="http://schemas.openxmlformats.org/drawingml/2006/main">
               <a:ext uri="{FF2B5EF4-FFF2-40B4-BE49-F238E27FC236}">
-                <a16:creationId xmlns:a16="http://schemas.microsoft.com/office/drawing/2014/main" id="{02B4E6CC-1AF1-49EF-B898-F9A00C04FD57}"/>
+                <a16:creationId xmlns:a16="http://schemas.microsoft.com/office/drawing/2014/main" id="{DED0B723-6342-43AE-8B77-E2939DCFA0A3}"/>
               </a:ext>
             </a:extLst>
           </p:cNvPr>
@@ -1385,7 +1385,7 @@
           <p:cNvPr id="3" name="Vertical Text Placeholder 2">
             <a:extLst xmlns:a="http://schemas.openxmlformats.org/drawingml/2006/main">
               <a:ext uri="{FF2B5EF4-FFF2-40B4-BE49-F238E27FC236}">
-                <a16:creationId xmlns:a16="http://schemas.microsoft.com/office/drawing/2014/main" id="{54B5B6A2-6FDB-431A-813C-316184EB37D1}"/>
+                <a16:creationId xmlns:a16="http://schemas.microsoft.com/office/drawing/2014/main" id="{75207C3F-383F-436C-AB91-CC378099F3A3}"/>
               </a:ext>
             </a:extLst>
           </p:cNvPr>
@@ -1447,7 +1447,7 @@
           <p:cNvPr id="4" name="Date Placeholder 3">
             <a:extLst xmlns:a="http://schemas.openxmlformats.org/drawingml/2006/main">
               <a:ext uri="{FF2B5EF4-FFF2-40B4-BE49-F238E27FC236}">
-                <a16:creationId xmlns:a16="http://schemas.microsoft.com/office/drawing/2014/main" id="{74A24A30-F10B-4DD6-B400-8366D1C961C1}"/>
+                <a16:creationId xmlns:a16="http://schemas.microsoft.com/office/drawing/2014/main" id="{49222054-F112-4322-A729-E3E31BDA17F8}"/>
               </a:ext>
             </a:extLst>
           </p:cNvPr>
@@ -1480,7 +1480,7 @@
           <p:cNvPr id="5" name="Footer Placeholder 4">
             <a:extLst xmlns:a="http://schemas.openxmlformats.org/drawingml/2006/main">
               <a:ext uri="{FF2B5EF4-FFF2-40B4-BE49-F238E27FC236}">
-                <a16:creationId xmlns:a16="http://schemas.microsoft.com/office/drawing/2014/main" id="{1ED228EB-8D79-4B5E-82B0-5090F9542EDD}"/>
+                <a16:creationId xmlns:a16="http://schemas.microsoft.com/office/drawing/2014/main" id="{4E3F0C10-DFD4-44DF-B47D-0AB80518ACFE}"/>
               </a:ext>
             </a:extLst>
           </p:cNvPr>
@@ -1515,7 +1515,7 @@
           <p:cNvPr id="6" name="Slide Number Placeholder 5">
             <a:extLst xmlns:a="http://schemas.openxmlformats.org/drawingml/2006/main">
               <a:ext uri="{FF2B5EF4-FFF2-40B4-BE49-F238E27FC236}">
-                <a16:creationId xmlns:a16="http://schemas.microsoft.com/office/drawing/2014/main" id="{BC56AB2D-6E66-4FB0-8900-50DC9B92E568}"/>
+                <a16:creationId xmlns:a16="http://schemas.microsoft.com/office/drawing/2014/main" id="{17787786-7EB9-4BC1-B0A9-6A75EFDBFE0F}"/>
               </a:ext>
             </a:extLst>
           </p:cNvPr>
@@ -1565,7 +1565,7 @@
           <p:cNvPr id="2" name="Vertical Title 1">
             <a:extLst xmlns:a="http://schemas.openxmlformats.org/drawingml/2006/main">
               <a:ext uri="{FF2B5EF4-FFF2-40B4-BE49-F238E27FC236}">
-                <a16:creationId xmlns:a16="http://schemas.microsoft.com/office/drawing/2014/main" id="{F6CFB8B3-857E-4BF1-8D87-9D5B0CDD8FB6}"/>
+                <a16:creationId xmlns:a16="http://schemas.microsoft.com/office/drawing/2014/main" id="{89608B2A-FE49-435D-98AB-3131D946C731}"/>
               </a:ext>
             </a:extLst>
           </p:cNvPr>
@@ -1597,7 +1597,7 @@
           <p:cNvPr id="3" name="Vertical Text Placeholder 2">
             <a:extLst xmlns:a="http://schemas.openxmlformats.org/drawingml/2006/main">
               <a:ext uri="{FF2B5EF4-FFF2-40B4-BE49-F238E27FC236}">
-                <a16:creationId xmlns:a16="http://schemas.microsoft.com/office/drawing/2014/main" id="{D77D7142-BCD7-41E8-9699-DC82AC4E70ED}"/>
+                <a16:creationId xmlns:a16="http://schemas.microsoft.com/office/drawing/2014/main" id="{3CF61226-5FD5-4696-AB46-4B21E45538E1}"/>
               </a:ext>
             </a:extLst>
           </p:cNvPr>
@@ -1664,7 +1664,7 @@
           <p:cNvPr id="4" name="Date Placeholder 3">
             <a:extLst xmlns:a="http://schemas.openxmlformats.org/drawingml/2006/main">
               <a:ext uri="{FF2B5EF4-FFF2-40B4-BE49-F238E27FC236}">
-                <a16:creationId xmlns:a16="http://schemas.microsoft.com/office/drawing/2014/main" id="{051EFEF0-E0C7-4F2F-9D5F-FE10A7C94C76}"/>
+                <a16:creationId xmlns:a16="http://schemas.microsoft.com/office/drawing/2014/main" id="{2E8C0530-C282-4AF4-87D8-F4CC7FF7C0E9}"/>
               </a:ext>
             </a:extLst>
           </p:cNvPr>
@@ -1697,7 +1697,7 @@
           <p:cNvPr id="5" name="Footer Placeholder 4">
             <a:extLst xmlns:a="http://schemas.openxmlformats.org/drawingml/2006/main">
               <a:ext uri="{FF2B5EF4-FFF2-40B4-BE49-F238E27FC236}">
-                <a16:creationId xmlns:a16="http://schemas.microsoft.com/office/drawing/2014/main" id="{4557BD7B-B058-47CA-A9AE-93E6B94730C1}"/>
+                <a16:creationId xmlns:a16="http://schemas.microsoft.com/office/drawing/2014/main" id="{A10CA7BC-F9F8-4E6F-BC98-A910627E5F6E}"/>
               </a:ext>
             </a:extLst>
           </p:cNvPr>
@@ -1732,7 +1732,7 @@
           <p:cNvPr id="6" name="Slide Number Placeholder 5">
             <a:extLst xmlns:a="http://schemas.openxmlformats.org/drawingml/2006/main">
               <a:ext uri="{FF2B5EF4-FFF2-40B4-BE49-F238E27FC236}">
-                <a16:creationId xmlns:a16="http://schemas.microsoft.com/office/drawing/2014/main" id="{078D677A-988D-4F5F-9366-E092C585AE7B}"/>
+                <a16:creationId xmlns:a16="http://schemas.microsoft.com/office/drawing/2014/main" id="{14F032DE-8734-4A4A-AFDC-A2582E61A467}"/>
               </a:ext>
             </a:extLst>
           </p:cNvPr>
@@ -1782,7 +1782,7 @@
           <p:cNvPr id="2" name="Title 1">
             <a:extLst xmlns:a="http://schemas.openxmlformats.org/drawingml/2006/main">
               <a:ext uri="{FF2B5EF4-FFF2-40B4-BE49-F238E27FC236}">
-                <a16:creationId xmlns:a16="http://schemas.microsoft.com/office/drawing/2014/main" id="{97D310BC-0ED7-46F1-B6C2-63A892746B36}"/>
+                <a16:creationId xmlns:a16="http://schemas.microsoft.com/office/drawing/2014/main" id="{493ADF57-9C78-4AF7-92B4-10AA5792A992}"/>
               </a:ext>
             </a:extLst>
           </p:cNvPr>
@@ -1809,7 +1809,7 @@
           <p:cNvPr id="3" name="Content Placeholder 2">
             <a:extLst xmlns:a="http://schemas.openxmlformats.org/drawingml/2006/main">
               <a:ext uri="{FF2B5EF4-FFF2-40B4-BE49-F238E27FC236}">
-                <a16:creationId xmlns:a16="http://schemas.microsoft.com/office/drawing/2014/main" id="{87372AF3-D95D-43F8-AA5B-C835E836877B}"/>
+                <a16:creationId xmlns:a16="http://schemas.microsoft.com/office/drawing/2014/main" id="{C78B6F8E-678C-44C5-8D7D-2A0F147CD6EF}"/>
               </a:ext>
             </a:extLst>
           </p:cNvPr>
@@ -1871,7 +1871,7 @@
           <p:cNvPr id="4" name="Date Placeholder 3">
             <a:extLst xmlns:a="http://schemas.openxmlformats.org/drawingml/2006/main">
               <a:ext uri="{FF2B5EF4-FFF2-40B4-BE49-F238E27FC236}">
-                <a16:creationId xmlns:a16="http://schemas.microsoft.com/office/drawing/2014/main" id="{2653958E-37DB-4FC1-821D-60FD2746C9B7}"/>
+                <a16:creationId xmlns:a16="http://schemas.microsoft.com/office/drawing/2014/main" id="{C7E2D76B-2825-4A72-90FC-27E215289A6B}"/>
               </a:ext>
             </a:extLst>
           </p:cNvPr>
@@ -1904,7 +1904,7 @@
           <p:cNvPr id="5" name="Footer Placeholder 4">
             <a:extLst xmlns:a="http://schemas.openxmlformats.org/drawingml/2006/main">
               <a:ext uri="{FF2B5EF4-FFF2-40B4-BE49-F238E27FC236}">
-                <a16:creationId xmlns:a16="http://schemas.microsoft.com/office/drawing/2014/main" id="{7546543E-6F1F-4627-BFD9-D4AD317F4310}"/>
+                <a16:creationId xmlns:a16="http://schemas.microsoft.com/office/drawing/2014/main" id="{67F87384-11AC-4627-A5C9-37376F0DF1E1}"/>
               </a:ext>
             </a:extLst>
           </p:cNvPr>
@@ -1939,7 +1939,7 @@
           <p:cNvPr id="6" name="Slide Number Placeholder 5">
             <a:extLst xmlns:a="http://schemas.openxmlformats.org/drawingml/2006/main">
               <a:ext uri="{FF2B5EF4-FFF2-40B4-BE49-F238E27FC236}">
-                <a16:creationId xmlns:a16="http://schemas.microsoft.com/office/drawing/2014/main" id="{8139F65C-2887-4D4A-8C98-4A5A37251B67}"/>
+                <a16:creationId xmlns:a16="http://schemas.microsoft.com/office/drawing/2014/main" id="{71CF1668-6AD7-4B1E-8DD1-11F64CD0C590}"/>
               </a:ext>
             </a:extLst>
           </p:cNvPr>
@@ -1989,7 +1989,7 @@
           <p:cNvPr id="2" name="Title 1">
             <a:extLst xmlns:a="http://schemas.openxmlformats.org/drawingml/2006/main">
               <a:ext uri="{FF2B5EF4-FFF2-40B4-BE49-F238E27FC236}">
-                <a16:creationId xmlns:a16="http://schemas.microsoft.com/office/drawing/2014/main" id="{B2463BFC-C49C-4F04-99F0-873417E9FF5B}"/>
+                <a16:creationId xmlns:a16="http://schemas.microsoft.com/office/drawing/2014/main" id="{64F1BE20-17C4-4B6E-B302-F171EA82B847}"/>
               </a:ext>
             </a:extLst>
           </p:cNvPr>
@@ -2026,7 +2026,7 @@
           <p:cNvPr id="3" name="Text Placeholder 2">
             <a:extLst xmlns:a="http://schemas.openxmlformats.org/drawingml/2006/main">
               <a:ext uri="{FF2B5EF4-FFF2-40B4-BE49-F238E27FC236}">
-                <a16:creationId xmlns:a16="http://schemas.microsoft.com/office/drawing/2014/main" id="{A0855FCC-A6AF-4B5B-8D3E-C21DB8186559}"/>
+                <a16:creationId xmlns:a16="http://schemas.microsoft.com/office/drawing/2014/main" id="{BD6CC9EC-AE89-477C-AFFE-84B2332B4733}"/>
               </a:ext>
             </a:extLst>
           </p:cNvPr>
@@ -2152,7 +2152,7 @@
           <p:cNvPr id="4" name="Date Placeholder 3">
             <a:extLst xmlns:a="http://schemas.openxmlformats.org/drawingml/2006/main">
               <a:ext uri="{FF2B5EF4-FFF2-40B4-BE49-F238E27FC236}">
-                <a16:creationId xmlns:a16="http://schemas.microsoft.com/office/drawing/2014/main" id="{288B4148-E986-4FAF-B613-18A4125CF308}"/>
+                <a16:creationId xmlns:a16="http://schemas.microsoft.com/office/drawing/2014/main" id="{6AD2BD51-D4F5-4C1E-8BC2-E26BE3C23158}"/>
               </a:ext>
             </a:extLst>
           </p:cNvPr>
@@ -2185,7 +2185,7 @@
           <p:cNvPr id="5" name="Footer Placeholder 4">
             <a:extLst xmlns:a="http://schemas.openxmlformats.org/drawingml/2006/main">
               <a:ext uri="{FF2B5EF4-FFF2-40B4-BE49-F238E27FC236}">
-                <a16:creationId xmlns:a16="http://schemas.microsoft.com/office/drawing/2014/main" id="{B6F14CC7-0C02-4E03-BE43-6556C9EC3759}"/>
+                <a16:creationId xmlns:a16="http://schemas.microsoft.com/office/drawing/2014/main" id="{915E4F27-6B45-49F0-8162-12FBF292F519}"/>
               </a:ext>
             </a:extLst>
           </p:cNvPr>
@@ -2220,7 +2220,7 @@
           <p:cNvPr id="6" name="Slide Number Placeholder 5">
             <a:extLst xmlns:a="http://schemas.openxmlformats.org/drawingml/2006/main">
               <a:ext uri="{FF2B5EF4-FFF2-40B4-BE49-F238E27FC236}">
-                <a16:creationId xmlns:a16="http://schemas.microsoft.com/office/drawing/2014/main" id="{F5DA7CBC-B397-4956-ABD0-3AD936F4EDB2}"/>
+                <a16:creationId xmlns:a16="http://schemas.microsoft.com/office/drawing/2014/main" id="{DFDC99D7-A5F2-4C15-8255-61EC1BC3F939}"/>
               </a:ext>
             </a:extLst>
           </p:cNvPr>
@@ -2270,7 +2270,7 @@
           <p:cNvPr id="2" name="Title 1">
             <a:extLst xmlns:a="http://schemas.openxmlformats.org/drawingml/2006/main">
               <a:ext uri="{FF2B5EF4-FFF2-40B4-BE49-F238E27FC236}">
-                <a16:creationId xmlns:a16="http://schemas.microsoft.com/office/drawing/2014/main" id="{F290A800-F9B5-46BB-8C62-806B539867D9}"/>
+                <a16:creationId xmlns:a16="http://schemas.microsoft.com/office/drawing/2014/main" id="{F0DB8BEE-0185-462D-A2B7-FD9F31D2E246}"/>
               </a:ext>
             </a:extLst>
           </p:cNvPr>
@@ -2297,7 +2297,7 @@
           <p:cNvPr id="3" name="Content Placeholder 2">
             <a:extLst xmlns:a="http://schemas.openxmlformats.org/drawingml/2006/main">
               <a:ext uri="{FF2B5EF4-FFF2-40B4-BE49-F238E27FC236}">
-                <a16:creationId xmlns:a16="http://schemas.microsoft.com/office/drawing/2014/main" id="{1C62A06C-B29E-4665-AA21-A5829138F4B1}"/>
+                <a16:creationId xmlns:a16="http://schemas.microsoft.com/office/drawing/2014/main" id="{AA25776A-0CE1-4DF1-8963-F300830ED6F9}"/>
               </a:ext>
             </a:extLst>
           </p:cNvPr>
@@ -2401,7 +2401,7 @@
           <p:cNvPr id="4" name="Content Placeholder 3">
             <a:extLst xmlns:a="http://schemas.openxmlformats.org/drawingml/2006/main">
               <a:ext uri="{FF2B5EF4-FFF2-40B4-BE49-F238E27FC236}">
-                <a16:creationId xmlns:a16="http://schemas.microsoft.com/office/drawing/2014/main" id="{227A344C-CFBE-493A-B94A-DB3D7FA8961C}"/>
+                <a16:creationId xmlns:a16="http://schemas.microsoft.com/office/drawing/2014/main" id="{3A48E1C1-BE36-4EB1-BB35-9A64AA41D1CE}"/>
               </a:ext>
             </a:extLst>
           </p:cNvPr>
@@ -2505,7 +2505,7 @@
           <p:cNvPr id="5" name="Date Placeholder 3">
             <a:extLst xmlns:a="http://schemas.openxmlformats.org/drawingml/2006/main">
               <a:ext uri="{FF2B5EF4-FFF2-40B4-BE49-F238E27FC236}">
-                <a16:creationId xmlns:a16="http://schemas.microsoft.com/office/drawing/2014/main" id="{FA8B8EDB-9C2F-445D-BB9B-0CA99DE49E14}"/>
+                <a16:creationId xmlns:a16="http://schemas.microsoft.com/office/drawing/2014/main" id="{A8055AB9-A4F8-4641-8786-A9DFEFB6BD7B}"/>
               </a:ext>
             </a:extLst>
           </p:cNvPr>
@@ -2538,7 +2538,7 @@
           <p:cNvPr id="6" name="Footer Placeholder 4">
             <a:extLst xmlns:a="http://schemas.openxmlformats.org/drawingml/2006/main">
               <a:ext uri="{FF2B5EF4-FFF2-40B4-BE49-F238E27FC236}">
-                <a16:creationId xmlns:a16="http://schemas.microsoft.com/office/drawing/2014/main" id="{16885972-C713-41B7-9657-5D5D29C0DF21}"/>
+                <a16:creationId xmlns:a16="http://schemas.microsoft.com/office/drawing/2014/main" id="{BE5C57E1-9FE6-4B15-AF4D-BF999764DDB9}"/>
               </a:ext>
             </a:extLst>
           </p:cNvPr>
@@ -2573,7 +2573,7 @@
           <p:cNvPr id="7" name="Slide Number Placeholder 5">
             <a:extLst xmlns:a="http://schemas.openxmlformats.org/drawingml/2006/main">
               <a:ext uri="{FF2B5EF4-FFF2-40B4-BE49-F238E27FC236}">
-                <a16:creationId xmlns:a16="http://schemas.microsoft.com/office/drawing/2014/main" id="{F8416745-1E1A-4166-8D64-262F3D0CE2AA}"/>
+                <a16:creationId xmlns:a16="http://schemas.microsoft.com/office/drawing/2014/main" id="{738A833E-F980-4EC0-B70A-EFCB84179F5B}"/>
               </a:ext>
             </a:extLst>
           </p:cNvPr>
@@ -2623,7 +2623,7 @@
           <p:cNvPr id="2" name="Title 1">
             <a:extLst xmlns:a="http://schemas.openxmlformats.org/drawingml/2006/main">
               <a:ext uri="{FF2B5EF4-FFF2-40B4-BE49-F238E27FC236}">
-                <a16:creationId xmlns:a16="http://schemas.microsoft.com/office/drawing/2014/main" id="{21336631-9668-4F15-AD29-2D218C71C190}"/>
+                <a16:creationId xmlns:a16="http://schemas.microsoft.com/office/drawing/2014/main" id="{8AB2542B-27EF-47AB-B68F-157AD3A9D729}"/>
               </a:ext>
             </a:extLst>
           </p:cNvPr>
@@ -2655,7 +2655,7 @@
           <p:cNvPr id="3" name="Text Placeholder 2">
             <a:extLst xmlns:a="http://schemas.openxmlformats.org/drawingml/2006/main">
               <a:ext uri="{FF2B5EF4-FFF2-40B4-BE49-F238E27FC236}">
-                <a16:creationId xmlns:a16="http://schemas.microsoft.com/office/drawing/2014/main" id="{26CF7036-2247-4519-BA2D-389049513134}"/>
+                <a16:creationId xmlns:a16="http://schemas.microsoft.com/office/drawing/2014/main" id="{F921CDC8-2AA7-4253-85B6-643B936D142E}"/>
               </a:ext>
             </a:extLst>
           </p:cNvPr>
@@ -2727,7 +2727,7 @@
           <p:cNvPr id="4" name="Content Placeholder 3">
             <a:extLst xmlns:a="http://schemas.openxmlformats.org/drawingml/2006/main">
               <a:ext uri="{FF2B5EF4-FFF2-40B4-BE49-F238E27FC236}">
-                <a16:creationId xmlns:a16="http://schemas.microsoft.com/office/drawing/2014/main" id="{B12918B2-C240-4036-B097-AE14AAFCCF14}"/>
+                <a16:creationId xmlns:a16="http://schemas.microsoft.com/office/drawing/2014/main" id="{CA772C36-CBB0-403F-8728-398EAE7B25FA}"/>
               </a:ext>
             </a:extLst>
           </p:cNvPr>
@@ -2831,7 +2831,7 @@
           <p:cNvPr id="5" name="Text Placeholder 4">
             <a:extLst xmlns:a="http://schemas.openxmlformats.org/drawingml/2006/main">
               <a:ext uri="{FF2B5EF4-FFF2-40B4-BE49-F238E27FC236}">
-                <a16:creationId xmlns:a16="http://schemas.microsoft.com/office/drawing/2014/main" id="{5812D4B7-F30F-4A03-9309-5640FE330EB3}"/>
+                <a16:creationId xmlns:a16="http://schemas.microsoft.com/office/drawing/2014/main" id="{DA0D9EE9-01AB-44EA-BC59-F3504B374E90}"/>
               </a:ext>
             </a:extLst>
           </p:cNvPr>
@@ -2903,7 +2903,7 @@
           <p:cNvPr id="6" name="Content Placeholder 5">
             <a:extLst xmlns:a="http://schemas.openxmlformats.org/drawingml/2006/main">
               <a:ext uri="{FF2B5EF4-FFF2-40B4-BE49-F238E27FC236}">
-                <a16:creationId xmlns:a16="http://schemas.microsoft.com/office/drawing/2014/main" id="{370D24EA-38E3-47A5-9D44-676F6CFB918D}"/>
+                <a16:creationId xmlns:a16="http://schemas.microsoft.com/office/drawing/2014/main" id="{34CAF7DA-A12F-4293-A303-681826165815}"/>
               </a:ext>
             </a:extLst>
           </p:cNvPr>
@@ -3007,7 +3007,7 @@
           <p:cNvPr id="7" name="Date Placeholder 3">
             <a:extLst xmlns:a="http://schemas.openxmlformats.org/drawingml/2006/main">
               <a:ext uri="{FF2B5EF4-FFF2-40B4-BE49-F238E27FC236}">
-                <a16:creationId xmlns:a16="http://schemas.microsoft.com/office/drawing/2014/main" id="{6B93DA61-E273-4882-8EDF-A6F2F3B18BA7}"/>
+                <a16:creationId xmlns:a16="http://schemas.microsoft.com/office/drawing/2014/main" id="{FD395D2B-ABA6-4DBB-83EF-1DA32C8AAF6D}"/>
               </a:ext>
             </a:extLst>
           </p:cNvPr>
@@ -3040,7 +3040,7 @@
           <p:cNvPr id="8" name="Footer Placeholder 4">
             <a:extLst xmlns:a="http://schemas.openxmlformats.org/drawingml/2006/main">
               <a:ext uri="{FF2B5EF4-FFF2-40B4-BE49-F238E27FC236}">
-                <a16:creationId xmlns:a16="http://schemas.microsoft.com/office/drawing/2014/main" id="{C32D4094-C31D-4136-9D6C-49A985C732B3}"/>
+                <a16:creationId xmlns:a16="http://schemas.microsoft.com/office/drawing/2014/main" id="{213E3A1C-C4DC-4C55-9E25-86A0A31C6860}"/>
               </a:ext>
             </a:extLst>
           </p:cNvPr>
@@ -3075,7 +3075,7 @@
           <p:cNvPr id="9" name="Slide Number Placeholder 5">
             <a:extLst xmlns:a="http://schemas.openxmlformats.org/drawingml/2006/main">
               <a:ext uri="{FF2B5EF4-FFF2-40B4-BE49-F238E27FC236}">
-                <a16:creationId xmlns:a16="http://schemas.microsoft.com/office/drawing/2014/main" id="{26F9622B-B7FE-4FD5-86B7-537AEE581715}"/>
+                <a16:creationId xmlns:a16="http://schemas.microsoft.com/office/drawing/2014/main" id="{A23D6E63-30FB-4478-9A65-ABD8D3703DCE}"/>
               </a:ext>
             </a:extLst>
           </p:cNvPr>
@@ -3125,7 +3125,7 @@
           <p:cNvPr id="2" name="Title 1">
             <a:extLst xmlns:a="http://schemas.openxmlformats.org/drawingml/2006/main">
               <a:ext uri="{FF2B5EF4-FFF2-40B4-BE49-F238E27FC236}">
-                <a16:creationId xmlns:a16="http://schemas.microsoft.com/office/drawing/2014/main" id="{94C69674-A5B1-4B2A-A69B-74C540AF794C}"/>
+                <a16:creationId xmlns:a16="http://schemas.microsoft.com/office/drawing/2014/main" id="{2E403004-510C-42CA-8911-36429D98380E}"/>
               </a:ext>
             </a:extLst>
           </p:cNvPr>
@@ -3152,7 +3152,7 @@
           <p:cNvPr id="3" name="Date Placeholder 3">
             <a:extLst xmlns:a="http://schemas.openxmlformats.org/drawingml/2006/main">
               <a:ext uri="{FF2B5EF4-FFF2-40B4-BE49-F238E27FC236}">
-                <a16:creationId xmlns:a16="http://schemas.microsoft.com/office/drawing/2014/main" id="{5216C0DA-C777-4615-B2E5-CD40470846A7}"/>
+                <a16:creationId xmlns:a16="http://schemas.microsoft.com/office/drawing/2014/main" id="{3547E4A9-6F88-424B-A2CD-35769C1757D3}"/>
               </a:ext>
             </a:extLst>
           </p:cNvPr>
@@ -3185,7 +3185,7 @@
           <p:cNvPr id="4" name="Footer Placeholder 4">
             <a:extLst xmlns:a="http://schemas.openxmlformats.org/drawingml/2006/main">
               <a:ext uri="{FF2B5EF4-FFF2-40B4-BE49-F238E27FC236}">
-                <a16:creationId xmlns:a16="http://schemas.microsoft.com/office/drawing/2014/main" id="{B7E387A5-5E02-4C5F-9713-4C2602555F1F}"/>
+                <a16:creationId xmlns:a16="http://schemas.microsoft.com/office/drawing/2014/main" id="{DCD558B4-2A3D-4286-9A6D-2ABDFA855896}"/>
               </a:ext>
             </a:extLst>
           </p:cNvPr>
@@ -3220,7 +3220,7 @@
           <p:cNvPr id="5" name="Slide Number Placeholder 5">
             <a:extLst xmlns:a="http://schemas.openxmlformats.org/drawingml/2006/main">
               <a:ext uri="{FF2B5EF4-FFF2-40B4-BE49-F238E27FC236}">
-                <a16:creationId xmlns:a16="http://schemas.microsoft.com/office/drawing/2014/main" id="{1A70C69A-BEBB-42D7-B5A1-6B03EB5A09A4}"/>
+                <a16:creationId xmlns:a16="http://schemas.microsoft.com/office/drawing/2014/main" id="{1B044A29-855A-4968-9685-08908A1AA58B}"/>
               </a:ext>
             </a:extLst>
           </p:cNvPr>
@@ -3270,7 +3270,7 @@
           <p:cNvPr id="2" name="Date Placeholder 3">
             <a:extLst xmlns:a="http://schemas.openxmlformats.org/drawingml/2006/main">
               <a:ext uri="{FF2B5EF4-FFF2-40B4-BE49-F238E27FC236}">
-                <a16:creationId xmlns:a16="http://schemas.microsoft.com/office/drawing/2014/main" id="{441F3C92-F84F-4A10-BED4-473EB84341F5}"/>
+                <a16:creationId xmlns:a16="http://schemas.microsoft.com/office/drawing/2014/main" id="{CC372B67-8BE5-4C5C-93BE-C75EA25BA628}"/>
               </a:ext>
             </a:extLst>
           </p:cNvPr>
@@ -3303,7 +3303,7 @@
           <p:cNvPr id="3" name="Footer Placeholder 4">
             <a:extLst xmlns:a="http://schemas.openxmlformats.org/drawingml/2006/main">
               <a:ext uri="{FF2B5EF4-FFF2-40B4-BE49-F238E27FC236}">
-                <a16:creationId xmlns:a16="http://schemas.microsoft.com/office/drawing/2014/main" id="{16FD70DB-F3C9-4DC2-8283-055489865C28}"/>
+                <a16:creationId xmlns:a16="http://schemas.microsoft.com/office/drawing/2014/main" id="{38469BED-57FF-4F20-927D-D80C082A334A}"/>
               </a:ext>
             </a:extLst>
           </p:cNvPr>
@@ -3338,7 +3338,7 @@
           <p:cNvPr id="4" name="Slide Number Placeholder 5">
             <a:extLst xmlns:a="http://schemas.openxmlformats.org/drawingml/2006/main">
               <a:ext uri="{FF2B5EF4-FFF2-40B4-BE49-F238E27FC236}">
-                <a16:creationId xmlns:a16="http://schemas.microsoft.com/office/drawing/2014/main" id="{3CAE64F9-92B1-4C31-A765-183BC6EB05EF}"/>
+                <a16:creationId xmlns:a16="http://schemas.microsoft.com/office/drawing/2014/main" id="{D13FD650-926F-44F4-AB85-AE6E8054DA99}"/>
               </a:ext>
             </a:extLst>
           </p:cNvPr>
@@ -3388,7 +3388,7 @@
           <p:cNvPr id="2" name="Title 1">
             <a:extLst xmlns:a="http://schemas.openxmlformats.org/drawingml/2006/main">
               <a:ext uri="{FF2B5EF4-FFF2-40B4-BE49-F238E27FC236}">
-                <a16:creationId xmlns:a16="http://schemas.microsoft.com/office/drawing/2014/main" id="{F4B71020-559B-4B4F-BA03-8C8CA6BF38CF}"/>
+                <a16:creationId xmlns:a16="http://schemas.microsoft.com/office/drawing/2014/main" id="{5EC4CDF0-304C-4DEC-8812-5DD4294E8C22}"/>
               </a:ext>
             </a:extLst>
           </p:cNvPr>
@@ -3425,7 +3425,7 @@
           <p:cNvPr id="3" name="Content Placeholder 2">
             <a:extLst xmlns:a="http://schemas.openxmlformats.org/drawingml/2006/main">
               <a:ext uri="{FF2B5EF4-FFF2-40B4-BE49-F238E27FC236}">
-                <a16:creationId xmlns:a16="http://schemas.microsoft.com/office/drawing/2014/main" id="{0582510D-B6F1-465B-9C9D-FD5A24C41BA3}"/>
+                <a16:creationId xmlns:a16="http://schemas.microsoft.com/office/drawing/2014/main" id="{C4E92FEE-D5DB-413E-8BE7-A9E3C9D121B6}"/>
               </a:ext>
             </a:extLst>
           </p:cNvPr>
@@ -3529,7 +3529,7 @@
           <p:cNvPr id="4" name="Text Placeholder 3">
             <a:extLst xmlns:a="http://schemas.openxmlformats.org/drawingml/2006/main">
               <a:ext uri="{FF2B5EF4-FFF2-40B4-BE49-F238E27FC236}">
-                <a16:creationId xmlns:a16="http://schemas.microsoft.com/office/drawing/2014/main" id="{9EC55F36-D254-47ED-A935-9F11BD4E7EFD}"/>
+                <a16:creationId xmlns:a16="http://schemas.microsoft.com/office/drawing/2014/main" id="{D86E44DD-BB20-4E14-9CA1-C602B367A4A4}"/>
               </a:ext>
             </a:extLst>
           </p:cNvPr>
@@ -3601,7 +3601,7 @@
           <p:cNvPr id="5" name="Date Placeholder 3">
             <a:extLst xmlns:a="http://schemas.openxmlformats.org/drawingml/2006/main">
               <a:ext uri="{FF2B5EF4-FFF2-40B4-BE49-F238E27FC236}">
-                <a16:creationId xmlns:a16="http://schemas.microsoft.com/office/drawing/2014/main" id="{B17B2E83-CEDD-4AA3-846B-A302735D2C3B}"/>
+                <a16:creationId xmlns:a16="http://schemas.microsoft.com/office/drawing/2014/main" id="{BA350F23-65E2-4B10-8957-BB7BEEC19ECE}"/>
               </a:ext>
             </a:extLst>
           </p:cNvPr>
@@ -3634,7 +3634,7 @@
           <p:cNvPr id="6" name="Footer Placeholder 4">
             <a:extLst xmlns:a="http://schemas.openxmlformats.org/drawingml/2006/main">
               <a:ext uri="{FF2B5EF4-FFF2-40B4-BE49-F238E27FC236}">
-                <a16:creationId xmlns:a16="http://schemas.microsoft.com/office/drawing/2014/main" id="{F69BE638-EC94-4A20-A9D6-1B3D52084C5C}"/>
+                <a16:creationId xmlns:a16="http://schemas.microsoft.com/office/drawing/2014/main" id="{1078948C-8816-4BA1-9227-75B0D35D7101}"/>
               </a:ext>
             </a:extLst>
           </p:cNvPr>
@@ -3669,7 +3669,7 @@
           <p:cNvPr id="7" name="Slide Number Placeholder 5">
             <a:extLst xmlns:a="http://schemas.openxmlformats.org/drawingml/2006/main">
               <a:ext uri="{FF2B5EF4-FFF2-40B4-BE49-F238E27FC236}">
-                <a16:creationId xmlns:a16="http://schemas.microsoft.com/office/drawing/2014/main" id="{B941BB8F-3328-4E63-BFE0-B5DE732CC2FC}"/>
+                <a16:creationId xmlns:a16="http://schemas.microsoft.com/office/drawing/2014/main" id="{71C86ABD-2FEE-48CD-8291-44B2E2122E2A}"/>
               </a:ext>
             </a:extLst>
           </p:cNvPr>
@@ -3719,7 +3719,7 @@
           <p:cNvPr id="2" name="Title 1">
             <a:extLst xmlns:a="http://schemas.openxmlformats.org/drawingml/2006/main">
               <a:ext uri="{FF2B5EF4-FFF2-40B4-BE49-F238E27FC236}">
-                <a16:creationId xmlns:a16="http://schemas.microsoft.com/office/drawing/2014/main" id="{BA0A5181-9A82-4DDB-A891-233B6EFF5849}"/>
+                <a16:creationId xmlns:a16="http://schemas.microsoft.com/office/drawing/2014/main" id="{3478F2B2-EB7B-420E-B5CE-4C158D475060}"/>
               </a:ext>
             </a:extLst>
           </p:cNvPr>
@@ -3756,7 +3756,7 @@
           <p:cNvPr id="3" name="Picture Placeholder 2">
             <a:extLst xmlns:a="http://schemas.openxmlformats.org/drawingml/2006/main">
               <a:ext uri="{FF2B5EF4-FFF2-40B4-BE49-F238E27FC236}">
-                <a16:creationId xmlns:a16="http://schemas.microsoft.com/office/drawing/2014/main" id="{FCD28C6D-9FF5-4FB4-96D7-34B36D67A105}"/>
+                <a16:creationId xmlns:a16="http://schemas.microsoft.com/office/drawing/2014/main" id="{6363EE99-7495-4345-B6CF-60DC73163D41}"/>
               </a:ext>
             </a:extLst>
           </p:cNvPr>
@@ -3828,7 +3828,7 @@
           <p:cNvPr id="4" name="Text Placeholder 3">
             <a:extLst xmlns:a="http://schemas.openxmlformats.org/drawingml/2006/main">
               <a:ext uri="{FF2B5EF4-FFF2-40B4-BE49-F238E27FC236}">
-                <a16:creationId xmlns:a16="http://schemas.microsoft.com/office/drawing/2014/main" id="{03747862-033E-4DD5-8E73-C2299BC9CA74}"/>
+                <a16:creationId xmlns:a16="http://schemas.microsoft.com/office/drawing/2014/main" id="{34B68A0A-66C0-47C2-91FC-7A20A7330283}"/>
               </a:ext>
             </a:extLst>
           </p:cNvPr>
@@ -3900,7 +3900,7 @@
           <p:cNvPr id="5" name="Date Placeholder 3">
             <a:extLst xmlns:a="http://schemas.openxmlformats.org/drawingml/2006/main">
               <a:ext uri="{FF2B5EF4-FFF2-40B4-BE49-F238E27FC236}">
-                <a16:creationId xmlns:a16="http://schemas.microsoft.com/office/drawing/2014/main" id="{46FBF623-AD30-4954-AAF2-4FC2CDC5CD96}"/>
+                <a16:creationId xmlns:a16="http://schemas.microsoft.com/office/drawing/2014/main" id="{4A5E5006-AB50-4AE5-B69A-48DD171B3D91}"/>
               </a:ext>
             </a:extLst>
           </p:cNvPr>
@@ -3933,7 +3933,7 @@
           <p:cNvPr id="6" name="Footer Placeholder 4">
             <a:extLst xmlns:a="http://schemas.openxmlformats.org/drawingml/2006/main">
               <a:ext uri="{FF2B5EF4-FFF2-40B4-BE49-F238E27FC236}">
-                <a16:creationId xmlns:a16="http://schemas.microsoft.com/office/drawing/2014/main" id="{DE15A0DA-B834-4343-844A-C73E39801787}"/>
+                <a16:creationId xmlns:a16="http://schemas.microsoft.com/office/drawing/2014/main" id="{EECAEE6A-597C-4D70-A998-64AD5B9535EA}"/>
               </a:ext>
             </a:extLst>
           </p:cNvPr>
@@ -3968,7 +3968,7 @@
           <p:cNvPr id="7" name="Slide Number Placeholder 5">
             <a:extLst xmlns:a="http://schemas.openxmlformats.org/drawingml/2006/main">
               <a:ext uri="{FF2B5EF4-FFF2-40B4-BE49-F238E27FC236}">
-                <a16:creationId xmlns:a16="http://schemas.microsoft.com/office/drawing/2014/main" id="{C9EF0386-8A8A-4D10-B8BA-4C5A49D32989}"/>
+                <a16:creationId xmlns:a16="http://schemas.microsoft.com/office/drawing/2014/main" id="{EA5991D2-E18E-47E4-BF42-4CF30D414BBD}"/>
               </a:ext>
             </a:extLst>
           </p:cNvPr>
@@ -4023,7 +4023,7 @@
           <p:cNvPr id="1026" name="Title Placeholder 1">
             <a:extLst xmlns:a="http://schemas.openxmlformats.org/drawingml/2006/main">
               <a:ext uri="{FF2B5EF4-FFF2-40B4-BE49-F238E27FC236}">
-                <a16:creationId xmlns:a16="http://schemas.microsoft.com/office/drawing/2014/main" id="{EEC56D45-4262-42AB-A291-8023FB3066CF}"/>
+                <a16:creationId xmlns:a16="http://schemas.microsoft.com/office/drawing/2014/main" id="{C0E07B4A-2F4D-46B7-A241-1A3E829893AC}"/>
               </a:ext>
             </a:extLst>
           </p:cNvPr>
@@ -4065,7 +4065,7 @@
           <p:cNvPr id="1027" name="Text Placeholder 2">
             <a:extLst xmlns:a="http://schemas.openxmlformats.org/drawingml/2006/main">
               <a:ext uri="{FF2B5EF4-FFF2-40B4-BE49-F238E27FC236}">
-                <a16:creationId xmlns:a16="http://schemas.microsoft.com/office/drawing/2014/main" id="{ADD854A5-B577-471C-83E5-8BFDFE71FF76}"/>
+                <a16:creationId xmlns:a16="http://schemas.microsoft.com/office/drawing/2014/main" id="{E371C434-A079-4DDF-88F7-98BAD2CABC8F}"/>
               </a:ext>
             </a:extLst>
           </p:cNvPr>
@@ -4139,7 +4139,7 @@
           <p:cNvPr id="4" name="Date Placeholder 3">
             <a:extLst xmlns:a="http://schemas.openxmlformats.org/drawingml/2006/main">
               <a:ext uri="{FF2B5EF4-FFF2-40B4-BE49-F238E27FC236}">
-                <a16:creationId xmlns:a16="http://schemas.microsoft.com/office/drawing/2014/main" id="{CB647B09-F409-41D5-A8E5-89C6F38B450C}"/>
+                <a16:creationId xmlns:a16="http://schemas.microsoft.com/office/drawing/2014/main" id="{5E007DED-B900-46B8-8E7F-17CBB5C1AC40}"/>
               </a:ext>
             </a:extLst>
           </p:cNvPr>
@@ -4187,7 +4187,7 @@
           <p:cNvPr id="5" name="Footer Placeholder 4">
             <a:extLst xmlns:a="http://schemas.openxmlformats.org/drawingml/2006/main">
               <a:ext uri="{FF2B5EF4-FFF2-40B4-BE49-F238E27FC236}">
-                <a16:creationId xmlns:a16="http://schemas.microsoft.com/office/drawing/2014/main" id="{3596EA32-A44B-4A4C-855E-3CB45FAEC7E7}"/>
+                <a16:creationId xmlns:a16="http://schemas.microsoft.com/office/drawing/2014/main" id="{22DB37A6-436F-4D33-8205-1A79564253D7}"/>
               </a:ext>
             </a:extLst>
           </p:cNvPr>
@@ -4245,7 +4245,7 @@
           <p:cNvPr id="6" name="Slide Number Placeholder 5">
             <a:extLst xmlns:a="http://schemas.openxmlformats.org/drawingml/2006/main">
               <a:ext uri="{FF2B5EF4-FFF2-40B4-BE49-F238E27FC236}">
-                <a16:creationId xmlns:a16="http://schemas.microsoft.com/office/drawing/2014/main" id="{537830A9-9162-4809-8E7E-5D104389C8D3}"/>
+                <a16:creationId xmlns:a16="http://schemas.microsoft.com/office/drawing/2014/main" id="{5F4E6EFB-A228-428A-82B7-B26AD3390BE9}"/>
               </a:ext>
             </a:extLst>
           </p:cNvPr>
@@ -4292,17 +4292,17 @@
   </p:cSld>
   <p:clrMap bg1="lt1" tx1="dk1" bg2="lt2" tx2="dk2" accent1="accent1" accent2="accent2" accent3="accent3" accent4="accent4" accent5="accent5" accent6="accent6" hlink="hlink" folHlink="folHlink"/>
   <p:sldLayoutIdLst>
-    <p:sldLayoutId xmlns:r="http://schemas.openxmlformats.org/officeDocument/2006/relationships" id="2147483649" r:id="R225c6ee31d6f4743"/>
-    <p:sldLayoutId xmlns:r="http://schemas.openxmlformats.org/officeDocument/2006/relationships" id="2147483650" r:id="Rfc8900e2270d4df8"/>
-    <p:sldLayoutId xmlns:r="http://schemas.openxmlformats.org/officeDocument/2006/relationships" id="2147483651" r:id="Rf1081e5e5b4d4847"/>
-    <p:sldLayoutId xmlns:r="http://schemas.openxmlformats.org/officeDocument/2006/relationships" id="2147483652" r:id="R6e4155d148784ae7"/>
-    <p:sldLayoutId xmlns:r="http://schemas.openxmlformats.org/officeDocument/2006/relationships" id="2147483653" r:id="R2a6baf6496f54096"/>
-    <p:sldLayoutId xmlns:r="http://schemas.openxmlformats.org/officeDocument/2006/relationships" id="2147483654" r:id="R1cb587f5db7c4aea"/>
-    <p:sldLayoutId xmlns:r="http://schemas.openxmlformats.org/officeDocument/2006/relationships" id="2147483655" r:id="Rd534b47d2ab54538"/>
-    <p:sldLayoutId xmlns:r="http://schemas.openxmlformats.org/officeDocument/2006/relationships" id="2147483656" r:id="Rc522070cdf1a481d"/>
-    <p:sldLayoutId xmlns:r="http://schemas.openxmlformats.org/officeDocument/2006/relationships" id="2147483657" r:id="Rf4d7964546c84e71"/>
-    <p:sldLayoutId xmlns:r="http://schemas.openxmlformats.org/officeDocument/2006/relationships" id="2147483658" r:id="R91a2d91ff790411b"/>
-    <p:sldLayoutId xmlns:r="http://schemas.openxmlformats.org/officeDocument/2006/relationships" id="2147483659" r:id="Rad6a94169bfc4804"/>
+    <p:sldLayoutId xmlns:r="http://schemas.openxmlformats.org/officeDocument/2006/relationships" id="2147483649" r:id="R0464eee4fd2d49f9"/>
+    <p:sldLayoutId xmlns:r="http://schemas.openxmlformats.org/officeDocument/2006/relationships" id="2147483650" r:id="Rc84a67144e1a4963"/>
+    <p:sldLayoutId xmlns:r="http://schemas.openxmlformats.org/officeDocument/2006/relationships" id="2147483651" r:id="R0df49bf918634a45"/>
+    <p:sldLayoutId xmlns:r="http://schemas.openxmlformats.org/officeDocument/2006/relationships" id="2147483652" r:id="R941905244384426b"/>
+    <p:sldLayoutId xmlns:r="http://schemas.openxmlformats.org/officeDocument/2006/relationships" id="2147483653" r:id="R5fb4fd44ed9f4c5c"/>
+    <p:sldLayoutId xmlns:r="http://schemas.openxmlformats.org/officeDocument/2006/relationships" id="2147483654" r:id="Rf31f36c07a204ce3"/>
+    <p:sldLayoutId xmlns:r="http://schemas.openxmlformats.org/officeDocument/2006/relationships" id="2147483655" r:id="Ra7840413e2d54378"/>
+    <p:sldLayoutId xmlns:r="http://schemas.openxmlformats.org/officeDocument/2006/relationships" id="2147483656" r:id="R7398e63686c54376"/>
+    <p:sldLayoutId xmlns:r="http://schemas.openxmlformats.org/officeDocument/2006/relationships" id="2147483657" r:id="R0da8bb62cac34757"/>
+    <p:sldLayoutId xmlns:r="http://schemas.openxmlformats.org/officeDocument/2006/relationships" id="2147483658" r:id="R744fdfdc42534ba1"/>
+    <p:sldLayoutId xmlns:r="http://schemas.openxmlformats.org/officeDocument/2006/relationships" id="2147483659" r:id="Rf00e9da0ad4744b3"/>
   </p:sldLayoutIdLst>
   <p:hf hdr="0" dt="0"/>
   <p:txStyles>
@@ -5609,7 +5609,7 @@
           <p:nvPr/>
         </p:nvPicPr>
         <p:blipFill rotWithShape="1">
-          <a:blip xmlns:r="http://schemas.openxmlformats.org/officeDocument/2006/relationships" xmlns:a="http://schemas.openxmlformats.org/drawingml/2006/main" r:embed="R6a12cbf4bcad4ef3"/>
+          <a:blip xmlns:r="http://schemas.openxmlformats.org/officeDocument/2006/relationships" xmlns:a="http://schemas.openxmlformats.org/drawingml/2006/main" r:embed="R83f2dfb8b34b4384"/>
           <a:srcRect xmlns:a="http://schemas.openxmlformats.org/drawingml/2006/main" l="0" t="0" r="59916" b="0"/>
           <a:stretch xmlns:a="http://schemas.openxmlformats.org/drawingml/2006/main"/>
         </p:blipFill>
@@ -5628,7 +5628,7 @@
           <p:cNvPr id="4" name="Subtitle 3">
             <a:extLst xmlns:a="http://schemas.openxmlformats.org/drawingml/2006/main">
               <a:ext uri="{FF2B5EF4-FFF2-40B4-BE49-F238E27FC236}">
-                <a16:creationId xmlns:a16="http://schemas.microsoft.com/office/drawing/2014/main" id="{E46FAA16-E42B-4705-BECF-D863871978C4}"/>
+                <a16:creationId xmlns:a16="http://schemas.microsoft.com/office/drawing/2014/main" id="{87B60016-46EE-4A2D-BEB9-1322D268332B}"/>
               </a:ext>
             </a:extLst>
           </p:cNvPr>
@@ -5686,7 +5686,7 @@
           <p:cNvPr id="8" name="Title 7">
             <a:extLst xmlns:a="http://schemas.openxmlformats.org/drawingml/2006/main">
               <a:ext uri="{FF2B5EF4-FFF2-40B4-BE49-F238E27FC236}">
-                <a16:creationId xmlns:a16="http://schemas.microsoft.com/office/drawing/2014/main" id="{5C2C0BB1-D5CD-4241-A967-2C956C6DF4CC}"/>
+                <a16:creationId xmlns:a16="http://schemas.microsoft.com/office/drawing/2014/main" id="{115EBC1D-8A96-4C81-86AD-4F3E83DE7F76}"/>
               </a:ext>
             </a:extLst>
           </p:cNvPr>
@@ -5745,7 +5745,7 @@
           <p:cNvPr id="10" name="TextBox 9">
             <a:extLst xmlns:a="http://schemas.openxmlformats.org/drawingml/2006/main">
               <a:ext uri="{FF2B5EF4-FFF2-40B4-BE49-F238E27FC236}">
-                <a16:creationId xmlns:a16="http://schemas.microsoft.com/office/drawing/2014/main" id="{BF1D07A2-F935-4AC1-8C0B-3275C28BCB55}"/>
+                <a16:creationId xmlns:a16="http://schemas.microsoft.com/office/drawing/2014/main" id="{CC4AEF87-48D2-45D5-A6A9-5FADF9C7E157}"/>
               </a:ext>
             </a:extLst>
           </p:cNvPr>
@@ -5908,7 +5908,7 @@
           <p:nvPr/>
         </p:nvPicPr>
         <p:blipFill>
-          <a:blip xmlns:r="http://schemas.openxmlformats.org/officeDocument/2006/relationships" xmlns:a="http://schemas.openxmlformats.org/drawingml/2006/main" r:embed="R334d3422f7034c05"/>
+          <a:blip xmlns:r="http://schemas.openxmlformats.org/officeDocument/2006/relationships" xmlns:a="http://schemas.openxmlformats.org/drawingml/2006/main" r:embed="Rf7ce08494400444a"/>
           <a:stretch xmlns:a="http://schemas.openxmlformats.org/drawingml/2006/main">
             <a:fillRect l="0" t="0" r="0" b="0"/>
           </a:stretch>
@@ -5926,7 +5926,7 @@
     </p:spTree>
     <p:extLst>
       <p:ext uri="{BB962C8B-B14F-4D97-AF65-F5344CB8AC3E}">
-        <p14:creationId xmlns:p14="http://schemas.microsoft.com/office/powerpoint/2010/main" val="1319020112"/>
+        <p14:creationId xmlns:p14="http://schemas.microsoft.com/office/powerpoint/2010/main" val="975848388"/>
       </p:ext>
     </p:extLst>
   </p:cSld>
@@ -5950,7 +5950,7 @@
           <p:cNvPr id="9" name="Rectangle 8">
             <a:extLst xmlns:a="http://schemas.openxmlformats.org/drawingml/2006/main">
               <a:ext uri="{FF2B5EF4-FFF2-40B4-BE49-F238E27FC236}">
-                <a16:creationId xmlns:a16="http://schemas.microsoft.com/office/drawing/2014/main" id="{A1F91A79-8E6B-4453-A972-F0E795323A2B}"/>
+                <a16:creationId xmlns:a16="http://schemas.microsoft.com/office/drawing/2014/main" id="{AFDDF6C0-6B4A-4429-91D0-5B61E10ABE19}"/>
               </a:ext>
             </a:extLst>
           </p:cNvPr>
@@ -6012,7 +6012,7 @@
           <p:cNvPr id="15361" name="Title 1">
             <a:extLst xmlns:a="http://schemas.openxmlformats.org/drawingml/2006/main">
               <a:ext uri="{FF2B5EF4-FFF2-40B4-BE49-F238E27FC236}">
-                <a16:creationId xmlns:a16="http://schemas.microsoft.com/office/drawing/2014/main" id="{F2DC126D-937D-494B-9C44-BFC6BA74B203}"/>
+                <a16:creationId xmlns:a16="http://schemas.microsoft.com/office/drawing/2014/main" id="{57ED162D-A553-4BF5-9095-01F1138AABD6}"/>
               </a:ext>
             </a:extLst>
           </p:cNvPr>
@@ -6061,7 +6061,7 @@
           <p:cNvPr id="6" name="Slide Number Placeholder 5">
             <a:extLst xmlns:a="http://schemas.openxmlformats.org/drawingml/2006/main">
               <a:ext uri="{FF2B5EF4-FFF2-40B4-BE49-F238E27FC236}">
-                <a16:creationId xmlns:a16="http://schemas.microsoft.com/office/drawing/2014/main" id="{3F66E4AC-9D69-4B3D-9527-0AEBF4F22D44}"/>
+                <a16:creationId xmlns:a16="http://schemas.microsoft.com/office/drawing/2014/main" id="{3A8C3FEA-05C5-49D0-8AB7-0B2357F3EEC1}"/>
               </a:ext>
             </a:extLst>
           </p:cNvPr>
@@ -6098,7 +6098,7 @@
           <p:cNvPr id="7" name="Footer Placeholder 6">
             <a:extLst xmlns:a="http://schemas.openxmlformats.org/drawingml/2006/main">
               <a:ext uri="{FF2B5EF4-FFF2-40B4-BE49-F238E27FC236}">
-                <a16:creationId xmlns:a16="http://schemas.microsoft.com/office/drawing/2014/main" id="{DB7DAF58-073C-458B-A89D-4E5D94BF9AB0}"/>
+                <a16:creationId xmlns:a16="http://schemas.microsoft.com/office/drawing/2014/main" id="{512DF5B2-EC04-47D8-91E6-C8FAE386AABF}"/>
               </a:ext>
             </a:extLst>
           </p:cNvPr>
@@ -6199,7 +6199,7 @@
           <p:nvPr/>
         </p:nvPicPr>
         <p:blipFill>
-          <a:blip xmlns:r="http://schemas.openxmlformats.org/officeDocument/2006/relationships" xmlns:a="http://schemas.openxmlformats.org/drawingml/2006/main" r:embed="R52862831be984cae"/>
+          <a:blip xmlns:r="http://schemas.openxmlformats.org/officeDocument/2006/relationships" xmlns:a="http://schemas.openxmlformats.org/drawingml/2006/main" r:embed="R971cec20fc4d45bd"/>
           <a:stretch xmlns:a="http://schemas.openxmlformats.org/drawingml/2006/main">
             <a:fillRect l="0" t="0" r="0" b="0"/>
           </a:stretch>
@@ -6219,7 +6219,7 @@
           <p:cNvPr id="15364" name="">
             <a:extLst xmlns:a="http://schemas.openxmlformats.org/drawingml/2006/main">
               <a:ext uri="{FF2B5EF4-FFF2-40B4-BE49-F238E27FC236}">
-                <a16:creationId xmlns:a16="http://schemas.microsoft.com/office/drawing/2014/main" id="{86CE8593-1BAC-4E9F-94D7-B38FE0D59E02}"/>
+                <a16:creationId xmlns:a16="http://schemas.microsoft.com/office/drawing/2014/main" id="{9BF41A0E-1BC5-4952-B3DE-5EC36F36E51B}"/>
               </a:ext>
             </a:extLst>
           </p:cNvPr>
@@ -6272,7 +6272,7 @@
           <p:cNvPr id="15365" name="">
             <a:extLst xmlns:a="http://schemas.openxmlformats.org/drawingml/2006/main">
               <a:ext uri="{FF2B5EF4-FFF2-40B4-BE49-F238E27FC236}">
-                <a16:creationId xmlns:a16="http://schemas.microsoft.com/office/drawing/2014/main" id="{3B865FA9-A0F0-4F07-B588-5C56CC1DE0EE}"/>
+                <a16:creationId xmlns:a16="http://schemas.microsoft.com/office/drawing/2014/main" id="{5809FAA8-6964-43FE-9B24-F1B8CBEE3C6A}"/>
               </a:ext>
             </a:extLst>
           </p:cNvPr>
@@ -6307,7 +6307,7 @@
           <p:cNvPr id="15366" name="">
             <a:extLst xmlns:a="http://schemas.openxmlformats.org/drawingml/2006/main">
               <a:ext uri="{FF2B5EF4-FFF2-40B4-BE49-F238E27FC236}">
-                <a16:creationId xmlns:a16="http://schemas.microsoft.com/office/drawing/2014/main" id="{32D08594-A7E9-486D-A85F-F7577D413D33}"/>
+                <a16:creationId xmlns:a16="http://schemas.microsoft.com/office/drawing/2014/main" id="{BF64D9B1-C641-4669-B8FC-B0A59CA99B17}"/>
               </a:ext>
             </a:extLst>
           </p:cNvPr>
@@ -6364,7 +6364,7 @@
           <p:nvPr/>
         </p:nvPicPr>
         <p:blipFill>
-          <a:blip xmlns:r="http://schemas.openxmlformats.org/officeDocument/2006/relationships" xmlns:a="http://schemas.openxmlformats.org/drawingml/2006/main" r:embed="R9c746180ba824b38"/>
+          <a:blip xmlns:r="http://schemas.openxmlformats.org/officeDocument/2006/relationships" xmlns:a="http://schemas.openxmlformats.org/drawingml/2006/main" r:embed="Raf6adb1f9bac4f00"/>
           <a:stretch xmlns:a="http://schemas.openxmlformats.org/drawingml/2006/main"/>
         </p:blipFill>
         <p:spPr>
@@ -6382,7 +6382,7 @@
           <p:cNvPr id="15368" name="">
             <a:extLst xmlns:a="http://schemas.openxmlformats.org/drawingml/2006/main">
               <a:ext uri="{FF2B5EF4-FFF2-40B4-BE49-F238E27FC236}">
-                <a16:creationId xmlns:a16="http://schemas.microsoft.com/office/drawing/2014/main" id="{5D1DD3D1-1BD4-422E-B29C-7BCEDEE8F1D6}"/>
+                <a16:creationId xmlns:a16="http://schemas.microsoft.com/office/drawing/2014/main" id="{A5F34FEB-36EB-4B42-A241-D718B8FB5C61}"/>
               </a:ext>
             </a:extLst>
           </p:cNvPr>
@@ -6421,7 +6421,7 @@
           <p:cNvPr id="15369" name="">
             <a:extLst xmlns:a="http://schemas.openxmlformats.org/drawingml/2006/main">
               <a:ext uri="{FF2B5EF4-FFF2-40B4-BE49-F238E27FC236}">
-                <a16:creationId xmlns:a16="http://schemas.microsoft.com/office/drawing/2014/main" id="{6CC8F96E-C949-4D70-9573-544E2FD2591E}"/>
+                <a16:creationId xmlns:a16="http://schemas.microsoft.com/office/drawing/2014/main" id="{99CCAAF5-F0CF-4333-8897-7D7599565F87}"/>
               </a:ext>
             </a:extLst>
           </p:cNvPr>
@@ -6474,7 +6474,7 @@
           <p:cNvPr id="15370" name="">
             <a:extLst xmlns:a="http://schemas.openxmlformats.org/drawingml/2006/main">
               <a:ext uri="{FF2B5EF4-FFF2-40B4-BE49-F238E27FC236}">
-                <a16:creationId xmlns:a16="http://schemas.microsoft.com/office/drawing/2014/main" id="{00DE4D1F-43B2-4968-9DC0-775316C33670}"/>
+                <a16:creationId xmlns:a16="http://schemas.microsoft.com/office/drawing/2014/main" id="{BD9F0E72-406A-4801-BA21-07BBDC8BFC0F}"/>
               </a:ext>
             </a:extLst>
           </p:cNvPr>
@@ -6531,7 +6531,7 @@
           <p:cNvPr id="15371" name="">
             <a:extLst xmlns:a="http://schemas.openxmlformats.org/drawingml/2006/main">
               <a:ext uri="{FF2B5EF4-FFF2-40B4-BE49-F238E27FC236}">
-                <a16:creationId xmlns:a16="http://schemas.microsoft.com/office/drawing/2014/main" id="{51B0B89A-E740-4BE3-A85F-0E1E1E0AA94C}"/>
+                <a16:creationId xmlns:a16="http://schemas.microsoft.com/office/drawing/2014/main" id="{9AA8D6FD-03FE-432B-A916-4F9BF3B2B61D}"/>
               </a:ext>
             </a:extLst>
           </p:cNvPr>
@@ -6570,7 +6570,7 @@
           <p:cNvPr id="15372" name="">
             <a:extLst xmlns:a="http://schemas.openxmlformats.org/drawingml/2006/main">
               <a:ext uri="{FF2B5EF4-FFF2-40B4-BE49-F238E27FC236}">
-                <a16:creationId xmlns:a16="http://schemas.microsoft.com/office/drawing/2014/main" id="{69146E8D-FCFC-4D3A-A554-C7A568EF5343}"/>
+                <a16:creationId xmlns:a16="http://schemas.microsoft.com/office/drawing/2014/main" id="{612CEF5D-24B8-4286-BA67-802B7F483FAB}"/>
               </a:ext>
             </a:extLst>
           </p:cNvPr>
@@ -6623,7 +6623,7 @@
           <p:cNvPr id="15373" name="">
             <a:extLst xmlns:a="http://schemas.openxmlformats.org/drawingml/2006/main">
               <a:ext uri="{FF2B5EF4-FFF2-40B4-BE49-F238E27FC236}">
-                <a16:creationId xmlns:a16="http://schemas.microsoft.com/office/drawing/2014/main" id="{3AC3A0DC-13B9-4AB4-AD72-940CD237B9F3}"/>
+                <a16:creationId xmlns:a16="http://schemas.microsoft.com/office/drawing/2014/main" id="{D943F8C1-AA17-4023-A3EB-BFE512A08D0A}"/>
               </a:ext>
             </a:extLst>
           </p:cNvPr>
@@ -6680,7 +6680,7 @@
           <p:cNvPr id="15374" name="">
             <a:extLst xmlns:a="http://schemas.openxmlformats.org/drawingml/2006/main">
               <a:ext uri="{FF2B5EF4-FFF2-40B4-BE49-F238E27FC236}">
-                <a16:creationId xmlns:a16="http://schemas.microsoft.com/office/drawing/2014/main" id="{39471600-5EBD-4C83-BC04-5C445EB8A7E9}"/>
+                <a16:creationId xmlns:a16="http://schemas.microsoft.com/office/drawing/2014/main" id="{2F7B4EA6-D427-47D6-93D4-6B1E2C0B19F5}"/>
               </a:ext>
             </a:extLst>
           </p:cNvPr>
@@ -6719,7 +6719,7 @@
           <p:cNvPr id="15375" name="">
             <a:extLst xmlns:a="http://schemas.openxmlformats.org/drawingml/2006/main">
               <a:ext uri="{FF2B5EF4-FFF2-40B4-BE49-F238E27FC236}">
-                <a16:creationId xmlns:a16="http://schemas.microsoft.com/office/drawing/2014/main" id="{5C81BC05-8BE7-49AD-9DEE-97C437A27814}"/>
+                <a16:creationId xmlns:a16="http://schemas.microsoft.com/office/drawing/2014/main" id="{283C4F41-356A-42B2-ADF7-3A97039D1D62}"/>
               </a:ext>
             </a:extLst>
           </p:cNvPr>
@@ -6772,7 +6772,7 @@
           <p:cNvPr id="15376" name="">
             <a:extLst xmlns:a="http://schemas.openxmlformats.org/drawingml/2006/main">
               <a:ext uri="{FF2B5EF4-FFF2-40B4-BE49-F238E27FC236}">
-                <a16:creationId xmlns:a16="http://schemas.microsoft.com/office/drawing/2014/main" id="{A7061E31-7754-4178-8D1E-D20FB9DD6799}"/>
+                <a16:creationId xmlns:a16="http://schemas.microsoft.com/office/drawing/2014/main" id="{6874C060-22FC-4FFC-B6DA-7FD5B0CD54C2}"/>
               </a:ext>
             </a:extLst>
           </p:cNvPr>
@@ -6827,7 +6827,7 @@
     </p:spTree>
     <p:extLst>
       <p:ext uri="{BB962C8B-B14F-4D97-AF65-F5344CB8AC3E}">
-        <p14:creationId xmlns:p14="http://schemas.microsoft.com/office/powerpoint/2010/main" val="1976101732"/>
+        <p14:creationId xmlns:p14="http://schemas.microsoft.com/office/powerpoint/2010/main" val="891020695"/>
       </p:ext>
     </p:extLst>
   </p:cSld>
@@ -6913,7 +6913,7 @@
           <p:cNvPr id="17409" name="Title 1">
             <a:extLst xmlns:a="http://schemas.openxmlformats.org/drawingml/2006/main">
               <a:ext uri="{FF2B5EF4-FFF2-40B4-BE49-F238E27FC236}">
-                <a16:creationId xmlns:a16="http://schemas.microsoft.com/office/drawing/2014/main" id="{838EB5C0-C653-469B-9805-E707AB94261E}"/>
+                <a16:creationId xmlns:a16="http://schemas.microsoft.com/office/drawing/2014/main" id="{7F5F0080-3FC6-412D-8CD3-EF482DCF628D}"/>
               </a:ext>
             </a:extLst>
           </p:cNvPr>
@@ -6948,7 +6948,7 @@
           <p:cNvPr id="6" name="Slide Number Placeholder 5">
             <a:extLst xmlns:a="http://schemas.openxmlformats.org/drawingml/2006/main">
               <a:ext uri="{FF2B5EF4-FFF2-40B4-BE49-F238E27FC236}">
-                <a16:creationId xmlns:a16="http://schemas.microsoft.com/office/drawing/2014/main" id="{416D568A-C309-4BEF-AC94-899BB285800C}"/>
+                <a16:creationId xmlns:a16="http://schemas.microsoft.com/office/drawing/2014/main" id="{1B423A6A-56FE-46A1-9719-9114C109E6E9}"/>
               </a:ext>
             </a:extLst>
           </p:cNvPr>
@@ -6985,7 +6985,7 @@
           <p:cNvPr id="7" name="Footer Placeholder 6">
             <a:extLst xmlns:a="http://schemas.openxmlformats.org/drawingml/2006/main">
               <a:ext uri="{FF2B5EF4-FFF2-40B4-BE49-F238E27FC236}">
-                <a16:creationId xmlns:a16="http://schemas.microsoft.com/office/drawing/2014/main" id="{7D737EC4-05C6-4F76-9D07-EB160F8EAE8F}"/>
+                <a16:creationId xmlns:a16="http://schemas.microsoft.com/office/drawing/2014/main" id="{F62B2358-A95D-40E1-BC6F-DE8F9E136933}"/>
               </a:ext>
             </a:extLst>
           </p:cNvPr>
@@ -7086,7 +7086,7 @@
           <p:nvPr/>
         </p:nvPicPr>
         <p:blipFill>
-          <a:blip xmlns:r="http://schemas.openxmlformats.org/officeDocument/2006/relationships" xmlns:a="http://schemas.openxmlformats.org/drawingml/2006/main" r:embed="R200ae834e1f44af5"/>
+          <a:blip xmlns:r="http://schemas.openxmlformats.org/officeDocument/2006/relationships" xmlns:a="http://schemas.openxmlformats.org/drawingml/2006/main" r:embed="R656dbfb7c3ea47f6"/>
           <a:stretch xmlns:a="http://schemas.openxmlformats.org/drawingml/2006/main">
             <a:fillRect l="0" t="0" r="0" b="0"/>
           </a:stretch>
@@ -7106,7 +7106,7 @@
           <p:cNvPr id="17412" name="">
             <a:extLst xmlns:a="http://schemas.openxmlformats.org/drawingml/2006/main">
               <a:ext uri="{FF2B5EF4-FFF2-40B4-BE49-F238E27FC236}">
-                <a16:creationId xmlns:a16="http://schemas.microsoft.com/office/drawing/2014/main" id="{2C9528E5-21A0-4C3F-980A-86F8A4E2B809}"/>
+                <a16:creationId xmlns:a16="http://schemas.microsoft.com/office/drawing/2014/main" id="{39FE3566-D6D4-4CD2-84B5-B152EAA1C815}"/>
               </a:ext>
             </a:extLst>
           </p:cNvPr>
@@ -7159,7 +7159,7 @@
           <p:cNvPr id="17413" name="">
             <a:extLst xmlns:a="http://schemas.openxmlformats.org/drawingml/2006/main">
               <a:ext uri="{FF2B5EF4-FFF2-40B4-BE49-F238E27FC236}">
-                <a16:creationId xmlns:a16="http://schemas.microsoft.com/office/drawing/2014/main" id="{F42026B6-D677-4DC2-8EE3-606D07034390}"/>
+                <a16:creationId xmlns:a16="http://schemas.microsoft.com/office/drawing/2014/main" id="{61F078B0-4DE0-4E27-9CDF-C2FBF9EA186D}"/>
               </a:ext>
             </a:extLst>
           </p:cNvPr>
@@ -7194,7 +7194,7 @@
           <p:cNvPr id="17414" name="">
             <a:extLst xmlns:a="http://schemas.openxmlformats.org/drawingml/2006/main">
               <a:ext uri="{FF2B5EF4-FFF2-40B4-BE49-F238E27FC236}">
-                <a16:creationId xmlns:a16="http://schemas.microsoft.com/office/drawing/2014/main" id="{5285F926-26A8-416B-87EA-DFA95A60B254}"/>
+                <a16:creationId xmlns:a16="http://schemas.microsoft.com/office/drawing/2014/main" id="{210EB5B6-93A3-4833-8BC1-9D3FD812F4F5}"/>
               </a:ext>
             </a:extLst>
           </p:cNvPr>
@@ -7231,7 +7231,7 @@
           <p:cNvPr id="17415" name="">
             <a:extLst xmlns:a="http://schemas.openxmlformats.org/drawingml/2006/main">
               <a:ext uri="{FF2B5EF4-FFF2-40B4-BE49-F238E27FC236}">
-                <a16:creationId xmlns:a16="http://schemas.microsoft.com/office/drawing/2014/main" id="{CC9A7EFF-1824-4BD0-A92C-99B5B9F0BDE9}"/>
+                <a16:creationId xmlns:a16="http://schemas.microsoft.com/office/drawing/2014/main" id="{ABE795D9-A732-4A4F-B379-3C5F9D835494}"/>
               </a:ext>
             </a:extLst>
           </p:cNvPr>
@@ -7288,7 +7288,7 @@
           <p:cNvPr id="17416" name="">
             <a:extLst xmlns:a="http://schemas.openxmlformats.org/drawingml/2006/main">
               <a:ext uri="{FF2B5EF4-FFF2-40B4-BE49-F238E27FC236}">
-                <a16:creationId xmlns:a16="http://schemas.microsoft.com/office/drawing/2014/main" id="{E059E07B-8831-4DB7-97F5-B1A8D8B48784}"/>
+                <a16:creationId xmlns:a16="http://schemas.microsoft.com/office/drawing/2014/main" id="{D05460D0-54AE-4C74-BB14-A87F11A7CABA}"/>
               </a:ext>
             </a:extLst>
           </p:cNvPr>
@@ -7325,7 +7325,7 @@
           <p:cNvPr id="17417" name="">
             <a:extLst xmlns:a="http://schemas.openxmlformats.org/drawingml/2006/main">
               <a:ext uri="{FF2B5EF4-FFF2-40B4-BE49-F238E27FC236}">
-                <a16:creationId xmlns:a16="http://schemas.microsoft.com/office/drawing/2014/main" id="{CA726DAA-7185-4DFA-9851-31B0D3419562}"/>
+                <a16:creationId xmlns:a16="http://schemas.microsoft.com/office/drawing/2014/main" id="{3D654C92-195D-4B95-AEDF-48D008C0F575}"/>
               </a:ext>
             </a:extLst>
           </p:cNvPr>
@@ -7372,7 +7372,7 @@
                 <a:ea typeface="Arial"/>
                 <a:cs typeface="Arial"/>
               </a:rPr>
-              <a:t>FastAPI - 18 REST routes, live OpenAPI docs</a:t>
+              <a:t>FastAPI - 46 HTTP routes, live OpenAPI docs</a:t>
             </a:r>
           </a:p>
         </p:txBody>
@@ -7382,7 +7382,7 @@
           <p:cNvPr id="17418" name="">
             <a:extLst xmlns:a="http://schemas.openxmlformats.org/drawingml/2006/main">
               <a:ext uri="{FF2B5EF4-FFF2-40B4-BE49-F238E27FC236}">
-                <a16:creationId xmlns:a16="http://schemas.microsoft.com/office/drawing/2014/main" id="{6D4FE2B4-32B8-4944-B968-37B7EF2D8596}"/>
+                <a16:creationId xmlns:a16="http://schemas.microsoft.com/office/drawing/2014/main" id="{7F04DB20-5550-4C24-A7B4-95D73C1722F5}"/>
               </a:ext>
             </a:extLst>
           </p:cNvPr>
@@ -7419,7 +7419,7 @@
           <p:cNvPr id="17419" name="">
             <a:extLst xmlns:a="http://schemas.openxmlformats.org/drawingml/2006/main">
               <a:ext uri="{FF2B5EF4-FFF2-40B4-BE49-F238E27FC236}">
-                <a16:creationId xmlns:a16="http://schemas.microsoft.com/office/drawing/2014/main" id="{36E26DC2-17B6-4336-A7EC-90B42E8E20A9}"/>
+                <a16:creationId xmlns:a16="http://schemas.microsoft.com/office/drawing/2014/main" id="{EF03509F-E287-4D9E-B740-3BC07DEED764}"/>
               </a:ext>
             </a:extLst>
           </p:cNvPr>
@@ -7476,7 +7476,7 @@
           <p:cNvPr id="17420" name="">
             <a:extLst xmlns:a="http://schemas.openxmlformats.org/drawingml/2006/main">
               <a:ext uri="{FF2B5EF4-FFF2-40B4-BE49-F238E27FC236}">
-                <a16:creationId xmlns:a16="http://schemas.microsoft.com/office/drawing/2014/main" id="{F6FC167C-2739-42A2-A5F4-A6BF3C8AE830}"/>
+                <a16:creationId xmlns:a16="http://schemas.microsoft.com/office/drawing/2014/main" id="{3A45EF35-3F0B-4C1F-8CD6-9CFBDB79B4C6}"/>
               </a:ext>
             </a:extLst>
           </p:cNvPr>
@@ -7513,7 +7513,7 @@
           <p:cNvPr id="17421" name="">
             <a:extLst xmlns:a="http://schemas.openxmlformats.org/drawingml/2006/main">
               <a:ext uri="{FF2B5EF4-FFF2-40B4-BE49-F238E27FC236}">
-                <a16:creationId xmlns:a16="http://schemas.microsoft.com/office/drawing/2014/main" id="{EAC5AE34-A0DB-4374-AFF9-C77F1C064A72}"/>
+                <a16:creationId xmlns:a16="http://schemas.microsoft.com/office/drawing/2014/main" id="{0B057C9A-03AA-42DA-A60B-CC88D0AE9057}"/>
               </a:ext>
             </a:extLst>
           </p:cNvPr>
@@ -7570,7 +7570,7 @@
           <p:cNvPr id="17422" name="">
             <a:extLst xmlns:a="http://schemas.openxmlformats.org/drawingml/2006/main">
               <a:ext uri="{FF2B5EF4-FFF2-40B4-BE49-F238E27FC236}">
-                <a16:creationId xmlns:a16="http://schemas.microsoft.com/office/drawing/2014/main" id="{9720233C-EF33-4D3D-932D-C0FF433DB6B4}"/>
+                <a16:creationId xmlns:a16="http://schemas.microsoft.com/office/drawing/2014/main" id="{DE0AF0A9-5339-45FA-8300-CC3E4ABD2851}"/>
               </a:ext>
             </a:extLst>
           </p:cNvPr>
@@ -7607,7 +7607,7 @@
           <p:cNvPr id="17423" name="">
             <a:extLst xmlns:a="http://schemas.openxmlformats.org/drawingml/2006/main">
               <a:ext uri="{FF2B5EF4-FFF2-40B4-BE49-F238E27FC236}">
-                <a16:creationId xmlns:a16="http://schemas.microsoft.com/office/drawing/2014/main" id="{404D6DF6-552C-42E0-A07E-DCB3BE2770B1}"/>
+                <a16:creationId xmlns:a16="http://schemas.microsoft.com/office/drawing/2014/main" id="{6B4BE06A-F4CE-44C6-A8A3-A007114C4767}"/>
               </a:ext>
             </a:extLst>
           </p:cNvPr>
@@ -7664,7 +7664,7 @@
           <p:cNvPr id="17424" name="">
             <a:extLst xmlns:a="http://schemas.openxmlformats.org/drawingml/2006/main">
               <a:ext uri="{FF2B5EF4-FFF2-40B4-BE49-F238E27FC236}">
-                <a16:creationId xmlns:a16="http://schemas.microsoft.com/office/drawing/2014/main" id="{B9D34F32-9ADA-49A0-9978-858BCF950FB0}"/>
+                <a16:creationId xmlns:a16="http://schemas.microsoft.com/office/drawing/2014/main" id="{3BE70456-1504-4844-9F51-B94113FBB90C}"/>
               </a:ext>
             </a:extLst>
           </p:cNvPr>
@@ -7701,7 +7701,7 @@
           <p:cNvPr id="17425" name="">
             <a:extLst xmlns:a="http://schemas.openxmlformats.org/drawingml/2006/main">
               <a:ext uri="{FF2B5EF4-FFF2-40B4-BE49-F238E27FC236}">
-                <a16:creationId xmlns:a16="http://schemas.microsoft.com/office/drawing/2014/main" id="{4567259B-1E98-42E4-85B0-476424B88E0C}"/>
+                <a16:creationId xmlns:a16="http://schemas.microsoft.com/office/drawing/2014/main" id="{B7B55BB1-1FDA-406B-A141-F13A26BDDDEF}"/>
               </a:ext>
             </a:extLst>
           </p:cNvPr>
@@ -7758,7 +7758,7 @@
           <p:cNvPr id="17426" name="">
             <a:extLst xmlns:a="http://schemas.openxmlformats.org/drawingml/2006/main">
               <a:ext uri="{FF2B5EF4-FFF2-40B4-BE49-F238E27FC236}">
-                <a16:creationId xmlns:a16="http://schemas.microsoft.com/office/drawing/2014/main" id="{AE68292C-85CA-433C-848E-1ED2C999F1BF}"/>
+                <a16:creationId xmlns:a16="http://schemas.microsoft.com/office/drawing/2014/main" id="{E0F8451A-8C33-426A-B453-29600B925226}"/>
               </a:ext>
             </a:extLst>
           </p:cNvPr>
@@ -7795,7 +7795,7 @@
           <p:cNvPr id="17427" name="">
             <a:extLst xmlns:a="http://schemas.openxmlformats.org/drawingml/2006/main">
               <a:ext uri="{FF2B5EF4-FFF2-40B4-BE49-F238E27FC236}">
-                <a16:creationId xmlns:a16="http://schemas.microsoft.com/office/drawing/2014/main" id="{28F9D552-04F3-443B-8B1B-3525678A82E3}"/>
+                <a16:creationId xmlns:a16="http://schemas.microsoft.com/office/drawing/2014/main" id="{8AB2C01E-5A81-409A-B971-63B90BA8D708}"/>
               </a:ext>
             </a:extLst>
           </p:cNvPr>
@@ -7852,7 +7852,7 @@
           <p:cNvPr id="17428" name="">
             <a:extLst xmlns:a="http://schemas.openxmlformats.org/drawingml/2006/main">
               <a:ext uri="{FF2B5EF4-FFF2-40B4-BE49-F238E27FC236}">
-                <a16:creationId xmlns:a16="http://schemas.microsoft.com/office/drawing/2014/main" id="{6B7FD995-08C9-4DEF-B189-C229D7ABA5E7}"/>
+                <a16:creationId xmlns:a16="http://schemas.microsoft.com/office/drawing/2014/main" id="{94E5737E-1BEB-40EC-B5F7-85904FF19CA2}"/>
               </a:ext>
             </a:extLst>
           </p:cNvPr>
@@ -7889,7 +7889,7 @@
           <p:cNvPr id="17429" name="">
             <a:extLst xmlns:a="http://schemas.openxmlformats.org/drawingml/2006/main">
               <a:ext uri="{FF2B5EF4-FFF2-40B4-BE49-F238E27FC236}">
-                <a16:creationId xmlns:a16="http://schemas.microsoft.com/office/drawing/2014/main" id="{A1CB8E63-052B-4EC5-8618-530D6816153B}"/>
+                <a16:creationId xmlns:a16="http://schemas.microsoft.com/office/drawing/2014/main" id="{DD880329-3FEE-4B22-8A77-819F2DC27366}"/>
               </a:ext>
             </a:extLst>
           </p:cNvPr>
@@ -7946,7 +7946,7 @@
           <p:cNvPr id="17430" name="">
             <a:extLst xmlns:a="http://schemas.openxmlformats.org/drawingml/2006/main">
               <a:ext uri="{FF2B5EF4-FFF2-40B4-BE49-F238E27FC236}">
-                <a16:creationId xmlns:a16="http://schemas.microsoft.com/office/drawing/2014/main" id="{BF0E8318-6CC0-4C02-8353-549B7FAE22E5}"/>
+                <a16:creationId xmlns:a16="http://schemas.microsoft.com/office/drawing/2014/main" id="{84F9FD05-7B0E-4866-BBC6-3A02EF5A1447}"/>
               </a:ext>
             </a:extLst>
           </p:cNvPr>
@@ -8003,7 +8003,7 @@
           <p:cNvPr id="17431" name="">
             <a:extLst xmlns:a="http://schemas.openxmlformats.org/drawingml/2006/main">
               <a:ext uri="{FF2B5EF4-FFF2-40B4-BE49-F238E27FC236}">
-                <a16:creationId xmlns:a16="http://schemas.microsoft.com/office/drawing/2014/main" id="{348D6EAA-6F68-4779-AD80-727C0D8609F9}"/>
+                <a16:creationId xmlns:a16="http://schemas.microsoft.com/office/drawing/2014/main" id="{46E5EF9F-BBF7-42FD-8A71-B47AE89AC2CE}"/>
               </a:ext>
             </a:extLst>
           </p:cNvPr>
@@ -8038,7 +8038,7 @@
           <p:cNvPr id="17432" name="">
             <a:extLst xmlns:a="http://schemas.openxmlformats.org/drawingml/2006/main">
               <a:ext uri="{FF2B5EF4-FFF2-40B4-BE49-F238E27FC236}">
-                <a16:creationId xmlns:a16="http://schemas.microsoft.com/office/drawing/2014/main" id="{57CDB292-0EB8-4CC5-8E6D-046725DFB0C6}"/>
+                <a16:creationId xmlns:a16="http://schemas.microsoft.com/office/drawing/2014/main" id="{B104FCC9-284D-42BC-B4E9-AE06CB0947F0}"/>
               </a:ext>
             </a:extLst>
           </p:cNvPr>
@@ -8091,7 +8091,7 @@
           <p:cNvPr id="17433" name="">
             <a:extLst xmlns:a="http://schemas.openxmlformats.org/drawingml/2006/main">
               <a:ext uri="{FF2B5EF4-FFF2-40B4-BE49-F238E27FC236}">
-                <a16:creationId xmlns:a16="http://schemas.microsoft.com/office/drawing/2014/main" id="{BA987D03-113F-4467-BC23-B13D0826F42D}"/>
+                <a16:creationId xmlns:a16="http://schemas.microsoft.com/office/drawing/2014/main" id="{BBEAD7B8-0769-4D2D-B48B-03929F4DE14F}"/>
               </a:ext>
             </a:extLst>
           </p:cNvPr>
@@ -8130,7 +8130,7 @@
           <p:nvPr/>
         </p:nvPicPr>
         <p:blipFill>
-          <a:blip xmlns:r="http://schemas.openxmlformats.org/officeDocument/2006/relationships" xmlns:a="http://schemas.openxmlformats.org/drawingml/2006/main" r:embed="R1eed3679fc04430d"/>
+          <a:blip xmlns:r="http://schemas.openxmlformats.org/officeDocument/2006/relationships" xmlns:a="http://schemas.openxmlformats.org/drawingml/2006/main" r:embed="R3a84da6043e74dab"/>
           <a:stretch xmlns:a="http://schemas.openxmlformats.org/drawingml/2006/main"/>
         </p:blipFill>
         <p:spPr>
@@ -8148,7 +8148,7 @@
           <p:cNvPr id="17435" name="">
             <a:extLst xmlns:a="http://schemas.openxmlformats.org/drawingml/2006/main">
               <a:ext uri="{FF2B5EF4-FFF2-40B4-BE49-F238E27FC236}">
-                <a16:creationId xmlns:a16="http://schemas.microsoft.com/office/drawing/2014/main" id="{B4EFBD78-1484-483C-B417-0DEFDF64B585}"/>
+                <a16:creationId xmlns:a16="http://schemas.microsoft.com/office/drawing/2014/main" id="{A5FE78A5-5C6E-4639-BC6C-7254FC2756F0}"/>
               </a:ext>
             </a:extLst>
           </p:cNvPr>
@@ -8183,7 +8183,7 @@
           <p:cNvPr id="17436" name="">
             <a:extLst xmlns:a="http://schemas.openxmlformats.org/drawingml/2006/main">
               <a:ext uri="{FF2B5EF4-FFF2-40B4-BE49-F238E27FC236}">
-                <a16:creationId xmlns:a16="http://schemas.microsoft.com/office/drawing/2014/main" id="{D629C378-08AC-4C61-9582-DA3BEFF90DC9}"/>
+                <a16:creationId xmlns:a16="http://schemas.microsoft.com/office/drawing/2014/main" id="{0DC29247-E748-4011-9040-4B8E0E1F93DC}"/>
               </a:ext>
             </a:extLst>
           </p:cNvPr>
@@ -8222,7 +8222,7 @@
           <p:cNvPr id="17437" name="">
             <a:extLst xmlns:a="http://schemas.openxmlformats.org/drawingml/2006/main">
               <a:ext uri="{FF2B5EF4-FFF2-40B4-BE49-F238E27FC236}">
-                <a16:creationId xmlns:a16="http://schemas.microsoft.com/office/drawing/2014/main" id="{FEB892E9-3418-407A-81F9-98D0F4FAC716}"/>
+                <a16:creationId xmlns:a16="http://schemas.microsoft.com/office/drawing/2014/main" id="{3F8846C7-AAB1-496E-A0F3-AB053C02A27C}"/>
               </a:ext>
             </a:extLst>
           </p:cNvPr>
@@ -8275,7 +8275,7 @@
           <p:cNvPr id="17438" name="">
             <a:extLst xmlns:a="http://schemas.openxmlformats.org/drawingml/2006/main">
               <a:ext uri="{FF2B5EF4-FFF2-40B4-BE49-F238E27FC236}">
-                <a16:creationId xmlns:a16="http://schemas.microsoft.com/office/drawing/2014/main" id="{125509F6-6D29-4BB7-991C-6A9D6637B148}"/>
+                <a16:creationId xmlns:a16="http://schemas.microsoft.com/office/drawing/2014/main" id="{85FB0E35-2B50-4C31-991D-EE349E0C4E41}"/>
               </a:ext>
             </a:extLst>
           </p:cNvPr>
@@ -8359,7 +8359,7 @@
           <p:cNvPr id="17439" name="">
             <a:extLst xmlns:a="http://schemas.openxmlformats.org/drawingml/2006/main">
               <a:ext uri="{FF2B5EF4-FFF2-40B4-BE49-F238E27FC236}">
-                <a16:creationId xmlns:a16="http://schemas.microsoft.com/office/drawing/2014/main" id="{7B99454C-E505-47DA-A42E-716F3D18A693}"/>
+                <a16:creationId xmlns:a16="http://schemas.microsoft.com/office/drawing/2014/main" id="{28A6C3FF-9A21-4211-BB7F-1E3EAE3C7FBE}"/>
               </a:ext>
             </a:extLst>
           </p:cNvPr>
@@ -8398,7 +8398,7 @@
           <p:cNvPr id="17440" name="">
             <a:extLst xmlns:a="http://schemas.openxmlformats.org/drawingml/2006/main">
               <a:ext uri="{FF2B5EF4-FFF2-40B4-BE49-F238E27FC236}">
-                <a16:creationId xmlns:a16="http://schemas.microsoft.com/office/drawing/2014/main" id="{5A713BB4-EE63-4D5C-8C49-37D63B988C19}"/>
+                <a16:creationId xmlns:a16="http://schemas.microsoft.com/office/drawing/2014/main" id="{CFCAE89B-750E-499C-B126-1B65CEEF8810}"/>
               </a:ext>
             </a:extLst>
           </p:cNvPr>
@@ -8451,7 +8451,7 @@
           <p:cNvPr id="17441" name="">
             <a:extLst xmlns:a="http://schemas.openxmlformats.org/drawingml/2006/main">
               <a:ext uri="{FF2B5EF4-FFF2-40B4-BE49-F238E27FC236}">
-                <a16:creationId xmlns:a16="http://schemas.microsoft.com/office/drawing/2014/main" id="{DB00B8A8-E5B2-47CD-AE53-9B96060B73C1}"/>
+                <a16:creationId xmlns:a16="http://schemas.microsoft.com/office/drawing/2014/main" id="{018FBFE4-4F14-42CC-B1C7-9F11EB1F7EA1}"/>
               </a:ext>
             </a:extLst>
           </p:cNvPr>
@@ -8535,7 +8535,7 @@
           <p:cNvPr id="17442" name="">
             <a:extLst xmlns:a="http://schemas.openxmlformats.org/drawingml/2006/main">
               <a:ext uri="{FF2B5EF4-FFF2-40B4-BE49-F238E27FC236}">
-                <a16:creationId xmlns:a16="http://schemas.microsoft.com/office/drawing/2014/main" id="{46BA5C53-84FC-4DB6-B011-6FC14127EE38}"/>
+                <a16:creationId xmlns:a16="http://schemas.microsoft.com/office/drawing/2014/main" id="{58E04DB7-443B-44AD-8E46-2545FE0BE6C7}"/>
               </a:ext>
             </a:extLst>
           </p:cNvPr>
@@ -8574,7 +8574,7 @@
           <p:cNvPr id="17443" name="">
             <a:extLst xmlns:a="http://schemas.openxmlformats.org/drawingml/2006/main">
               <a:ext uri="{FF2B5EF4-FFF2-40B4-BE49-F238E27FC236}">
-                <a16:creationId xmlns:a16="http://schemas.microsoft.com/office/drawing/2014/main" id="{08222567-9BC4-45E7-95CA-1162C694193B}"/>
+                <a16:creationId xmlns:a16="http://schemas.microsoft.com/office/drawing/2014/main" id="{F57D8955-DDB5-43DD-A3D2-607BC4FA5F1E}"/>
               </a:ext>
             </a:extLst>
           </p:cNvPr>
@@ -8627,7 +8627,7 @@
           <p:cNvPr id="17444" name="">
             <a:extLst xmlns:a="http://schemas.openxmlformats.org/drawingml/2006/main">
               <a:ext uri="{FF2B5EF4-FFF2-40B4-BE49-F238E27FC236}">
-                <a16:creationId xmlns:a16="http://schemas.microsoft.com/office/drawing/2014/main" id="{8532A1A5-5714-483F-9DCD-464BE8491077}"/>
+                <a16:creationId xmlns:a16="http://schemas.microsoft.com/office/drawing/2014/main" id="{DCD0AAB7-68DB-4FD8-9230-8F48563CBBC8}"/>
               </a:ext>
             </a:extLst>
           </p:cNvPr>
@@ -8711,7 +8711,7 @@
           <p:cNvPr id="17445" name="">
             <a:extLst xmlns:a="http://schemas.openxmlformats.org/drawingml/2006/main">
               <a:ext uri="{FF2B5EF4-FFF2-40B4-BE49-F238E27FC236}">
-                <a16:creationId xmlns:a16="http://schemas.microsoft.com/office/drawing/2014/main" id="{02DE4DD1-124D-459E-B3C6-91F86EFB2AD2}"/>
+                <a16:creationId xmlns:a16="http://schemas.microsoft.com/office/drawing/2014/main" id="{312498E1-EBCB-4638-800A-432E5CCBD496}"/>
               </a:ext>
             </a:extLst>
           </p:cNvPr>
@@ -8750,7 +8750,7 @@
           <p:cNvPr id="17446" name="">
             <a:extLst xmlns:a="http://schemas.openxmlformats.org/drawingml/2006/main">
               <a:ext uri="{FF2B5EF4-FFF2-40B4-BE49-F238E27FC236}">
-                <a16:creationId xmlns:a16="http://schemas.microsoft.com/office/drawing/2014/main" id="{919EBF11-A0D7-4852-BE78-9E3E8D761E44}"/>
+                <a16:creationId xmlns:a16="http://schemas.microsoft.com/office/drawing/2014/main" id="{8954CA1B-B2C5-4BF5-90C6-1B14BCF6897A}"/>
               </a:ext>
             </a:extLst>
           </p:cNvPr>
@@ -8803,7 +8803,7 @@
           <p:cNvPr id="17447" name="">
             <a:extLst xmlns:a="http://schemas.openxmlformats.org/drawingml/2006/main">
               <a:ext uri="{FF2B5EF4-FFF2-40B4-BE49-F238E27FC236}">
-                <a16:creationId xmlns:a16="http://schemas.microsoft.com/office/drawing/2014/main" id="{DD3BCB12-AC1B-49E9-A977-40439BA297BE}"/>
+                <a16:creationId xmlns:a16="http://schemas.microsoft.com/office/drawing/2014/main" id="{F01E2DA0-07B8-40CF-8FB6-B56F6C92B726}"/>
               </a:ext>
             </a:extLst>
           </p:cNvPr>
@@ -8856,7 +8856,7 @@
           <p:cNvPr id="17448" name="">
             <a:extLst xmlns:a="http://schemas.openxmlformats.org/drawingml/2006/main">
               <a:ext uri="{FF2B5EF4-FFF2-40B4-BE49-F238E27FC236}">
-                <a16:creationId xmlns:a16="http://schemas.microsoft.com/office/drawing/2014/main" id="{8CE64769-A02B-40E4-AF6D-501C2685CB0E}"/>
+                <a16:creationId xmlns:a16="http://schemas.microsoft.com/office/drawing/2014/main" id="{F1446069-7633-4ABD-B623-E58114D384F6}"/>
               </a:ext>
             </a:extLst>
           </p:cNvPr>
@@ -8909,7 +8909,7 @@
           <p:cNvPr id="17449" name="">
             <a:extLst xmlns:a="http://schemas.openxmlformats.org/drawingml/2006/main">
               <a:ext uri="{FF2B5EF4-FFF2-40B4-BE49-F238E27FC236}">
-                <a16:creationId xmlns:a16="http://schemas.microsoft.com/office/drawing/2014/main" id="{10AE65EE-85D9-4C04-B5FB-857A34AA7499}"/>
+                <a16:creationId xmlns:a16="http://schemas.microsoft.com/office/drawing/2014/main" id="{29B8E586-7181-48EC-B9AC-0707D348CE82}"/>
               </a:ext>
             </a:extLst>
           </p:cNvPr>
@@ -8962,7 +8962,7 @@
           <p:cNvPr id="17450" name="">
             <a:extLst xmlns:a="http://schemas.openxmlformats.org/drawingml/2006/main">
               <a:ext uri="{FF2B5EF4-FFF2-40B4-BE49-F238E27FC236}">
-                <a16:creationId xmlns:a16="http://schemas.microsoft.com/office/drawing/2014/main" id="{7F60D7EF-95BB-43E1-A5EA-D99E99590F0A}"/>
+                <a16:creationId xmlns:a16="http://schemas.microsoft.com/office/drawing/2014/main" id="{9855D0CF-55BA-4026-9048-6D04B517FF2F}"/>
               </a:ext>
             </a:extLst>
           </p:cNvPr>
@@ -9017,7 +9017,7 @@
     </p:spTree>
     <p:extLst>
       <p:ext uri="{BB962C8B-B14F-4D97-AF65-F5344CB8AC3E}">
-        <p14:creationId xmlns:p14="http://schemas.microsoft.com/office/powerpoint/2010/main" val="312407123"/>
+        <p14:creationId xmlns:p14="http://schemas.microsoft.com/office/powerpoint/2010/main" val="1517258410"/>
       </p:ext>
     </p:extLst>
   </p:cSld>
@@ -9112,7 +9112,7 @@
           <p:cNvPr id="17409" name="Title 1">
             <a:extLst xmlns:a="http://schemas.openxmlformats.org/drawingml/2006/main">
               <a:ext uri="{FF2B5EF4-FFF2-40B4-BE49-F238E27FC236}">
-                <a16:creationId xmlns:a16="http://schemas.microsoft.com/office/drawing/2014/main" id="{D81E8101-B5E7-4A46-9475-A015F524C4D4}"/>
+                <a16:creationId xmlns:a16="http://schemas.microsoft.com/office/drawing/2014/main" id="{5C8A7163-2A37-4442-869E-8311247544D3}"/>
               </a:ext>
             </a:extLst>
           </p:cNvPr>
@@ -9147,7 +9147,7 @@
           <p:cNvPr id="6" name="Slide Number Placeholder 5">
             <a:extLst xmlns:a="http://schemas.openxmlformats.org/drawingml/2006/main">
               <a:ext uri="{FF2B5EF4-FFF2-40B4-BE49-F238E27FC236}">
-                <a16:creationId xmlns:a16="http://schemas.microsoft.com/office/drawing/2014/main" id="{F885C77F-4322-41B3-977A-0346B187B33B}"/>
+                <a16:creationId xmlns:a16="http://schemas.microsoft.com/office/drawing/2014/main" id="{64A16D57-B72D-4D7C-8CD4-CEC18C448768}"/>
               </a:ext>
             </a:extLst>
           </p:cNvPr>
@@ -9211,7 +9211,7 @@
           <p:cNvPr id="7" name="Footer Placeholder 6">
             <a:extLst xmlns:a="http://schemas.openxmlformats.org/drawingml/2006/main">
               <a:ext uri="{FF2B5EF4-FFF2-40B4-BE49-F238E27FC236}">
-                <a16:creationId xmlns:a16="http://schemas.microsoft.com/office/drawing/2014/main" id="{1BD3A42D-575B-4D08-9AC9-67CDC04C809D}"/>
+                <a16:creationId xmlns:a16="http://schemas.microsoft.com/office/drawing/2014/main" id="{87909037-6A62-4F4B-B331-8D260420C7F8}"/>
               </a:ext>
             </a:extLst>
           </p:cNvPr>
@@ -9336,7 +9336,7 @@
           <p:nvPr/>
         </p:nvPicPr>
         <p:blipFill>
-          <a:blip xmlns:r="http://schemas.openxmlformats.org/officeDocument/2006/relationships" xmlns:a="http://schemas.openxmlformats.org/drawingml/2006/main" r:embed="R7b7b13936ff84b49"/>
+          <a:blip xmlns:r="http://schemas.openxmlformats.org/officeDocument/2006/relationships" xmlns:a="http://schemas.openxmlformats.org/drawingml/2006/main" r:embed="Rbc7c00ad53ec4842"/>
           <a:stretch xmlns:a="http://schemas.openxmlformats.org/drawingml/2006/main">
             <a:fillRect l="0" t="0" r="0" b="0"/>
           </a:stretch>
@@ -9356,7 +9356,7 @@
           <p:cNvPr id="17412" name="">
             <a:extLst xmlns:a="http://schemas.openxmlformats.org/drawingml/2006/main">
               <a:ext uri="{FF2B5EF4-FFF2-40B4-BE49-F238E27FC236}">
-                <a16:creationId xmlns:a16="http://schemas.microsoft.com/office/drawing/2014/main" id="{D49C91A4-94AD-4E52-B399-51B2B750E922}"/>
+                <a16:creationId xmlns:a16="http://schemas.microsoft.com/office/drawing/2014/main" id="{4E08ECE7-9C8E-48DB-A7DD-1C2897A074BA}"/>
               </a:ext>
             </a:extLst>
           </p:cNvPr>
@@ -9409,7 +9409,7 @@
           <p:cNvPr id="17413" name="">
             <a:extLst xmlns:a="http://schemas.openxmlformats.org/drawingml/2006/main">
               <a:ext uri="{FF2B5EF4-FFF2-40B4-BE49-F238E27FC236}">
-                <a16:creationId xmlns:a16="http://schemas.microsoft.com/office/drawing/2014/main" id="{266EA6F6-DC4E-4D35-A83F-F574B584B5B4}"/>
+                <a16:creationId xmlns:a16="http://schemas.microsoft.com/office/drawing/2014/main" id="{327A9D5C-8D9E-484D-B3C7-E38B421CF26F}"/>
               </a:ext>
             </a:extLst>
           </p:cNvPr>
@@ -9444,7 +9444,7 @@
           <p:cNvPr id="17414" name="">
             <a:extLst xmlns:a="http://schemas.openxmlformats.org/drawingml/2006/main">
               <a:ext uri="{FF2B5EF4-FFF2-40B4-BE49-F238E27FC236}">
-                <a16:creationId xmlns:a16="http://schemas.microsoft.com/office/drawing/2014/main" id="{A9D257C5-7C07-4E98-9AEC-931F1F441B47}"/>
+                <a16:creationId xmlns:a16="http://schemas.microsoft.com/office/drawing/2014/main" id="{EA058FA4-4333-47C6-B452-A6B01C27E95D}"/>
               </a:ext>
             </a:extLst>
           </p:cNvPr>
@@ -9501,7 +9501,7 @@
           <p:nvPr/>
         </p:nvPicPr>
         <p:blipFill>
-          <a:blip xmlns:r="http://schemas.openxmlformats.org/officeDocument/2006/relationships" xmlns:a="http://schemas.openxmlformats.org/drawingml/2006/main" r:embed="R5d4fb449101f489a"/>
+          <a:blip xmlns:r="http://schemas.openxmlformats.org/officeDocument/2006/relationships" xmlns:a="http://schemas.openxmlformats.org/drawingml/2006/main" r:embed="R41085f3dc7e44868"/>
           <a:stretch xmlns:a="http://schemas.openxmlformats.org/drawingml/2006/main"/>
         </p:blipFill>
         <p:spPr>
@@ -9519,7 +9519,7 @@
           <p:cNvPr id="17416" name="">
             <a:extLst xmlns:a="http://schemas.openxmlformats.org/drawingml/2006/main">
               <a:ext uri="{FF2B5EF4-FFF2-40B4-BE49-F238E27FC236}">
-                <a16:creationId xmlns:a16="http://schemas.microsoft.com/office/drawing/2014/main" id="{0582D47E-DFD4-476D-A158-867E23307700}"/>
+                <a16:creationId xmlns:a16="http://schemas.microsoft.com/office/drawing/2014/main" id="{8233DA0D-98C1-41AC-B8D6-FFD6EDDBEB50}"/>
               </a:ext>
             </a:extLst>
           </p:cNvPr>
@@ -9572,7 +9572,7 @@
           <p:cNvPr id="17417" name="">
             <a:extLst xmlns:a="http://schemas.openxmlformats.org/drawingml/2006/main">
               <a:ext uri="{FF2B5EF4-FFF2-40B4-BE49-F238E27FC236}">
-                <a16:creationId xmlns:a16="http://schemas.microsoft.com/office/drawing/2014/main" id="{2F4B9C5B-68F3-489B-A4F7-0CD50681592E}"/>
+                <a16:creationId xmlns:a16="http://schemas.microsoft.com/office/drawing/2014/main" id="{E8D3E2B0-F87B-4162-9BDC-E6F77A32166A}"/>
               </a:ext>
             </a:extLst>
           </p:cNvPr>
@@ -9607,7 +9607,7 @@
           <p:cNvPr id="17418" name="">
             <a:extLst xmlns:a="http://schemas.openxmlformats.org/drawingml/2006/main">
               <a:ext uri="{FF2B5EF4-FFF2-40B4-BE49-F238E27FC236}">
-                <a16:creationId xmlns:a16="http://schemas.microsoft.com/office/drawing/2014/main" id="{CDBDC700-E377-4D76-A519-BBB30FA0EF6A}"/>
+                <a16:creationId xmlns:a16="http://schemas.microsoft.com/office/drawing/2014/main" id="{4B2329E1-2D10-482D-8B17-00BEA693FE75}"/>
               </a:ext>
             </a:extLst>
           </p:cNvPr>
@@ -9660,7 +9660,7 @@
           <p:cNvPr id="17419" name="">
             <a:extLst xmlns:a="http://schemas.openxmlformats.org/drawingml/2006/main">
               <a:ext uri="{FF2B5EF4-FFF2-40B4-BE49-F238E27FC236}">
-                <a16:creationId xmlns:a16="http://schemas.microsoft.com/office/drawing/2014/main" id="{C56AF309-E8E5-4AC1-8A95-A0C6A77F83A7}"/>
+                <a16:creationId xmlns:a16="http://schemas.microsoft.com/office/drawing/2014/main" id="{7134E0FC-5F63-435A-8399-8A62243430C9}"/>
               </a:ext>
             </a:extLst>
           </p:cNvPr>
@@ -9695,7 +9695,7 @@
           <p:cNvPr id="17420" name="">
             <a:extLst xmlns:a="http://schemas.openxmlformats.org/drawingml/2006/main">
               <a:ext uri="{FF2B5EF4-FFF2-40B4-BE49-F238E27FC236}">
-                <a16:creationId xmlns:a16="http://schemas.microsoft.com/office/drawing/2014/main" id="{D215B9BA-D905-4C08-8EDB-4C6A58389750}"/>
+                <a16:creationId xmlns:a16="http://schemas.microsoft.com/office/drawing/2014/main" id="{7DBD88F3-B1E4-405E-AEDE-10AF4125E502}"/>
               </a:ext>
             </a:extLst>
           </p:cNvPr>
@@ -9732,7 +9732,7 @@
           <p:cNvPr id="17421" name="">
             <a:extLst xmlns:a="http://schemas.openxmlformats.org/drawingml/2006/main">
               <a:ext uri="{FF2B5EF4-FFF2-40B4-BE49-F238E27FC236}">
-                <a16:creationId xmlns:a16="http://schemas.microsoft.com/office/drawing/2014/main" id="{5BD8C25F-4DBA-4538-991A-C40C93775972}"/>
+                <a16:creationId xmlns:a16="http://schemas.microsoft.com/office/drawing/2014/main" id="{1D3311EC-D07F-4D22-B1CB-003C2A328161}"/>
               </a:ext>
             </a:extLst>
           </p:cNvPr>
@@ -9789,7 +9789,7 @@
           <p:cNvPr id="17422" name="">
             <a:extLst xmlns:a="http://schemas.openxmlformats.org/drawingml/2006/main">
               <a:ext uri="{FF2B5EF4-FFF2-40B4-BE49-F238E27FC236}">
-                <a16:creationId xmlns:a16="http://schemas.microsoft.com/office/drawing/2014/main" id="{EE28CF33-3B06-4B31-A0A3-F269DDD19CF7}"/>
+                <a16:creationId xmlns:a16="http://schemas.microsoft.com/office/drawing/2014/main" id="{2AABD397-5E1C-407C-B234-ED32478CD733}"/>
               </a:ext>
             </a:extLst>
           </p:cNvPr>
@@ -9826,7 +9826,7 @@
           <p:cNvPr id="17423" name="">
             <a:extLst xmlns:a="http://schemas.openxmlformats.org/drawingml/2006/main">
               <a:ext uri="{FF2B5EF4-FFF2-40B4-BE49-F238E27FC236}">
-                <a16:creationId xmlns:a16="http://schemas.microsoft.com/office/drawing/2014/main" id="{C9CE4E81-650D-4682-9F4E-1BED53A530EE}"/>
+                <a16:creationId xmlns:a16="http://schemas.microsoft.com/office/drawing/2014/main" id="{F4D8AAE5-80E1-4D2A-A93F-490FBC54C66C}"/>
               </a:ext>
             </a:extLst>
           </p:cNvPr>
@@ -9883,7 +9883,7 @@
           <p:cNvPr id="17424" name="">
             <a:extLst xmlns:a="http://schemas.openxmlformats.org/drawingml/2006/main">
               <a:ext uri="{FF2B5EF4-FFF2-40B4-BE49-F238E27FC236}">
-                <a16:creationId xmlns:a16="http://schemas.microsoft.com/office/drawing/2014/main" id="{30DEA4E8-72BF-4818-AFCF-2077F233C964}"/>
+                <a16:creationId xmlns:a16="http://schemas.microsoft.com/office/drawing/2014/main" id="{B37401A7-9E97-4EDC-80A5-82FC7C0AEC73}"/>
               </a:ext>
             </a:extLst>
           </p:cNvPr>
@@ -9920,7 +9920,7 @@
           <p:cNvPr id="17425" name="">
             <a:extLst xmlns:a="http://schemas.openxmlformats.org/drawingml/2006/main">
               <a:ext uri="{FF2B5EF4-FFF2-40B4-BE49-F238E27FC236}">
-                <a16:creationId xmlns:a16="http://schemas.microsoft.com/office/drawing/2014/main" id="{70309B60-4D73-4324-9198-4AF28ECE0BE4}"/>
+                <a16:creationId xmlns:a16="http://schemas.microsoft.com/office/drawing/2014/main" id="{F75F43F0-2EA0-4D13-88E5-853EDF3B280A}"/>
               </a:ext>
             </a:extLst>
           </p:cNvPr>
@@ -9977,7 +9977,7 @@
           <p:cNvPr id="17426" name="">
             <a:extLst xmlns:a="http://schemas.openxmlformats.org/drawingml/2006/main">
               <a:ext uri="{FF2B5EF4-FFF2-40B4-BE49-F238E27FC236}">
-                <a16:creationId xmlns:a16="http://schemas.microsoft.com/office/drawing/2014/main" id="{B81016EA-0F4B-4C1D-A6F0-00F890A781F5}"/>
+                <a16:creationId xmlns:a16="http://schemas.microsoft.com/office/drawing/2014/main" id="{E815ECC0-E99A-48AA-980B-8CF79F7FE40A}"/>
               </a:ext>
             </a:extLst>
           </p:cNvPr>
@@ -10014,7 +10014,7 @@
           <p:cNvPr id="17427" name="">
             <a:extLst xmlns:a="http://schemas.openxmlformats.org/drawingml/2006/main">
               <a:ext uri="{FF2B5EF4-FFF2-40B4-BE49-F238E27FC236}">
-                <a16:creationId xmlns:a16="http://schemas.microsoft.com/office/drawing/2014/main" id="{E72C7640-3A0F-4BF9-BCD6-8DC6D4CA77DC}"/>
+                <a16:creationId xmlns:a16="http://schemas.microsoft.com/office/drawing/2014/main" id="{7ACB58A0-8C44-40A4-8077-5C3A08A10DEF}"/>
               </a:ext>
             </a:extLst>
           </p:cNvPr>
@@ -10071,7 +10071,7 @@
           <p:cNvPr id="17428" name="">
             <a:extLst xmlns:a="http://schemas.openxmlformats.org/drawingml/2006/main">
               <a:ext uri="{FF2B5EF4-FFF2-40B4-BE49-F238E27FC236}">
-                <a16:creationId xmlns:a16="http://schemas.microsoft.com/office/drawing/2014/main" id="{15482769-9FB7-43B3-8C9A-0FBCA25D0E75}"/>
+                <a16:creationId xmlns:a16="http://schemas.microsoft.com/office/drawing/2014/main" id="{ECA83DFE-DA3E-4A87-8F74-4A394B18BA24}"/>
               </a:ext>
             </a:extLst>
           </p:cNvPr>
@@ -10108,7 +10108,7 @@
           <p:cNvPr id="17429" name="">
             <a:extLst xmlns:a="http://schemas.openxmlformats.org/drawingml/2006/main">
               <a:ext uri="{FF2B5EF4-FFF2-40B4-BE49-F238E27FC236}">
-                <a16:creationId xmlns:a16="http://schemas.microsoft.com/office/drawing/2014/main" id="{210414DA-807A-4426-AE47-7646E5E46FBB}"/>
+                <a16:creationId xmlns:a16="http://schemas.microsoft.com/office/drawing/2014/main" id="{EED77B60-69F4-4963-92EC-E099B027FA4F}"/>
               </a:ext>
             </a:extLst>
           </p:cNvPr>
@@ -10165,7 +10165,7 @@
           <p:cNvPr id="17430" name="">
             <a:extLst xmlns:a="http://schemas.openxmlformats.org/drawingml/2006/main">
               <a:ext uri="{FF2B5EF4-FFF2-40B4-BE49-F238E27FC236}">
-                <a16:creationId xmlns:a16="http://schemas.microsoft.com/office/drawing/2014/main" id="{5E14C968-181B-4717-ADB5-80D39E281B80}"/>
+                <a16:creationId xmlns:a16="http://schemas.microsoft.com/office/drawing/2014/main" id="{4F22F223-830B-449B-82AF-059654138EF8}"/>
               </a:ext>
             </a:extLst>
           </p:cNvPr>
@@ -10202,7 +10202,7 @@
           <p:cNvPr id="17431" name="">
             <a:extLst xmlns:a="http://schemas.openxmlformats.org/drawingml/2006/main">
               <a:ext uri="{FF2B5EF4-FFF2-40B4-BE49-F238E27FC236}">
-                <a16:creationId xmlns:a16="http://schemas.microsoft.com/office/drawing/2014/main" id="{832147CD-1D03-441E-BCAE-FDC3F21B3E37}"/>
+                <a16:creationId xmlns:a16="http://schemas.microsoft.com/office/drawing/2014/main" id="{9B74E8FF-554D-4E9A-A0C8-595F4ABA6DAB}"/>
               </a:ext>
             </a:extLst>
           </p:cNvPr>
@@ -10259,7 +10259,7 @@
           <p:cNvPr id="17432" name="">
             <a:extLst xmlns:a="http://schemas.openxmlformats.org/drawingml/2006/main">
               <a:ext uri="{FF2B5EF4-FFF2-40B4-BE49-F238E27FC236}">
-                <a16:creationId xmlns:a16="http://schemas.microsoft.com/office/drawing/2014/main" id="{FFA07055-92E7-4D9C-A6D5-2772A3E891BC}"/>
+                <a16:creationId xmlns:a16="http://schemas.microsoft.com/office/drawing/2014/main" id="{3C096779-C157-4EE5-BCCF-1BCFF5FC1455}"/>
               </a:ext>
             </a:extLst>
           </p:cNvPr>
@@ -10296,7 +10296,7 @@
           <p:cNvPr id="17433" name="">
             <a:extLst xmlns:a="http://schemas.openxmlformats.org/drawingml/2006/main">
               <a:ext uri="{FF2B5EF4-FFF2-40B4-BE49-F238E27FC236}">
-                <a16:creationId xmlns:a16="http://schemas.microsoft.com/office/drawing/2014/main" id="{AA3B6680-9B45-4E96-AB3F-6DCADEC6644F}"/>
+                <a16:creationId xmlns:a16="http://schemas.microsoft.com/office/drawing/2014/main" id="{E3B6C188-C91A-4438-AC43-670228FA37EA}"/>
               </a:ext>
             </a:extLst>
           </p:cNvPr>
@@ -10353,7 +10353,7 @@
           <p:cNvPr id="17434" name="">
             <a:extLst xmlns:a="http://schemas.openxmlformats.org/drawingml/2006/main">
               <a:ext uri="{FF2B5EF4-FFF2-40B4-BE49-F238E27FC236}">
-                <a16:creationId xmlns:a16="http://schemas.microsoft.com/office/drawing/2014/main" id="{8156EF7C-311B-4E42-B4F3-D8589FF478B0}"/>
+                <a16:creationId xmlns:a16="http://schemas.microsoft.com/office/drawing/2014/main" id="{ECA236AB-4428-41B4-B410-50CBCC90BC97}"/>
               </a:ext>
             </a:extLst>
           </p:cNvPr>
@@ -10390,7 +10390,7 @@
           <p:cNvPr id="17435" name="">
             <a:extLst xmlns:a="http://schemas.openxmlformats.org/drawingml/2006/main">
               <a:ext uri="{FF2B5EF4-FFF2-40B4-BE49-F238E27FC236}">
-                <a16:creationId xmlns:a16="http://schemas.microsoft.com/office/drawing/2014/main" id="{1BD6BE3A-712B-47BC-8F16-4724AFDAD2F6}"/>
+                <a16:creationId xmlns:a16="http://schemas.microsoft.com/office/drawing/2014/main" id="{DEEA0468-0FBF-4835-A86B-6A0531499CCC}"/>
               </a:ext>
             </a:extLst>
           </p:cNvPr>
@@ -10447,7 +10447,7 @@
           <p:cNvPr id="17436" name="">
             <a:extLst xmlns:a="http://schemas.openxmlformats.org/drawingml/2006/main">
               <a:ext uri="{FF2B5EF4-FFF2-40B4-BE49-F238E27FC236}">
-                <a16:creationId xmlns:a16="http://schemas.microsoft.com/office/drawing/2014/main" id="{610D8D92-9F0A-462D-8C62-66951C729873}"/>
+                <a16:creationId xmlns:a16="http://schemas.microsoft.com/office/drawing/2014/main" id="{978A9451-0A89-409F-BB55-403E42637691}"/>
               </a:ext>
             </a:extLst>
           </p:cNvPr>
@@ -10484,7 +10484,7 @@
           <p:cNvPr id="17437" name="">
             <a:extLst xmlns:a="http://schemas.openxmlformats.org/drawingml/2006/main">
               <a:ext uri="{FF2B5EF4-FFF2-40B4-BE49-F238E27FC236}">
-                <a16:creationId xmlns:a16="http://schemas.microsoft.com/office/drawing/2014/main" id="{96912386-AAF7-4FE7-B005-F4C4774B4611}"/>
+                <a16:creationId xmlns:a16="http://schemas.microsoft.com/office/drawing/2014/main" id="{027ED6DB-7AED-422C-8589-304D3F83338E}"/>
               </a:ext>
             </a:extLst>
           </p:cNvPr>
@@ -10541,7 +10541,7 @@
           <p:cNvPr id="17438" name="">
             <a:extLst xmlns:a="http://schemas.openxmlformats.org/drawingml/2006/main">
               <a:ext uri="{FF2B5EF4-FFF2-40B4-BE49-F238E27FC236}">
-                <a16:creationId xmlns:a16="http://schemas.microsoft.com/office/drawing/2014/main" id="{AD21464E-5EEA-4C2E-9B8B-D40FEA0069C8}"/>
+                <a16:creationId xmlns:a16="http://schemas.microsoft.com/office/drawing/2014/main" id="{B0073232-2C6F-478C-B440-D2D7BAE8B834}"/>
               </a:ext>
             </a:extLst>
           </p:cNvPr>
@@ -10578,7 +10578,7 @@
           <p:cNvPr id="17439" name="">
             <a:extLst xmlns:a="http://schemas.openxmlformats.org/drawingml/2006/main">
               <a:ext uri="{FF2B5EF4-FFF2-40B4-BE49-F238E27FC236}">
-                <a16:creationId xmlns:a16="http://schemas.microsoft.com/office/drawing/2014/main" id="{7B972849-07E1-452F-B20E-DB2B366DA969}"/>
+                <a16:creationId xmlns:a16="http://schemas.microsoft.com/office/drawing/2014/main" id="{B42B5B07-E0B6-439F-84C4-7047E6EC8C3D}"/>
               </a:ext>
             </a:extLst>
           </p:cNvPr>
@@ -10635,7 +10635,7 @@
           <p:cNvPr id="17440" name="">
             <a:extLst xmlns:a="http://schemas.openxmlformats.org/drawingml/2006/main">
               <a:ext uri="{FF2B5EF4-FFF2-40B4-BE49-F238E27FC236}">
-                <a16:creationId xmlns:a16="http://schemas.microsoft.com/office/drawing/2014/main" id="{2839C258-06F3-424C-B03D-526CB28506AA}"/>
+                <a16:creationId xmlns:a16="http://schemas.microsoft.com/office/drawing/2014/main" id="{3E31D2A4-FBF4-4C9B-913E-74343BC6A8F6}"/>
               </a:ext>
             </a:extLst>
           </p:cNvPr>
@@ -10781,7 +10781,7 @@
           <p:cNvPr id="17409" name="Title 1">
             <a:extLst xmlns:a="http://schemas.openxmlformats.org/drawingml/2006/main">
               <a:ext uri="{FF2B5EF4-FFF2-40B4-BE49-F238E27FC236}">
-                <a16:creationId xmlns:a16="http://schemas.microsoft.com/office/drawing/2014/main" id="{654D91DE-7587-4935-86E8-B7F1FB29AF8F}"/>
+                <a16:creationId xmlns:a16="http://schemas.microsoft.com/office/drawing/2014/main" id="{670CA319-68D2-46C2-A235-47BEB8F41F22}"/>
               </a:ext>
             </a:extLst>
           </p:cNvPr>
@@ -10816,7 +10816,7 @@
           <p:cNvPr id="6" name="Slide Number Placeholder 5">
             <a:extLst xmlns:a="http://schemas.openxmlformats.org/drawingml/2006/main">
               <a:ext uri="{FF2B5EF4-FFF2-40B4-BE49-F238E27FC236}">
-                <a16:creationId xmlns:a16="http://schemas.microsoft.com/office/drawing/2014/main" id="{1E5B0D73-AD7B-4A39-9CED-3A4D2276568B}"/>
+                <a16:creationId xmlns:a16="http://schemas.microsoft.com/office/drawing/2014/main" id="{1FA19EED-F565-46E4-8BF7-0EE59FD0AB84}"/>
               </a:ext>
             </a:extLst>
           </p:cNvPr>
@@ -10880,7 +10880,7 @@
           <p:cNvPr id="7" name="Footer Placeholder 6">
             <a:extLst xmlns:a="http://schemas.openxmlformats.org/drawingml/2006/main">
               <a:ext uri="{FF2B5EF4-FFF2-40B4-BE49-F238E27FC236}">
-                <a16:creationId xmlns:a16="http://schemas.microsoft.com/office/drawing/2014/main" id="{105E41CA-16AB-4600-B9F0-AA4A3BD1C8D0}"/>
+                <a16:creationId xmlns:a16="http://schemas.microsoft.com/office/drawing/2014/main" id="{9EA4734D-E473-46C2-A9B7-0E22E95D153F}"/>
               </a:ext>
             </a:extLst>
           </p:cNvPr>
@@ -11005,7 +11005,7 @@
           <p:nvPr/>
         </p:nvPicPr>
         <p:blipFill>
-          <a:blip xmlns:r="http://schemas.openxmlformats.org/officeDocument/2006/relationships" xmlns:a="http://schemas.openxmlformats.org/drawingml/2006/main" r:embed="R42d1d8df6a7642ed"/>
+          <a:blip xmlns:r="http://schemas.openxmlformats.org/officeDocument/2006/relationships" xmlns:a="http://schemas.openxmlformats.org/drawingml/2006/main" r:embed="R7aac89d2b5be415d"/>
           <a:stretch xmlns:a="http://schemas.openxmlformats.org/drawingml/2006/main">
             <a:fillRect l="0" t="0" r="0" b="0"/>
           </a:stretch>
@@ -11025,7 +11025,7 @@
           <p:cNvPr id="17412" name="">
             <a:extLst xmlns:a="http://schemas.openxmlformats.org/drawingml/2006/main">
               <a:ext uri="{FF2B5EF4-FFF2-40B4-BE49-F238E27FC236}">
-                <a16:creationId xmlns:a16="http://schemas.microsoft.com/office/drawing/2014/main" id="{8769B67D-7062-415F-A42D-5A1F59DD46AA}"/>
+                <a16:creationId xmlns:a16="http://schemas.microsoft.com/office/drawing/2014/main" id="{5D135CD0-AF63-4B7B-94AE-B755B7D90777}"/>
               </a:ext>
             </a:extLst>
           </p:cNvPr>
@@ -11078,7 +11078,7 @@
           <p:cNvPr id="17413" name="">
             <a:extLst xmlns:a="http://schemas.openxmlformats.org/drawingml/2006/main">
               <a:ext uri="{FF2B5EF4-FFF2-40B4-BE49-F238E27FC236}">
-                <a16:creationId xmlns:a16="http://schemas.microsoft.com/office/drawing/2014/main" id="{4AEF0B70-B8EB-4C78-959C-21D6E03C23AC}"/>
+                <a16:creationId xmlns:a16="http://schemas.microsoft.com/office/drawing/2014/main" id="{F647F850-CBDC-4B61-B8DD-FE8DEDB52321}"/>
               </a:ext>
             </a:extLst>
           </p:cNvPr>
@@ -11113,7 +11113,7 @@
           <p:cNvPr id="17414" name="">
             <a:extLst xmlns:a="http://schemas.openxmlformats.org/drawingml/2006/main">
               <a:ext uri="{FF2B5EF4-FFF2-40B4-BE49-F238E27FC236}">
-                <a16:creationId xmlns:a16="http://schemas.microsoft.com/office/drawing/2014/main" id="{A145CC59-7D14-4528-B53D-73C4CB94096C}"/>
+                <a16:creationId xmlns:a16="http://schemas.microsoft.com/office/drawing/2014/main" id="{9C1C251C-091D-42E0-A810-66996C8286E8}"/>
               </a:ext>
             </a:extLst>
           </p:cNvPr>
@@ -11166,7 +11166,7 @@
           <p:cNvPr id="17415" name="">
             <a:extLst xmlns:a="http://schemas.openxmlformats.org/drawingml/2006/main">
               <a:ext uri="{FF2B5EF4-FFF2-40B4-BE49-F238E27FC236}">
-                <a16:creationId xmlns:a16="http://schemas.microsoft.com/office/drawing/2014/main" id="{65191114-23D2-441E-A98E-E55F42A83934}"/>
+                <a16:creationId xmlns:a16="http://schemas.microsoft.com/office/drawing/2014/main" id="{1022C3D4-6E9D-40DE-90EB-ACD2CF87577C}"/>
               </a:ext>
             </a:extLst>
           </p:cNvPr>
@@ -11205,7 +11205,7 @@
           <p:cNvPr id="17416" name="">
             <a:extLst xmlns:a="http://schemas.openxmlformats.org/drawingml/2006/main">
               <a:ext uri="{FF2B5EF4-FFF2-40B4-BE49-F238E27FC236}">
-                <a16:creationId xmlns:a16="http://schemas.microsoft.com/office/drawing/2014/main" id="{ACC6AB31-77DE-4766-A9FF-8E92D15F95A0}"/>
+                <a16:creationId xmlns:a16="http://schemas.microsoft.com/office/drawing/2014/main" id="{08F4D503-269F-491E-BC92-D8582FD7FAF1}"/>
               </a:ext>
             </a:extLst>
           </p:cNvPr>
@@ -11258,7 +11258,7 @@
           <p:cNvPr id="17417" name="">
             <a:extLst xmlns:a="http://schemas.openxmlformats.org/drawingml/2006/main">
               <a:ext uri="{FF2B5EF4-FFF2-40B4-BE49-F238E27FC236}">
-                <a16:creationId xmlns:a16="http://schemas.microsoft.com/office/drawing/2014/main" id="{243307A0-BF0C-44E5-A05A-E9526E73C094}"/>
+                <a16:creationId xmlns:a16="http://schemas.microsoft.com/office/drawing/2014/main" id="{C7048BFF-3F06-4C9F-8030-CF4EAA1ED6AF}"/>
               </a:ext>
             </a:extLst>
           </p:cNvPr>
@@ -11342,7 +11342,7 @@
           <p:cNvPr id="17418" name="">
             <a:extLst xmlns:a="http://schemas.openxmlformats.org/drawingml/2006/main">
               <a:ext uri="{FF2B5EF4-FFF2-40B4-BE49-F238E27FC236}">
-                <a16:creationId xmlns:a16="http://schemas.microsoft.com/office/drawing/2014/main" id="{5F331483-21A6-4741-9878-8F1A733CD0C5}"/>
+                <a16:creationId xmlns:a16="http://schemas.microsoft.com/office/drawing/2014/main" id="{7B4C8CB7-A6DD-4254-92C3-DAE16778742A}"/>
               </a:ext>
             </a:extLst>
           </p:cNvPr>
@@ -11381,7 +11381,7 @@
           <p:cNvPr id="17419" name="">
             <a:extLst xmlns:a="http://schemas.openxmlformats.org/drawingml/2006/main">
               <a:ext uri="{FF2B5EF4-FFF2-40B4-BE49-F238E27FC236}">
-                <a16:creationId xmlns:a16="http://schemas.microsoft.com/office/drawing/2014/main" id="{F92A3254-4747-45F6-B426-5FAFE6E96438}"/>
+                <a16:creationId xmlns:a16="http://schemas.microsoft.com/office/drawing/2014/main" id="{BD7DAC2A-AAC4-41A3-908B-C9337CD41B0B}"/>
               </a:ext>
             </a:extLst>
           </p:cNvPr>
@@ -11434,7 +11434,7 @@
           <p:cNvPr id="17420" name="">
             <a:extLst xmlns:a="http://schemas.openxmlformats.org/drawingml/2006/main">
               <a:ext uri="{FF2B5EF4-FFF2-40B4-BE49-F238E27FC236}">
-                <a16:creationId xmlns:a16="http://schemas.microsoft.com/office/drawing/2014/main" id="{7ACA5BF7-5814-4EC3-B9AF-308D3B683654}"/>
+                <a16:creationId xmlns:a16="http://schemas.microsoft.com/office/drawing/2014/main" id="{E82A7506-A187-49AE-A8DB-28240CFE51C1}"/>
               </a:ext>
             </a:extLst>
           </p:cNvPr>
@@ -11518,7 +11518,7 @@
           <p:cNvPr id="17421" name="">
             <a:extLst xmlns:a="http://schemas.openxmlformats.org/drawingml/2006/main">
               <a:ext uri="{FF2B5EF4-FFF2-40B4-BE49-F238E27FC236}">
-                <a16:creationId xmlns:a16="http://schemas.microsoft.com/office/drawing/2014/main" id="{B4FCB98D-2065-438E-BAEC-50351110DC26}"/>
+                <a16:creationId xmlns:a16="http://schemas.microsoft.com/office/drawing/2014/main" id="{F9DABCA0-183D-4B70-ABBC-4FF832222FA5}"/>
               </a:ext>
             </a:extLst>
           </p:cNvPr>
@@ -11557,7 +11557,7 @@
           <p:cNvPr id="17422" name="">
             <a:extLst xmlns:a="http://schemas.openxmlformats.org/drawingml/2006/main">
               <a:ext uri="{FF2B5EF4-FFF2-40B4-BE49-F238E27FC236}">
-                <a16:creationId xmlns:a16="http://schemas.microsoft.com/office/drawing/2014/main" id="{6B7707B2-165C-4872-9A68-616884EE2043}"/>
+                <a16:creationId xmlns:a16="http://schemas.microsoft.com/office/drawing/2014/main" id="{5B504005-4F5D-41EC-A2BD-F82D53322D0B}"/>
               </a:ext>
             </a:extLst>
           </p:cNvPr>
@@ -11610,7 +11610,7 @@
           <p:cNvPr id="17423" name="">
             <a:extLst xmlns:a="http://schemas.openxmlformats.org/drawingml/2006/main">
               <a:ext uri="{FF2B5EF4-FFF2-40B4-BE49-F238E27FC236}">
-                <a16:creationId xmlns:a16="http://schemas.microsoft.com/office/drawing/2014/main" id="{E70E0939-F54E-4AD5-B8E9-377714745C6C}"/>
+                <a16:creationId xmlns:a16="http://schemas.microsoft.com/office/drawing/2014/main" id="{8D74C150-E675-4D1A-ACF9-618DFB855339}"/>
               </a:ext>
             </a:extLst>
           </p:cNvPr>
@@ -11694,7 +11694,7 @@
           <p:cNvPr id="17424" name="">
             <a:extLst xmlns:a="http://schemas.openxmlformats.org/drawingml/2006/main">
               <a:ext uri="{FF2B5EF4-FFF2-40B4-BE49-F238E27FC236}">
-                <a16:creationId xmlns:a16="http://schemas.microsoft.com/office/drawing/2014/main" id="{6D69B78F-43C4-4F3A-8FE9-E1D4D5A3DBD3}"/>
+                <a16:creationId xmlns:a16="http://schemas.microsoft.com/office/drawing/2014/main" id="{DAABFFCB-9E56-4145-9D79-07775467800D}"/>
               </a:ext>
             </a:extLst>
           </p:cNvPr>
@@ -11733,7 +11733,7 @@
           <p:cNvPr id="17425" name="">
             <a:extLst xmlns:a="http://schemas.openxmlformats.org/drawingml/2006/main">
               <a:ext uri="{FF2B5EF4-FFF2-40B4-BE49-F238E27FC236}">
-                <a16:creationId xmlns:a16="http://schemas.microsoft.com/office/drawing/2014/main" id="{EDE0F91A-1C5E-4D58-B77C-CDECC0DBC31D}"/>
+                <a16:creationId xmlns:a16="http://schemas.microsoft.com/office/drawing/2014/main" id="{302172D2-0AF9-4CE3-AEBA-0659444611D6}"/>
               </a:ext>
             </a:extLst>
           </p:cNvPr>
@@ -11786,7 +11786,7 @@
           <p:cNvPr id="17426" name="">
             <a:extLst xmlns:a="http://schemas.openxmlformats.org/drawingml/2006/main">
               <a:ext uri="{FF2B5EF4-FFF2-40B4-BE49-F238E27FC236}">
-                <a16:creationId xmlns:a16="http://schemas.microsoft.com/office/drawing/2014/main" id="{0B0C4AEE-5AB6-408E-8613-F2BA0C1001CE}"/>
+                <a16:creationId xmlns:a16="http://schemas.microsoft.com/office/drawing/2014/main" id="{C19FF7D0-411A-4A52-91DA-D6350E679F71}"/>
               </a:ext>
             </a:extLst>
           </p:cNvPr>
@@ -11870,7 +11870,7 @@
           <p:cNvPr id="17427" name="">
             <a:extLst xmlns:a="http://schemas.openxmlformats.org/drawingml/2006/main">
               <a:ext uri="{FF2B5EF4-FFF2-40B4-BE49-F238E27FC236}">
-                <a16:creationId xmlns:a16="http://schemas.microsoft.com/office/drawing/2014/main" id="{F5169F67-08AA-4881-8C9F-592676CF19F0}"/>
+                <a16:creationId xmlns:a16="http://schemas.microsoft.com/office/drawing/2014/main" id="{A3A8D672-AE20-42C2-89E6-DE595C7DCE16}"/>
               </a:ext>
             </a:extLst>
           </p:cNvPr>
@@ -11909,7 +11909,7 @@
           <p:cNvPr id="17428" name="">
             <a:extLst xmlns:a="http://schemas.openxmlformats.org/drawingml/2006/main">
               <a:ext uri="{FF2B5EF4-FFF2-40B4-BE49-F238E27FC236}">
-                <a16:creationId xmlns:a16="http://schemas.microsoft.com/office/drawing/2014/main" id="{BDB0987F-4A72-40E5-97C8-32DA22BE2E6D}"/>
+                <a16:creationId xmlns:a16="http://schemas.microsoft.com/office/drawing/2014/main" id="{D43D794B-0394-46F8-8EBF-F97580DDD23D}"/>
               </a:ext>
             </a:extLst>
           </p:cNvPr>
@@ -11962,7 +11962,7 @@
           <p:cNvPr id="17429" name="">
             <a:extLst xmlns:a="http://schemas.openxmlformats.org/drawingml/2006/main">
               <a:ext uri="{FF2B5EF4-FFF2-40B4-BE49-F238E27FC236}">
-                <a16:creationId xmlns:a16="http://schemas.microsoft.com/office/drawing/2014/main" id="{ABAB8546-649B-4860-BE0C-B1B2AA1CC5C5}"/>
+                <a16:creationId xmlns:a16="http://schemas.microsoft.com/office/drawing/2014/main" id="{506A9E28-D78A-4CBA-8B18-72C415D51DBD}"/>
               </a:ext>
             </a:extLst>
           </p:cNvPr>
@@ -12176,7 +12176,7 @@
           <p:cNvPr id="17435" name="">
             <a:extLst xmlns:a="http://schemas.openxmlformats.org/drawingml/2006/main">
               <a:ext uri="{FF2B5EF4-FFF2-40B4-BE49-F238E27FC236}">
-                <a16:creationId xmlns:a16="http://schemas.microsoft.com/office/drawing/2014/main" id="{A1279AF8-E4F9-4046-8CEF-84E1405A740D}"/>
+                <a16:creationId xmlns:a16="http://schemas.microsoft.com/office/drawing/2014/main" id="{A25DEB54-449C-4D1F-AA70-A64BC579EABC}"/>
               </a:ext>
             </a:extLst>
           </p:cNvPr>
@@ -12229,7 +12229,7 @@
           <p:cNvPr id="17436" name="">
             <a:extLst xmlns:a="http://schemas.openxmlformats.org/drawingml/2006/main">
               <a:ext uri="{FF2B5EF4-FFF2-40B4-BE49-F238E27FC236}">
-                <a16:creationId xmlns:a16="http://schemas.microsoft.com/office/drawing/2014/main" id="{02A8178D-CEBA-4C91-B14B-BB2CFD7B9BF4}"/>
+                <a16:creationId xmlns:a16="http://schemas.microsoft.com/office/drawing/2014/main" id="{9133E7D0-C16B-4F4F-B25C-A4005D7BC47D}"/>
               </a:ext>
             </a:extLst>
           </p:cNvPr>
@@ -12282,7 +12282,7 @@
           <p:cNvPr id="17437" name="">
             <a:extLst xmlns:a="http://schemas.openxmlformats.org/drawingml/2006/main">
               <a:ext uri="{FF2B5EF4-FFF2-40B4-BE49-F238E27FC236}">
-                <a16:creationId xmlns:a16="http://schemas.microsoft.com/office/drawing/2014/main" id="{60161F40-6F14-4607-BB49-F2EA66133246}"/>
+                <a16:creationId xmlns:a16="http://schemas.microsoft.com/office/drawing/2014/main" id="{7D041C43-F79F-484C-8BD0-ED8165498B5A}"/>
               </a:ext>
             </a:extLst>
           </p:cNvPr>
@@ -12317,7 +12317,7 @@
           <p:cNvPr id="17438" name="">
             <a:extLst xmlns:a="http://schemas.openxmlformats.org/drawingml/2006/main">
               <a:ext uri="{FF2B5EF4-FFF2-40B4-BE49-F238E27FC236}">
-                <a16:creationId xmlns:a16="http://schemas.microsoft.com/office/drawing/2014/main" id="{F1DA5F22-2ECC-4A57-9EE0-3E29D11F2809}"/>
+                <a16:creationId xmlns:a16="http://schemas.microsoft.com/office/drawing/2014/main" id="{B3D38CD1-B5B2-43F9-9D27-964512685BD2}"/>
               </a:ext>
             </a:extLst>
           </p:cNvPr>
@@ -12356,7 +12356,7 @@
           <p:cNvPr id="17439" name="">
             <a:extLst xmlns:a="http://schemas.openxmlformats.org/drawingml/2006/main">
               <a:ext uri="{FF2B5EF4-FFF2-40B4-BE49-F238E27FC236}">
-                <a16:creationId xmlns:a16="http://schemas.microsoft.com/office/drawing/2014/main" id="{F5E7824E-46C2-4D5E-BA4B-57266CBF612D}"/>
+                <a16:creationId xmlns:a16="http://schemas.microsoft.com/office/drawing/2014/main" id="{066946A7-F14A-43E5-AC67-72F8ACBCD38F}"/>
               </a:ext>
             </a:extLst>
           </p:cNvPr>
@@ -12409,7 +12409,7 @@
           <p:cNvPr id="17440" name="">
             <a:extLst xmlns:a="http://schemas.openxmlformats.org/drawingml/2006/main">
               <a:ext uri="{FF2B5EF4-FFF2-40B4-BE49-F238E27FC236}">
-                <a16:creationId xmlns:a16="http://schemas.microsoft.com/office/drawing/2014/main" id="{6A44C59D-B918-4CE9-82A6-E0816E16028B}"/>
+                <a16:creationId xmlns:a16="http://schemas.microsoft.com/office/drawing/2014/main" id="{9283CD58-F6DF-40DE-B7A9-3047DDD98295}"/>
               </a:ext>
             </a:extLst>
           </p:cNvPr>
@@ -12466,7 +12466,7 @@
           <p:cNvPr id="17441" name="">
             <a:extLst xmlns:a="http://schemas.openxmlformats.org/drawingml/2006/main">
               <a:ext uri="{FF2B5EF4-FFF2-40B4-BE49-F238E27FC236}">
-                <a16:creationId xmlns:a16="http://schemas.microsoft.com/office/drawing/2014/main" id="{D1576A16-F480-4820-9EA9-9EC6C3F48FBF}"/>
+                <a16:creationId xmlns:a16="http://schemas.microsoft.com/office/drawing/2014/main" id="{8B303410-D778-4969-89AD-01A3BDE1D934}"/>
               </a:ext>
             </a:extLst>
           </p:cNvPr>
@@ -12505,7 +12505,7 @@
           <p:cNvPr id="17442" name="">
             <a:extLst xmlns:a="http://schemas.openxmlformats.org/drawingml/2006/main">
               <a:ext uri="{FF2B5EF4-FFF2-40B4-BE49-F238E27FC236}">
-                <a16:creationId xmlns:a16="http://schemas.microsoft.com/office/drawing/2014/main" id="{996631D9-2192-4D44-B33E-C24184505C8E}"/>
+                <a16:creationId xmlns:a16="http://schemas.microsoft.com/office/drawing/2014/main" id="{2FB14AB9-2053-4B23-9E05-A474F4830C24}"/>
               </a:ext>
             </a:extLst>
           </p:cNvPr>
@@ -12558,7 +12558,7 @@
           <p:cNvPr id="17443" name="">
             <a:extLst xmlns:a="http://schemas.openxmlformats.org/drawingml/2006/main">
               <a:ext uri="{FF2B5EF4-FFF2-40B4-BE49-F238E27FC236}">
-                <a16:creationId xmlns:a16="http://schemas.microsoft.com/office/drawing/2014/main" id="{46878698-7C76-4AC1-8543-CB3CADBEEE1C}"/>
+                <a16:creationId xmlns:a16="http://schemas.microsoft.com/office/drawing/2014/main" id="{9A152E09-11FD-4D94-8F93-C5FB1B7028F4}"/>
               </a:ext>
             </a:extLst>
           </p:cNvPr>
@@ -12615,7 +12615,7 @@
           <p:cNvPr id="17444" name="">
             <a:extLst xmlns:a="http://schemas.openxmlformats.org/drawingml/2006/main">
               <a:ext uri="{FF2B5EF4-FFF2-40B4-BE49-F238E27FC236}">
-                <a16:creationId xmlns:a16="http://schemas.microsoft.com/office/drawing/2014/main" id="{A7F5626B-EE37-4451-A5B7-38DE01BB17A4}"/>
+                <a16:creationId xmlns:a16="http://schemas.microsoft.com/office/drawing/2014/main" id="{B5C75667-1FC0-48E1-B323-078F28CBD325}"/>
               </a:ext>
             </a:extLst>
           </p:cNvPr>
@@ -12654,7 +12654,7 @@
           <p:cNvPr id="17445" name="">
             <a:extLst xmlns:a="http://schemas.openxmlformats.org/drawingml/2006/main">
               <a:ext uri="{FF2B5EF4-FFF2-40B4-BE49-F238E27FC236}">
-                <a16:creationId xmlns:a16="http://schemas.microsoft.com/office/drawing/2014/main" id="{074B4132-4085-4C07-9CFE-9D68E9EDCFBA}"/>
+                <a16:creationId xmlns:a16="http://schemas.microsoft.com/office/drawing/2014/main" id="{63E6A228-277F-4ED6-AD3C-DACFBD5136F2}"/>
               </a:ext>
             </a:extLst>
           </p:cNvPr>
@@ -12707,7 +12707,7 @@
           <p:cNvPr id="17446" name="">
             <a:extLst xmlns:a="http://schemas.openxmlformats.org/drawingml/2006/main">
               <a:ext uri="{FF2B5EF4-FFF2-40B4-BE49-F238E27FC236}">
-                <a16:creationId xmlns:a16="http://schemas.microsoft.com/office/drawing/2014/main" id="{AABA5DCA-2EF3-4FE2-98C9-B5011501DC95}"/>
+                <a16:creationId xmlns:a16="http://schemas.microsoft.com/office/drawing/2014/main" id="{520A5EE6-9DE0-458D-AA9C-5C0FA2534F17}"/>
               </a:ext>
             </a:extLst>
           </p:cNvPr>
@@ -12764,7 +12764,7 @@
           <p:cNvPr id="17447" name="">
             <a:extLst xmlns:a="http://schemas.openxmlformats.org/drawingml/2006/main">
               <a:ext uri="{FF2B5EF4-FFF2-40B4-BE49-F238E27FC236}">
-                <a16:creationId xmlns:a16="http://schemas.microsoft.com/office/drawing/2014/main" id="{05F62BDD-53CC-4D5B-A266-2EEDD92EC125}"/>
+                <a16:creationId xmlns:a16="http://schemas.microsoft.com/office/drawing/2014/main" id="{4DA26D0E-621E-4713-B1DE-7E69DC84B69A}"/>
               </a:ext>
             </a:extLst>
           </p:cNvPr>
@@ -12803,7 +12803,7 @@
           <p:cNvPr id="17448" name="">
             <a:extLst xmlns:a="http://schemas.openxmlformats.org/drawingml/2006/main">
               <a:ext uri="{FF2B5EF4-FFF2-40B4-BE49-F238E27FC236}">
-                <a16:creationId xmlns:a16="http://schemas.microsoft.com/office/drawing/2014/main" id="{2FA22828-C5A6-45CC-B6B0-C5A20B54444D}"/>
+                <a16:creationId xmlns:a16="http://schemas.microsoft.com/office/drawing/2014/main" id="{D4CE8052-AF92-4801-AA32-64EDECAF0AF9}"/>
               </a:ext>
             </a:extLst>
           </p:cNvPr>
@@ -12856,7 +12856,7 @@
           <p:cNvPr id="17449" name="">
             <a:extLst xmlns:a="http://schemas.openxmlformats.org/drawingml/2006/main">
               <a:ext uri="{FF2B5EF4-FFF2-40B4-BE49-F238E27FC236}">
-                <a16:creationId xmlns:a16="http://schemas.microsoft.com/office/drawing/2014/main" id="{B9C883A7-2D38-4B64-ABD5-9F27BF7C3857}"/>
+                <a16:creationId xmlns:a16="http://schemas.microsoft.com/office/drawing/2014/main" id="{BD8D9706-0465-439B-99E4-DA859E9403D9}"/>
               </a:ext>
             </a:extLst>
           </p:cNvPr>
@@ -12913,7 +12913,7 @@
           <p:cNvPr id="17450" name="">
             <a:extLst xmlns:a="http://schemas.openxmlformats.org/drawingml/2006/main">
               <a:ext uri="{FF2B5EF4-FFF2-40B4-BE49-F238E27FC236}">
-                <a16:creationId xmlns:a16="http://schemas.microsoft.com/office/drawing/2014/main" id="{B2F18391-DD4C-4191-8DC8-7224FCB4F733}"/>
+                <a16:creationId xmlns:a16="http://schemas.microsoft.com/office/drawing/2014/main" id="{E55EF326-4CDC-4527-96FF-AA496AFFC970}"/>
               </a:ext>
             </a:extLst>
           </p:cNvPr>
@@ -12952,7 +12952,7 @@
           <p:cNvPr id="17451" name="">
             <a:extLst xmlns:a="http://schemas.openxmlformats.org/drawingml/2006/main">
               <a:ext uri="{FF2B5EF4-FFF2-40B4-BE49-F238E27FC236}">
-                <a16:creationId xmlns:a16="http://schemas.microsoft.com/office/drawing/2014/main" id="{841E5162-2F2B-451F-A98A-FD4FD6E5E115}"/>
+                <a16:creationId xmlns:a16="http://schemas.microsoft.com/office/drawing/2014/main" id="{4A3B3420-7AA1-4B30-8212-A6989344101B}"/>
               </a:ext>
             </a:extLst>
           </p:cNvPr>
@@ -13005,7 +13005,7 @@
           <p:cNvPr id="17452" name="">
             <a:extLst xmlns:a="http://schemas.openxmlformats.org/drawingml/2006/main">
               <a:ext uri="{FF2B5EF4-FFF2-40B4-BE49-F238E27FC236}">
-                <a16:creationId xmlns:a16="http://schemas.microsoft.com/office/drawing/2014/main" id="{4D16FFA5-D335-43B5-896E-2550AF198372}"/>
+                <a16:creationId xmlns:a16="http://schemas.microsoft.com/office/drawing/2014/main" id="{E68E794C-AC73-49BD-84D6-68578ECC1EEB}"/>
               </a:ext>
             </a:extLst>
           </p:cNvPr>
@@ -13058,7 +13058,7 @@
           <p:cNvPr id="17453" name="">
             <a:extLst xmlns:a="http://schemas.openxmlformats.org/drawingml/2006/main">
               <a:ext uri="{FF2B5EF4-FFF2-40B4-BE49-F238E27FC236}">
-                <a16:creationId xmlns:a16="http://schemas.microsoft.com/office/drawing/2014/main" id="{5E0B19A2-1D98-4926-8BAC-9B6A7DC344D9}"/>
+                <a16:creationId xmlns:a16="http://schemas.microsoft.com/office/drawing/2014/main" id="{1EAF6071-45C4-49A8-A354-AD5B72044E0E}"/>
               </a:ext>
             </a:extLst>
           </p:cNvPr>
@@ -13208,7 +13208,7 @@
           <p:cNvPr id="17409" name="Title 1">
             <a:extLst xmlns:a="http://schemas.openxmlformats.org/drawingml/2006/main">
               <a:ext uri="{FF2B5EF4-FFF2-40B4-BE49-F238E27FC236}">
-                <a16:creationId xmlns:a16="http://schemas.microsoft.com/office/drawing/2014/main" id="{92670BD1-933C-4CCB-9A40-F3C6C92FB75E}"/>
+                <a16:creationId xmlns:a16="http://schemas.microsoft.com/office/drawing/2014/main" id="{D867CC2A-FDDC-4BC7-A0DB-F72E69E73869}"/>
               </a:ext>
             </a:extLst>
           </p:cNvPr>
@@ -13243,7 +13243,7 @@
           <p:cNvPr id="6" name="Slide Number Placeholder 5">
             <a:extLst xmlns:a="http://schemas.openxmlformats.org/drawingml/2006/main">
               <a:ext uri="{FF2B5EF4-FFF2-40B4-BE49-F238E27FC236}">
-                <a16:creationId xmlns:a16="http://schemas.microsoft.com/office/drawing/2014/main" id="{5F605257-C7F3-4AEC-9509-BCEEAF66C1C4}"/>
+                <a16:creationId xmlns:a16="http://schemas.microsoft.com/office/drawing/2014/main" id="{0DFF40B7-0A41-4B1A-871B-FD52B745BF83}"/>
               </a:ext>
             </a:extLst>
           </p:cNvPr>
@@ -13307,7 +13307,7 @@
           <p:cNvPr id="7" name="Footer Placeholder 6">
             <a:extLst xmlns:a="http://schemas.openxmlformats.org/drawingml/2006/main">
               <a:ext uri="{FF2B5EF4-FFF2-40B4-BE49-F238E27FC236}">
-                <a16:creationId xmlns:a16="http://schemas.microsoft.com/office/drawing/2014/main" id="{FC75FDE8-21D2-45D6-B9A0-95EA9F671938}"/>
+                <a16:creationId xmlns:a16="http://schemas.microsoft.com/office/drawing/2014/main" id="{5820371A-D465-48A3-9F3A-6C23ADED3388}"/>
               </a:ext>
             </a:extLst>
           </p:cNvPr>
@@ -13432,7 +13432,7 @@
           <p:nvPr/>
         </p:nvPicPr>
         <p:blipFill>
-          <a:blip xmlns:r="http://schemas.openxmlformats.org/officeDocument/2006/relationships" xmlns:a="http://schemas.openxmlformats.org/drawingml/2006/main" r:embed="R4031acba9e444982"/>
+          <a:blip xmlns:r="http://schemas.openxmlformats.org/officeDocument/2006/relationships" xmlns:a="http://schemas.openxmlformats.org/drawingml/2006/main" r:embed="R074ac28dc7ec4a3b"/>
           <a:stretch xmlns:a="http://schemas.openxmlformats.org/drawingml/2006/main">
             <a:fillRect l="0" t="0" r="0" b="0"/>
           </a:stretch>
@@ -13452,7 +13452,7 @@
           <p:cNvPr id="17412" name="">
             <a:extLst xmlns:a="http://schemas.openxmlformats.org/drawingml/2006/main">
               <a:ext uri="{FF2B5EF4-FFF2-40B4-BE49-F238E27FC236}">
-                <a16:creationId xmlns:a16="http://schemas.microsoft.com/office/drawing/2014/main" id="{00E51E6F-63F0-4935-8CEA-4668AB68D890}"/>
+                <a16:creationId xmlns:a16="http://schemas.microsoft.com/office/drawing/2014/main" id="{7365B1A2-E802-403E-AB80-59B2E3D3FC3D}"/>
               </a:ext>
             </a:extLst>
           </p:cNvPr>
@@ -13505,7 +13505,7 @@
           <p:cNvPr id="17413" name="">
             <a:extLst xmlns:a="http://schemas.openxmlformats.org/drawingml/2006/main">
               <a:ext uri="{FF2B5EF4-FFF2-40B4-BE49-F238E27FC236}">
-                <a16:creationId xmlns:a16="http://schemas.microsoft.com/office/drawing/2014/main" id="{23C6FC7B-F884-409F-A935-9CC3E56BB788}"/>
+                <a16:creationId xmlns:a16="http://schemas.microsoft.com/office/drawing/2014/main" id="{4F00FF33-D429-485E-896E-05DE7EDD9F6D}"/>
               </a:ext>
             </a:extLst>
           </p:cNvPr>
@@ -13540,7 +13540,7 @@
           <p:cNvPr id="17414" name="">
             <a:extLst xmlns:a="http://schemas.openxmlformats.org/drawingml/2006/main">
               <a:ext uri="{FF2B5EF4-FFF2-40B4-BE49-F238E27FC236}">
-                <a16:creationId xmlns:a16="http://schemas.microsoft.com/office/drawing/2014/main" id="{F6CDC308-F950-4BF5-8ACC-B922E6358211}"/>
+                <a16:creationId xmlns:a16="http://schemas.microsoft.com/office/drawing/2014/main" id="{BB2B7402-581E-47B8-AFDE-A3A93C22CFBF}"/>
               </a:ext>
             </a:extLst>
           </p:cNvPr>
@@ -13579,7 +13579,7 @@
           <p:cNvPr id="17415" name="">
             <a:extLst xmlns:a="http://schemas.openxmlformats.org/drawingml/2006/main">
               <a:ext uri="{FF2B5EF4-FFF2-40B4-BE49-F238E27FC236}">
-                <a16:creationId xmlns:a16="http://schemas.microsoft.com/office/drawing/2014/main" id="{EFD48DED-4C25-4912-A146-81AE942023B7}"/>
+                <a16:creationId xmlns:a16="http://schemas.microsoft.com/office/drawing/2014/main" id="{753DEC91-B83B-49CE-B081-F7B14E657BAE}"/>
               </a:ext>
             </a:extLst>
           </p:cNvPr>
@@ -13632,7 +13632,7 @@
           <p:cNvPr id="17416" name="">
             <a:extLst xmlns:a="http://schemas.openxmlformats.org/drawingml/2006/main">
               <a:ext uri="{FF2B5EF4-FFF2-40B4-BE49-F238E27FC236}">
-                <a16:creationId xmlns:a16="http://schemas.microsoft.com/office/drawing/2014/main" id="{4CB85F8D-2D63-4AA7-BB35-5233AA35C05C}"/>
+                <a16:creationId xmlns:a16="http://schemas.microsoft.com/office/drawing/2014/main" id="{EDD7C598-45A2-4471-9B1D-B3233FC700BD}"/>
               </a:ext>
             </a:extLst>
           </p:cNvPr>
@@ -13685,7 +13685,7 @@
           <p:cNvPr id="17417" name="">
             <a:extLst xmlns:a="http://schemas.openxmlformats.org/drawingml/2006/main">
               <a:ext uri="{FF2B5EF4-FFF2-40B4-BE49-F238E27FC236}">
-                <a16:creationId xmlns:a16="http://schemas.microsoft.com/office/drawing/2014/main" id="{417DBF61-E315-447E-B6D9-3D7BE2B1DBF4}"/>
+                <a16:creationId xmlns:a16="http://schemas.microsoft.com/office/drawing/2014/main" id="{E21CE6F5-7DD1-49F6-8525-C87B27AB3620}"/>
               </a:ext>
             </a:extLst>
           </p:cNvPr>
@@ -13738,7 +13738,7 @@
           <p:cNvPr id="17418" name="">
             <a:extLst xmlns:a="http://schemas.openxmlformats.org/drawingml/2006/main">
               <a:ext uri="{FF2B5EF4-FFF2-40B4-BE49-F238E27FC236}">
-                <a16:creationId xmlns:a16="http://schemas.microsoft.com/office/drawing/2014/main" id="{9E5B7883-E31D-4E51-9ECF-B85A459A5371}"/>
+                <a16:creationId xmlns:a16="http://schemas.microsoft.com/office/drawing/2014/main" id="{71864D79-7E18-4C5A-BC3F-D76F5F0E64DF}"/>
               </a:ext>
             </a:extLst>
           </p:cNvPr>
@@ -13777,7 +13777,7 @@
           <p:cNvPr id="17419" name="">
             <a:extLst xmlns:a="http://schemas.openxmlformats.org/drawingml/2006/main">
               <a:ext uri="{FF2B5EF4-FFF2-40B4-BE49-F238E27FC236}">
-                <a16:creationId xmlns:a16="http://schemas.microsoft.com/office/drawing/2014/main" id="{B80B6DB0-B69B-4E05-9942-8062AE4F81BA}"/>
+                <a16:creationId xmlns:a16="http://schemas.microsoft.com/office/drawing/2014/main" id="{00264DD8-AF3C-4F39-9790-A55D86DE7676}"/>
               </a:ext>
             </a:extLst>
           </p:cNvPr>
@@ -13830,7 +13830,7 @@
           <p:cNvPr id="17420" name="">
             <a:extLst xmlns:a="http://schemas.openxmlformats.org/drawingml/2006/main">
               <a:ext uri="{FF2B5EF4-FFF2-40B4-BE49-F238E27FC236}">
-                <a16:creationId xmlns:a16="http://schemas.microsoft.com/office/drawing/2014/main" id="{E8E6F09C-DBD7-4C6F-9A90-6EDDBD079B09}"/>
+                <a16:creationId xmlns:a16="http://schemas.microsoft.com/office/drawing/2014/main" id="{22F2C116-8F85-43B6-BC5D-05C0157B77A7}"/>
               </a:ext>
             </a:extLst>
           </p:cNvPr>
@@ -13883,7 +13883,7 @@
           <p:cNvPr id="17421" name="">
             <a:extLst xmlns:a="http://schemas.openxmlformats.org/drawingml/2006/main">
               <a:ext uri="{FF2B5EF4-FFF2-40B4-BE49-F238E27FC236}">
-                <a16:creationId xmlns:a16="http://schemas.microsoft.com/office/drawing/2014/main" id="{0FCA49E8-BA59-41B9-80E2-E21153DA7323}"/>
+                <a16:creationId xmlns:a16="http://schemas.microsoft.com/office/drawing/2014/main" id="{8B53A376-31BD-4561-8D7D-B732B08D4B02}"/>
               </a:ext>
             </a:extLst>
           </p:cNvPr>
@@ -13936,7 +13936,7 @@
           <p:cNvPr id="17422" name="">
             <a:extLst xmlns:a="http://schemas.openxmlformats.org/drawingml/2006/main">
               <a:ext uri="{FF2B5EF4-FFF2-40B4-BE49-F238E27FC236}">
-                <a16:creationId xmlns:a16="http://schemas.microsoft.com/office/drawing/2014/main" id="{E5A9A985-621E-4BFD-B8FE-88E10E454BB8}"/>
+                <a16:creationId xmlns:a16="http://schemas.microsoft.com/office/drawing/2014/main" id="{82AF9415-7938-4DD8-84DA-91E6F5FBC00A}"/>
               </a:ext>
             </a:extLst>
           </p:cNvPr>
@@ -13975,7 +13975,7 @@
           <p:cNvPr id="17423" name="">
             <a:extLst xmlns:a="http://schemas.openxmlformats.org/drawingml/2006/main">
               <a:ext uri="{FF2B5EF4-FFF2-40B4-BE49-F238E27FC236}">
-                <a16:creationId xmlns:a16="http://schemas.microsoft.com/office/drawing/2014/main" id="{F0225576-A512-4F94-A24C-6197118FB5DA}"/>
+                <a16:creationId xmlns:a16="http://schemas.microsoft.com/office/drawing/2014/main" id="{CB7191A2-49D4-4AA0-8B5C-DDCD9018C354}"/>
               </a:ext>
             </a:extLst>
           </p:cNvPr>
@@ -14028,7 +14028,7 @@
           <p:cNvPr id="17424" name="">
             <a:extLst xmlns:a="http://schemas.openxmlformats.org/drawingml/2006/main">
               <a:ext uri="{FF2B5EF4-FFF2-40B4-BE49-F238E27FC236}">
-                <a16:creationId xmlns:a16="http://schemas.microsoft.com/office/drawing/2014/main" id="{A18B3571-2F76-4A42-8E68-6934C9B7D9E5}"/>
+                <a16:creationId xmlns:a16="http://schemas.microsoft.com/office/drawing/2014/main" id="{DB4B7F31-3C64-439A-AE63-0CF86BD1C6B4}"/>
               </a:ext>
             </a:extLst>
           </p:cNvPr>
@@ -14081,7 +14081,7 @@
           <p:cNvPr id="17425" name="">
             <a:extLst xmlns:a="http://schemas.openxmlformats.org/drawingml/2006/main">
               <a:ext uri="{FF2B5EF4-FFF2-40B4-BE49-F238E27FC236}">
-                <a16:creationId xmlns:a16="http://schemas.microsoft.com/office/drawing/2014/main" id="{F7F709F4-418D-4757-B444-1F7212E3A925}"/>
+                <a16:creationId xmlns:a16="http://schemas.microsoft.com/office/drawing/2014/main" id="{AAFDF025-32F0-4ED4-B623-A1CC5E5AD986}"/>
               </a:ext>
             </a:extLst>
           </p:cNvPr>
@@ -14134,7 +14134,7 @@
           <p:cNvPr id="17426" name="">
             <a:extLst xmlns:a="http://schemas.openxmlformats.org/drawingml/2006/main">
               <a:ext uri="{FF2B5EF4-FFF2-40B4-BE49-F238E27FC236}">
-                <a16:creationId xmlns:a16="http://schemas.microsoft.com/office/drawing/2014/main" id="{C8C76224-41F2-48AC-B738-5CE144AB3FE8}"/>
+                <a16:creationId xmlns:a16="http://schemas.microsoft.com/office/drawing/2014/main" id="{0DF5CC19-AC8F-4279-BE60-9577FC2AF80B}"/>
               </a:ext>
             </a:extLst>
           </p:cNvPr>
@@ -14173,7 +14173,7 @@
           <p:cNvPr id="17427" name="">
             <a:extLst xmlns:a="http://schemas.openxmlformats.org/drawingml/2006/main">
               <a:ext uri="{FF2B5EF4-FFF2-40B4-BE49-F238E27FC236}">
-                <a16:creationId xmlns:a16="http://schemas.microsoft.com/office/drawing/2014/main" id="{2C78548E-1C27-4C73-96DB-9D859557C0EE}"/>
+                <a16:creationId xmlns:a16="http://schemas.microsoft.com/office/drawing/2014/main" id="{62A14768-2935-4724-86EF-BEFC5195E2D5}"/>
               </a:ext>
             </a:extLst>
           </p:cNvPr>
@@ -14226,7 +14226,7 @@
           <p:cNvPr id="17428" name="">
             <a:extLst xmlns:a="http://schemas.openxmlformats.org/drawingml/2006/main">
               <a:ext uri="{FF2B5EF4-FFF2-40B4-BE49-F238E27FC236}">
-                <a16:creationId xmlns:a16="http://schemas.microsoft.com/office/drawing/2014/main" id="{D92B2C7E-6C84-4A98-8D3B-60443960306E}"/>
+                <a16:creationId xmlns:a16="http://schemas.microsoft.com/office/drawing/2014/main" id="{054C37A3-B951-44B6-A7B8-1007A7A5657F}"/>
               </a:ext>
             </a:extLst>
           </p:cNvPr>
@@ -14279,7 +14279,7 @@
           <p:cNvPr id="17429" name="">
             <a:extLst xmlns:a="http://schemas.openxmlformats.org/drawingml/2006/main">
               <a:ext uri="{FF2B5EF4-FFF2-40B4-BE49-F238E27FC236}">
-                <a16:creationId xmlns:a16="http://schemas.microsoft.com/office/drawing/2014/main" id="{FD348395-BB55-440E-A8AC-C994B84ED1A8}"/>
+                <a16:creationId xmlns:a16="http://schemas.microsoft.com/office/drawing/2014/main" id="{67B63E6F-E595-46E9-9F7F-503E5FF5683F}"/>
               </a:ext>
             </a:extLst>
           </p:cNvPr>
@@ -14332,7 +14332,7 @@
           <p:cNvPr id="17430" name="">
             <a:extLst xmlns:a="http://schemas.openxmlformats.org/drawingml/2006/main">
               <a:ext uri="{FF2B5EF4-FFF2-40B4-BE49-F238E27FC236}">
-                <a16:creationId xmlns:a16="http://schemas.microsoft.com/office/drawing/2014/main" id="{5A34998E-E166-414E-92A0-CBAB1C238B5C}"/>
+                <a16:creationId xmlns:a16="http://schemas.microsoft.com/office/drawing/2014/main" id="{098ADEFA-C841-47D0-8864-7F87CC0ED59B}"/>
               </a:ext>
             </a:extLst>
           </p:cNvPr>
@@ -14371,7 +14371,7 @@
           <p:cNvPr id="17431" name="">
             <a:extLst xmlns:a="http://schemas.openxmlformats.org/drawingml/2006/main">
               <a:ext uri="{FF2B5EF4-FFF2-40B4-BE49-F238E27FC236}">
-                <a16:creationId xmlns:a16="http://schemas.microsoft.com/office/drawing/2014/main" id="{C5CA2E5F-D702-4346-B608-C142B39756F9}"/>
+                <a16:creationId xmlns:a16="http://schemas.microsoft.com/office/drawing/2014/main" id="{E73795D8-0316-43FB-9A95-F6308EAE0FCC}"/>
               </a:ext>
             </a:extLst>
           </p:cNvPr>
@@ -14424,7 +14424,7 @@
           <p:cNvPr id="17432" name="">
             <a:extLst xmlns:a="http://schemas.openxmlformats.org/drawingml/2006/main">
               <a:ext uri="{FF2B5EF4-FFF2-40B4-BE49-F238E27FC236}">
-                <a16:creationId xmlns:a16="http://schemas.microsoft.com/office/drawing/2014/main" id="{B49C4A09-F900-46B1-93DC-0F2D72DD303A}"/>
+                <a16:creationId xmlns:a16="http://schemas.microsoft.com/office/drawing/2014/main" id="{2061AD34-997C-4F34-A920-D15B97E56C17}"/>
               </a:ext>
             </a:extLst>
           </p:cNvPr>
@@ -14477,7 +14477,7 @@
           <p:cNvPr id="17433" name="">
             <a:extLst xmlns:a="http://schemas.openxmlformats.org/drawingml/2006/main">
               <a:ext uri="{FF2B5EF4-FFF2-40B4-BE49-F238E27FC236}">
-                <a16:creationId xmlns:a16="http://schemas.microsoft.com/office/drawing/2014/main" id="{199D4F4C-EA35-434E-B3D3-D6001B1384B8}"/>
+                <a16:creationId xmlns:a16="http://schemas.microsoft.com/office/drawing/2014/main" id="{D154E658-9781-4129-99B4-F25AA2C7079A}"/>
               </a:ext>
             </a:extLst>
           </p:cNvPr>
@@ -14530,7 +14530,7 @@
           <p:cNvPr id="17434" name="">
             <a:extLst xmlns:a="http://schemas.openxmlformats.org/drawingml/2006/main">
               <a:ext uri="{FF2B5EF4-FFF2-40B4-BE49-F238E27FC236}">
-                <a16:creationId xmlns:a16="http://schemas.microsoft.com/office/drawing/2014/main" id="{6E48D157-5A57-41F6-8424-BB6B293EA4A7}"/>
+                <a16:creationId xmlns:a16="http://schemas.microsoft.com/office/drawing/2014/main" id="{C727907A-F60C-445A-AAD5-22362135782D}"/>
               </a:ext>
             </a:extLst>
           </p:cNvPr>
@@ -14583,7 +14583,7 @@
           <p:cNvPr id="17435" name="">
             <a:extLst xmlns:a="http://schemas.openxmlformats.org/drawingml/2006/main">
               <a:ext uri="{FF2B5EF4-FFF2-40B4-BE49-F238E27FC236}">
-                <a16:creationId xmlns:a16="http://schemas.microsoft.com/office/drawing/2014/main" id="{EE95EDA3-B9A4-445F-8DAB-A9DA9B128FAE}"/>
+                <a16:creationId xmlns:a16="http://schemas.microsoft.com/office/drawing/2014/main" id="{C443CEBC-25D3-4A30-BBAB-8729344841CD}"/>
               </a:ext>
             </a:extLst>
           </p:cNvPr>
@@ -14618,7 +14618,7 @@
           <p:cNvPr id="17436" name="">
             <a:extLst xmlns:a="http://schemas.openxmlformats.org/drawingml/2006/main">
               <a:ext uri="{FF2B5EF4-FFF2-40B4-BE49-F238E27FC236}">
-                <a16:creationId xmlns:a16="http://schemas.microsoft.com/office/drawing/2014/main" id="{17D15497-85EE-4FCC-90F0-BCE2C464103A}"/>
+                <a16:creationId xmlns:a16="http://schemas.microsoft.com/office/drawing/2014/main" id="{0456A1F5-C6A9-455E-860C-7AD42A1B499E}"/>
               </a:ext>
             </a:extLst>
           </p:cNvPr>
@@ -14657,7 +14657,7 @@
           <p:cNvPr id="17437" name="">
             <a:extLst xmlns:a="http://schemas.openxmlformats.org/drawingml/2006/main">
               <a:ext uri="{FF2B5EF4-FFF2-40B4-BE49-F238E27FC236}">
-                <a16:creationId xmlns:a16="http://schemas.microsoft.com/office/drawing/2014/main" id="{BA4AF086-1399-40B2-AAF9-E64BAFA0A997}"/>
+                <a16:creationId xmlns:a16="http://schemas.microsoft.com/office/drawing/2014/main" id="{A5FD9B10-2254-4DB3-9008-E98F1CA2603B}"/>
               </a:ext>
             </a:extLst>
           </p:cNvPr>
@@ -14710,7 +14710,7 @@
           <p:cNvPr id="17438" name="">
             <a:extLst xmlns:a="http://schemas.openxmlformats.org/drawingml/2006/main">
               <a:ext uri="{FF2B5EF4-FFF2-40B4-BE49-F238E27FC236}">
-                <a16:creationId xmlns:a16="http://schemas.microsoft.com/office/drawing/2014/main" id="{87A8E4F9-DF6B-48E7-8D61-7FF09EF6D4F9}"/>
+                <a16:creationId xmlns:a16="http://schemas.microsoft.com/office/drawing/2014/main" id="{A66C7BC1-F609-4234-A5F1-C76CE1D4BA7C}"/>
               </a:ext>
             </a:extLst>
           </p:cNvPr>
@@ -14763,7 +14763,7 @@
           <p:cNvPr id="17439" name="">
             <a:extLst xmlns:a="http://schemas.openxmlformats.org/drawingml/2006/main">
               <a:ext uri="{FF2B5EF4-FFF2-40B4-BE49-F238E27FC236}">
-                <a16:creationId xmlns:a16="http://schemas.microsoft.com/office/drawing/2014/main" id="{1672378B-5CBA-447E-8C5D-80059D016D12}"/>
+                <a16:creationId xmlns:a16="http://schemas.microsoft.com/office/drawing/2014/main" id="{235F22A6-8675-40A6-968D-76F5FAEB4CD0}"/>
               </a:ext>
             </a:extLst>
           </p:cNvPr>
@@ -14816,7 +14816,7 @@
           <p:cNvPr id="17440" name="">
             <a:extLst xmlns:a="http://schemas.openxmlformats.org/drawingml/2006/main">
               <a:ext uri="{FF2B5EF4-FFF2-40B4-BE49-F238E27FC236}">
-                <a16:creationId xmlns:a16="http://schemas.microsoft.com/office/drawing/2014/main" id="{55770E02-E59F-4AC0-96D2-D084C7B8EF7D}"/>
+                <a16:creationId xmlns:a16="http://schemas.microsoft.com/office/drawing/2014/main" id="{C45FC526-D0A4-49A2-964A-707548BBCFCA}"/>
               </a:ext>
             </a:extLst>
           </p:cNvPr>
@@ -14855,7 +14855,7 @@
           <p:cNvPr id="17441" name="">
             <a:extLst xmlns:a="http://schemas.openxmlformats.org/drawingml/2006/main">
               <a:ext uri="{FF2B5EF4-FFF2-40B4-BE49-F238E27FC236}">
-                <a16:creationId xmlns:a16="http://schemas.microsoft.com/office/drawing/2014/main" id="{F017BBB9-F102-483A-9642-C9FC12BACF20}"/>
+                <a16:creationId xmlns:a16="http://schemas.microsoft.com/office/drawing/2014/main" id="{59ADE905-F26F-4B04-9839-681A8932FAAF}"/>
               </a:ext>
             </a:extLst>
           </p:cNvPr>
@@ -14908,7 +14908,7 @@
           <p:cNvPr id="17442" name="">
             <a:extLst xmlns:a="http://schemas.openxmlformats.org/drawingml/2006/main">
               <a:ext uri="{FF2B5EF4-FFF2-40B4-BE49-F238E27FC236}">
-                <a16:creationId xmlns:a16="http://schemas.microsoft.com/office/drawing/2014/main" id="{1AF5E9B7-1CF7-475C-B76C-2CD92AAC7467}"/>
+                <a16:creationId xmlns:a16="http://schemas.microsoft.com/office/drawing/2014/main" id="{58AE2441-D4E7-4BF0-821A-CF88DEE11AC1}"/>
               </a:ext>
             </a:extLst>
           </p:cNvPr>
@@ -14961,7 +14961,7 @@
           <p:cNvPr id="17443" name="">
             <a:extLst xmlns:a="http://schemas.openxmlformats.org/drawingml/2006/main">
               <a:ext uri="{FF2B5EF4-FFF2-40B4-BE49-F238E27FC236}">
-                <a16:creationId xmlns:a16="http://schemas.microsoft.com/office/drawing/2014/main" id="{D3A5771D-4831-47BD-8BB7-87C36F008DBE}"/>
+                <a16:creationId xmlns:a16="http://schemas.microsoft.com/office/drawing/2014/main" id="{F77DDCA4-4F59-4226-B5FF-508B0C492500}"/>
               </a:ext>
             </a:extLst>
           </p:cNvPr>
@@ -15014,7 +15014,7 @@
           <p:cNvPr id="17444" name="">
             <a:extLst xmlns:a="http://schemas.openxmlformats.org/drawingml/2006/main">
               <a:ext uri="{FF2B5EF4-FFF2-40B4-BE49-F238E27FC236}">
-                <a16:creationId xmlns:a16="http://schemas.microsoft.com/office/drawing/2014/main" id="{EBD0DEAF-DDAE-4CA2-928E-B033C6FAEA64}"/>
+                <a16:creationId xmlns:a16="http://schemas.microsoft.com/office/drawing/2014/main" id="{CF06693A-317F-4C2A-B364-70FEB2268B8B}"/>
               </a:ext>
             </a:extLst>
           </p:cNvPr>
@@ -15053,7 +15053,7 @@
           <p:cNvPr id="17445" name="">
             <a:extLst xmlns:a="http://schemas.openxmlformats.org/drawingml/2006/main">
               <a:ext uri="{FF2B5EF4-FFF2-40B4-BE49-F238E27FC236}">
-                <a16:creationId xmlns:a16="http://schemas.microsoft.com/office/drawing/2014/main" id="{CB4FC139-E51A-466E-B6C8-0ABD77D55B42}"/>
+                <a16:creationId xmlns:a16="http://schemas.microsoft.com/office/drawing/2014/main" id="{D364FBF4-36CB-4F82-98E7-7373CBA75E65}"/>
               </a:ext>
             </a:extLst>
           </p:cNvPr>
@@ -15106,7 +15106,7 @@
           <p:cNvPr id="17446" name="">
             <a:extLst xmlns:a="http://schemas.openxmlformats.org/drawingml/2006/main">
               <a:ext uri="{FF2B5EF4-FFF2-40B4-BE49-F238E27FC236}">
-                <a16:creationId xmlns:a16="http://schemas.microsoft.com/office/drawing/2014/main" id="{9E196D74-49B5-4D3C-8F0D-E79817ACA457}"/>
+                <a16:creationId xmlns:a16="http://schemas.microsoft.com/office/drawing/2014/main" id="{C7B15911-E538-45E7-B3FC-60E80FF31744}"/>
               </a:ext>
             </a:extLst>
           </p:cNvPr>
@@ -15159,7 +15159,7 @@
           <p:cNvPr id="17447" name="">
             <a:extLst xmlns:a="http://schemas.openxmlformats.org/drawingml/2006/main">
               <a:ext uri="{FF2B5EF4-FFF2-40B4-BE49-F238E27FC236}">
-                <a16:creationId xmlns:a16="http://schemas.microsoft.com/office/drawing/2014/main" id="{CC2C7F05-0A7A-4452-ABAF-CFCF71D61CE3}"/>
+                <a16:creationId xmlns:a16="http://schemas.microsoft.com/office/drawing/2014/main" id="{D993219B-6354-485B-87DE-1AEC2CF882CD}"/>
               </a:ext>
             </a:extLst>
           </p:cNvPr>
@@ -15198,7 +15198,7 @@
           <p:cNvPr id="17448" name="">
             <a:extLst xmlns:a="http://schemas.openxmlformats.org/drawingml/2006/main">
               <a:ext uri="{FF2B5EF4-FFF2-40B4-BE49-F238E27FC236}">
-                <a16:creationId xmlns:a16="http://schemas.microsoft.com/office/drawing/2014/main" id="{89887B69-47AA-4D71-950F-2094C4FF9E1D}"/>
+                <a16:creationId xmlns:a16="http://schemas.microsoft.com/office/drawing/2014/main" id="{124E169C-F289-447F-944A-2981AAA97525}"/>
               </a:ext>
             </a:extLst>
           </p:cNvPr>
@@ -15251,7 +15251,7 @@
           <p:cNvPr id="17449" name="">
             <a:extLst xmlns:a="http://schemas.openxmlformats.org/drawingml/2006/main">
               <a:ext uri="{FF2B5EF4-FFF2-40B4-BE49-F238E27FC236}">
-                <a16:creationId xmlns:a16="http://schemas.microsoft.com/office/drawing/2014/main" id="{B0E684DA-F1CC-404A-8496-ECFCAC384D7E}"/>
+                <a16:creationId xmlns:a16="http://schemas.microsoft.com/office/drawing/2014/main" id="{D64D85E1-0038-4FF1-BDBE-316C875C4087}"/>
               </a:ext>
             </a:extLst>
           </p:cNvPr>
@@ -15304,7 +15304,7 @@
           <p:cNvPr id="17450" name="">
             <a:extLst xmlns:a="http://schemas.openxmlformats.org/drawingml/2006/main">
               <a:ext uri="{FF2B5EF4-FFF2-40B4-BE49-F238E27FC236}">
-                <a16:creationId xmlns:a16="http://schemas.microsoft.com/office/drawing/2014/main" id="{EC4E1C01-E727-48F2-8F51-E5530F672485}"/>
+                <a16:creationId xmlns:a16="http://schemas.microsoft.com/office/drawing/2014/main" id="{39EB3EE0-AEEA-42B8-8585-406A824C4B3A}"/>
               </a:ext>
             </a:extLst>
           </p:cNvPr>
@@ -15343,7 +15343,7 @@
           <p:cNvPr id="17451" name="">
             <a:extLst xmlns:a="http://schemas.openxmlformats.org/drawingml/2006/main">
               <a:ext uri="{FF2B5EF4-FFF2-40B4-BE49-F238E27FC236}">
-                <a16:creationId xmlns:a16="http://schemas.microsoft.com/office/drawing/2014/main" id="{2D5B4AE8-AE53-4EB8-ADDC-E3E14560F778}"/>
+                <a16:creationId xmlns:a16="http://schemas.microsoft.com/office/drawing/2014/main" id="{B6E8113A-A51F-4F62-8097-DBE138CE0473}"/>
               </a:ext>
             </a:extLst>
           </p:cNvPr>
@@ -15396,7 +15396,7 @@
           <p:cNvPr id="17452" name="">
             <a:extLst xmlns:a="http://schemas.openxmlformats.org/drawingml/2006/main">
               <a:ext uri="{FF2B5EF4-FFF2-40B4-BE49-F238E27FC236}">
-                <a16:creationId xmlns:a16="http://schemas.microsoft.com/office/drawing/2014/main" id="{DAAFD37D-7770-4635-AA09-B1A8C390CC10}"/>
+                <a16:creationId xmlns:a16="http://schemas.microsoft.com/office/drawing/2014/main" id="{7ED835B5-218F-4467-9A40-824D83D289E0}"/>
               </a:ext>
             </a:extLst>
           </p:cNvPr>
@@ -15449,7 +15449,7 @@
           <p:cNvPr id="17453" name="">
             <a:extLst xmlns:a="http://schemas.openxmlformats.org/drawingml/2006/main">
               <a:ext uri="{FF2B5EF4-FFF2-40B4-BE49-F238E27FC236}">
-                <a16:creationId xmlns:a16="http://schemas.microsoft.com/office/drawing/2014/main" id="{4FC6F66D-8882-4571-AF74-235C43650118}"/>
+                <a16:creationId xmlns:a16="http://schemas.microsoft.com/office/drawing/2014/main" id="{D2360340-329A-4D21-86C8-49A7B01E3BF9}"/>
               </a:ext>
             </a:extLst>
           </p:cNvPr>
@@ -15502,7 +15502,7 @@
           <p:cNvPr id="17454" name="">
             <a:extLst xmlns:a="http://schemas.openxmlformats.org/drawingml/2006/main">
               <a:ext uri="{FF2B5EF4-FFF2-40B4-BE49-F238E27FC236}">
-                <a16:creationId xmlns:a16="http://schemas.microsoft.com/office/drawing/2014/main" id="{5CB2514F-0E01-49A2-A6BF-7CD50A04ED31}"/>
+                <a16:creationId xmlns:a16="http://schemas.microsoft.com/office/drawing/2014/main" id="{5AD20F6A-F5BE-4DAA-AD1C-57D3FD840468}"/>
               </a:ext>
             </a:extLst>
           </p:cNvPr>
@@ -15541,7 +15541,7 @@
           <p:cNvPr id="17455" name="">
             <a:extLst xmlns:a="http://schemas.openxmlformats.org/drawingml/2006/main">
               <a:ext uri="{FF2B5EF4-FFF2-40B4-BE49-F238E27FC236}">
-                <a16:creationId xmlns:a16="http://schemas.microsoft.com/office/drawing/2014/main" id="{EAB1388A-DA1B-41E6-B45A-7A0BF490FF8E}"/>
+                <a16:creationId xmlns:a16="http://schemas.microsoft.com/office/drawing/2014/main" id="{FF0E5F42-E897-40DF-B98F-3CE11D113A4B}"/>
               </a:ext>
             </a:extLst>
           </p:cNvPr>
@@ -15594,7 +15594,7 @@
           <p:cNvPr id="17456" name="">
             <a:extLst xmlns:a="http://schemas.openxmlformats.org/drawingml/2006/main">
               <a:ext uri="{FF2B5EF4-FFF2-40B4-BE49-F238E27FC236}">
-                <a16:creationId xmlns:a16="http://schemas.microsoft.com/office/drawing/2014/main" id="{34A4C831-6B72-49BD-B66E-1483C2770F02}"/>
+                <a16:creationId xmlns:a16="http://schemas.microsoft.com/office/drawing/2014/main" id="{388C05A0-572B-4A85-B45D-9EEC48B9FA61}"/>
               </a:ext>
             </a:extLst>
           </p:cNvPr>
@@ -15658,7 +15658,7 @@
           <p:cNvPr id="17457" name="">
             <a:extLst xmlns:a="http://schemas.openxmlformats.org/drawingml/2006/main">
               <a:ext uri="{FF2B5EF4-FFF2-40B4-BE49-F238E27FC236}">
-                <a16:creationId xmlns:a16="http://schemas.microsoft.com/office/drawing/2014/main" id="{A8378FD6-6A1A-4EAE-9570-2A2B75044A43}"/>
+                <a16:creationId xmlns:a16="http://schemas.microsoft.com/office/drawing/2014/main" id="{97C48AF5-279E-4DDF-BD30-023AF702596D}"/>
               </a:ext>
             </a:extLst>
           </p:cNvPr>
@@ -15722,7 +15722,7 @@
           <p:cNvPr id="17458" name="">
             <a:extLst xmlns:a="http://schemas.openxmlformats.org/drawingml/2006/main">
               <a:ext uri="{FF2B5EF4-FFF2-40B4-BE49-F238E27FC236}">
-                <a16:creationId xmlns:a16="http://schemas.microsoft.com/office/drawing/2014/main" id="{B13AE8CC-E20F-416B-8359-82504B4D92CB}"/>
+                <a16:creationId xmlns:a16="http://schemas.microsoft.com/office/drawing/2014/main" id="{09EE2E2F-9B6A-4818-A505-8D541E46E233}"/>
               </a:ext>
             </a:extLst>
           </p:cNvPr>
@@ -15786,7 +15786,7 @@
           <p:cNvPr id="17459" name="">
             <a:extLst xmlns:a="http://schemas.openxmlformats.org/drawingml/2006/main">
               <a:ext uri="{FF2B5EF4-FFF2-40B4-BE49-F238E27FC236}">
-                <a16:creationId xmlns:a16="http://schemas.microsoft.com/office/drawing/2014/main" id="{CA5A8A86-26BC-4FCF-AD0B-F9855A38D5FF}"/>
+                <a16:creationId xmlns:a16="http://schemas.microsoft.com/office/drawing/2014/main" id="{9DDE6DD0-04FF-4C9C-953B-D31DF3F68B93}"/>
               </a:ext>
             </a:extLst>
           </p:cNvPr>

--- a/deliverables/NAVIS_SIH2026_NamasteByte_FINAL.pptx
+++ b/deliverables/NAVIS_SIH2026_NamasteByte_FINAL.pptx
@@ -2,18 +2,18 @@
 <file path=ppt/presentation.xml><?xml version="1.0" encoding="utf-8"?>
 <p:presentation xmlns:p="http://schemas.openxmlformats.org/presentationml/2006/main">
   <p:sldMasterIdLst>
-    <p:sldMasterId xmlns:r="http://schemas.openxmlformats.org/officeDocument/2006/relationships" id="2147483648" r:id="Rc8da03cc165c4402"/>
+    <p:sldMasterId xmlns:r="http://schemas.openxmlformats.org/officeDocument/2006/relationships" id="2147483648" r:id="R0fab0f9857b14f9a"/>
   </p:sldMasterIdLst>
   <p:notesMasterIdLst>
-    <p:notesMasterId xmlns:r="http://schemas.openxmlformats.org/officeDocument/2006/relationships" r:id="R4e93ff1e9f49489c"/>
+    <p:notesMasterId xmlns:r="http://schemas.openxmlformats.org/officeDocument/2006/relationships" r:id="R8badbde4e62746c0"/>
   </p:notesMasterIdLst>
   <p:sldIdLst>
-    <p:sldId xmlns:r="http://schemas.openxmlformats.org/officeDocument/2006/relationships" id="256" r:id="Rf07e37acde2d4823"/>
-    <p:sldId xmlns:r="http://schemas.openxmlformats.org/officeDocument/2006/relationships" id="257" r:id="R64e0e34c726147ad"/>
-    <p:sldId xmlns:r="http://schemas.openxmlformats.org/officeDocument/2006/relationships" id="258" r:id="R02aad59003974a64"/>
-    <p:sldId xmlns:r="http://schemas.openxmlformats.org/officeDocument/2006/relationships" id="259" r:id="Rd3f1ada75a6d430e"/>
-    <p:sldId xmlns:r="http://schemas.openxmlformats.org/officeDocument/2006/relationships" id="260" r:id="R6e9322772c474d3c"/>
-    <p:sldId xmlns:r="http://schemas.openxmlformats.org/officeDocument/2006/relationships" id="261" r:id="R9b9432f817634bb8"/>
+    <p:sldId xmlns:r="http://schemas.openxmlformats.org/officeDocument/2006/relationships" id="256" r:id="Rf04376cfcb8445e3"/>
+    <p:sldId xmlns:r="http://schemas.openxmlformats.org/officeDocument/2006/relationships" id="257" r:id="R4ca175ec6f7e4aea"/>
+    <p:sldId xmlns:r="http://schemas.openxmlformats.org/officeDocument/2006/relationships" id="258" r:id="R8e46de5b8df644a6"/>
+    <p:sldId xmlns:r="http://schemas.openxmlformats.org/officeDocument/2006/relationships" id="259" r:id="R332b56fa756b459b"/>
+    <p:sldId xmlns:r="http://schemas.openxmlformats.org/officeDocument/2006/relationships" id="260" r:id="R11005f9df93d4df1"/>
+    <p:sldId xmlns:r="http://schemas.openxmlformats.org/officeDocument/2006/relationships" id="261" r:id="Rbc301b2c15424827"/>
   </p:sldIdLst>
   <p:sldSz cx="12192000" cy="6858000"/>
   <p:notesSz cx="6858000" cy="9144000"/>
@@ -686,7 +686,7 @@
               <a:buNone/>
             </a:pPr>
             <a:r>
-              <a:t>1,426 automated tests = 1,202 pytest plus 224 vitest, all passing on 10 September 2026.</a:t>
+              <a:t>1,431 automated tests = 1,202 pytest plus 229 vitest, all passing, re-counted on 10 September 2026 after the responsive-layout work (D-099).</a:t>
             </a:r>
             <a:endParaRPr/>
           </a:p>
@@ -1085,7 +1085,7 @@
           <p:cNvPr id="2" name="Title 1">
             <a:extLst xmlns:a="http://schemas.openxmlformats.org/drawingml/2006/main">
               <a:ext uri="{FF2B5EF4-FFF2-40B4-BE49-F238E27FC236}">
-                <a16:creationId xmlns:a16="http://schemas.microsoft.com/office/drawing/2014/main" id="{665A57F7-2F3C-4E1F-9502-E26C0E19C5BC}"/>
+                <a16:creationId xmlns:a16="http://schemas.microsoft.com/office/drawing/2014/main" id="{49765462-F42F-437F-960E-BBD03EFB73E2}"/>
               </a:ext>
             </a:extLst>
           </p:cNvPr>
@@ -1117,7 +1117,7 @@
           <p:cNvPr id="3" name="Subtitle 2">
             <a:extLst xmlns:a="http://schemas.openxmlformats.org/drawingml/2006/main">
               <a:ext uri="{FF2B5EF4-FFF2-40B4-BE49-F238E27FC236}">
-                <a16:creationId xmlns:a16="http://schemas.microsoft.com/office/drawing/2014/main" id="{0B552106-9163-4266-84CF-7EC5DFC3FDD9}"/>
+                <a16:creationId xmlns:a16="http://schemas.microsoft.com/office/drawing/2014/main" id="{41DFD6AC-469A-446E-9DE7-413B9F0CBAE4}"/>
               </a:ext>
             </a:extLst>
           </p:cNvPr>
@@ -1240,7 +1240,7 @@
           <p:cNvPr id="4" name="Date Placeholder 3">
             <a:extLst xmlns:a="http://schemas.openxmlformats.org/drawingml/2006/main">
               <a:ext uri="{FF2B5EF4-FFF2-40B4-BE49-F238E27FC236}">
-                <a16:creationId xmlns:a16="http://schemas.microsoft.com/office/drawing/2014/main" id="{12CE80B8-E245-4E98-BAB9-51FE225140D5}"/>
+                <a16:creationId xmlns:a16="http://schemas.microsoft.com/office/drawing/2014/main" id="{B7BC930F-D545-4895-B808-8B6F21FFCBE9}"/>
               </a:ext>
             </a:extLst>
           </p:cNvPr>
@@ -1273,7 +1273,7 @@
           <p:cNvPr id="5" name="Footer Placeholder 4">
             <a:extLst xmlns:a="http://schemas.openxmlformats.org/drawingml/2006/main">
               <a:ext uri="{FF2B5EF4-FFF2-40B4-BE49-F238E27FC236}">
-                <a16:creationId xmlns:a16="http://schemas.microsoft.com/office/drawing/2014/main" id="{1FCCA019-71C3-4C81-829A-ABBBECD51800}"/>
+                <a16:creationId xmlns:a16="http://schemas.microsoft.com/office/drawing/2014/main" id="{45308811-BA4C-415F-BB50-92CD86CE6273}"/>
               </a:ext>
             </a:extLst>
           </p:cNvPr>
@@ -1308,7 +1308,7 @@
           <p:cNvPr id="6" name="Slide Number Placeholder 5">
             <a:extLst xmlns:a="http://schemas.openxmlformats.org/drawingml/2006/main">
               <a:ext uri="{FF2B5EF4-FFF2-40B4-BE49-F238E27FC236}">
-                <a16:creationId xmlns:a16="http://schemas.microsoft.com/office/drawing/2014/main" id="{C094CE2A-C447-4CEB-990B-6BD5CFF7C140}"/>
+                <a16:creationId xmlns:a16="http://schemas.microsoft.com/office/drawing/2014/main" id="{DF4E98CB-28A8-4B4D-80F5-0C7D8658E5CE}"/>
               </a:ext>
             </a:extLst>
           </p:cNvPr>
@@ -1358,7 +1358,7 @@
           <p:cNvPr id="2" name="Title 1">
             <a:extLst xmlns:a="http://schemas.openxmlformats.org/drawingml/2006/main">
               <a:ext uri="{FF2B5EF4-FFF2-40B4-BE49-F238E27FC236}">
-                <a16:creationId xmlns:a16="http://schemas.microsoft.com/office/drawing/2014/main" id="{DED0B723-6342-43AE-8B77-E2939DCFA0A3}"/>
+                <a16:creationId xmlns:a16="http://schemas.microsoft.com/office/drawing/2014/main" id="{7B857687-4A57-4049-8CAB-C28E12ABC0B8}"/>
               </a:ext>
             </a:extLst>
           </p:cNvPr>
@@ -1385,7 +1385,7 @@
           <p:cNvPr id="3" name="Vertical Text Placeholder 2">
             <a:extLst xmlns:a="http://schemas.openxmlformats.org/drawingml/2006/main">
               <a:ext uri="{FF2B5EF4-FFF2-40B4-BE49-F238E27FC236}">
-                <a16:creationId xmlns:a16="http://schemas.microsoft.com/office/drawing/2014/main" id="{75207C3F-383F-436C-AB91-CC378099F3A3}"/>
+                <a16:creationId xmlns:a16="http://schemas.microsoft.com/office/drawing/2014/main" id="{3A2CA1CA-FFEB-4CA7-BA59-7E6C0145E5FB}"/>
               </a:ext>
             </a:extLst>
           </p:cNvPr>
@@ -1447,7 +1447,7 @@
           <p:cNvPr id="4" name="Date Placeholder 3">
             <a:extLst xmlns:a="http://schemas.openxmlformats.org/drawingml/2006/main">
               <a:ext uri="{FF2B5EF4-FFF2-40B4-BE49-F238E27FC236}">
-                <a16:creationId xmlns:a16="http://schemas.microsoft.com/office/drawing/2014/main" id="{49222054-F112-4322-A729-E3E31BDA17F8}"/>
+                <a16:creationId xmlns:a16="http://schemas.microsoft.com/office/drawing/2014/main" id="{9A885D0E-9E12-4A58-B0BA-AB2E60608F5C}"/>
               </a:ext>
             </a:extLst>
           </p:cNvPr>
@@ -1480,7 +1480,7 @@
           <p:cNvPr id="5" name="Footer Placeholder 4">
             <a:extLst xmlns:a="http://schemas.openxmlformats.org/drawingml/2006/main">
               <a:ext uri="{FF2B5EF4-FFF2-40B4-BE49-F238E27FC236}">
-                <a16:creationId xmlns:a16="http://schemas.microsoft.com/office/drawing/2014/main" id="{4E3F0C10-DFD4-44DF-B47D-0AB80518ACFE}"/>
+                <a16:creationId xmlns:a16="http://schemas.microsoft.com/office/drawing/2014/main" id="{0FCAAC47-226F-497B-975E-86FF3AD260FE}"/>
               </a:ext>
             </a:extLst>
           </p:cNvPr>
@@ -1515,7 +1515,7 @@
           <p:cNvPr id="6" name="Slide Number Placeholder 5">
             <a:extLst xmlns:a="http://schemas.openxmlformats.org/drawingml/2006/main">
               <a:ext uri="{FF2B5EF4-FFF2-40B4-BE49-F238E27FC236}">
-                <a16:creationId xmlns:a16="http://schemas.microsoft.com/office/drawing/2014/main" id="{17787786-7EB9-4BC1-B0A9-6A75EFDBFE0F}"/>
+                <a16:creationId xmlns:a16="http://schemas.microsoft.com/office/drawing/2014/main" id="{4F26C7F7-3DC7-4DE0-A182-8B2B54235CC3}"/>
               </a:ext>
             </a:extLst>
           </p:cNvPr>
@@ -1565,7 +1565,7 @@
           <p:cNvPr id="2" name="Vertical Title 1">
             <a:extLst xmlns:a="http://schemas.openxmlformats.org/drawingml/2006/main">
               <a:ext uri="{FF2B5EF4-FFF2-40B4-BE49-F238E27FC236}">
-                <a16:creationId xmlns:a16="http://schemas.microsoft.com/office/drawing/2014/main" id="{89608B2A-FE49-435D-98AB-3131D946C731}"/>
+                <a16:creationId xmlns:a16="http://schemas.microsoft.com/office/drawing/2014/main" id="{4BA4E0CD-D9E2-4739-A6D8-C2144D69204F}"/>
               </a:ext>
             </a:extLst>
           </p:cNvPr>
@@ -1597,7 +1597,7 @@
           <p:cNvPr id="3" name="Vertical Text Placeholder 2">
             <a:extLst xmlns:a="http://schemas.openxmlformats.org/drawingml/2006/main">
               <a:ext uri="{FF2B5EF4-FFF2-40B4-BE49-F238E27FC236}">
-                <a16:creationId xmlns:a16="http://schemas.microsoft.com/office/drawing/2014/main" id="{3CF61226-5FD5-4696-AB46-4B21E45538E1}"/>
+                <a16:creationId xmlns:a16="http://schemas.microsoft.com/office/drawing/2014/main" id="{66F34820-5517-4ECB-9EA1-EBF1208203E4}"/>
               </a:ext>
             </a:extLst>
           </p:cNvPr>
@@ -1664,7 +1664,7 @@
           <p:cNvPr id="4" name="Date Placeholder 3">
             <a:extLst xmlns:a="http://schemas.openxmlformats.org/drawingml/2006/main">
               <a:ext uri="{FF2B5EF4-FFF2-40B4-BE49-F238E27FC236}">
-                <a16:creationId xmlns:a16="http://schemas.microsoft.com/office/drawing/2014/main" id="{2E8C0530-C282-4AF4-87D8-F4CC7FF7C0E9}"/>
+                <a16:creationId xmlns:a16="http://schemas.microsoft.com/office/drawing/2014/main" id="{DB2A2FE2-EBC0-4470-B6EE-B00066010A61}"/>
               </a:ext>
             </a:extLst>
           </p:cNvPr>
@@ -1697,7 +1697,7 @@
           <p:cNvPr id="5" name="Footer Placeholder 4">
             <a:extLst xmlns:a="http://schemas.openxmlformats.org/drawingml/2006/main">
               <a:ext uri="{FF2B5EF4-FFF2-40B4-BE49-F238E27FC236}">
-                <a16:creationId xmlns:a16="http://schemas.microsoft.com/office/drawing/2014/main" id="{A10CA7BC-F9F8-4E6F-BC98-A910627E5F6E}"/>
+                <a16:creationId xmlns:a16="http://schemas.microsoft.com/office/drawing/2014/main" id="{8B60D6E0-6697-4F0C-BA8E-1E7AE4BAC009}"/>
               </a:ext>
             </a:extLst>
           </p:cNvPr>
@@ -1732,7 +1732,7 @@
           <p:cNvPr id="6" name="Slide Number Placeholder 5">
             <a:extLst xmlns:a="http://schemas.openxmlformats.org/drawingml/2006/main">
               <a:ext uri="{FF2B5EF4-FFF2-40B4-BE49-F238E27FC236}">
-                <a16:creationId xmlns:a16="http://schemas.microsoft.com/office/drawing/2014/main" id="{14F032DE-8734-4A4A-AFDC-A2582E61A467}"/>
+                <a16:creationId xmlns:a16="http://schemas.microsoft.com/office/drawing/2014/main" id="{124911BF-5FCE-41F4-B502-7FDDAD38A957}"/>
               </a:ext>
             </a:extLst>
           </p:cNvPr>
@@ -1782,7 +1782,7 @@
           <p:cNvPr id="2" name="Title 1">
             <a:extLst xmlns:a="http://schemas.openxmlformats.org/drawingml/2006/main">
               <a:ext uri="{FF2B5EF4-FFF2-40B4-BE49-F238E27FC236}">
-                <a16:creationId xmlns:a16="http://schemas.microsoft.com/office/drawing/2014/main" id="{493ADF57-9C78-4AF7-92B4-10AA5792A992}"/>
+                <a16:creationId xmlns:a16="http://schemas.microsoft.com/office/drawing/2014/main" id="{A6B84C8E-4932-4E1B-8EF4-19D2A9D459C1}"/>
               </a:ext>
             </a:extLst>
           </p:cNvPr>
@@ -1809,7 +1809,7 @@
           <p:cNvPr id="3" name="Content Placeholder 2">
             <a:extLst xmlns:a="http://schemas.openxmlformats.org/drawingml/2006/main">
               <a:ext uri="{FF2B5EF4-FFF2-40B4-BE49-F238E27FC236}">
-                <a16:creationId xmlns:a16="http://schemas.microsoft.com/office/drawing/2014/main" id="{C78B6F8E-678C-44C5-8D7D-2A0F147CD6EF}"/>
+                <a16:creationId xmlns:a16="http://schemas.microsoft.com/office/drawing/2014/main" id="{AEF13383-D797-4D10-A590-AA83B1178419}"/>
               </a:ext>
             </a:extLst>
           </p:cNvPr>
@@ -1871,7 +1871,7 @@
           <p:cNvPr id="4" name="Date Placeholder 3">
             <a:extLst xmlns:a="http://schemas.openxmlformats.org/drawingml/2006/main">
               <a:ext uri="{FF2B5EF4-FFF2-40B4-BE49-F238E27FC236}">
-                <a16:creationId xmlns:a16="http://schemas.microsoft.com/office/drawing/2014/main" id="{C7E2D76B-2825-4A72-90FC-27E215289A6B}"/>
+                <a16:creationId xmlns:a16="http://schemas.microsoft.com/office/drawing/2014/main" id="{72A4B765-AC03-45C6-8321-5070C4A6D7B0}"/>
               </a:ext>
             </a:extLst>
           </p:cNvPr>
@@ -1904,7 +1904,7 @@
           <p:cNvPr id="5" name="Footer Placeholder 4">
             <a:extLst xmlns:a="http://schemas.openxmlformats.org/drawingml/2006/main">
               <a:ext uri="{FF2B5EF4-FFF2-40B4-BE49-F238E27FC236}">
-                <a16:creationId xmlns:a16="http://schemas.microsoft.com/office/drawing/2014/main" id="{67F87384-11AC-4627-A5C9-37376F0DF1E1}"/>
+                <a16:creationId xmlns:a16="http://schemas.microsoft.com/office/drawing/2014/main" id="{F9958917-E428-47E8-A214-F40B780DE950}"/>
               </a:ext>
             </a:extLst>
           </p:cNvPr>
@@ -1939,7 +1939,7 @@
           <p:cNvPr id="6" name="Slide Number Placeholder 5">
             <a:extLst xmlns:a="http://schemas.openxmlformats.org/drawingml/2006/main">
               <a:ext uri="{FF2B5EF4-FFF2-40B4-BE49-F238E27FC236}">
-                <a16:creationId xmlns:a16="http://schemas.microsoft.com/office/drawing/2014/main" id="{71CF1668-6AD7-4B1E-8DD1-11F64CD0C590}"/>
+                <a16:creationId xmlns:a16="http://schemas.microsoft.com/office/drawing/2014/main" id="{D62A5A44-A369-49A0-A4A5-3824CD03D973}"/>
               </a:ext>
             </a:extLst>
           </p:cNvPr>
@@ -1989,7 +1989,7 @@
           <p:cNvPr id="2" name="Title 1">
             <a:extLst xmlns:a="http://schemas.openxmlformats.org/drawingml/2006/main">
               <a:ext uri="{FF2B5EF4-FFF2-40B4-BE49-F238E27FC236}">
-                <a16:creationId xmlns:a16="http://schemas.microsoft.com/office/drawing/2014/main" id="{64F1BE20-17C4-4B6E-B302-F171EA82B847}"/>
+                <a16:creationId xmlns:a16="http://schemas.microsoft.com/office/drawing/2014/main" id="{F9A0FED9-8670-490E-98C1-F557ECBB1A48}"/>
               </a:ext>
             </a:extLst>
           </p:cNvPr>
@@ -2026,7 +2026,7 @@
           <p:cNvPr id="3" name="Text Placeholder 2">
             <a:extLst xmlns:a="http://schemas.openxmlformats.org/drawingml/2006/main">
               <a:ext uri="{FF2B5EF4-FFF2-40B4-BE49-F238E27FC236}">
-                <a16:creationId xmlns:a16="http://schemas.microsoft.com/office/drawing/2014/main" id="{BD6CC9EC-AE89-477C-AFFE-84B2332B4733}"/>
+                <a16:creationId xmlns:a16="http://schemas.microsoft.com/office/drawing/2014/main" id="{D402718E-4660-4573-98F0-87450FC24B13}"/>
               </a:ext>
             </a:extLst>
           </p:cNvPr>
@@ -2152,7 +2152,7 @@
           <p:cNvPr id="4" name="Date Placeholder 3">
             <a:extLst xmlns:a="http://schemas.openxmlformats.org/drawingml/2006/main">
               <a:ext uri="{FF2B5EF4-FFF2-40B4-BE49-F238E27FC236}">
-                <a16:creationId xmlns:a16="http://schemas.microsoft.com/office/drawing/2014/main" id="{6AD2BD51-D4F5-4C1E-8BC2-E26BE3C23158}"/>
+                <a16:creationId xmlns:a16="http://schemas.microsoft.com/office/drawing/2014/main" id="{051727BA-5AC6-4A7B-9E56-41819F149AEE}"/>
               </a:ext>
             </a:extLst>
           </p:cNvPr>
@@ -2185,7 +2185,7 @@
           <p:cNvPr id="5" name="Footer Placeholder 4">
             <a:extLst xmlns:a="http://schemas.openxmlformats.org/drawingml/2006/main">
               <a:ext uri="{FF2B5EF4-FFF2-40B4-BE49-F238E27FC236}">
-                <a16:creationId xmlns:a16="http://schemas.microsoft.com/office/drawing/2014/main" id="{915E4F27-6B45-49F0-8162-12FBF292F519}"/>
+                <a16:creationId xmlns:a16="http://schemas.microsoft.com/office/drawing/2014/main" id="{10649E1B-F1C1-416C-84A6-1692F7D4FF9D}"/>
               </a:ext>
             </a:extLst>
           </p:cNvPr>
@@ -2220,7 +2220,7 @@
           <p:cNvPr id="6" name="Slide Number Placeholder 5">
             <a:extLst xmlns:a="http://schemas.openxmlformats.org/drawingml/2006/main">
               <a:ext uri="{FF2B5EF4-FFF2-40B4-BE49-F238E27FC236}">
-                <a16:creationId xmlns:a16="http://schemas.microsoft.com/office/drawing/2014/main" id="{DFDC99D7-A5F2-4C15-8255-61EC1BC3F939}"/>
+                <a16:creationId xmlns:a16="http://schemas.microsoft.com/office/drawing/2014/main" id="{2ED1ECF9-0697-46B5-B69E-09ADB5B0E3A0}"/>
               </a:ext>
             </a:extLst>
           </p:cNvPr>
@@ -2270,7 +2270,7 @@
           <p:cNvPr id="2" name="Title 1">
             <a:extLst xmlns:a="http://schemas.openxmlformats.org/drawingml/2006/main">
               <a:ext uri="{FF2B5EF4-FFF2-40B4-BE49-F238E27FC236}">
-                <a16:creationId xmlns:a16="http://schemas.microsoft.com/office/drawing/2014/main" id="{F0DB8BEE-0185-462D-A2B7-FD9F31D2E246}"/>
+                <a16:creationId xmlns:a16="http://schemas.microsoft.com/office/drawing/2014/main" id="{47F4D890-60CA-4201-950D-777A63BD3DFB}"/>
               </a:ext>
             </a:extLst>
           </p:cNvPr>
@@ -2297,7 +2297,7 @@
           <p:cNvPr id="3" name="Content Placeholder 2">
             <a:extLst xmlns:a="http://schemas.openxmlformats.org/drawingml/2006/main">
               <a:ext uri="{FF2B5EF4-FFF2-40B4-BE49-F238E27FC236}">
-                <a16:creationId xmlns:a16="http://schemas.microsoft.com/office/drawing/2014/main" id="{AA25776A-0CE1-4DF1-8963-F300830ED6F9}"/>
+                <a16:creationId xmlns:a16="http://schemas.microsoft.com/office/drawing/2014/main" id="{7CD6C2A0-DE29-47F8-B316-5BA909DC2EA6}"/>
               </a:ext>
             </a:extLst>
           </p:cNvPr>
@@ -2401,7 +2401,7 @@
           <p:cNvPr id="4" name="Content Placeholder 3">
             <a:extLst xmlns:a="http://schemas.openxmlformats.org/drawingml/2006/main">
               <a:ext uri="{FF2B5EF4-FFF2-40B4-BE49-F238E27FC236}">
-                <a16:creationId xmlns:a16="http://schemas.microsoft.com/office/drawing/2014/main" id="{3A48E1C1-BE36-4EB1-BB35-9A64AA41D1CE}"/>
+                <a16:creationId xmlns:a16="http://schemas.microsoft.com/office/drawing/2014/main" id="{142EB3E4-1C6F-491D-9D38-3CCFC1640631}"/>
               </a:ext>
             </a:extLst>
           </p:cNvPr>
@@ -2505,7 +2505,7 @@
           <p:cNvPr id="5" name="Date Placeholder 3">
             <a:extLst xmlns:a="http://schemas.openxmlformats.org/drawingml/2006/main">
               <a:ext uri="{FF2B5EF4-FFF2-40B4-BE49-F238E27FC236}">
-                <a16:creationId xmlns:a16="http://schemas.microsoft.com/office/drawing/2014/main" id="{A8055AB9-A4F8-4641-8786-A9DFEFB6BD7B}"/>
+                <a16:creationId xmlns:a16="http://schemas.microsoft.com/office/drawing/2014/main" id="{4805562B-5026-40B4-8F2A-5BCE4B05DB3A}"/>
               </a:ext>
             </a:extLst>
           </p:cNvPr>
@@ -2538,7 +2538,7 @@
           <p:cNvPr id="6" name="Footer Placeholder 4">
             <a:extLst xmlns:a="http://schemas.openxmlformats.org/drawingml/2006/main">
               <a:ext uri="{FF2B5EF4-FFF2-40B4-BE49-F238E27FC236}">
-                <a16:creationId xmlns:a16="http://schemas.microsoft.com/office/drawing/2014/main" id="{BE5C57E1-9FE6-4B15-AF4D-BF999764DDB9}"/>
+                <a16:creationId xmlns:a16="http://schemas.microsoft.com/office/drawing/2014/main" id="{D3597200-345B-4C8B-8D39-D92F355ABA28}"/>
               </a:ext>
             </a:extLst>
           </p:cNvPr>
@@ -2573,7 +2573,7 @@
           <p:cNvPr id="7" name="Slide Number Placeholder 5">
             <a:extLst xmlns:a="http://schemas.openxmlformats.org/drawingml/2006/main">
               <a:ext uri="{FF2B5EF4-FFF2-40B4-BE49-F238E27FC236}">
-                <a16:creationId xmlns:a16="http://schemas.microsoft.com/office/drawing/2014/main" id="{738A833E-F980-4EC0-B70A-EFCB84179F5B}"/>
+                <a16:creationId xmlns:a16="http://schemas.microsoft.com/office/drawing/2014/main" id="{27EDE383-AC7B-4084-988F-90E94B5DE586}"/>
               </a:ext>
             </a:extLst>
           </p:cNvPr>
@@ -2623,7 +2623,7 @@
           <p:cNvPr id="2" name="Title 1">
             <a:extLst xmlns:a="http://schemas.openxmlformats.org/drawingml/2006/main">
               <a:ext uri="{FF2B5EF4-FFF2-40B4-BE49-F238E27FC236}">
-                <a16:creationId xmlns:a16="http://schemas.microsoft.com/office/drawing/2014/main" id="{8AB2542B-27EF-47AB-B68F-157AD3A9D729}"/>
+                <a16:creationId xmlns:a16="http://schemas.microsoft.com/office/drawing/2014/main" id="{78913EDA-85F6-430A-BAD9-E2768147EBD0}"/>
               </a:ext>
             </a:extLst>
           </p:cNvPr>
@@ -2655,7 +2655,7 @@
           <p:cNvPr id="3" name="Text Placeholder 2">
             <a:extLst xmlns:a="http://schemas.openxmlformats.org/drawingml/2006/main">
               <a:ext uri="{FF2B5EF4-FFF2-40B4-BE49-F238E27FC236}">
-                <a16:creationId xmlns:a16="http://schemas.microsoft.com/office/drawing/2014/main" id="{F921CDC8-2AA7-4253-85B6-643B936D142E}"/>
+                <a16:creationId xmlns:a16="http://schemas.microsoft.com/office/drawing/2014/main" id="{E9E3E3C9-2D38-4110-A261-ACCE235602F9}"/>
               </a:ext>
             </a:extLst>
           </p:cNvPr>
@@ -2727,7 +2727,7 @@
           <p:cNvPr id="4" name="Content Placeholder 3">
             <a:extLst xmlns:a="http://schemas.openxmlformats.org/drawingml/2006/main">
               <a:ext uri="{FF2B5EF4-FFF2-40B4-BE49-F238E27FC236}">
-                <a16:creationId xmlns:a16="http://schemas.microsoft.com/office/drawing/2014/main" id="{CA772C36-CBB0-403F-8728-398EAE7B25FA}"/>
+                <a16:creationId xmlns:a16="http://schemas.microsoft.com/office/drawing/2014/main" id="{E1D4187F-F1A8-479C-BF4E-13CD0B88C716}"/>
               </a:ext>
             </a:extLst>
           </p:cNvPr>
@@ -2831,7 +2831,7 @@
           <p:cNvPr id="5" name="Text Placeholder 4">
             <a:extLst xmlns:a="http://schemas.openxmlformats.org/drawingml/2006/main">
               <a:ext uri="{FF2B5EF4-FFF2-40B4-BE49-F238E27FC236}">
-                <a16:creationId xmlns:a16="http://schemas.microsoft.com/office/drawing/2014/main" id="{DA0D9EE9-01AB-44EA-BC59-F3504B374E90}"/>
+                <a16:creationId xmlns:a16="http://schemas.microsoft.com/office/drawing/2014/main" id="{661C2E89-4CBC-4E7A-A25A-E46AAA50EBC8}"/>
               </a:ext>
             </a:extLst>
           </p:cNvPr>
@@ -2903,7 +2903,7 @@
           <p:cNvPr id="6" name="Content Placeholder 5">
             <a:extLst xmlns:a="http://schemas.openxmlformats.org/drawingml/2006/main">
               <a:ext uri="{FF2B5EF4-FFF2-40B4-BE49-F238E27FC236}">
-                <a16:creationId xmlns:a16="http://schemas.microsoft.com/office/drawing/2014/main" id="{34CAF7DA-A12F-4293-A303-681826165815}"/>
+                <a16:creationId xmlns:a16="http://schemas.microsoft.com/office/drawing/2014/main" id="{DCCED9DF-58FD-4403-A7D1-B7324E1ED770}"/>
               </a:ext>
             </a:extLst>
           </p:cNvPr>
@@ -3007,7 +3007,7 @@
           <p:cNvPr id="7" name="Date Placeholder 3">
             <a:extLst xmlns:a="http://schemas.openxmlformats.org/drawingml/2006/main">
               <a:ext uri="{FF2B5EF4-FFF2-40B4-BE49-F238E27FC236}">
-                <a16:creationId xmlns:a16="http://schemas.microsoft.com/office/drawing/2014/main" id="{FD395D2B-ABA6-4DBB-83EF-1DA32C8AAF6D}"/>
+                <a16:creationId xmlns:a16="http://schemas.microsoft.com/office/drawing/2014/main" id="{CB07D824-0608-44D6-999E-276B195D8BF8}"/>
               </a:ext>
             </a:extLst>
           </p:cNvPr>
@@ -3040,7 +3040,7 @@
           <p:cNvPr id="8" name="Footer Placeholder 4">
             <a:extLst xmlns:a="http://schemas.openxmlformats.org/drawingml/2006/main">
               <a:ext uri="{FF2B5EF4-FFF2-40B4-BE49-F238E27FC236}">
-                <a16:creationId xmlns:a16="http://schemas.microsoft.com/office/drawing/2014/main" id="{213E3A1C-C4DC-4C55-9E25-86A0A31C6860}"/>
+                <a16:creationId xmlns:a16="http://schemas.microsoft.com/office/drawing/2014/main" id="{C3433FBE-B712-449E-A6DB-4076C2CB92D5}"/>
               </a:ext>
             </a:extLst>
           </p:cNvPr>
@@ -3075,7 +3075,7 @@
           <p:cNvPr id="9" name="Slide Number Placeholder 5">
             <a:extLst xmlns:a="http://schemas.openxmlformats.org/drawingml/2006/main">
               <a:ext uri="{FF2B5EF4-FFF2-40B4-BE49-F238E27FC236}">
-                <a16:creationId xmlns:a16="http://schemas.microsoft.com/office/drawing/2014/main" id="{A23D6E63-30FB-4478-9A65-ABD8D3703DCE}"/>
+                <a16:creationId xmlns:a16="http://schemas.microsoft.com/office/drawing/2014/main" id="{085F13E3-FBE4-451E-B6E7-E68C6BF2C351}"/>
               </a:ext>
             </a:extLst>
           </p:cNvPr>
@@ -3125,7 +3125,7 @@
           <p:cNvPr id="2" name="Title 1">
             <a:extLst xmlns:a="http://schemas.openxmlformats.org/drawingml/2006/main">
               <a:ext uri="{FF2B5EF4-FFF2-40B4-BE49-F238E27FC236}">
-                <a16:creationId xmlns:a16="http://schemas.microsoft.com/office/drawing/2014/main" id="{2E403004-510C-42CA-8911-36429D98380E}"/>
+                <a16:creationId xmlns:a16="http://schemas.microsoft.com/office/drawing/2014/main" id="{27D844D1-140A-4536-9444-556DADBC15A4}"/>
               </a:ext>
             </a:extLst>
           </p:cNvPr>
@@ -3152,7 +3152,7 @@
           <p:cNvPr id="3" name="Date Placeholder 3">
             <a:extLst xmlns:a="http://schemas.openxmlformats.org/drawingml/2006/main">
               <a:ext uri="{FF2B5EF4-FFF2-40B4-BE49-F238E27FC236}">
-                <a16:creationId xmlns:a16="http://schemas.microsoft.com/office/drawing/2014/main" id="{3547E4A9-6F88-424B-A2CD-35769C1757D3}"/>
+                <a16:creationId xmlns:a16="http://schemas.microsoft.com/office/drawing/2014/main" id="{A6F31A1B-5E52-44A0-92FA-81F333AC704B}"/>
               </a:ext>
             </a:extLst>
           </p:cNvPr>
@@ -3185,7 +3185,7 @@
           <p:cNvPr id="4" name="Footer Placeholder 4">
             <a:extLst xmlns:a="http://schemas.openxmlformats.org/drawingml/2006/main">
               <a:ext uri="{FF2B5EF4-FFF2-40B4-BE49-F238E27FC236}">
-                <a16:creationId xmlns:a16="http://schemas.microsoft.com/office/drawing/2014/main" id="{DCD558B4-2A3D-4286-9A6D-2ABDFA855896}"/>
+                <a16:creationId xmlns:a16="http://schemas.microsoft.com/office/drawing/2014/main" id="{6BB1E217-CCAF-4AF9-A965-46DF8299707D}"/>
               </a:ext>
             </a:extLst>
           </p:cNvPr>
@@ -3220,7 +3220,7 @@
           <p:cNvPr id="5" name="Slide Number Placeholder 5">
             <a:extLst xmlns:a="http://schemas.openxmlformats.org/drawingml/2006/main">
               <a:ext uri="{FF2B5EF4-FFF2-40B4-BE49-F238E27FC236}">
-                <a16:creationId xmlns:a16="http://schemas.microsoft.com/office/drawing/2014/main" id="{1B044A29-855A-4968-9685-08908A1AA58B}"/>
+                <a16:creationId xmlns:a16="http://schemas.microsoft.com/office/drawing/2014/main" id="{C3EF53F2-68D9-4106-91EB-A9511AA65865}"/>
               </a:ext>
             </a:extLst>
           </p:cNvPr>
@@ -3270,7 +3270,7 @@
           <p:cNvPr id="2" name="Date Placeholder 3">
             <a:extLst xmlns:a="http://schemas.openxmlformats.org/drawingml/2006/main">
               <a:ext uri="{FF2B5EF4-FFF2-40B4-BE49-F238E27FC236}">
-                <a16:creationId xmlns:a16="http://schemas.microsoft.com/office/drawing/2014/main" id="{CC372B67-8BE5-4C5C-93BE-C75EA25BA628}"/>
+                <a16:creationId xmlns:a16="http://schemas.microsoft.com/office/drawing/2014/main" id="{FF098B76-218D-408B-AB69-AD435DD0B573}"/>
               </a:ext>
             </a:extLst>
           </p:cNvPr>
@@ -3303,7 +3303,7 @@
           <p:cNvPr id="3" name="Footer Placeholder 4">
             <a:extLst xmlns:a="http://schemas.openxmlformats.org/drawingml/2006/main">
               <a:ext uri="{FF2B5EF4-FFF2-40B4-BE49-F238E27FC236}">
-                <a16:creationId xmlns:a16="http://schemas.microsoft.com/office/drawing/2014/main" id="{38469BED-57FF-4F20-927D-D80C082A334A}"/>
+                <a16:creationId xmlns:a16="http://schemas.microsoft.com/office/drawing/2014/main" id="{89E17B95-652D-467D-8151-10B1D55EAC25}"/>
               </a:ext>
             </a:extLst>
           </p:cNvPr>
@@ -3338,7 +3338,7 @@
           <p:cNvPr id="4" name="Slide Number Placeholder 5">
             <a:extLst xmlns:a="http://schemas.openxmlformats.org/drawingml/2006/main">
               <a:ext uri="{FF2B5EF4-FFF2-40B4-BE49-F238E27FC236}">
-                <a16:creationId xmlns:a16="http://schemas.microsoft.com/office/drawing/2014/main" id="{D13FD650-926F-44F4-AB85-AE6E8054DA99}"/>
+                <a16:creationId xmlns:a16="http://schemas.microsoft.com/office/drawing/2014/main" id="{BAAC13C4-9C42-4599-8067-E1E0E30DC3EC}"/>
               </a:ext>
             </a:extLst>
           </p:cNvPr>
@@ -3388,7 +3388,7 @@
           <p:cNvPr id="2" name="Title 1">
             <a:extLst xmlns:a="http://schemas.openxmlformats.org/drawingml/2006/main">
               <a:ext uri="{FF2B5EF4-FFF2-40B4-BE49-F238E27FC236}">
-                <a16:creationId xmlns:a16="http://schemas.microsoft.com/office/drawing/2014/main" id="{5EC4CDF0-304C-4DEC-8812-5DD4294E8C22}"/>
+                <a16:creationId xmlns:a16="http://schemas.microsoft.com/office/drawing/2014/main" id="{1C9EDFFF-8B8C-430C-8320-08096618BE85}"/>
               </a:ext>
             </a:extLst>
           </p:cNvPr>
@@ -3425,7 +3425,7 @@
           <p:cNvPr id="3" name="Content Placeholder 2">
             <a:extLst xmlns:a="http://schemas.openxmlformats.org/drawingml/2006/main">
               <a:ext uri="{FF2B5EF4-FFF2-40B4-BE49-F238E27FC236}">
-                <a16:creationId xmlns:a16="http://schemas.microsoft.com/office/drawing/2014/main" id="{C4E92FEE-D5DB-413E-8BE7-A9E3C9D121B6}"/>
+                <a16:creationId xmlns:a16="http://schemas.microsoft.com/office/drawing/2014/main" id="{1E3AEE5B-3989-4AC6-983E-E0111CDEE564}"/>
               </a:ext>
             </a:extLst>
           </p:cNvPr>
@@ -3529,7 +3529,7 @@
           <p:cNvPr id="4" name="Text Placeholder 3">
             <a:extLst xmlns:a="http://schemas.openxmlformats.org/drawingml/2006/main">
               <a:ext uri="{FF2B5EF4-FFF2-40B4-BE49-F238E27FC236}">
-                <a16:creationId xmlns:a16="http://schemas.microsoft.com/office/drawing/2014/main" id="{D86E44DD-BB20-4E14-9CA1-C602B367A4A4}"/>
+                <a16:creationId xmlns:a16="http://schemas.microsoft.com/office/drawing/2014/main" id="{A116901A-428C-48D5-9FBB-3010D7149F88}"/>
               </a:ext>
             </a:extLst>
           </p:cNvPr>
@@ -3601,7 +3601,7 @@
           <p:cNvPr id="5" name="Date Placeholder 3">
             <a:extLst xmlns:a="http://schemas.openxmlformats.org/drawingml/2006/main">
               <a:ext uri="{FF2B5EF4-FFF2-40B4-BE49-F238E27FC236}">
-                <a16:creationId xmlns:a16="http://schemas.microsoft.com/office/drawing/2014/main" id="{BA350F23-65E2-4B10-8957-BB7BEEC19ECE}"/>
+                <a16:creationId xmlns:a16="http://schemas.microsoft.com/office/drawing/2014/main" id="{E18155AB-44EC-464D-83B9-3F42F6AE1265}"/>
               </a:ext>
             </a:extLst>
           </p:cNvPr>
@@ -3634,7 +3634,7 @@
           <p:cNvPr id="6" name="Footer Placeholder 4">
             <a:extLst xmlns:a="http://schemas.openxmlformats.org/drawingml/2006/main">
               <a:ext uri="{FF2B5EF4-FFF2-40B4-BE49-F238E27FC236}">
-                <a16:creationId xmlns:a16="http://schemas.microsoft.com/office/drawing/2014/main" id="{1078948C-8816-4BA1-9227-75B0D35D7101}"/>
+                <a16:creationId xmlns:a16="http://schemas.microsoft.com/office/drawing/2014/main" id="{DF43600A-8201-491D-94B8-4DE1EE2744BD}"/>
               </a:ext>
             </a:extLst>
           </p:cNvPr>
@@ -3669,7 +3669,7 @@
           <p:cNvPr id="7" name="Slide Number Placeholder 5">
             <a:extLst xmlns:a="http://schemas.openxmlformats.org/drawingml/2006/main">
               <a:ext uri="{FF2B5EF4-FFF2-40B4-BE49-F238E27FC236}">
-                <a16:creationId xmlns:a16="http://schemas.microsoft.com/office/drawing/2014/main" id="{71C86ABD-2FEE-48CD-8291-44B2E2122E2A}"/>
+                <a16:creationId xmlns:a16="http://schemas.microsoft.com/office/drawing/2014/main" id="{4A29B597-B413-4CE9-9EFE-3CA6E22B635E}"/>
               </a:ext>
             </a:extLst>
           </p:cNvPr>
@@ -3719,7 +3719,7 @@
           <p:cNvPr id="2" name="Title 1">
             <a:extLst xmlns:a="http://schemas.openxmlformats.org/drawingml/2006/main">
               <a:ext uri="{FF2B5EF4-FFF2-40B4-BE49-F238E27FC236}">
-                <a16:creationId xmlns:a16="http://schemas.microsoft.com/office/drawing/2014/main" id="{3478F2B2-EB7B-420E-B5CE-4C158D475060}"/>
+                <a16:creationId xmlns:a16="http://schemas.microsoft.com/office/drawing/2014/main" id="{E4749B49-D823-4F86-9F0C-D660CB94EF0A}"/>
               </a:ext>
             </a:extLst>
           </p:cNvPr>
@@ -3756,7 +3756,7 @@
           <p:cNvPr id="3" name="Picture Placeholder 2">
             <a:extLst xmlns:a="http://schemas.openxmlformats.org/drawingml/2006/main">
               <a:ext uri="{FF2B5EF4-FFF2-40B4-BE49-F238E27FC236}">
-                <a16:creationId xmlns:a16="http://schemas.microsoft.com/office/drawing/2014/main" id="{6363EE99-7495-4345-B6CF-60DC73163D41}"/>
+                <a16:creationId xmlns:a16="http://schemas.microsoft.com/office/drawing/2014/main" id="{CEF1E88D-0B1C-4E5C-9C9A-6789518BBDBA}"/>
               </a:ext>
             </a:extLst>
           </p:cNvPr>
@@ -3828,7 +3828,7 @@
           <p:cNvPr id="4" name="Text Placeholder 3">
             <a:extLst xmlns:a="http://schemas.openxmlformats.org/drawingml/2006/main">
               <a:ext uri="{FF2B5EF4-FFF2-40B4-BE49-F238E27FC236}">
-                <a16:creationId xmlns:a16="http://schemas.microsoft.com/office/drawing/2014/main" id="{34B68A0A-66C0-47C2-91FC-7A20A7330283}"/>
+                <a16:creationId xmlns:a16="http://schemas.microsoft.com/office/drawing/2014/main" id="{67795461-552A-40B7-8FE0-619FA1A89D15}"/>
               </a:ext>
             </a:extLst>
           </p:cNvPr>
@@ -3900,7 +3900,7 @@
           <p:cNvPr id="5" name="Date Placeholder 3">
             <a:extLst xmlns:a="http://schemas.openxmlformats.org/drawingml/2006/main">
               <a:ext uri="{FF2B5EF4-FFF2-40B4-BE49-F238E27FC236}">
-                <a16:creationId xmlns:a16="http://schemas.microsoft.com/office/drawing/2014/main" id="{4A5E5006-AB50-4AE5-B69A-48DD171B3D91}"/>
+                <a16:creationId xmlns:a16="http://schemas.microsoft.com/office/drawing/2014/main" id="{C81EE974-0830-4C8D-9090-90F5B56B79F2}"/>
               </a:ext>
             </a:extLst>
           </p:cNvPr>
@@ -3933,7 +3933,7 @@
           <p:cNvPr id="6" name="Footer Placeholder 4">
             <a:extLst xmlns:a="http://schemas.openxmlformats.org/drawingml/2006/main">
               <a:ext uri="{FF2B5EF4-FFF2-40B4-BE49-F238E27FC236}">
-                <a16:creationId xmlns:a16="http://schemas.microsoft.com/office/drawing/2014/main" id="{EECAEE6A-597C-4D70-A998-64AD5B9535EA}"/>
+                <a16:creationId xmlns:a16="http://schemas.microsoft.com/office/drawing/2014/main" id="{57192DA0-A38A-484E-B315-611F1B9F9DB1}"/>
               </a:ext>
             </a:extLst>
           </p:cNvPr>
@@ -3968,7 +3968,7 @@
           <p:cNvPr id="7" name="Slide Number Placeholder 5">
             <a:extLst xmlns:a="http://schemas.openxmlformats.org/drawingml/2006/main">
               <a:ext uri="{FF2B5EF4-FFF2-40B4-BE49-F238E27FC236}">
-                <a16:creationId xmlns:a16="http://schemas.microsoft.com/office/drawing/2014/main" id="{EA5991D2-E18E-47E4-BF42-4CF30D414BBD}"/>
+                <a16:creationId xmlns:a16="http://schemas.microsoft.com/office/drawing/2014/main" id="{6542A57E-AB64-487A-9A13-0ED4C5E5F30C}"/>
               </a:ext>
             </a:extLst>
           </p:cNvPr>
@@ -4023,7 +4023,7 @@
           <p:cNvPr id="1026" name="Title Placeholder 1">
             <a:extLst xmlns:a="http://schemas.openxmlformats.org/drawingml/2006/main">
               <a:ext uri="{FF2B5EF4-FFF2-40B4-BE49-F238E27FC236}">
-                <a16:creationId xmlns:a16="http://schemas.microsoft.com/office/drawing/2014/main" id="{C0E07B4A-2F4D-46B7-A241-1A3E829893AC}"/>
+                <a16:creationId xmlns:a16="http://schemas.microsoft.com/office/drawing/2014/main" id="{2CF77B4A-48A8-428C-8C43-5501200A2CC8}"/>
               </a:ext>
             </a:extLst>
           </p:cNvPr>
@@ -4065,7 +4065,7 @@
           <p:cNvPr id="1027" name="Text Placeholder 2">
             <a:extLst xmlns:a="http://schemas.openxmlformats.org/drawingml/2006/main">
               <a:ext uri="{FF2B5EF4-FFF2-40B4-BE49-F238E27FC236}">
-                <a16:creationId xmlns:a16="http://schemas.microsoft.com/office/drawing/2014/main" id="{E371C434-A079-4DDF-88F7-98BAD2CABC8F}"/>
+                <a16:creationId xmlns:a16="http://schemas.microsoft.com/office/drawing/2014/main" id="{66A4ECFC-5F9C-4BF2-A113-F8306EC6BFAC}"/>
               </a:ext>
             </a:extLst>
           </p:cNvPr>
@@ -4139,7 +4139,7 @@
           <p:cNvPr id="4" name="Date Placeholder 3">
             <a:extLst xmlns:a="http://schemas.openxmlformats.org/drawingml/2006/main">
               <a:ext uri="{FF2B5EF4-FFF2-40B4-BE49-F238E27FC236}">
-                <a16:creationId xmlns:a16="http://schemas.microsoft.com/office/drawing/2014/main" id="{5E007DED-B900-46B8-8E7F-17CBB5C1AC40}"/>
+                <a16:creationId xmlns:a16="http://schemas.microsoft.com/office/drawing/2014/main" id="{AA3A111D-9EE1-46D4-99A9-3CAB24086EB6}"/>
               </a:ext>
             </a:extLst>
           </p:cNvPr>
@@ -4187,7 +4187,7 @@
           <p:cNvPr id="5" name="Footer Placeholder 4">
             <a:extLst xmlns:a="http://schemas.openxmlformats.org/drawingml/2006/main">
               <a:ext uri="{FF2B5EF4-FFF2-40B4-BE49-F238E27FC236}">
-                <a16:creationId xmlns:a16="http://schemas.microsoft.com/office/drawing/2014/main" id="{22DB37A6-436F-4D33-8205-1A79564253D7}"/>
+                <a16:creationId xmlns:a16="http://schemas.microsoft.com/office/drawing/2014/main" id="{7BEF525A-626C-4832-A9DB-0BC4382F3328}"/>
               </a:ext>
             </a:extLst>
           </p:cNvPr>
@@ -4245,7 +4245,7 @@
           <p:cNvPr id="6" name="Slide Number Placeholder 5">
             <a:extLst xmlns:a="http://schemas.openxmlformats.org/drawingml/2006/main">
               <a:ext uri="{FF2B5EF4-FFF2-40B4-BE49-F238E27FC236}">
-                <a16:creationId xmlns:a16="http://schemas.microsoft.com/office/drawing/2014/main" id="{5F4E6EFB-A228-428A-82B7-B26AD3390BE9}"/>
+                <a16:creationId xmlns:a16="http://schemas.microsoft.com/office/drawing/2014/main" id="{E28D5401-B09E-4047-98EA-771792642577}"/>
               </a:ext>
             </a:extLst>
           </p:cNvPr>
@@ -4292,17 +4292,17 @@
   </p:cSld>
   <p:clrMap bg1="lt1" tx1="dk1" bg2="lt2" tx2="dk2" accent1="accent1" accent2="accent2" accent3="accent3" accent4="accent4" accent5="accent5" accent6="accent6" hlink="hlink" folHlink="folHlink"/>
   <p:sldLayoutIdLst>
-    <p:sldLayoutId xmlns:r="http://schemas.openxmlformats.org/officeDocument/2006/relationships" id="2147483649" r:id="R0464eee4fd2d49f9"/>
-    <p:sldLayoutId xmlns:r="http://schemas.openxmlformats.org/officeDocument/2006/relationships" id="2147483650" r:id="Rc84a67144e1a4963"/>
-    <p:sldLayoutId xmlns:r="http://schemas.openxmlformats.org/officeDocument/2006/relationships" id="2147483651" r:id="R0df49bf918634a45"/>
-    <p:sldLayoutId xmlns:r="http://schemas.openxmlformats.org/officeDocument/2006/relationships" id="2147483652" r:id="R941905244384426b"/>
-    <p:sldLayoutId xmlns:r="http://schemas.openxmlformats.org/officeDocument/2006/relationships" id="2147483653" r:id="R5fb4fd44ed9f4c5c"/>
-    <p:sldLayoutId xmlns:r="http://schemas.openxmlformats.org/officeDocument/2006/relationships" id="2147483654" r:id="Rf31f36c07a204ce3"/>
-    <p:sldLayoutId xmlns:r="http://schemas.openxmlformats.org/officeDocument/2006/relationships" id="2147483655" r:id="Ra7840413e2d54378"/>
-    <p:sldLayoutId xmlns:r="http://schemas.openxmlformats.org/officeDocument/2006/relationships" id="2147483656" r:id="R7398e63686c54376"/>
-    <p:sldLayoutId xmlns:r="http://schemas.openxmlformats.org/officeDocument/2006/relationships" id="2147483657" r:id="R0da8bb62cac34757"/>
-    <p:sldLayoutId xmlns:r="http://schemas.openxmlformats.org/officeDocument/2006/relationships" id="2147483658" r:id="R744fdfdc42534ba1"/>
-    <p:sldLayoutId xmlns:r="http://schemas.openxmlformats.org/officeDocument/2006/relationships" id="2147483659" r:id="Rf00e9da0ad4744b3"/>
+    <p:sldLayoutId xmlns:r="http://schemas.openxmlformats.org/officeDocument/2006/relationships" id="2147483649" r:id="Rd770191da084489d"/>
+    <p:sldLayoutId xmlns:r="http://schemas.openxmlformats.org/officeDocument/2006/relationships" id="2147483650" r:id="R66a61e64f6ee4001"/>
+    <p:sldLayoutId xmlns:r="http://schemas.openxmlformats.org/officeDocument/2006/relationships" id="2147483651" r:id="R48092d14498943fb"/>
+    <p:sldLayoutId xmlns:r="http://schemas.openxmlformats.org/officeDocument/2006/relationships" id="2147483652" r:id="R591fcd28188f4dc8"/>
+    <p:sldLayoutId xmlns:r="http://schemas.openxmlformats.org/officeDocument/2006/relationships" id="2147483653" r:id="Rb837136fea784a64"/>
+    <p:sldLayoutId xmlns:r="http://schemas.openxmlformats.org/officeDocument/2006/relationships" id="2147483654" r:id="Rdc7cd49a24c34cb9"/>
+    <p:sldLayoutId xmlns:r="http://schemas.openxmlformats.org/officeDocument/2006/relationships" id="2147483655" r:id="Rf8252bd49df94d23"/>
+    <p:sldLayoutId xmlns:r="http://schemas.openxmlformats.org/officeDocument/2006/relationships" id="2147483656" r:id="Rb2938b45ff8e4a6e"/>
+    <p:sldLayoutId xmlns:r="http://schemas.openxmlformats.org/officeDocument/2006/relationships" id="2147483657" r:id="R9af256f54b274933"/>
+    <p:sldLayoutId xmlns:r="http://schemas.openxmlformats.org/officeDocument/2006/relationships" id="2147483658" r:id="R25744631613f4622"/>
+    <p:sldLayoutId xmlns:r="http://schemas.openxmlformats.org/officeDocument/2006/relationships" id="2147483659" r:id="R76ea6b25ab8441c4"/>
   </p:sldLayoutIdLst>
   <p:hf hdr="0" dt="0"/>
   <p:txStyles>
@@ -5609,7 +5609,7 @@
           <p:nvPr/>
         </p:nvPicPr>
         <p:blipFill rotWithShape="1">
-          <a:blip xmlns:r="http://schemas.openxmlformats.org/officeDocument/2006/relationships" xmlns:a="http://schemas.openxmlformats.org/drawingml/2006/main" r:embed="R83f2dfb8b34b4384"/>
+          <a:blip xmlns:r="http://schemas.openxmlformats.org/officeDocument/2006/relationships" xmlns:a="http://schemas.openxmlformats.org/drawingml/2006/main" r:embed="R67b6adcd9a534026"/>
           <a:srcRect xmlns:a="http://schemas.openxmlformats.org/drawingml/2006/main" l="0" t="0" r="59916" b="0"/>
           <a:stretch xmlns:a="http://schemas.openxmlformats.org/drawingml/2006/main"/>
         </p:blipFill>
@@ -5628,7 +5628,7 @@
           <p:cNvPr id="4" name="Subtitle 3">
             <a:extLst xmlns:a="http://schemas.openxmlformats.org/drawingml/2006/main">
               <a:ext uri="{FF2B5EF4-FFF2-40B4-BE49-F238E27FC236}">
-                <a16:creationId xmlns:a16="http://schemas.microsoft.com/office/drawing/2014/main" id="{87B60016-46EE-4A2D-BEB9-1322D268332B}"/>
+                <a16:creationId xmlns:a16="http://schemas.microsoft.com/office/drawing/2014/main" id="{AA502AAE-A882-4BB6-804F-CBF52D83A921}"/>
               </a:ext>
             </a:extLst>
           </p:cNvPr>
@@ -5686,7 +5686,7 @@
           <p:cNvPr id="8" name="Title 7">
             <a:extLst xmlns:a="http://schemas.openxmlformats.org/drawingml/2006/main">
               <a:ext uri="{FF2B5EF4-FFF2-40B4-BE49-F238E27FC236}">
-                <a16:creationId xmlns:a16="http://schemas.microsoft.com/office/drawing/2014/main" id="{115EBC1D-8A96-4C81-86AD-4F3E83DE7F76}"/>
+                <a16:creationId xmlns:a16="http://schemas.microsoft.com/office/drawing/2014/main" id="{3599372E-67A7-4F58-971D-DF651A0F136D}"/>
               </a:ext>
             </a:extLst>
           </p:cNvPr>
@@ -5745,7 +5745,7 @@
           <p:cNvPr id="10" name="TextBox 9">
             <a:extLst xmlns:a="http://schemas.openxmlformats.org/drawingml/2006/main">
               <a:ext uri="{FF2B5EF4-FFF2-40B4-BE49-F238E27FC236}">
-                <a16:creationId xmlns:a16="http://schemas.microsoft.com/office/drawing/2014/main" id="{CC4AEF87-48D2-45D5-A6A9-5FADF9C7E157}"/>
+                <a16:creationId xmlns:a16="http://schemas.microsoft.com/office/drawing/2014/main" id="{BF5C42B8-DE52-4BF5-B4A7-8037A77F1601}"/>
               </a:ext>
             </a:extLst>
           </p:cNvPr>
@@ -5908,7 +5908,7 @@
           <p:nvPr/>
         </p:nvPicPr>
         <p:blipFill>
-          <a:blip xmlns:r="http://schemas.openxmlformats.org/officeDocument/2006/relationships" xmlns:a="http://schemas.openxmlformats.org/drawingml/2006/main" r:embed="Rf7ce08494400444a"/>
+          <a:blip xmlns:r="http://schemas.openxmlformats.org/officeDocument/2006/relationships" xmlns:a="http://schemas.openxmlformats.org/drawingml/2006/main" r:embed="R5263184cdb494d82"/>
           <a:stretch xmlns:a="http://schemas.openxmlformats.org/drawingml/2006/main">
             <a:fillRect l="0" t="0" r="0" b="0"/>
           </a:stretch>
@@ -5926,7 +5926,7 @@
     </p:spTree>
     <p:extLst>
       <p:ext uri="{BB962C8B-B14F-4D97-AF65-F5344CB8AC3E}">
-        <p14:creationId xmlns:p14="http://schemas.microsoft.com/office/powerpoint/2010/main" val="975848388"/>
+        <p14:creationId xmlns:p14="http://schemas.microsoft.com/office/powerpoint/2010/main" val="1745281229"/>
       </p:ext>
     </p:extLst>
   </p:cSld>
@@ -5950,7 +5950,7 @@
           <p:cNvPr id="9" name="Rectangle 8">
             <a:extLst xmlns:a="http://schemas.openxmlformats.org/drawingml/2006/main">
               <a:ext uri="{FF2B5EF4-FFF2-40B4-BE49-F238E27FC236}">
-                <a16:creationId xmlns:a16="http://schemas.microsoft.com/office/drawing/2014/main" id="{AFDDF6C0-6B4A-4429-91D0-5B61E10ABE19}"/>
+                <a16:creationId xmlns:a16="http://schemas.microsoft.com/office/drawing/2014/main" id="{EC712E1B-B6D0-473D-9872-C835ECCC21DF}"/>
               </a:ext>
             </a:extLst>
           </p:cNvPr>
@@ -6012,7 +6012,7 @@
           <p:cNvPr id="15361" name="Title 1">
             <a:extLst xmlns:a="http://schemas.openxmlformats.org/drawingml/2006/main">
               <a:ext uri="{FF2B5EF4-FFF2-40B4-BE49-F238E27FC236}">
-                <a16:creationId xmlns:a16="http://schemas.microsoft.com/office/drawing/2014/main" id="{57ED162D-A553-4BF5-9095-01F1138AABD6}"/>
+                <a16:creationId xmlns:a16="http://schemas.microsoft.com/office/drawing/2014/main" id="{D894B11B-5B1B-44B1-99C4-5709B807FBC3}"/>
               </a:ext>
             </a:extLst>
           </p:cNvPr>
@@ -6061,7 +6061,7 @@
           <p:cNvPr id="6" name="Slide Number Placeholder 5">
             <a:extLst xmlns:a="http://schemas.openxmlformats.org/drawingml/2006/main">
               <a:ext uri="{FF2B5EF4-FFF2-40B4-BE49-F238E27FC236}">
-                <a16:creationId xmlns:a16="http://schemas.microsoft.com/office/drawing/2014/main" id="{3A8C3FEA-05C5-49D0-8AB7-0B2357F3EEC1}"/>
+                <a16:creationId xmlns:a16="http://schemas.microsoft.com/office/drawing/2014/main" id="{BD87E8F8-5165-4B3D-9BF9-F6E988D8420E}"/>
               </a:ext>
             </a:extLst>
           </p:cNvPr>
@@ -6098,7 +6098,7 @@
           <p:cNvPr id="7" name="Footer Placeholder 6">
             <a:extLst xmlns:a="http://schemas.openxmlformats.org/drawingml/2006/main">
               <a:ext uri="{FF2B5EF4-FFF2-40B4-BE49-F238E27FC236}">
-                <a16:creationId xmlns:a16="http://schemas.microsoft.com/office/drawing/2014/main" id="{512DF5B2-EC04-47D8-91E6-C8FAE386AABF}"/>
+                <a16:creationId xmlns:a16="http://schemas.microsoft.com/office/drawing/2014/main" id="{D4416F25-5808-4281-B898-C2CB2B7C53F4}"/>
               </a:ext>
             </a:extLst>
           </p:cNvPr>
@@ -6199,7 +6199,7 @@
           <p:nvPr/>
         </p:nvPicPr>
         <p:blipFill>
-          <a:blip xmlns:r="http://schemas.openxmlformats.org/officeDocument/2006/relationships" xmlns:a="http://schemas.openxmlformats.org/drawingml/2006/main" r:embed="R971cec20fc4d45bd"/>
+          <a:blip xmlns:r="http://schemas.openxmlformats.org/officeDocument/2006/relationships" xmlns:a="http://schemas.openxmlformats.org/drawingml/2006/main" r:embed="R22bd723109e04d42"/>
           <a:stretch xmlns:a="http://schemas.openxmlformats.org/drawingml/2006/main">
             <a:fillRect l="0" t="0" r="0" b="0"/>
           </a:stretch>
@@ -6219,7 +6219,7 @@
           <p:cNvPr id="15364" name="">
             <a:extLst xmlns:a="http://schemas.openxmlformats.org/drawingml/2006/main">
               <a:ext uri="{FF2B5EF4-FFF2-40B4-BE49-F238E27FC236}">
-                <a16:creationId xmlns:a16="http://schemas.microsoft.com/office/drawing/2014/main" id="{9BF41A0E-1BC5-4952-B3DE-5EC36F36E51B}"/>
+                <a16:creationId xmlns:a16="http://schemas.microsoft.com/office/drawing/2014/main" id="{A23AB7F9-6B18-4A7B-9258-4515B27B6729}"/>
               </a:ext>
             </a:extLst>
           </p:cNvPr>
@@ -6272,7 +6272,7 @@
           <p:cNvPr id="15365" name="">
             <a:extLst xmlns:a="http://schemas.openxmlformats.org/drawingml/2006/main">
               <a:ext uri="{FF2B5EF4-FFF2-40B4-BE49-F238E27FC236}">
-                <a16:creationId xmlns:a16="http://schemas.microsoft.com/office/drawing/2014/main" id="{5809FAA8-6964-43FE-9B24-F1B8CBEE3C6A}"/>
+                <a16:creationId xmlns:a16="http://schemas.microsoft.com/office/drawing/2014/main" id="{DF27E299-2ADA-4CC9-8E00-F051D4ADB53A}"/>
               </a:ext>
             </a:extLst>
           </p:cNvPr>
@@ -6307,7 +6307,7 @@
           <p:cNvPr id="15366" name="">
             <a:extLst xmlns:a="http://schemas.openxmlformats.org/drawingml/2006/main">
               <a:ext uri="{FF2B5EF4-FFF2-40B4-BE49-F238E27FC236}">
-                <a16:creationId xmlns:a16="http://schemas.microsoft.com/office/drawing/2014/main" id="{BF64D9B1-C641-4669-B8FC-B0A59CA99B17}"/>
+                <a16:creationId xmlns:a16="http://schemas.microsoft.com/office/drawing/2014/main" id="{AA5E6801-2CE9-4253-9FD9-7DD0A51FC4D9}"/>
               </a:ext>
             </a:extLst>
           </p:cNvPr>
@@ -6364,7 +6364,7 @@
           <p:nvPr/>
         </p:nvPicPr>
         <p:blipFill>
-          <a:blip xmlns:r="http://schemas.openxmlformats.org/officeDocument/2006/relationships" xmlns:a="http://schemas.openxmlformats.org/drawingml/2006/main" r:embed="Raf6adb1f9bac4f00"/>
+          <a:blip xmlns:r="http://schemas.openxmlformats.org/officeDocument/2006/relationships" xmlns:a="http://schemas.openxmlformats.org/drawingml/2006/main" r:embed="R0f1e47c32a4d4bfa"/>
           <a:stretch xmlns:a="http://schemas.openxmlformats.org/drawingml/2006/main"/>
         </p:blipFill>
         <p:spPr>
@@ -6382,7 +6382,7 @@
           <p:cNvPr id="15368" name="">
             <a:extLst xmlns:a="http://schemas.openxmlformats.org/drawingml/2006/main">
               <a:ext uri="{FF2B5EF4-FFF2-40B4-BE49-F238E27FC236}">
-                <a16:creationId xmlns:a16="http://schemas.microsoft.com/office/drawing/2014/main" id="{A5F34FEB-36EB-4B42-A241-D718B8FB5C61}"/>
+                <a16:creationId xmlns:a16="http://schemas.microsoft.com/office/drawing/2014/main" id="{B8BE7CE4-90B9-454A-BC35-C669CAADC2AC}"/>
               </a:ext>
             </a:extLst>
           </p:cNvPr>
@@ -6421,7 +6421,7 @@
           <p:cNvPr id="15369" name="">
             <a:extLst xmlns:a="http://schemas.openxmlformats.org/drawingml/2006/main">
               <a:ext uri="{FF2B5EF4-FFF2-40B4-BE49-F238E27FC236}">
-                <a16:creationId xmlns:a16="http://schemas.microsoft.com/office/drawing/2014/main" id="{99CCAAF5-F0CF-4333-8897-7D7599565F87}"/>
+                <a16:creationId xmlns:a16="http://schemas.microsoft.com/office/drawing/2014/main" id="{7BA58A1D-86B9-4F33-8EAC-58B26B5BD71B}"/>
               </a:ext>
             </a:extLst>
           </p:cNvPr>
@@ -6474,7 +6474,7 @@
           <p:cNvPr id="15370" name="">
             <a:extLst xmlns:a="http://schemas.openxmlformats.org/drawingml/2006/main">
               <a:ext uri="{FF2B5EF4-FFF2-40B4-BE49-F238E27FC236}">
-                <a16:creationId xmlns:a16="http://schemas.microsoft.com/office/drawing/2014/main" id="{BD9F0E72-406A-4801-BA21-07BBDC8BFC0F}"/>
+                <a16:creationId xmlns:a16="http://schemas.microsoft.com/office/drawing/2014/main" id="{9B571E68-E2C1-424D-8223-EDF070282A73}"/>
               </a:ext>
             </a:extLst>
           </p:cNvPr>
@@ -6531,7 +6531,7 @@
           <p:cNvPr id="15371" name="">
             <a:extLst xmlns:a="http://schemas.openxmlformats.org/drawingml/2006/main">
               <a:ext uri="{FF2B5EF4-FFF2-40B4-BE49-F238E27FC236}">
-                <a16:creationId xmlns:a16="http://schemas.microsoft.com/office/drawing/2014/main" id="{9AA8D6FD-03FE-432B-A916-4F9BF3B2B61D}"/>
+                <a16:creationId xmlns:a16="http://schemas.microsoft.com/office/drawing/2014/main" id="{CCEB837E-76B3-40F6-8166-C44A94B0B585}"/>
               </a:ext>
             </a:extLst>
           </p:cNvPr>
@@ -6570,7 +6570,7 @@
           <p:cNvPr id="15372" name="">
             <a:extLst xmlns:a="http://schemas.openxmlformats.org/drawingml/2006/main">
               <a:ext uri="{FF2B5EF4-FFF2-40B4-BE49-F238E27FC236}">
-                <a16:creationId xmlns:a16="http://schemas.microsoft.com/office/drawing/2014/main" id="{612CEF5D-24B8-4286-BA67-802B7F483FAB}"/>
+                <a16:creationId xmlns:a16="http://schemas.microsoft.com/office/drawing/2014/main" id="{0227E892-F25D-4ADD-A402-F469AF660260}"/>
               </a:ext>
             </a:extLst>
           </p:cNvPr>
@@ -6623,7 +6623,7 @@
           <p:cNvPr id="15373" name="">
             <a:extLst xmlns:a="http://schemas.openxmlformats.org/drawingml/2006/main">
               <a:ext uri="{FF2B5EF4-FFF2-40B4-BE49-F238E27FC236}">
-                <a16:creationId xmlns:a16="http://schemas.microsoft.com/office/drawing/2014/main" id="{D943F8C1-AA17-4023-A3EB-BFE512A08D0A}"/>
+                <a16:creationId xmlns:a16="http://schemas.microsoft.com/office/drawing/2014/main" id="{5F915593-BFFC-4237-8624-A282CEE7D166}"/>
               </a:ext>
             </a:extLst>
           </p:cNvPr>
@@ -6680,7 +6680,7 @@
           <p:cNvPr id="15374" name="">
             <a:extLst xmlns:a="http://schemas.openxmlformats.org/drawingml/2006/main">
               <a:ext uri="{FF2B5EF4-FFF2-40B4-BE49-F238E27FC236}">
-                <a16:creationId xmlns:a16="http://schemas.microsoft.com/office/drawing/2014/main" id="{2F7B4EA6-D427-47D6-93D4-6B1E2C0B19F5}"/>
+                <a16:creationId xmlns:a16="http://schemas.microsoft.com/office/drawing/2014/main" id="{19EDE361-85C6-43D3-B7F8-90BA54C89647}"/>
               </a:ext>
             </a:extLst>
           </p:cNvPr>
@@ -6719,7 +6719,7 @@
           <p:cNvPr id="15375" name="">
             <a:extLst xmlns:a="http://schemas.openxmlformats.org/drawingml/2006/main">
               <a:ext uri="{FF2B5EF4-FFF2-40B4-BE49-F238E27FC236}">
-                <a16:creationId xmlns:a16="http://schemas.microsoft.com/office/drawing/2014/main" id="{283C4F41-356A-42B2-ADF7-3A97039D1D62}"/>
+                <a16:creationId xmlns:a16="http://schemas.microsoft.com/office/drawing/2014/main" id="{A66DC43D-C281-4546-B644-973C55D6DFDA}"/>
               </a:ext>
             </a:extLst>
           </p:cNvPr>
@@ -6772,7 +6772,7 @@
           <p:cNvPr id="15376" name="">
             <a:extLst xmlns:a="http://schemas.openxmlformats.org/drawingml/2006/main">
               <a:ext uri="{FF2B5EF4-FFF2-40B4-BE49-F238E27FC236}">
-                <a16:creationId xmlns:a16="http://schemas.microsoft.com/office/drawing/2014/main" id="{6874C060-22FC-4FFC-B6DA-7FD5B0CD54C2}"/>
+                <a16:creationId xmlns:a16="http://schemas.microsoft.com/office/drawing/2014/main" id="{E3C51887-289D-4863-90A1-C70D41D51034}"/>
               </a:ext>
             </a:extLst>
           </p:cNvPr>
@@ -6827,7 +6827,7 @@
     </p:spTree>
     <p:extLst>
       <p:ext uri="{BB962C8B-B14F-4D97-AF65-F5344CB8AC3E}">
-        <p14:creationId xmlns:p14="http://schemas.microsoft.com/office/powerpoint/2010/main" val="891020695"/>
+        <p14:creationId xmlns:p14="http://schemas.microsoft.com/office/powerpoint/2010/main" val="643150068"/>
       </p:ext>
     </p:extLst>
   </p:cSld>
@@ -6913,7 +6913,7 @@
           <p:cNvPr id="17409" name="Title 1">
             <a:extLst xmlns:a="http://schemas.openxmlformats.org/drawingml/2006/main">
               <a:ext uri="{FF2B5EF4-FFF2-40B4-BE49-F238E27FC236}">
-                <a16:creationId xmlns:a16="http://schemas.microsoft.com/office/drawing/2014/main" id="{7F5F0080-3FC6-412D-8CD3-EF482DCF628D}"/>
+                <a16:creationId xmlns:a16="http://schemas.microsoft.com/office/drawing/2014/main" id="{548A25E1-24FE-4BC7-A834-75D354393A96}"/>
               </a:ext>
             </a:extLst>
           </p:cNvPr>
@@ -6948,7 +6948,7 @@
           <p:cNvPr id="6" name="Slide Number Placeholder 5">
             <a:extLst xmlns:a="http://schemas.openxmlformats.org/drawingml/2006/main">
               <a:ext uri="{FF2B5EF4-FFF2-40B4-BE49-F238E27FC236}">
-                <a16:creationId xmlns:a16="http://schemas.microsoft.com/office/drawing/2014/main" id="{1B423A6A-56FE-46A1-9719-9114C109E6E9}"/>
+                <a16:creationId xmlns:a16="http://schemas.microsoft.com/office/drawing/2014/main" id="{347F82EF-9990-4108-9668-045ED512786F}"/>
               </a:ext>
             </a:extLst>
           </p:cNvPr>
@@ -6985,7 +6985,7 @@
           <p:cNvPr id="7" name="Footer Placeholder 6">
             <a:extLst xmlns:a="http://schemas.openxmlformats.org/drawingml/2006/main">
               <a:ext uri="{FF2B5EF4-FFF2-40B4-BE49-F238E27FC236}">
-                <a16:creationId xmlns:a16="http://schemas.microsoft.com/office/drawing/2014/main" id="{F62B2358-A95D-40E1-BC6F-DE8F9E136933}"/>
+                <a16:creationId xmlns:a16="http://schemas.microsoft.com/office/drawing/2014/main" id="{807C959B-AD88-4FDC-8A74-3D7EA4839B32}"/>
               </a:ext>
             </a:extLst>
           </p:cNvPr>
@@ -7086,7 +7086,7 @@
           <p:nvPr/>
         </p:nvPicPr>
         <p:blipFill>
-          <a:blip xmlns:r="http://schemas.openxmlformats.org/officeDocument/2006/relationships" xmlns:a="http://schemas.openxmlformats.org/drawingml/2006/main" r:embed="R656dbfb7c3ea47f6"/>
+          <a:blip xmlns:r="http://schemas.openxmlformats.org/officeDocument/2006/relationships" xmlns:a="http://schemas.openxmlformats.org/drawingml/2006/main" r:embed="R16213530f0d045df"/>
           <a:stretch xmlns:a="http://schemas.openxmlformats.org/drawingml/2006/main">
             <a:fillRect l="0" t="0" r="0" b="0"/>
           </a:stretch>
@@ -7106,7 +7106,7 @@
           <p:cNvPr id="17412" name="">
             <a:extLst xmlns:a="http://schemas.openxmlformats.org/drawingml/2006/main">
               <a:ext uri="{FF2B5EF4-FFF2-40B4-BE49-F238E27FC236}">
-                <a16:creationId xmlns:a16="http://schemas.microsoft.com/office/drawing/2014/main" id="{39FE3566-D6D4-4CD2-84B5-B152EAA1C815}"/>
+                <a16:creationId xmlns:a16="http://schemas.microsoft.com/office/drawing/2014/main" id="{C6C1064D-FCF9-4FD7-B9A7-865BDB54EBC2}"/>
               </a:ext>
             </a:extLst>
           </p:cNvPr>
@@ -7159,7 +7159,7 @@
           <p:cNvPr id="17413" name="">
             <a:extLst xmlns:a="http://schemas.openxmlformats.org/drawingml/2006/main">
               <a:ext uri="{FF2B5EF4-FFF2-40B4-BE49-F238E27FC236}">
-                <a16:creationId xmlns:a16="http://schemas.microsoft.com/office/drawing/2014/main" id="{61F078B0-4DE0-4E27-9CDF-C2FBF9EA186D}"/>
+                <a16:creationId xmlns:a16="http://schemas.microsoft.com/office/drawing/2014/main" id="{6CE37ADD-0B41-466E-B3ED-1EED0CEB3077}"/>
               </a:ext>
             </a:extLst>
           </p:cNvPr>
@@ -7194,7 +7194,7 @@
           <p:cNvPr id="17414" name="">
             <a:extLst xmlns:a="http://schemas.openxmlformats.org/drawingml/2006/main">
               <a:ext uri="{FF2B5EF4-FFF2-40B4-BE49-F238E27FC236}">
-                <a16:creationId xmlns:a16="http://schemas.microsoft.com/office/drawing/2014/main" id="{210EB5B6-93A3-4833-8BC1-9D3FD812F4F5}"/>
+                <a16:creationId xmlns:a16="http://schemas.microsoft.com/office/drawing/2014/main" id="{00B816CB-EE17-4E65-9EA9-B8EB2701BAAA}"/>
               </a:ext>
             </a:extLst>
           </p:cNvPr>
@@ -7231,7 +7231,7 @@
           <p:cNvPr id="17415" name="">
             <a:extLst xmlns:a="http://schemas.openxmlformats.org/drawingml/2006/main">
               <a:ext uri="{FF2B5EF4-FFF2-40B4-BE49-F238E27FC236}">
-                <a16:creationId xmlns:a16="http://schemas.microsoft.com/office/drawing/2014/main" id="{ABE795D9-A732-4A4F-B379-3C5F9D835494}"/>
+                <a16:creationId xmlns:a16="http://schemas.microsoft.com/office/drawing/2014/main" id="{325C6C35-425F-44C3-8D97-CB357178678D}"/>
               </a:ext>
             </a:extLst>
           </p:cNvPr>
@@ -7288,7 +7288,7 @@
           <p:cNvPr id="17416" name="">
             <a:extLst xmlns:a="http://schemas.openxmlformats.org/drawingml/2006/main">
               <a:ext uri="{FF2B5EF4-FFF2-40B4-BE49-F238E27FC236}">
-                <a16:creationId xmlns:a16="http://schemas.microsoft.com/office/drawing/2014/main" id="{D05460D0-54AE-4C74-BB14-A87F11A7CABA}"/>
+                <a16:creationId xmlns:a16="http://schemas.microsoft.com/office/drawing/2014/main" id="{3D57FC24-BB27-4B01-9FEA-5E172B449A46}"/>
               </a:ext>
             </a:extLst>
           </p:cNvPr>
@@ -7325,7 +7325,7 @@
           <p:cNvPr id="17417" name="">
             <a:extLst xmlns:a="http://schemas.openxmlformats.org/drawingml/2006/main">
               <a:ext uri="{FF2B5EF4-FFF2-40B4-BE49-F238E27FC236}">
-                <a16:creationId xmlns:a16="http://schemas.microsoft.com/office/drawing/2014/main" id="{3D654C92-195D-4B95-AEDF-48D008C0F575}"/>
+                <a16:creationId xmlns:a16="http://schemas.microsoft.com/office/drawing/2014/main" id="{EA841960-D16C-47AD-99FC-C9AB3B8FB7A4}"/>
               </a:ext>
             </a:extLst>
           </p:cNvPr>
@@ -7382,7 +7382,7 @@
           <p:cNvPr id="17418" name="">
             <a:extLst xmlns:a="http://schemas.openxmlformats.org/drawingml/2006/main">
               <a:ext uri="{FF2B5EF4-FFF2-40B4-BE49-F238E27FC236}">
-                <a16:creationId xmlns:a16="http://schemas.microsoft.com/office/drawing/2014/main" id="{7F04DB20-5550-4C24-A7B4-95D73C1722F5}"/>
+                <a16:creationId xmlns:a16="http://schemas.microsoft.com/office/drawing/2014/main" id="{CF376DA5-CC5F-4EF3-9C5A-B22210FD67CB}"/>
               </a:ext>
             </a:extLst>
           </p:cNvPr>
@@ -7419,7 +7419,7 @@
           <p:cNvPr id="17419" name="">
             <a:extLst xmlns:a="http://schemas.openxmlformats.org/drawingml/2006/main">
               <a:ext uri="{FF2B5EF4-FFF2-40B4-BE49-F238E27FC236}">
-                <a16:creationId xmlns:a16="http://schemas.microsoft.com/office/drawing/2014/main" id="{EF03509F-E287-4D9E-B740-3BC07DEED764}"/>
+                <a16:creationId xmlns:a16="http://schemas.microsoft.com/office/drawing/2014/main" id="{2D5A3983-9474-4D0A-A98C-D19E5C9910D8}"/>
               </a:ext>
             </a:extLst>
           </p:cNvPr>
@@ -7476,7 +7476,7 @@
           <p:cNvPr id="17420" name="">
             <a:extLst xmlns:a="http://schemas.openxmlformats.org/drawingml/2006/main">
               <a:ext uri="{FF2B5EF4-FFF2-40B4-BE49-F238E27FC236}">
-                <a16:creationId xmlns:a16="http://schemas.microsoft.com/office/drawing/2014/main" id="{3A45EF35-3F0B-4C1F-8CD6-9CFBDB79B4C6}"/>
+                <a16:creationId xmlns:a16="http://schemas.microsoft.com/office/drawing/2014/main" id="{2E81CE4C-025A-4750-828C-C56359B52FD5}"/>
               </a:ext>
             </a:extLst>
           </p:cNvPr>
@@ -7513,7 +7513,7 @@
           <p:cNvPr id="17421" name="">
             <a:extLst xmlns:a="http://schemas.openxmlformats.org/drawingml/2006/main">
               <a:ext uri="{FF2B5EF4-FFF2-40B4-BE49-F238E27FC236}">
-                <a16:creationId xmlns:a16="http://schemas.microsoft.com/office/drawing/2014/main" id="{0B057C9A-03AA-42DA-A60B-CC88D0AE9057}"/>
+                <a16:creationId xmlns:a16="http://schemas.microsoft.com/office/drawing/2014/main" id="{CF1D8369-DF6D-4ED3-9DB4-9CA36C3F4171}"/>
               </a:ext>
             </a:extLst>
           </p:cNvPr>
@@ -7570,7 +7570,7 @@
           <p:cNvPr id="17422" name="">
             <a:extLst xmlns:a="http://schemas.openxmlformats.org/drawingml/2006/main">
               <a:ext uri="{FF2B5EF4-FFF2-40B4-BE49-F238E27FC236}">
-                <a16:creationId xmlns:a16="http://schemas.microsoft.com/office/drawing/2014/main" id="{DE0AF0A9-5339-45FA-8300-CC3E4ABD2851}"/>
+                <a16:creationId xmlns:a16="http://schemas.microsoft.com/office/drawing/2014/main" id="{CF024693-D2F7-49D0-A1B1-EC63B3D439FE}"/>
               </a:ext>
             </a:extLst>
           </p:cNvPr>
@@ -7607,7 +7607,7 @@
           <p:cNvPr id="17423" name="">
             <a:extLst xmlns:a="http://schemas.openxmlformats.org/drawingml/2006/main">
               <a:ext uri="{FF2B5EF4-FFF2-40B4-BE49-F238E27FC236}">
-                <a16:creationId xmlns:a16="http://schemas.microsoft.com/office/drawing/2014/main" id="{6B4BE06A-F4CE-44C6-A8A3-A007114C4767}"/>
+                <a16:creationId xmlns:a16="http://schemas.microsoft.com/office/drawing/2014/main" id="{B70A24CD-0D19-4B82-8544-923B33634CFA}"/>
               </a:ext>
             </a:extLst>
           </p:cNvPr>
@@ -7664,7 +7664,7 @@
           <p:cNvPr id="17424" name="">
             <a:extLst xmlns:a="http://schemas.openxmlformats.org/drawingml/2006/main">
               <a:ext uri="{FF2B5EF4-FFF2-40B4-BE49-F238E27FC236}">
-                <a16:creationId xmlns:a16="http://schemas.microsoft.com/office/drawing/2014/main" id="{3BE70456-1504-4844-9F51-B94113FBB90C}"/>
+                <a16:creationId xmlns:a16="http://schemas.microsoft.com/office/drawing/2014/main" id="{C9BC8D23-38E6-4270-AC5A-6535ABC5DA5D}"/>
               </a:ext>
             </a:extLst>
           </p:cNvPr>
@@ -7701,7 +7701,7 @@
           <p:cNvPr id="17425" name="">
             <a:extLst xmlns:a="http://schemas.openxmlformats.org/drawingml/2006/main">
               <a:ext uri="{FF2B5EF4-FFF2-40B4-BE49-F238E27FC236}">
-                <a16:creationId xmlns:a16="http://schemas.microsoft.com/office/drawing/2014/main" id="{B7B55BB1-1FDA-406B-A141-F13A26BDDDEF}"/>
+                <a16:creationId xmlns:a16="http://schemas.microsoft.com/office/drawing/2014/main" id="{7D5D52EA-6F46-4EDD-A38F-21C1AE14E92D}"/>
               </a:ext>
             </a:extLst>
           </p:cNvPr>
@@ -7758,7 +7758,7 @@
           <p:cNvPr id="17426" name="">
             <a:extLst xmlns:a="http://schemas.openxmlformats.org/drawingml/2006/main">
               <a:ext uri="{FF2B5EF4-FFF2-40B4-BE49-F238E27FC236}">
-                <a16:creationId xmlns:a16="http://schemas.microsoft.com/office/drawing/2014/main" id="{E0F8451A-8C33-426A-B453-29600B925226}"/>
+                <a16:creationId xmlns:a16="http://schemas.microsoft.com/office/drawing/2014/main" id="{28292221-0D68-462B-8760-ABD828217380}"/>
               </a:ext>
             </a:extLst>
           </p:cNvPr>
@@ -7795,7 +7795,7 @@
           <p:cNvPr id="17427" name="">
             <a:extLst xmlns:a="http://schemas.openxmlformats.org/drawingml/2006/main">
               <a:ext uri="{FF2B5EF4-FFF2-40B4-BE49-F238E27FC236}">
-                <a16:creationId xmlns:a16="http://schemas.microsoft.com/office/drawing/2014/main" id="{8AB2C01E-5A81-409A-B971-63B90BA8D708}"/>
+                <a16:creationId xmlns:a16="http://schemas.microsoft.com/office/drawing/2014/main" id="{AA819AE6-3A13-4709-A2B7-C754FF4AE0AD}"/>
               </a:ext>
             </a:extLst>
           </p:cNvPr>
@@ -7852,7 +7852,7 @@
           <p:cNvPr id="17428" name="">
             <a:extLst xmlns:a="http://schemas.openxmlformats.org/drawingml/2006/main">
               <a:ext uri="{FF2B5EF4-FFF2-40B4-BE49-F238E27FC236}">
-                <a16:creationId xmlns:a16="http://schemas.microsoft.com/office/drawing/2014/main" id="{94E5737E-1BEB-40EC-B5F7-85904FF19CA2}"/>
+                <a16:creationId xmlns:a16="http://schemas.microsoft.com/office/drawing/2014/main" id="{A35DCCE0-7774-4B38-B418-BA6E6EB5ABA1}"/>
               </a:ext>
             </a:extLst>
           </p:cNvPr>
@@ -7889,7 +7889,7 @@
           <p:cNvPr id="17429" name="">
             <a:extLst xmlns:a="http://schemas.openxmlformats.org/drawingml/2006/main">
               <a:ext uri="{FF2B5EF4-FFF2-40B4-BE49-F238E27FC236}">
-                <a16:creationId xmlns:a16="http://schemas.microsoft.com/office/drawing/2014/main" id="{DD880329-3FEE-4B22-8A77-819F2DC27366}"/>
+                <a16:creationId xmlns:a16="http://schemas.microsoft.com/office/drawing/2014/main" id="{8FFC465A-98E6-4154-963D-00EE5EF3445B}"/>
               </a:ext>
             </a:extLst>
           </p:cNvPr>
@@ -7946,7 +7946,7 @@
           <p:cNvPr id="17430" name="">
             <a:extLst xmlns:a="http://schemas.openxmlformats.org/drawingml/2006/main">
               <a:ext uri="{FF2B5EF4-FFF2-40B4-BE49-F238E27FC236}">
-                <a16:creationId xmlns:a16="http://schemas.microsoft.com/office/drawing/2014/main" id="{84F9FD05-7B0E-4866-BBC6-3A02EF5A1447}"/>
+                <a16:creationId xmlns:a16="http://schemas.microsoft.com/office/drawing/2014/main" id="{41A44572-1173-416C-B4D5-8349AA67F985}"/>
               </a:ext>
             </a:extLst>
           </p:cNvPr>
@@ -8003,7 +8003,7 @@
           <p:cNvPr id="17431" name="">
             <a:extLst xmlns:a="http://schemas.openxmlformats.org/drawingml/2006/main">
               <a:ext uri="{FF2B5EF4-FFF2-40B4-BE49-F238E27FC236}">
-                <a16:creationId xmlns:a16="http://schemas.microsoft.com/office/drawing/2014/main" id="{46E5EF9F-BBF7-42FD-8A71-B47AE89AC2CE}"/>
+                <a16:creationId xmlns:a16="http://schemas.microsoft.com/office/drawing/2014/main" id="{23C2AAF0-863B-4461-A7B6-F91F9D219D43}"/>
               </a:ext>
             </a:extLst>
           </p:cNvPr>
@@ -8038,7 +8038,7 @@
           <p:cNvPr id="17432" name="">
             <a:extLst xmlns:a="http://schemas.openxmlformats.org/drawingml/2006/main">
               <a:ext uri="{FF2B5EF4-FFF2-40B4-BE49-F238E27FC236}">
-                <a16:creationId xmlns:a16="http://schemas.microsoft.com/office/drawing/2014/main" id="{B104FCC9-284D-42BC-B4E9-AE06CB0947F0}"/>
+                <a16:creationId xmlns:a16="http://schemas.microsoft.com/office/drawing/2014/main" id="{C128A006-739E-49C6-B8BF-336436A97E53}"/>
               </a:ext>
             </a:extLst>
           </p:cNvPr>
@@ -8091,7 +8091,7 @@
           <p:cNvPr id="17433" name="">
             <a:extLst xmlns:a="http://schemas.openxmlformats.org/drawingml/2006/main">
               <a:ext uri="{FF2B5EF4-FFF2-40B4-BE49-F238E27FC236}">
-                <a16:creationId xmlns:a16="http://schemas.microsoft.com/office/drawing/2014/main" id="{BBEAD7B8-0769-4D2D-B48B-03929F4DE14F}"/>
+                <a16:creationId xmlns:a16="http://schemas.microsoft.com/office/drawing/2014/main" id="{D0B5E51E-054C-4FBC-AF4C-EE882B97FB4F}"/>
               </a:ext>
             </a:extLst>
           </p:cNvPr>
@@ -8130,7 +8130,7 @@
           <p:nvPr/>
         </p:nvPicPr>
         <p:blipFill>
-          <a:blip xmlns:r="http://schemas.openxmlformats.org/officeDocument/2006/relationships" xmlns:a="http://schemas.openxmlformats.org/drawingml/2006/main" r:embed="R3a84da6043e74dab"/>
+          <a:blip xmlns:r="http://schemas.openxmlformats.org/officeDocument/2006/relationships" xmlns:a="http://schemas.openxmlformats.org/drawingml/2006/main" r:embed="R67293c8d3602470b"/>
           <a:stretch xmlns:a="http://schemas.openxmlformats.org/drawingml/2006/main"/>
         </p:blipFill>
         <p:spPr>
@@ -8148,7 +8148,7 @@
           <p:cNvPr id="17435" name="">
             <a:extLst xmlns:a="http://schemas.openxmlformats.org/drawingml/2006/main">
               <a:ext uri="{FF2B5EF4-FFF2-40B4-BE49-F238E27FC236}">
-                <a16:creationId xmlns:a16="http://schemas.microsoft.com/office/drawing/2014/main" id="{A5FE78A5-5C6E-4639-BC6C-7254FC2756F0}"/>
+                <a16:creationId xmlns:a16="http://schemas.microsoft.com/office/drawing/2014/main" id="{3D31420B-13C4-4CD7-8FEC-92C3D5191D3F}"/>
               </a:ext>
             </a:extLst>
           </p:cNvPr>
@@ -8183,7 +8183,7 @@
           <p:cNvPr id="17436" name="">
             <a:extLst xmlns:a="http://schemas.openxmlformats.org/drawingml/2006/main">
               <a:ext uri="{FF2B5EF4-FFF2-40B4-BE49-F238E27FC236}">
-                <a16:creationId xmlns:a16="http://schemas.microsoft.com/office/drawing/2014/main" id="{0DC29247-E748-4011-9040-4B8E0E1F93DC}"/>
+                <a16:creationId xmlns:a16="http://schemas.microsoft.com/office/drawing/2014/main" id="{3FB07331-8052-46FC-9BC3-CDD62491FB91}"/>
               </a:ext>
             </a:extLst>
           </p:cNvPr>
@@ -8222,7 +8222,7 @@
           <p:cNvPr id="17437" name="">
             <a:extLst xmlns:a="http://schemas.openxmlformats.org/drawingml/2006/main">
               <a:ext uri="{FF2B5EF4-FFF2-40B4-BE49-F238E27FC236}">
-                <a16:creationId xmlns:a16="http://schemas.microsoft.com/office/drawing/2014/main" id="{3F8846C7-AAB1-496E-A0F3-AB053C02A27C}"/>
+                <a16:creationId xmlns:a16="http://schemas.microsoft.com/office/drawing/2014/main" id="{649B3BE3-9C8E-4960-B688-052BE5305D34}"/>
               </a:ext>
             </a:extLst>
           </p:cNvPr>
@@ -8275,7 +8275,7 @@
           <p:cNvPr id="17438" name="">
             <a:extLst xmlns:a="http://schemas.openxmlformats.org/drawingml/2006/main">
               <a:ext uri="{FF2B5EF4-FFF2-40B4-BE49-F238E27FC236}">
-                <a16:creationId xmlns:a16="http://schemas.microsoft.com/office/drawing/2014/main" id="{85FB0E35-2B50-4C31-991D-EE349E0C4E41}"/>
+                <a16:creationId xmlns:a16="http://schemas.microsoft.com/office/drawing/2014/main" id="{FFA7892D-CD6C-494E-ADC8-26D286DDA429}"/>
               </a:ext>
             </a:extLst>
           </p:cNvPr>
@@ -8359,7 +8359,7 @@
           <p:cNvPr id="17439" name="">
             <a:extLst xmlns:a="http://schemas.openxmlformats.org/drawingml/2006/main">
               <a:ext uri="{FF2B5EF4-FFF2-40B4-BE49-F238E27FC236}">
-                <a16:creationId xmlns:a16="http://schemas.microsoft.com/office/drawing/2014/main" id="{28A6C3FF-9A21-4211-BB7F-1E3EAE3C7FBE}"/>
+                <a16:creationId xmlns:a16="http://schemas.microsoft.com/office/drawing/2014/main" id="{089AB278-53ED-42D0-9AAB-9ACACF7539D5}"/>
               </a:ext>
             </a:extLst>
           </p:cNvPr>
@@ -8398,7 +8398,7 @@
           <p:cNvPr id="17440" name="">
             <a:extLst xmlns:a="http://schemas.openxmlformats.org/drawingml/2006/main">
               <a:ext uri="{FF2B5EF4-FFF2-40B4-BE49-F238E27FC236}">
-                <a16:creationId xmlns:a16="http://schemas.microsoft.com/office/drawing/2014/main" id="{CFCAE89B-750E-499C-B126-1B65CEEF8810}"/>
+                <a16:creationId xmlns:a16="http://schemas.microsoft.com/office/drawing/2014/main" id="{044E9712-6BE6-4D6F-A0A1-A8476E9FEF65}"/>
               </a:ext>
             </a:extLst>
           </p:cNvPr>
@@ -8451,7 +8451,7 @@
           <p:cNvPr id="17441" name="">
             <a:extLst xmlns:a="http://schemas.openxmlformats.org/drawingml/2006/main">
               <a:ext uri="{FF2B5EF4-FFF2-40B4-BE49-F238E27FC236}">
-                <a16:creationId xmlns:a16="http://schemas.microsoft.com/office/drawing/2014/main" id="{018FBFE4-4F14-42CC-B1C7-9F11EB1F7EA1}"/>
+                <a16:creationId xmlns:a16="http://schemas.microsoft.com/office/drawing/2014/main" id="{804EA0B5-0415-41FB-9415-85069D9ACEE6}"/>
               </a:ext>
             </a:extLst>
           </p:cNvPr>
@@ -8535,7 +8535,7 @@
           <p:cNvPr id="17442" name="">
             <a:extLst xmlns:a="http://schemas.openxmlformats.org/drawingml/2006/main">
               <a:ext uri="{FF2B5EF4-FFF2-40B4-BE49-F238E27FC236}">
-                <a16:creationId xmlns:a16="http://schemas.microsoft.com/office/drawing/2014/main" id="{58E04DB7-443B-44AD-8E46-2545FE0BE6C7}"/>
+                <a16:creationId xmlns:a16="http://schemas.microsoft.com/office/drawing/2014/main" id="{8E09AD82-37A7-4BE2-AE6B-2685ABEA3226}"/>
               </a:ext>
             </a:extLst>
           </p:cNvPr>
@@ -8574,7 +8574,7 @@
           <p:cNvPr id="17443" name="">
             <a:extLst xmlns:a="http://schemas.openxmlformats.org/drawingml/2006/main">
               <a:ext uri="{FF2B5EF4-FFF2-40B4-BE49-F238E27FC236}">
-                <a16:creationId xmlns:a16="http://schemas.microsoft.com/office/drawing/2014/main" id="{F57D8955-DDB5-43DD-A3D2-607BC4FA5F1E}"/>
+                <a16:creationId xmlns:a16="http://schemas.microsoft.com/office/drawing/2014/main" id="{A79C1640-12F6-4CEE-BB66-A05AAE2B1991}"/>
               </a:ext>
             </a:extLst>
           </p:cNvPr>
@@ -8627,7 +8627,7 @@
           <p:cNvPr id="17444" name="">
             <a:extLst xmlns:a="http://schemas.openxmlformats.org/drawingml/2006/main">
               <a:ext uri="{FF2B5EF4-FFF2-40B4-BE49-F238E27FC236}">
-                <a16:creationId xmlns:a16="http://schemas.microsoft.com/office/drawing/2014/main" id="{DCD0AAB7-68DB-4FD8-9230-8F48563CBBC8}"/>
+                <a16:creationId xmlns:a16="http://schemas.microsoft.com/office/drawing/2014/main" id="{462EB339-A285-49ED-9727-A0AB1EB34A2B}"/>
               </a:ext>
             </a:extLst>
           </p:cNvPr>
@@ -8711,7 +8711,7 @@
           <p:cNvPr id="17445" name="">
             <a:extLst xmlns:a="http://schemas.openxmlformats.org/drawingml/2006/main">
               <a:ext uri="{FF2B5EF4-FFF2-40B4-BE49-F238E27FC236}">
-                <a16:creationId xmlns:a16="http://schemas.microsoft.com/office/drawing/2014/main" id="{312498E1-EBCB-4638-800A-432E5CCBD496}"/>
+                <a16:creationId xmlns:a16="http://schemas.microsoft.com/office/drawing/2014/main" id="{C399E1B7-C64E-4712-9C89-C73DD92F6882}"/>
               </a:ext>
             </a:extLst>
           </p:cNvPr>
@@ -8750,7 +8750,7 @@
           <p:cNvPr id="17446" name="">
             <a:extLst xmlns:a="http://schemas.openxmlformats.org/drawingml/2006/main">
               <a:ext uri="{FF2B5EF4-FFF2-40B4-BE49-F238E27FC236}">
-                <a16:creationId xmlns:a16="http://schemas.microsoft.com/office/drawing/2014/main" id="{8954CA1B-B2C5-4BF5-90C6-1B14BCF6897A}"/>
+                <a16:creationId xmlns:a16="http://schemas.microsoft.com/office/drawing/2014/main" id="{5348D99F-C3C0-482E-ADE6-4BE74F3C88B9}"/>
               </a:ext>
             </a:extLst>
           </p:cNvPr>
@@ -8762,7 +8762,7 @@
         <p:spPr>
           <a:xfrm xmlns:a="http://schemas.openxmlformats.org/drawingml/2006/main">
             <a:off x="8267700" y="5143500"/>
-            <a:ext cx="666750" cy="190500"/>
+            <a:ext cx="590550" cy="190500"/>
           </a:xfrm>
           <a:prstGeom xmlns:a="http://schemas.openxmlformats.org/drawingml/2006/main" prst="rect">
             <a:avLst/>
@@ -8793,7 +8793,7 @@
                 <a:ea typeface="Arial"/>
                 <a:cs typeface="Arial"/>
               </a:rPr>
-              <a:t>GitHub</a:t>
+              <a:t>Verify</a:t>
             </a:r>
           </a:p>
         </p:txBody>
@@ -8803,19 +8803,19 @@
           <p:cNvPr id="17447" name="">
             <a:extLst xmlns:a="http://schemas.openxmlformats.org/drawingml/2006/main">
               <a:ext uri="{FF2B5EF4-FFF2-40B4-BE49-F238E27FC236}">
-                <a16:creationId xmlns:a16="http://schemas.microsoft.com/office/drawing/2014/main" id="{F01E2DA0-07B8-40CF-8FB6-B56F6C92B726}"/>
-              </a:ext>
-            </a:extLst>
-          </p:cNvPr>
-          <p:cNvSpPr>
-            <a:spLocks xmlns:a="http://schemas.openxmlformats.org/drawingml/2006/main" noGrp="1"/>
-          </p:cNvSpPr>
-          <p:nvPr/>
-        </p:nvSpPr>
-        <p:spPr>
-          <a:xfrm xmlns:a="http://schemas.openxmlformats.org/drawingml/2006/main">
-            <a:off x="8934450" y="5143500"/>
-            <a:ext cx="2819400" cy="190500"/>
+                <a16:creationId xmlns:a16="http://schemas.microsoft.com/office/drawing/2014/main" id="{DBEDBF2F-686E-4561-8604-FAE580756D77}"/>
+              </a:ext>
+            </a:extLst>
+          </p:cNvPr>
+          <p:cNvSpPr>
+            <a:spLocks xmlns:a="http://schemas.openxmlformats.org/drawingml/2006/main" noGrp="1"/>
+          </p:cNvSpPr>
+          <p:nvPr/>
+        </p:nvSpPr>
+        <p:spPr>
+          <a:xfrm xmlns:a="http://schemas.openxmlformats.org/drawingml/2006/main">
+            <a:off x="8858250" y="5143500"/>
+            <a:ext cx="2895600" cy="190500"/>
           </a:xfrm>
           <a:prstGeom xmlns:a="http://schemas.openxmlformats.org/drawingml/2006/main" prst="rect">
             <a:avLst/>
@@ -8830,7 +8830,7 @@
             <a:pPr algn="l">
               <a:defRPr sz="863">
                 <a:solidFill>
-                  <a:srgbClr val="0B67B2"/>
+                  <a:srgbClr val="182230"/>
                 </a:solidFill>
                 <a:latin typeface="Arial"/>
                 <a:ea typeface="Arial"/>
@@ -8840,13 +8840,13 @@
             <a:r>
               <a:rPr sz="863">
                 <a:solidFill>
-                  <a:srgbClr val="0B67B2"/>
+                  <a:srgbClr val="182230"/>
                 </a:solidFill>
                 <a:latin typeface="Arial"/>
                 <a:ea typeface="Arial"/>
                 <a:cs typeface="Arial"/>
               </a:rPr>
-              <a:t>github.com/poa8534-crypto/SIH-2026</a:t>
+              <a:t>python eval.py  reproduces every figure above</a:t>
             </a:r>
           </a:p>
         </p:txBody>
@@ -8856,7 +8856,7 @@
           <p:cNvPr id="17448" name="">
             <a:extLst xmlns:a="http://schemas.openxmlformats.org/drawingml/2006/main">
               <a:ext uri="{FF2B5EF4-FFF2-40B4-BE49-F238E27FC236}">
-                <a16:creationId xmlns:a16="http://schemas.microsoft.com/office/drawing/2014/main" id="{F1446069-7633-4ABD-B623-E58114D384F6}"/>
+                <a16:creationId xmlns:a16="http://schemas.microsoft.com/office/drawing/2014/main" id="{F071E6FB-CE1E-4FBC-99D6-E51C5FB4927B}"/>
               </a:ext>
             </a:extLst>
           </p:cNvPr>
@@ -8868,7 +8868,7 @@
         <p:spPr>
           <a:xfrm xmlns:a="http://schemas.openxmlformats.org/drawingml/2006/main">
             <a:off x="8267700" y="5391150"/>
-            <a:ext cx="666750" cy="190500"/>
+            <a:ext cx="590550" cy="190500"/>
           </a:xfrm>
           <a:prstGeom xmlns:a="http://schemas.openxmlformats.org/drawingml/2006/main" prst="rect">
             <a:avLst/>
@@ -8899,7 +8899,7 @@
                 <a:ea typeface="Arial"/>
                 <a:cs typeface="Arial"/>
               </a:rPr>
-              <a:t>Verify</a:t>
+              <a:t>Scope</a:t>
             </a:r>
           </a:p>
         </p:txBody>
@@ -8909,19 +8909,19 @@
           <p:cNvPr id="17449" name="">
             <a:extLst xmlns:a="http://schemas.openxmlformats.org/drawingml/2006/main">
               <a:ext uri="{FF2B5EF4-FFF2-40B4-BE49-F238E27FC236}">
-                <a16:creationId xmlns:a16="http://schemas.microsoft.com/office/drawing/2014/main" id="{29B8E586-7181-48EC-B9AC-0707D348CE82}"/>
-              </a:ext>
-            </a:extLst>
-          </p:cNvPr>
-          <p:cNvSpPr>
-            <a:spLocks xmlns:a="http://schemas.openxmlformats.org/drawingml/2006/main" noGrp="1"/>
-          </p:cNvSpPr>
-          <p:nvPr/>
-        </p:nvSpPr>
-        <p:spPr>
-          <a:xfrm xmlns:a="http://schemas.openxmlformats.org/drawingml/2006/main">
-            <a:off x="8934450" y="5391150"/>
-            <a:ext cx="2819400" cy="190500"/>
+                <a16:creationId xmlns:a16="http://schemas.microsoft.com/office/drawing/2014/main" id="{3EA6472B-7880-4BB1-80E1-964BD6D09000}"/>
+              </a:ext>
+            </a:extLst>
+          </p:cNvPr>
+          <p:cNvSpPr>
+            <a:spLocks xmlns:a="http://schemas.openxmlformats.org/drawingml/2006/main" noGrp="1"/>
+          </p:cNvSpPr>
+          <p:nvPr/>
+        </p:nvSpPr>
+        <p:spPr>
+          <a:xfrm xmlns:a="http://schemas.openxmlformats.org/drawingml/2006/main">
+            <a:off x="8858250" y="5391150"/>
+            <a:ext cx="2895600" cy="190500"/>
           </a:xfrm>
           <a:prstGeom xmlns:a="http://schemas.openxmlformats.org/drawingml/2006/main" prst="rect">
             <a:avLst/>
@@ -8952,7 +8952,7 @@
                 <a:ea typeface="Arial"/>
                 <a:cs typeface="Arial"/>
               </a:rPr>
-              <a:t>python eval.py  reproduces every figure above</a:t>
+              <a:t>154 held-out mentions, synthetic corpus, one project</a:t>
             </a:r>
           </a:p>
         </p:txBody>
@@ -8962,7 +8962,7 @@
           <p:cNvPr id="17450" name="">
             <a:extLst xmlns:a="http://schemas.openxmlformats.org/drawingml/2006/main">
               <a:ext uri="{FF2B5EF4-FFF2-40B4-BE49-F238E27FC236}">
-                <a16:creationId xmlns:a16="http://schemas.microsoft.com/office/drawing/2014/main" id="{9855D0CF-55BA-4026-9048-6D04B517FF2F}"/>
+                <a16:creationId xmlns:a16="http://schemas.microsoft.com/office/drawing/2014/main" id="{A88B92C1-D7B1-4299-AF9D-B8C70A0BBA9E}"/>
               </a:ext>
             </a:extLst>
           </p:cNvPr>
@@ -9009,7 +9009,7 @@
                 <a:ea typeface="Arial"/>
                 <a:cs typeface="Arial"/>
               </a:rPr>
-              <a:t>Working prototype - 1,426 automated tests passing</a:t>
+              <a:t>Working prototype - 1,431 automated tests passing</a:t>
             </a:r>
           </a:p>
         </p:txBody>
@@ -9017,7 +9017,7 @@
     </p:spTree>
     <p:extLst>
       <p:ext uri="{BB962C8B-B14F-4D97-AF65-F5344CB8AC3E}">
-        <p14:creationId xmlns:p14="http://schemas.microsoft.com/office/powerpoint/2010/main" val="1517258410"/>
+        <p14:creationId xmlns:p14="http://schemas.microsoft.com/office/powerpoint/2010/main" val="1880786811"/>
       </p:ext>
     </p:extLst>
   </p:cSld>
@@ -9112,7 +9112,7 @@
           <p:cNvPr id="17409" name="Title 1">
             <a:extLst xmlns:a="http://schemas.openxmlformats.org/drawingml/2006/main">
               <a:ext uri="{FF2B5EF4-FFF2-40B4-BE49-F238E27FC236}">
-                <a16:creationId xmlns:a16="http://schemas.microsoft.com/office/drawing/2014/main" id="{5C8A7163-2A37-4442-869E-8311247544D3}"/>
+                <a16:creationId xmlns:a16="http://schemas.microsoft.com/office/drawing/2014/main" id="{6166DBCF-7EBB-4706-99A6-849F8A66C013}"/>
               </a:ext>
             </a:extLst>
           </p:cNvPr>
@@ -9147,7 +9147,7 @@
           <p:cNvPr id="6" name="Slide Number Placeholder 5">
             <a:extLst xmlns:a="http://schemas.openxmlformats.org/drawingml/2006/main">
               <a:ext uri="{FF2B5EF4-FFF2-40B4-BE49-F238E27FC236}">
-                <a16:creationId xmlns:a16="http://schemas.microsoft.com/office/drawing/2014/main" id="{64A16D57-B72D-4D7C-8CD4-CEC18C448768}"/>
+                <a16:creationId xmlns:a16="http://schemas.microsoft.com/office/drawing/2014/main" id="{DABBAB69-07C6-4471-A5A9-2DB4324FD973}"/>
               </a:ext>
             </a:extLst>
           </p:cNvPr>
@@ -9211,7 +9211,7 @@
           <p:cNvPr id="7" name="Footer Placeholder 6">
             <a:extLst xmlns:a="http://schemas.openxmlformats.org/drawingml/2006/main">
               <a:ext uri="{FF2B5EF4-FFF2-40B4-BE49-F238E27FC236}">
-                <a16:creationId xmlns:a16="http://schemas.microsoft.com/office/drawing/2014/main" id="{87909037-6A62-4F4B-B331-8D260420C7F8}"/>
+                <a16:creationId xmlns:a16="http://schemas.microsoft.com/office/drawing/2014/main" id="{91F1656F-10E9-496D-95EC-29C56B952258}"/>
               </a:ext>
             </a:extLst>
           </p:cNvPr>
@@ -9329,14 +9329,14 @@
       </p:sp>
       <p:pic>
         <p:nvPicPr>
-          <p:cNvPr id="17446" name="Picture 10"/>
+          <p:cNvPr id="17470" name="Picture 10"/>
           <p:cNvPicPr>
             <a:picLocks xmlns:a="http://schemas.openxmlformats.org/drawingml/2006/main" noChangeAspect="1"/>
           </p:cNvPicPr>
           <p:nvPr/>
         </p:nvPicPr>
         <p:blipFill>
-          <a:blip xmlns:r="http://schemas.openxmlformats.org/officeDocument/2006/relationships" xmlns:a="http://schemas.openxmlformats.org/drawingml/2006/main" r:embed="Rbc7c00ad53ec4842"/>
+          <a:blip xmlns:r="http://schemas.openxmlformats.org/officeDocument/2006/relationships" xmlns:a="http://schemas.openxmlformats.org/drawingml/2006/main" r:embed="R0791e78976bc402c"/>
           <a:stretch xmlns:a="http://schemas.openxmlformats.org/drawingml/2006/main">
             <a:fillRect l="0" t="0" r="0" b="0"/>
           </a:stretch>
@@ -9356,7 +9356,7 @@
           <p:cNvPr id="17412" name="">
             <a:extLst xmlns:a="http://schemas.openxmlformats.org/drawingml/2006/main">
               <a:ext uri="{FF2B5EF4-FFF2-40B4-BE49-F238E27FC236}">
-                <a16:creationId xmlns:a16="http://schemas.microsoft.com/office/drawing/2014/main" id="{4E08ECE7-9C8E-48DB-A7DD-1C2897A074BA}"/>
+                <a16:creationId xmlns:a16="http://schemas.microsoft.com/office/drawing/2014/main" id="{DC28D37F-BD4C-4132-8135-786D833F12DB}"/>
               </a:ext>
             </a:extLst>
           </p:cNvPr>
@@ -9409,7 +9409,7 @@
           <p:cNvPr id="17413" name="">
             <a:extLst xmlns:a="http://schemas.openxmlformats.org/drawingml/2006/main">
               <a:ext uri="{FF2B5EF4-FFF2-40B4-BE49-F238E27FC236}">
-                <a16:creationId xmlns:a16="http://schemas.microsoft.com/office/drawing/2014/main" id="{327A9D5C-8D9E-484D-B3C7-E38B421CF26F}"/>
+                <a16:creationId xmlns:a16="http://schemas.microsoft.com/office/drawing/2014/main" id="{CCA046EB-7613-4FAA-9D8A-35A976ACB01B}"/>
               </a:ext>
             </a:extLst>
           </p:cNvPr>
@@ -9444,7 +9444,7 @@
           <p:cNvPr id="17414" name="">
             <a:extLst xmlns:a="http://schemas.openxmlformats.org/drawingml/2006/main">
               <a:ext uri="{FF2B5EF4-FFF2-40B4-BE49-F238E27FC236}">
-                <a16:creationId xmlns:a16="http://schemas.microsoft.com/office/drawing/2014/main" id="{EA058FA4-4333-47C6-B452-A6B01C27E95D}"/>
+                <a16:creationId xmlns:a16="http://schemas.microsoft.com/office/drawing/2014/main" id="{8054039F-B7BA-4D30-84FE-D9D1AA9DC697}"/>
               </a:ext>
             </a:extLst>
           </p:cNvPr>
@@ -9492,46 +9492,63 @@
           </a:p>
         </p:txBody>
       </p:sp>
-      <p:pic>
-        <p:nvPicPr>
-          <p:cNvPr id="17450" name=""/>
-          <p:cNvPicPr>
-            <a:picLocks xmlns:a="http://schemas.openxmlformats.org/drawingml/2006/main" noChangeAspect="1"/>
-          </p:cNvPicPr>
-          <p:nvPr/>
-        </p:nvPicPr>
-        <p:blipFill>
-          <a:blip xmlns:r="http://schemas.openxmlformats.org/officeDocument/2006/relationships" xmlns:a="http://schemas.openxmlformats.org/drawingml/2006/main" r:embed="R41085f3dc7e44868"/>
-          <a:stretch xmlns:a="http://schemas.openxmlformats.org/drawingml/2006/main"/>
-        </p:blipFill>
-        <p:spPr>
-          <a:xfrm xmlns:a="http://schemas.openxmlformats.org/drawingml/2006/main">
-            <a:off x="930071" y="1447800"/>
-            <a:ext cx="10331859" cy="2286000"/>
-          </a:xfrm>
-          <a:prstGeom xmlns:a="http://schemas.openxmlformats.org/drawingml/2006/main" prst="rect">
-            <a:avLst/>
-          </a:prstGeom>
-        </p:spPr>
-      </p:pic>
+      <p:sp>
+        <p:nvSpPr>
+          <p:cNvPr id="17415" name="">
+            <a:extLst xmlns:a="http://schemas.openxmlformats.org/drawingml/2006/main">
+              <a:ext uri="{FF2B5EF4-FFF2-40B4-BE49-F238E27FC236}">
+                <a16:creationId xmlns:a16="http://schemas.microsoft.com/office/drawing/2014/main" id="{0E1D09ED-18FA-455B-B94D-33B972FD66BF}"/>
+              </a:ext>
+            </a:extLst>
+          </p:cNvPr>
+          <p:cNvSpPr>
+            <a:spLocks xmlns:a="http://schemas.openxmlformats.org/drawingml/2006/main" noGrp="1"/>
+          </p:cNvSpPr>
+          <p:nvPr/>
+        </p:nvSpPr>
+        <p:spPr>
+          <a:xfrm xmlns:a="http://schemas.openxmlformats.org/drawingml/2006/main">
+            <a:off x="342900" y="1447800"/>
+            <a:ext cx="9620250" cy="2286000"/>
+          </a:xfrm>
+          <a:prstGeom xmlns:a="http://schemas.openxmlformats.org/drawingml/2006/main" prst="roundRect">
+            <a:avLst>
+              <a:gd name="adj" fmla="val 5833"/>
+            </a:avLst>
+          </a:prstGeom>
+          <a:solidFill xmlns:a="http://schemas.openxmlformats.org/drawingml/2006/main">
+            <a:srgbClr val="F7FAFD"/>
+          </a:solidFill>
+          <a:ln xmlns:a="http://schemas.openxmlformats.org/drawingml/2006/main" w="12383">
+            <a:solidFill>
+              <a:srgbClr val="0B67B2"/>
+            </a:solidFill>
+            <a:prstDash val="solid"/>
+          </a:ln>
+        </p:spPr>
+        <p:txBody xmlns:a="http://schemas.openxmlformats.org/drawingml/2006/main">
+          <a:bodyPr/>
+          <a:p/>
+        </p:txBody>
+      </p:sp>
       <p:sp>
         <p:nvSpPr>
           <p:cNvPr id="17416" name="">
             <a:extLst xmlns:a="http://schemas.openxmlformats.org/drawingml/2006/main">
               <a:ext uri="{FF2B5EF4-FFF2-40B4-BE49-F238E27FC236}">
-                <a16:creationId xmlns:a16="http://schemas.microsoft.com/office/drawing/2014/main" id="{8233DA0D-98C1-41AC-B8D6-FFD6EDDBEB50}"/>
-              </a:ext>
-            </a:extLst>
-          </p:cNvPr>
-          <p:cNvSpPr>
-            <a:spLocks xmlns:a="http://schemas.openxmlformats.org/drawingml/2006/main" noGrp="1"/>
-          </p:cNvSpPr>
-          <p:nvPr/>
-        </p:nvSpPr>
-        <p:spPr>
-          <a:xfrm xmlns:a="http://schemas.openxmlformats.org/drawingml/2006/main">
-            <a:off x="342900" y="3886200"/>
-            <a:ext cx="4381500" cy="209550"/>
+                <a16:creationId xmlns:a16="http://schemas.microsoft.com/office/drawing/2014/main" id="{5706A7D3-57F0-419E-A61E-AAEC0A2DFAED}"/>
+              </a:ext>
+            </a:extLst>
+          </p:cNvPr>
+          <p:cNvSpPr>
+            <a:spLocks xmlns:a="http://schemas.openxmlformats.org/drawingml/2006/main" noGrp="1"/>
+          </p:cNvSpPr>
+          <p:nvPr/>
+        </p:nvSpPr>
+        <p:spPr>
+          <a:xfrm xmlns:a="http://schemas.openxmlformats.org/drawingml/2006/main">
+            <a:off x="495300" y="1543050"/>
+            <a:ext cx="9144000" cy="190500"/>
           </a:xfrm>
           <a:prstGeom xmlns:a="http://schemas.openxmlformats.org/drawingml/2006/main" prst="rect">
             <a:avLst/>
@@ -9544,6 +9561,1497 @@
           <a:lstStyle xmlns:a="http://schemas.openxmlformats.org/drawingml/2006/main"/>
           <a:p xmlns:a="http://schemas.openxmlformats.org/drawingml/2006/main">
             <a:pPr algn="l">
+              <a:defRPr sz="863" b="1">
+                <a:solidFill>
+                  <a:srgbClr val="0B67B2"/>
+                </a:solidFill>
+                <a:latin typeface="Arial"/>
+                <a:ea typeface="Arial"/>
+                <a:cs typeface="Arial"/>
+              </a:defRPr>
+            </a:pPr>
+            <a:r>
+              <a:rPr sz="863" b="1">
+                <a:solidFill>
+                  <a:srgbClr val="0B67B2"/>
+                </a:solidFill>
+                <a:latin typeface="Arial"/>
+                <a:ea typeface="Arial"/>
+                <a:cs typeface="Arial"/>
+              </a:rPr>
+              <a:t>ON-PREMISE BOUNDARY - no cloud service, no API key, nothing leaves your network</a:t>
+            </a:r>
+          </a:p>
+        </p:txBody>
+      </p:sp>
+      <p:sp>
+        <p:nvSpPr>
+          <p:cNvPr id="17417" name="">
+            <a:extLst xmlns:a="http://schemas.openxmlformats.org/drawingml/2006/main">
+              <a:ext uri="{FF2B5EF4-FFF2-40B4-BE49-F238E27FC236}">
+                <a16:creationId xmlns:a16="http://schemas.microsoft.com/office/drawing/2014/main" id="{3325E9B1-FDEE-4EC6-8872-CF54095D5CB1}"/>
+              </a:ext>
+            </a:extLst>
+          </p:cNvPr>
+          <p:cNvSpPr>
+            <a:spLocks xmlns:a="http://schemas.openxmlformats.org/drawingml/2006/main" noGrp="1"/>
+          </p:cNvSpPr>
+          <p:nvPr/>
+        </p:nvSpPr>
+        <p:spPr>
+          <a:xfrm xmlns:a="http://schemas.openxmlformats.org/drawingml/2006/main">
+            <a:off x="495300" y="1847850"/>
+            <a:ext cx="1695450" cy="1733550"/>
+          </a:xfrm>
+          <a:prstGeom xmlns:a="http://schemas.openxmlformats.org/drawingml/2006/main" prst="roundRect">
+            <a:avLst>
+              <a:gd name="adj" fmla="val 6180"/>
+            </a:avLst>
+          </a:prstGeom>
+          <a:solidFill xmlns:a="http://schemas.openxmlformats.org/drawingml/2006/main">
+            <a:srgbClr val="EAF6EF"/>
+          </a:solidFill>
+          <a:ln xmlns:a="http://schemas.openxmlformats.org/drawingml/2006/main" w="12383">
+            <a:solidFill>
+              <a:srgbClr val="92C9AA"/>
+            </a:solidFill>
+            <a:prstDash val="solid"/>
+          </a:ln>
+        </p:spPr>
+        <p:txBody xmlns:a="http://schemas.openxmlformats.org/drawingml/2006/main">
+          <a:bodyPr/>
+          <a:p/>
+        </p:txBody>
+      </p:sp>
+      <p:sp>
+        <p:nvSpPr>
+          <p:cNvPr id="17418" name="">
+            <a:extLst xmlns:a="http://schemas.openxmlformats.org/drawingml/2006/main">
+              <a:ext uri="{FF2B5EF4-FFF2-40B4-BE49-F238E27FC236}">
+                <a16:creationId xmlns:a16="http://schemas.microsoft.com/office/drawing/2014/main" id="{1AA2693F-4318-40FA-9580-2FF0B9E9A892}"/>
+              </a:ext>
+            </a:extLst>
+          </p:cNvPr>
+          <p:cNvSpPr>
+            <a:spLocks xmlns:a="http://schemas.openxmlformats.org/drawingml/2006/main" noGrp="1"/>
+          </p:cNvSpPr>
+          <p:nvPr/>
+        </p:nvSpPr>
+        <p:spPr>
+          <a:xfrm xmlns:a="http://schemas.openxmlformats.org/drawingml/2006/main">
+            <a:off x="590550" y="1943100"/>
+            <a:ext cx="1504950" cy="171450"/>
+          </a:xfrm>
+          <a:prstGeom xmlns:a="http://schemas.openxmlformats.org/drawingml/2006/main" prst="rect">
+            <a:avLst/>
+          </a:prstGeom>
+        </p:spPr>
+        <p:txBody>
+          <a:bodyPr xmlns:a="http://schemas.openxmlformats.org/drawingml/2006/main" wrap="square" lIns="0" tIns="0" rIns="0" bIns="0" anchor="ctr">
+            <a:normAutofit fontScale="100000"/>
+          </a:bodyPr>
+          <a:lstStyle xmlns:a="http://schemas.openxmlformats.org/drawingml/2006/main"/>
+          <a:p xmlns:a="http://schemas.openxmlformats.org/drawingml/2006/main">
+            <a:pPr algn="ctr">
+              <a:defRPr sz="863" b="1">
+                <a:solidFill>
+                  <a:srgbClr val="1B7F4B"/>
+                </a:solidFill>
+                <a:latin typeface="Arial"/>
+                <a:ea typeface="Arial"/>
+                <a:cs typeface="Arial"/>
+              </a:defRPr>
+            </a:pPr>
+            <a:r>
+              <a:rPr sz="863" b="1">
+                <a:solidFill>
+                  <a:srgbClr val="1B7F4B"/>
+                </a:solidFill>
+                <a:latin typeface="Arial"/>
+                <a:ea typeface="Arial"/>
+                <a:cs typeface="Arial"/>
+              </a:rPr>
+              <a:t>CLIENT</a:t>
+            </a:r>
+          </a:p>
+        </p:txBody>
+      </p:sp>
+      <p:sp>
+        <p:nvSpPr>
+          <p:cNvPr id="17419" name="">
+            <a:extLst xmlns:a="http://schemas.openxmlformats.org/drawingml/2006/main">
+              <a:ext uri="{FF2B5EF4-FFF2-40B4-BE49-F238E27FC236}">
+                <a16:creationId xmlns:a16="http://schemas.microsoft.com/office/drawing/2014/main" id="{FB97F345-CCBC-4DC6-8D01-AC7DC4EB2173}"/>
+              </a:ext>
+            </a:extLst>
+          </p:cNvPr>
+          <p:cNvSpPr>
+            <a:spLocks xmlns:a="http://schemas.openxmlformats.org/drawingml/2006/main" noGrp="1"/>
+          </p:cNvSpPr>
+          <p:nvPr/>
+        </p:nvSpPr>
+        <p:spPr>
+          <a:xfrm xmlns:a="http://schemas.openxmlformats.org/drawingml/2006/main">
+            <a:off x="590550" y="2152650"/>
+            <a:ext cx="1504950" cy="1352550"/>
+          </a:xfrm>
+          <a:prstGeom xmlns:a="http://schemas.openxmlformats.org/drawingml/2006/main" prst="rect">
+            <a:avLst/>
+          </a:prstGeom>
+        </p:spPr>
+        <p:txBody>
+          <a:bodyPr xmlns:a="http://schemas.openxmlformats.org/drawingml/2006/main" wrap="square" lIns="0" tIns="0" rIns="0" bIns="0" anchor="t">
+            <a:normAutofit fontScale="100000"/>
+          </a:bodyPr>
+          <a:lstStyle xmlns:a="http://schemas.openxmlformats.org/drawingml/2006/main"/>
+          <a:p xmlns:a="http://schemas.openxmlformats.org/drawingml/2006/main">
+            <a:pPr algn="ctr">
+              <a:lnSpc>
+                <a:spcPct val="108000"/>
+              </a:lnSpc>
+              <a:buNone/>
+              <a:defRPr sz="788">
+                <a:solidFill>
+                  <a:srgbClr val="182230"/>
+                </a:solidFill>
+                <a:latin typeface="Arial"/>
+                <a:ea typeface="Arial"/>
+                <a:cs typeface="Arial"/>
+              </a:defRPr>
+            </a:pPr>
+            <a:r>
+              <a:rPr sz="788">
+                <a:solidFill>
+                  <a:srgbClr val="182230"/>
+                </a:solidFill>
+                <a:latin typeface="Arial"/>
+                <a:ea typeface="Arial"/>
+                <a:cs typeface="Arial"/>
+              </a:rPr>
+              <a:t>Planner web app</a:t>
+            </a:r>
+          </a:p>
+          <a:p xmlns:a="http://schemas.openxmlformats.org/drawingml/2006/main">
+            <a:pPr algn="ctr">
+              <a:lnSpc>
+                <a:spcPct val="108000"/>
+              </a:lnSpc>
+              <a:buNone/>
+              <a:defRPr sz="788">
+                <a:solidFill>
+                  <a:srgbClr val="182230"/>
+                </a:solidFill>
+                <a:latin typeface="Arial"/>
+                <a:ea typeface="Arial"/>
+                <a:cs typeface="Arial"/>
+              </a:defRPr>
+            </a:pPr>
+            <a:r>
+              <a:rPr sz="788">
+                <a:solidFill>
+                  <a:srgbClr val="182230"/>
+                </a:solidFill>
+                <a:latin typeface="Arial"/>
+                <a:ea typeface="Arial"/>
+                <a:cs typeface="Arial"/>
+              </a:rPr>
+              <a:t>(React + TypeScript)</a:t>
+            </a:r>
+          </a:p>
+          <a:p xmlns:a="http://schemas.openxmlformats.org/drawingml/2006/main">
+            <a:pPr algn="ctr">
+              <a:lnSpc>
+                <a:spcPct val="108000"/>
+              </a:lnSpc>
+              <a:buNone/>
+              <a:defRPr sz="788">
+                <a:solidFill>
+                  <a:srgbClr val="182230"/>
+                </a:solidFill>
+                <a:latin typeface="Arial"/>
+                <a:ea typeface="Arial"/>
+                <a:cs typeface="Arial"/>
+              </a:defRPr>
+            </a:pPr>
+            <a:r>
+              <a:rPr sz="788">
+                <a:solidFill>
+                  <a:srgbClr val="182230"/>
+                </a:solidFill>
+                <a:latin typeface="Arial"/>
+                <a:ea typeface="Arial"/>
+                <a:cs typeface="Arial"/>
+              </a:rPr>
+              <a:t>Field supervisor screen</a:t>
+            </a:r>
+          </a:p>
+        </p:txBody>
+      </p:sp>
+      <p:sp>
+        <p:nvSpPr>
+          <p:cNvPr id="17420" name="">
+            <a:extLst xmlns:a="http://schemas.openxmlformats.org/drawingml/2006/main">
+              <a:ext uri="{FF2B5EF4-FFF2-40B4-BE49-F238E27FC236}">
+                <a16:creationId xmlns:a16="http://schemas.microsoft.com/office/drawing/2014/main" id="{618BABF7-819A-49A0-B359-8F407FC9020A}"/>
+              </a:ext>
+            </a:extLst>
+          </p:cNvPr>
+          <p:cNvSpPr>
+            <a:spLocks xmlns:a="http://schemas.openxmlformats.org/drawingml/2006/main" noGrp="1"/>
+          </p:cNvSpPr>
+          <p:nvPr/>
+        </p:nvSpPr>
+        <p:spPr>
+          <a:xfrm xmlns:a="http://schemas.openxmlformats.org/drawingml/2006/main">
+            <a:off x="2400300" y="1847850"/>
+            <a:ext cx="1695450" cy="1733550"/>
+          </a:xfrm>
+          <a:prstGeom xmlns:a="http://schemas.openxmlformats.org/drawingml/2006/main" prst="roundRect">
+            <a:avLst>
+              <a:gd name="adj" fmla="val 6180"/>
+            </a:avLst>
+          </a:prstGeom>
+          <a:solidFill xmlns:a="http://schemas.openxmlformats.org/drawingml/2006/main">
+            <a:srgbClr val="FBF0FA"/>
+          </a:solidFill>
+          <a:ln xmlns:a="http://schemas.openxmlformats.org/drawingml/2006/main" w="12383">
+            <a:solidFill>
+              <a:srgbClr val="D9A9D2"/>
+            </a:solidFill>
+            <a:prstDash val="solid"/>
+          </a:ln>
+        </p:spPr>
+        <p:txBody xmlns:a="http://schemas.openxmlformats.org/drawingml/2006/main">
+          <a:bodyPr/>
+          <a:p/>
+        </p:txBody>
+      </p:sp>
+      <p:sp>
+        <p:nvSpPr>
+          <p:cNvPr id="17421" name="">
+            <a:extLst xmlns:a="http://schemas.openxmlformats.org/drawingml/2006/main">
+              <a:ext uri="{FF2B5EF4-FFF2-40B4-BE49-F238E27FC236}">
+                <a16:creationId xmlns:a16="http://schemas.microsoft.com/office/drawing/2014/main" id="{039D652E-2C0C-488B-B7C9-8160B423D721}"/>
+              </a:ext>
+            </a:extLst>
+          </p:cNvPr>
+          <p:cNvSpPr>
+            <a:spLocks xmlns:a="http://schemas.openxmlformats.org/drawingml/2006/main" noGrp="1"/>
+          </p:cNvSpPr>
+          <p:nvPr/>
+        </p:nvSpPr>
+        <p:spPr>
+          <a:xfrm xmlns:a="http://schemas.openxmlformats.org/drawingml/2006/main">
+            <a:off x="2495550" y="1943100"/>
+            <a:ext cx="1504950" cy="171450"/>
+          </a:xfrm>
+          <a:prstGeom xmlns:a="http://schemas.openxmlformats.org/drawingml/2006/main" prst="rect">
+            <a:avLst/>
+          </a:prstGeom>
+        </p:spPr>
+        <p:txBody>
+          <a:bodyPr xmlns:a="http://schemas.openxmlformats.org/drawingml/2006/main" wrap="square" lIns="0" tIns="0" rIns="0" bIns="0" anchor="ctr">
+            <a:normAutofit fontScale="100000"/>
+          </a:bodyPr>
+          <a:lstStyle xmlns:a="http://schemas.openxmlformats.org/drawingml/2006/main"/>
+          <a:p xmlns:a="http://schemas.openxmlformats.org/drawingml/2006/main">
+            <a:pPr algn="ctr">
+              <a:defRPr sz="863" b="1">
+                <a:solidFill>
+                  <a:srgbClr val="8E3C82"/>
+                </a:solidFill>
+                <a:latin typeface="Arial"/>
+                <a:ea typeface="Arial"/>
+                <a:cs typeface="Arial"/>
+              </a:defRPr>
+            </a:pPr>
+            <a:r>
+              <a:rPr sz="863" b="1">
+                <a:solidFill>
+                  <a:srgbClr val="8E3C82"/>
+                </a:solidFill>
+                <a:latin typeface="Arial"/>
+                <a:ea typeface="Arial"/>
+                <a:cs typeface="Arial"/>
+              </a:rPr>
+              <a:t>API</a:t>
+            </a:r>
+          </a:p>
+        </p:txBody>
+      </p:sp>
+      <p:sp>
+        <p:nvSpPr>
+          <p:cNvPr id="17422" name="">
+            <a:extLst xmlns:a="http://schemas.openxmlformats.org/drawingml/2006/main">
+              <a:ext uri="{FF2B5EF4-FFF2-40B4-BE49-F238E27FC236}">
+                <a16:creationId xmlns:a16="http://schemas.microsoft.com/office/drawing/2014/main" id="{B2B0CC9F-DBCE-4415-ABBE-3A3DEFDD52BC}"/>
+              </a:ext>
+            </a:extLst>
+          </p:cNvPr>
+          <p:cNvSpPr>
+            <a:spLocks xmlns:a="http://schemas.openxmlformats.org/drawingml/2006/main" noGrp="1"/>
+          </p:cNvSpPr>
+          <p:nvPr/>
+        </p:nvSpPr>
+        <p:spPr>
+          <a:xfrm xmlns:a="http://schemas.openxmlformats.org/drawingml/2006/main">
+            <a:off x="2495550" y="2152650"/>
+            <a:ext cx="1504950" cy="1352550"/>
+          </a:xfrm>
+          <a:prstGeom xmlns:a="http://schemas.openxmlformats.org/drawingml/2006/main" prst="rect">
+            <a:avLst/>
+          </a:prstGeom>
+        </p:spPr>
+        <p:txBody>
+          <a:bodyPr xmlns:a="http://schemas.openxmlformats.org/drawingml/2006/main" wrap="square" lIns="0" tIns="0" rIns="0" bIns="0" anchor="t">
+            <a:normAutofit fontScale="100000"/>
+          </a:bodyPr>
+          <a:lstStyle xmlns:a="http://schemas.openxmlformats.org/drawingml/2006/main"/>
+          <a:p xmlns:a="http://schemas.openxmlformats.org/drawingml/2006/main">
+            <a:pPr algn="ctr">
+              <a:lnSpc>
+                <a:spcPct val="108000"/>
+              </a:lnSpc>
+              <a:buNone/>
+              <a:defRPr sz="788">
+                <a:solidFill>
+                  <a:srgbClr val="182230"/>
+                </a:solidFill>
+                <a:latin typeface="Arial"/>
+                <a:ea typeface="Arial"/>
+                <a:cs typeface="Arial"/>
+              </a:defRPr>
+            </a:pPr>
+            <a:r>
+              <a:rPr sz="788">
+                <a:solidFill>
+                  <a:srgbClr val="182230"/>
+                </a:solidFill>
+                <a:latin typeface="Arial"/>
+                <a:ea typeface="Arial"/>
+                <a:cs typeface="Arial"/>
+              </a:rPr>
+              <a:t>FastAPI</a:t>
+            </a:r>
+          </a:p>
+          <a:p xmlns:a="http://schemas.openxmlformats.org/drawingml/2006/main">
+            <a:pPr algn="ctr">
+              <a:lnSpc>
+                <a:spcPct val="108000"/>
+              </a:lnSpc>
+              <a:buNone/>
+              <a:defRPr sz="788">
+                <a:solidFill>
+                  <a:srgbClr val="182230"/>
+                </a:solidFill>
+                <a:latin typeface="Arial"/>
+                <a:ea typeface="Arial"/>
+                <a:cs typeface="Arial"/>
+              </a:defRPr>
+            </a:pPr>
+            <a:r>
+              <a:rPr sz="788">
+                <a:solidFill>
+                  <a:srgbClr val="182230"/>
+                </a:solidFill>
+                <a:latin typeface="Arial"/>
+                <a:ea typeface="Arial"/>
+                <a:cs typeface="Arial"/>
+              </a:rPr>
+              <a:t>46 HTTP routes</a:t>
+            </a:r>
+          </a:p>
+          <a:p xmlns:a="http://schemas.openxmlformats.org/drawingml/2006/main">
+            <a:pPr algn="ctr">
+              <a:lnSpc>
+                <a:spcPct val="108000"/>
+              </a:lnSpc>
+              <a:buNone/>
+              <a:defRPr sz="788">
+                <a:solidFill>
+                  <a:srgbClr val="182230"/>
+                </a:solidFill>
+                <a:latin typeface="Arial"/>
+                <a:ea typeface="Arial"/>
+                <a:cs typeface="Arial"/>
+              </a:defRPr>
+            </a:pPr>
+            <a:r>
+              <a:rPr sz="788">
+                <a:solidFill>
+                  <a:srgbClr val="182230"/>
+                </a:solidFill>
+                <a:latin typeface="Arial"/>
+                <a:ea typeface="Arial"/>
+                <a:cs typeface="Arial"/>
+              </a:rPr>
+              <a:t>live OpenAPI docs</a:t>
+            </a:r>
+          </a:p>
+        </p:txBody>
+      </p:sp>
+      <p:sp>
+        <p:nvSpPr>
+          <p:cNvPr id="17423" name="">
+            <a:extLst xmlns:a="http://schemas.openxmlformats.org/drawingml/2006/main">
+              <a:ext uri="{FF2B5EF4-FFF2-40B4-BE49-F238E27FC236}">
+                <a16:creationId xmlns:a16="http://schemas.microsoft.com/office/drawing/2014/main" id="{DE36B3A2-D41B-4F5F-B15E-FE51D5E68E70}"/>
+              </a:ext>
+            </a:extLst>
+          </p:cNvPr>
+          <p:cNvSpPr>
+            <a:spLocks xmlns:a="http://schemas.openxmlformats.org/drawingml/2006/main" noGrp="1"/>
+          </p:cNvSpPr>
+          <p:nvPr/>
+        </p:nvSpPr>
+        <p:spPr>
+          <a:xfrm xmlns:a="http://schemas.openxmlformats.org/drawingml/2006/main">
+            <a:off x="4305300" y="1847850"/>
+            <a:ext cx="1695450" cy="1733550"/>
+          </a:xfrm>
+          <a:prstGeom xmlns:a="http://schemas.openxmlformats.org/drawingml/2006/main" prst="roundRect">
+            <a:avLst>
+              <a:gd name="adj" fmla="val 6180"/>
+            </a:avLst>
+          </a:prstGeom>
+          <a:solidFill xmlns:a="http://schemas.openxmlformats.org/drawingml/2006/main">
+            <a:srgbClr val="FFFAF0"/>
+          </a:solidFill>
+          <a:ln xmlns:a="http://schemas.openxmlformats.org/drawingml/2006/main" w="12383">
+            <a:solidFill>
+              <a:srgbClr val="E3B968"/>
+            </a:solidFill>
+            <a:prstDash val="solid"/>
+          </a:ln>
+        </p:spPr>
+        <p:txBody xmlns:a="http://schemas.openxmlformats.org/drawingml/2006/main">
+          <a:bodyPr/>
+          <a:p/>
+        </p:txBody>
+      </p:sp>
+      <p:sp>
+        <p:nvSpPr>
+          <p:cNvPr id="17424" name="">
+            <a:extLst xmlns:a="http://schemas.openxmlformats.org/drawingml/2006/main">
+              <a:ext uri="{FF2B5EF4-FFF2-40B4-BE49-F238E27FC236}">
+                <a16:creationId xmlns:a16="http://schemas.microsoft.com/office/drawing/2014/main" id="{00798BE6-0D97-4C6F-B362-30F052A0212B}"/>
+              </a:ext>
+            </a:extLst>
+          </p:cNvPr>
+          <p:cNvSpPr>
+            <a:spLocks xmlns:a="http://schemas.openxmlformats.org/drawingml/2006/main" noGrp="1"/>
+          </p:cNvSpPr>
+          <p:nvPr/>
+        </p:nvSpPr>
+        <p:spPr>
+          <a:xfrm xmlns:a="http://schemas.openxmlformats.org/drawingml/2006/main">
+            <a:off x="4400550" y="1943100"/>
+            <a:ext cx="1504950" cy="171450"/>
+          </a:xfrm>
+          <a:prstGeom xmlns:a="http://schemas.openxmlformats.org/drawingml/2006/main" prst="rect">
+            <a:avLst/>
+          </a:prstGeom>
+        </p:spPr>
+        <p:txBody>
+          <a:bodyPr xmlns:a="http://schemas.openxmlformats.org/drawingml/2006/main" wrap="square" lIns="0" tIns="0" rIns="0" bIns="0" anchor="ctr">
+            <a:normAutofit fontScale="100000"/>
+          </a:bodyPr>
+          <a:lstStyle xmlns:a="http://schemas.openxmlformats.org/drawingml/2006/main"/>
+          <a:p xmlns:a="http://schemas.openxmlformats.org/drawingml/2006/main">
+            <a:pPr algn="ctr">
+              <a:defRPr sz="863" b="1">
+                <a:solidFill>
+                  <a:srgbClr val="C2660A"/>
+                </a:solidFill>
+                <a:latin typeface="Arial"/>
+                <a:ea typeface="Arial"/>
+                <a:cs typeface="Arial"/>
+              </a:defRPr>
+            </a:pPr>
+            <a:r>
+              <a:rPr sz="863" b="1">
+                <a:solidFill>
+                  <a:srgbClr val="C2660A"/>
+                </a:solidFill>
+                <a:latin typeface="Arial"/>
+                <a:ea typeface="Arial"/>
+                <a:cs typeface="Arial"/>
+              </a:rPr>
+              <a:t>ENGINE</a:t>
+            </a:r>
+          </a:p>
+        </p:txBody>
+      </p:sp>
+      <p:sp>
+        <p:nvSpPr>
+          <p:cNvPr id="17425" name="">
+            <a:extLst xmlns:a="http://schemas.openxmlformats.org/drawingml/2006/main">
+              <a:ext uri="{FF2B5EF4-FFF2-40B4-BE49-F238E27FC236}">
+                <a16:creationId xmlns:a16="http://schemas.microsoft.com/office/drawing/2014/main" id="{04FFF4EC-8FC3-4687-A202-AA3A3E7EBB97}"/>
+              </a:ext>
+            </a:extLst>
+          </p:cNvPr>
+          <p:cNvSpPr>
+            <a:spLocks xmlns:a="http://schemas.openxmlformats.org/drawingml/2006/main" noGrp="1"/>
+          </p:cNvSpPr>
+          <p:nvPr/>
+        </p:nvSpPr>
+        <p:spPr>
+          <a:xfrm xmlns:a="http://schemas.openxmlformats.org/drawingml/2006/main">
+            <a:off x="4400550" y="2152650"/>
+            <a:ext cx="1504950" cy="1352550"/>
+          </a:xfrm>
+          <a:prstGeom xmlns:a="http://schemas.openxmlformats.org/drawingml/2006/main" prst="rect">
+            <a:avLst/>
+          </a:prstGeom>
+        </p:spPr>
+        <p:txBody>
+          <a:bodyPr xmlns:a="http://schemas.openxmlformats.org/drawingml/2006/main" wrap="square" lIns="0" tIns="0" rIns="0" bIns="0" anchor="t">
+            <a:normAutofit fontScale="100000"/>
+          </a:bodyPr>
+          <a:lstStyle xmlns:a="http://schemas.openxmlformats.org/drawingml/2006/main"/>
+          <a:p xmlns:a="http://schemas.openxmlformats.org/drawingml/2006/main">
+            <a:pPr algn="ctr">
+              <a:lnSpc>
+                <a:spcPct val="108000"/>
+              </a:lnSpc>
+              <a:buNone/>
+              <a:defRPr sz="788">
+                <a:solidFill>
+                  <a:srgbClr val="182230"/>
+                </a:solidFill>
+                <a:latin typeface="Arial"/>
+                <a:ea typeface="Arial"/>
+                <a:cs typeface="Arial"/>
+              </a:defRPr>
+            </a:pPr>
+            <a:r>
+              <a:rPr sz="788">
+                <a:solidFill>
+                  <a:srgbClr val="182230"/>
+                </a:solidFill>
+                <a:latin typeface="Arial"/>
+                <a:ea typeface="Arial"/>
+                <a:cs typeface="Arial"/>
+              </a:rPr>
+              <a:t>Extraction rules</a:t>
+            </a:r>
+          </a:p>
+          <a:p xmlns:a="http://schemas.openxmlformats.org/drawingml/2006/main">
+            <a:pPr algn="ctr">
+              <a:lnSpc>
+                <a:spcPct val="108000"/>
+              </a:lnSpc>
+              <a:buNone/>
+              <a:defRPr sz="788">
+                <a:solidFill>
+                  <a:srgbClr val="182230"/>
+                </a:solidFill>
+                <a:latin typeface="Arial"/>
+                <a:ea typeface="Arial"/>
+                <a:cs typeface="Arial"/>
+              </a:defRPr>
+            </a:pPr>
+            <a:r>
+              <a:rPr sz="788">
+                <a:solidFill>
+                  <a:srgbClr val="182230"/>
+                </a:solidFill>
+                <a:latin typeface="Arial"/>
+                <a:ea typeface="Arial"/>
+                <a:cs typeface="Arial"/>
+              </a:rPr>
+              <a:t>Hybrid matcher</a:t>
+            </a:r>
+          </a:p>
+          <a:p xmlns:a="http://schemas.openxmlformats.org/drawingml/2006/main">
+            <a:pPr algn="ctr">
+              <a:lnSpc>
+                <a:spcPct val="108000"/>
+              </a:lnSpc>
+              <a:buNone/>
+              <a:defRPr sz="788">
+                <a:solidFill>
+                  <a:srgbClr val="182230"/>
+                </a:solidFill>
+                <a:latin typeface="Arial"/>
+                <a:ea typeface="Arial"/>
+                <a:cs typeface="Arial"/>
+              </a:defRPr>
+            </a:pPr>
+            <a:r>
+              <a:rPr sz="788">
+                <a:solidFill>
+                  <a:srgbClr val="182230"/>
+                </a:solidFill>
+                <a:latin typeface="Arial"/>
+                <a:ea typeface="Arial"/>
+                <a:cs typeface="Arial"/>
+              </a:rPr>
+              <a:t>Confidence policy</a:t>
+            </a:r>
+          </a:p>
+          <a:p xmlns:a="http://schemas.openxmlformats.org/drawingml/2006/main">
+            <a:r>
+              <a:t/>
+            </a:r>
+          </a:p>
+          <a:p xmlns:a="http://schemas.openxmlformats.org/drawingml/2006/main">
+            <a:pPr algn="ctr">
+              <a:lnSpc>
+                <a:spcPct val="108000"/>
+              </a:lnSpc>
+              <a:buNone/>
+              <a:defRPr sz="788">
+                <a:solidFill>
+                  <a:srgbClr val="182230"/>
+                </a:solidFill>
+                <a:latin typeface="Arial"/>
+                <a:ea typeface="Arial"/>
+                <a:cs typeface="Arial"/>
+              </a:defRPr>
+            </a:pPr>
+            <a:r>
+              <a:rPr sz="788">
+                <a:solidFill>
+                  <a:srgbClr val="182230"/>
+                </a:solidFill>
+                <a:latin typeface="Arial"/>
+                <a:ea typeface="Arial"/>
+                <a:cs typeface="Arial"/>
+              </a:rPr>
+              <a:t>Local LLM (Ollama):</a:t>
+            </a:r>
+          </a:p>
+          <a:p xmlns:a="http://schemas.openxmlformats.org/drawingml/2006/main">
+            <a:pPr algn="ctr">
+              <a:lnSpc>
+                <a:spcPct val="108000"/>
+              </a:lnSpc>
+              <a:buNone/>
+              <a:defRPr sz="788">
+                <a:solidFill>
+                  <a:srgbClr val="182230"/>
+                </a:solidFill>
+                <a:latin typeface="Arial"/>
+                <a:ea typeface="Arial"/>
+                <a:cs typeface="Arial"/>
+              </a:defRPr>
+            </a:pPr>
+            <a:r>
+              <a:rPr sz="788">
+                <a:solidFill>
+                  <a:srgbClr val="182230"/>
+                </a:solidFill>
+                <a:latin typeface="Arial"/>
+                <a:ea typeface="Arial"/>
+                <a:cs typeface="Arial"/>
+              </a:rPr>
+              <a:t>optional, OFF by default</a:t>
+            </a:r>
+          </a:p>
+        </p:txBody>
+      </p:sp>
+      <p:sp>
+        <p:nvSpPr>
+          <p:cNvPr id="17426" name="">
+            <a:extLst xmlns:a="http://schemas.openxmlformats.org/drawingml/2006/main">
+              <a:ext uri="{FF2B5EF4-FFF2-40B4-BE49-F238E27FC236}">
+                <a16:creationId xmlns:a16="http://schemas.microsoft.com/office/drawing/2014/main" id="{2F1F4F1F-9620-476C-A265-F06DC91A6A27}"/>
+              </a:ext>
+            </a:extLst>
+          </p:cNvPr>
+          <p:cNvSpPr>
+            <a:spLocks xmlns:a="http://schemas.openxmlformats.org/drawingml/2006/main" noGrp="1"/>
+          </p:cNvSpPr>
+          <p:nvPr/>
+        </p:nvSpPr>
+        <p:spPr>
+          <a:xfrm xmlns:a="http://schemas.openxmlformats.org/drawingml/2006/main">
+            <a:off x="6210300" y="1847850"/>
+            <a:ext cx="1695450" cy="1733550"/>
+          </a:xfrm>
+          <a:prstGeom xmlns:a="http://schemas.openxmlformats.org/drawingml/2006/main" prst="roundRect">
+            <a:avLst>
+              <a:gd name="adj" fmla="val 6180"/>
+            </a:avLst>
+          </a:prstGeom>
+          <a:solidFill xmlns:a="http://schemas.openxmlformats.org/drawingml/2006/main">
+            <a:srgbClr val="EAF3FB"/>
+          </a:solidFill>
+          <a:ln xmlns:a="http://schemas.openxmlformats.org/drawingml/2006/main" w="12383">
+            <a:solidFill>
+              <a:srgbClr val="9DC2E6"/>
+            </a:solidFill>
+            <a:prstDash val="solid"/>
+          </a:ln>
+        </p:spPr>
+        <p:txBody xmlns:a="http://schemas.openxmlformats.org/drawingml/2006/main">
+          <a:bodyPr/>
+          <a:p/>
+        </p:txBody>
+      </p:sp>
+      <p:sp>
+        <p:nvSpPr>
+          <p:cNvPr id="17427" name="">
+            <a:extLst xmlns:a="http://schemas.openxmlformats.org/drawingml/2006/main">
+              <a:ext uri="{FF2B5EF4-FFF2-40B4-BE49-F238E27FC236}">
+                <a16:creationId xmlns:a16="http://schemas.microsoft.com/office/drawing/2014/main" id="{C553AC4C-6450-49FC-8923-71990FC057CA}"/>
+              </a:ext>
+            </a:extLst>
+          </p:cNvPr>
+          <p:cNvSpPr>
+            <a:spLocks xmlns:a="http://schemas.openxmlformats.org/drawingml/2006/main" noGrp="1"/>
+          </p:cNvSpPr>
+          <p:nvPr/>
+        </p:nvSpPr>
+        <p:spPr>
+          <a:xfrm xmlns:a="http://schemas.openxmlformats.org/drawingml/2006/main">
+            <a:off x="6305550" y="1943100"/>
+            <a:ext cx="1504950" cy="171450"/>
+          </a:xfrm>
+          <a:prstGeom xmlns:a="http://schemas.openxmlformats.org/drawingml/2006/main" prst="rect">
+            <a:avLst/>
+          </a:prstGeom>
+        </p:spPr>
+        <p:txBody>
+          <a:bodyPr xmlns:a="http://schemas.openxmlformats.org/drawingml/2006/main" wrap="square" lIns="0" tIns="0" rIns="0" bIns="0" anchor="ctr">
+            <a:normAutofit fontScale="100000"/>
+          </a:bodyPr>
+          <a:lstStyle xmlns:a="http://schemas.openxmlformats.org/drawingml/2006/main"/>
+          <a:p xmlns:a="http://schemas.openxmlformats.org/drawingml/2006/main">
+            <a:pPr algn="ctr">
+              <a:defRPr sz="863" b="1">
+                <a:solidFill>
+                  <a:srgbClr val="123F78"/>
+                </a:solidFill>
+                <a:latin typeface="Arial"/>
+                <a:ea typeface="Arial"/>
+                <a:cs typeface="Arial"/>
+              </a:defRPr>
+            </a:pPr>
+            <a:r>
+              <a:rPr sz="863" b="1">
+                <a:solidFill>
+                  <a:srgbClr val="123F78"/>
+                </a:solidFill>
+                <a:latin typeface="Arial"/>
+                <a:ea typeface="Arial"/>
+                <a:cs typeface="Arial"/>
+              </a:rPr>
+              <a:t>DATA</a:t>
+            </a:r>
+          </a:p>
+        </p:txBody>
+      </p:sp>
+      <p:sp>
+        <p:nvSpPr>
+          <p:cNvPr id="17428" name="">
+            <a:extLst xmlns:a="http://schemas.openxmlformats.org/drawingml/2006/main">
+              <a:ext uri="{FF2B5EF4-FFF2-40B4-BE49-F238E27FC236}">
+                <a16:creationId xmlns:a16="http://schemas.microsoft.com/office/drawing/2014/main" id="{36DA1C48-B1C8-47CA-8592-A7724A512004}"/>
+              </a:ext>
+            </a:extLst>
+          </p:cNvPr>
+          <p:cNvSpPr>
+            <a:spLocks xmlns:a="http://schemas.openxmlformats.org/drawingml/2006/main" noGrp="1"/>
+          </p:cNvSpPr>
+          <p:nvPr/>
+        </p:nvSpPr>
+        <p:spPr>
+          <a:xfrm xmlns:a="http://schemas.openxmlformats.org/drawingml/2006/main">
+            <a:off x="6305550" y="2152650"/>
+            <a:ext cx="1504950" cy="1352550"/>
+          </a:xfrm>
+          <a:prstGeom xmlns:a="http://schemas.openxmlformats.org/drawingml/2006/main" prst="rect">
+            <a:avLst/>
+          </a:prstGeom>
+        </p:spPr>
+        <p:txBody>
+          <a:bodyPr xmlns:a="http://schemas.openxmlformats.org/drawingml/2006/main" wrap="square" lIns="0" tIns="0" rIns="0" bIns="0" anchor="t">
+            <a:normAutofit fontScale="100000"/>
+          </a:bodyPr>
+          <a:lstStyle xmlns:a="http://schemas.openxmlformats.org/drawingml/2006/main"/>
+          <a:p xmlns:a="http://schemas.openxmlformats.org/drawingml/2006/main">
+            <a:pPr algn="ctr">
+              <a:lnSpc>
+                <a:spcPct val="108000"/>
+              </a:lnSpc>
+              <a:buNone/>
+              <a:defRPr sz="788">
+                <a:solidFill>
+                  <a:srgbClr val="182230"/>
+                </a:solidFill>
+                <a:latin typeface="Arial"/>
+                <a:ea typeface="Arial"/>
+                <a:cs typeface="Arial"/>
+              </a:defRPr>
+            </a:pPr>
+            <a:r>
+              <a:rPr sz="788">
+                <a:solidFill>
+                  <a:srgbClr val="182230"/>
+                </a:solidFill>
+                <a:latin typeface="Arial"/>
+                <a:ea typeface="Arial"/>
+                <a:cs typeface="Arial"/>
+              </a:rPr>
+              <a:t>SQLite</a:t>
+            </a:r>
+          </a:p>
+          <a:p xmlns:a="http://schemas.openxmlformats.org/drawingml/2006/main">
+            <a:pPr algn="ctr">
+              <a:lnSpc>
+                <a:spcPct val="108000"/>
+              </a:lnSpc>
+              <a:buNone/>
+              <a:defRPr sz="788">
+                <a:solidFill>
+                  <a:srgbClr val="182230"/>
+                </a:solidFill>
+                <a:latin typeface="Arial"/>
+                <a:ea typeface="Arial"/>
+                <a:cs typeface="Arial"/>
+              </a:defRPr>
+            </a:pPr>
+            <a:r>
+              <a:rPr sz="788">
+                <a:solidFill>
+                  <a:srgbClr val="182230"/>
+                </a:solidFill>
+                <a:latin typeface="Arial"/>
+                <a:ea typeface="Arial"/>
+                <a:cs typeface="Arial"/>
+              </a:rPr>
+              <a:t>Actuals, review queue</a:t>
+            </a:r>
+          </a:p>
+          <a:p xmlns:a="http://schemas.openxmlformats.org/drawingml/2006/main">
+            <a:pPr algn="ctr">
+              <a:lnSpc>
+                <a:spcPct val="108000"/>
+              </a:lnSpc>
+              <a:buNone/>
+              <a:defRPr sz="788">
+                <a:solidFill>
+                  <a:srgbClr val="182230"/>
+                </a:solidFill>
+                <a:latin typeface="Arial"/>
+                <a:ea typeface="Arial"/>
+                <a:cs typeface="Arial"/>
+              </a:defRPr>
+            </a:pPr>
+            <a:r>
+              <a:rPr sz="788">
+                <a:solidFill>
+                  <a:srgbClr val="182230"/>
+                </a:solidFill>
+                <a:latin typeface="Arial"/>
+                <a:ea typeface="Arial"/>
+                <a:cs typeface="Arial"/>
+              </a:rPr>
+              <a:t>Append-only audit</a:t>
+            </a:r>
+          </a:p>
+        </p:txBody>
+      </p:sp>
+      <p:sp>
+        <p:nvSpPr>
+          <p:cNvPr id="17429" name="">
+            <a:extLst xmlns:a="http://schemas.openxmlformats.org/drawingml/2006/main">
+              <a:ext uri="{FF2B5EF4-FFF2-40B4-BE49-F238E27FC236}">
+                <a16:creationId xmlns:a16="http://schemas.microsoft.com/office/drawing/2014/main" id="{962BAD83-716D-4718-B490-512B99D2719C}"/>
+              </a:ext>
+            </a:extLst>
+          </p:cNvPr>
+          <p:cNvSpPr>
+            <a:spLocks xmlns:a="http://schemas.openxmlformats.org/drawingml/2006/main" noGrp="1"/>
+          </p:cNvSpPr>
+          <p:nvPr/>
+        </p:nvSpPr>
+        <p:spPr>
+          <a:xfrm xmlns:a="http://schemas.openxmlformats.org/drawingml/2006/main">
+            <a:off x="8115300" y="1847850"/>
+            <a:ext cx="1695450" cy="1733550"/>
+          </a:xfrm>
+          <a:prstGeom xmlns:a="http://schemas.openxmlformats.org/drawingml/2006/main" prst="roundRect">
+            <a:avLst>
+              <a:gd name="adj" fmla="val 6180"/>
+            </a:avLst>
+          </a:prstGeom>
+          <a:solidFill xmlns:a="http://schemas.openxmlformats.org/drawingml/2006/main">
+            <a:srgbClr val="F4F8FC"/>
+          </a:solidFill>
+          <a:ln xmlns:a="http://schemas.openxmlformats.org/drawingml/2006/main" w="12383">
+            <a:solidFill>
+              <a:srgbClr val="C7D3E3"/>
+            </a:solidFill>
+            <a:prstDash val="solid"/>
+          </a:ln>
+        </p:spPr>
+        <p:txBody xmlns:a="http://schemas.openxmlformats.org/drawingml/2006/main">
+          <a:bodyPr/>
+          <a:p/>
+        </p:txBody>
+      </p:sp>
+      <p:sp>
+        <p:nvSpPr>
+          <p:cNvPr id="17430" name="">
+            <a:extLst xmlns:a="http://schemas.openxmlformats.org/drawingml/2006/main">
+              <a:ext uri="{FF2B5EF4-FFF2-40B4-BE49-F238E27FC236}">
+                <a16:creationId xmlns:a16="http://schemas.microsoft.com/office/drawing/2014/main" id="{BD038287-9EA4-48E5-8029-0E5F3970DEE5}"/>
+              </a:ext>
+            </a:extLst>
+          </p:cNvPr>
+          <p:cNvSpPr>
+            <a:spLocks xmlns:a="http://schemas.openxmlformats.org/drawingml/2006/main" noGrp="1"/>
+          </p:cNvSpPr>
+          <p:nvPr/>
+        </p:nvSpPr>
+        <p:spPr>
+          <a:xfrm xmlns:a="http://schemas.openxmlformats.org/drawingml/2006/main">
+            <a:off x="8210550" y="1943100"/>
+            <a:ext cx="1504950" cy="171450"/>
+          </a:xfrm>
+          <a:prstGeom xmlns:a="http://schemas.openxmlformats.org/drawingml/2006/main" prst="rect">
+            <a:avLst/>
+          </a:prstGeom>
+        </p:spPr>
+        <p:txBody>
+          <a:bodyPr xmlns:a="http://schemas.openxmlformats.org/drawingml/2006/main" wrap="square" lIns="0" tIns="0" rIns="0" bIns="0" anchor="ctr">
+            <a:normAutofit fontScale="100000"/>
+          </a:bodyPr>
+          <a:lstStyle xmlns:a="http://schemas.openxmlformats.org/drawingml/2006/main"/>
+          <a:p xmlns:a="http://schemas.openxmlformats.org/drawingml/2006/main">
+            <a:pPr algn="ctr">
+              <a:defRPr sz="863" b="1">
+                <a:solidFill>
+                  <a:srgbClr val="123F78"/>
+                </a:solidFill>
+                <a:latin typeface="Arial"/>
+                <a:ea typeface="Arial"/>
+                <a:cs typeface="Arial"/>
+              </a:defRPr>
+            </a:pPr>
+            <a:r>
+              <a:rPr sz="863" b="1">
+                <a:solidFill>
+                  <a:srgbClr val="123F78"/>
+                </a:solidFill>
+                <a:latin typeface="Arial"/>
+                <a:ea typeface="Arial"/>
+                <a:cs typeface="Arial"/>
+              </a:rPr>
+              <a:t>INTEROP</a:t>
+            </a:r>
+          </a:p>
+        </p:txBody>
+      </p:sp>
+      <p:sp>
+        <p:nvSpPr>
+          <p:cNvPr id="17431" name="">
+            <a:extLst xmlns:a="http://schemas.openxmlformats.org/drawingml/2006/main">
+              <a:ext uri="{FF2B5EF4-FFF2-40B4-BE49-F238E27FC236}">
+                <a16:creationId xmlns:a16="http://schemas.microsoft.com/office/drawing/2014/main" id="{658D0B16-4703-4682-B2BC-EBC33F00140A}"/>
+              </a:ext>
+            </a:extLst>
+          </p:cNvPr>
+          <p:cNvSpPr>
+            <a:spLocks xmlns:a="http://schemas.openxmlformats.org/drawingml/2006/main" noGrp="1"/>
+          </p:cNvSpPr>
+          <p:nvPr/>
+        </p:nvSpPr>
+        <p:spPr>
+          <a:xfrm xmlns:a="http://schemas.openxmlformats.org/drawingml/2006/main">
+            <a:off x="8210550" y="2152650"/>
+            <a:ext cx="1504950" cy="1352550"/>
+          </a:xfrm>
+          <a:prstGeom xmlns:a="http://schemas.openxmlformats.org/drawingml/2006/main" prst="rect">
+            <a:avLst/>
+          </a:prstGeom>
+        </p:spPr>
+        <p:txBody>
+          <a:bodyPr xmlns:a="http://schemas.openxmlformats.org/drawingml/2006/main" wrap="square" lIns="0" tIns="0" rIns="0" bIns="0" anchor="t">
+            <a:normAutofit fontScale="100000"/>
+          </a:bodyPr>
+          <a:lstStyle xmlns:a="http://schemas.openxmlformats.org/drawingml/2006/main"/>
+          <a:p xmlns:a="http://schemas.openxmlformats.org/drawingml/2006/main">
+            <a:pPr algn="ctr">
+              <a:lnSpc>
+                <a:spcPct val="108000"/>
+              </a:lnSpc>
+              <a:buNone/>
+              <a:defRPr sz="788">
+                <a:solidFill>
+                  <a:srgbClr val="182230"/>
+                </a:solidFill>
+                <a:latin typeface="Arial"/>
+                <a:ea typeface="Arial"/>
+                <a:cs typeface="Arial"/>
+              </a:defRPr>
+            </a:pPr>
+            <a:r>
+              <a:rPr sz="788">
+                <a:solidFill>
+                  <a:srgbClr val="182230"/>
+                </a:solidFill>
+                <a:latin typeface="Arial"/>
+                <a:ea typeface="Arial"/>
+                <a:cs typeface="Arial"/>
+              </a:rPr>
+              <a:t>Import: P6 PMXML,</a:t>
+            </a:r>
+          </a:p>
+          <a:p xmlns:a="http://schemas.openxmlformats.org/drawingml/2006/main">
+            <a:pPr algn="ctr">
+              <a:lnSpc>
+                <a:spcPct val="108000"/>
+              </a:lnSpc>
+              <a:buNone/>
+              <a:defRPr sz="788">
+                <a:solidFill>
+                  <a:srgbClr val="182230"/>
+                </a:solidFill>
+                <a:latin typeface="Arial"/>
+                <a:ea typeface="Arial"/>
+                <a:cs typeface="Arial"/>
+              </a:defRPr>
+            </a:pPr>
+            <a:r>
+              <a:rPr sz="788">
+                <a:solidFill>
+                  <a:srgbClr val="182230"/>
+                </a:solidFill>
+                <a:latin typeface="Arial"/>
+                <a:ea typeface="Arial"/>
+                <a:cs typeface="Arial"/>
+              </a:rPr>
+              <a:t>P6 XER, JSON baseline</a:t>
+            </a:r>
+          </a:p>
+          <a:p xmlns:a="http://schemas.openxmlformats.org/drawingml/2006/main">
+            <a:pPr algn="ctr">
+              <a:lnSpc>
+                <a:spcPct val="108000"/>
+              </a:lnSpc>
+              <a:buNone/>
+              <a:defRPr sz="788">
+                <a:solidFill>
+                  <a:srgbClr val="182230"/>
+                </a:solidFill>
+                <a:latin typeface="Arial"/>
+                <a:ea typeface="Arial"/>
+                <a:cs typeface="Arial"/>
+              </a:defRPr>
+            </a:pPr>
+            <a:r>
+              <a:rPr sz="788">
+                <a:solidFill>
+                  <a:srgbClr val="182230"/>
+                </a:solidFill>
+                <a:latin typeface="Arial"/>
+                <a:ea typeface="Arial"/>
+                <a:cs typeface="Arial"/>
+              </a:rPr>
+              <a:t>Export: PMXML, XER</a:t>
+            </a:r>
+          </a:p>
+        </p:txBody>
+      </p:sp>
+      <p:cxnSp>
+        <p:nvCxnSpPr>
+          <p:cNvPr id="17491" name=""/>
+          <p:cNvCxnSpPr>
+            <a:stCxn xmlns:a="http://schemas.openxmlformats.org/drawingml/2006/main" id="17417" idx="3"/>
+            <a:endCxn xmlns:a="http://schemas.openxmlformats.org/drawingml/2006/main" id="17420" idx="1"/>
+          </p:cNvCxnSpPr>
+          <p:nvPr/>
+        </p:nvCxnSpPr>
+        <p:spPr>
+          <a:xfrm xmlns:a="http://schemas.openxmlformats.org/drawingml/2006/main">
+            <a:off x="2190750" y="2714625"/>
+            <a:ext cx="209550" cy="0"/>
+          </a:xfrm>
+          <a:prstGeom xmlns:a="http://schemas.openxmlformats.org/drawingml/2006/main" prst="straightConnector1">
+            <a:avLst/>
+          </a:prstGeom>
+          <a:ln xmlns:a="http://schemas.openxmlformats.org/drawingml/2006/main" w="15240">
+            <a:solidFill>
+              <a:srgbClr val="0B67B2"/>
+            </a:solidFill>
+            <a:prstDash val="solid"/>
+            <a:tailEnd type="triangle" w="sm" len="sm"/>
+          </a:ln>
+        </p:spPr>
+      </p:cxnSp>
+      <p:cxnSp>
+        <p:nvCxnSpPr>
+          <p:cNvPr id="17492" name=""/>
+          <p:cNvCxnSpPr>
+            <a:stCxn xmlns:a="http://schemas.openxmlformats.org/drawingml/2006/main" id="17420" idx="3"/>
+            <a:endCxn xmlns:a="http://schemas.openxmlformats.org/drawingml/2006/main" id="17423" idx="1"/>
+          </p:cNvCxnSpPr>
+          <p:nvPr/>
+        </p:nvCxnSpPr>
+        <p:spPr>
+          <a:xfrm xmlns:a="http://schemas.openxmlformats.org/drawingml/2006/main">
+            <a:off x="4095750" y="2714625"/>
+            <a:ext cx="209550" cy="0"/>
+          </a:xfrm>
+          <a:prstGeom xmlns:a="http://schemas.openxmlformats.org/drawingml/2006/main" prst="straightConnector1">
+            <a:avLst/>
+          </a:prstGeom>
+          <a:ln xmlns:a="http://schemas.openxmlformats.org/drawingml/2006/main" w="15240">
+            <a:solidFill>
+              <a:srgbClr val="0B67B2"/>
+            </a:solidFill>
+            <a:prstDash val="solid"/>
+            <a:tailEnd type="triangle" w="sm" len="sm"/>
+          </a:ln>
+        </p:spPr>
+      </p:cxnSp>
+      <p:cxnSp>
+        <p:nvCxnSpPr>
+          <p:cNvPr id="17493" name=""/>
+          <p:cNvCxnSpPr>
+            <a:stCxn xmlns:a="http://schemas.openxmlformats.org/drawingml/2006/main" id="17423" idx="3"/>
+            <a:endCxn xmlns:a="http://schemas.openxmlformats.org/drawingml/2006/main" id="17426" idx="1"/>
+          </p:cNvCxnSpPr>
+          <p:nvPr/>
+        </p:nvCxnSpPr>
+        <p:spPr>
+          <a:xfrm xmlns:a="http://schemas.openxmlformats.org/drawingml/2006/main">
+            <a:off x="6000750" y="2714625"/>
+            <a:ext cx="209550" cy="0"/>
+          </a:xfrm>
+          <a:prstGeom xmlns:a="http://schemas.openxmlformats.org/drawingml/2006/main" prst="straightConnector1">
+            <a:avLst/>
+          </a:prstGeom>
+          <a:ln xmlns:a="http://schemas.openxmlformats.org/drawingml/2006/main" w="15240">
+            <a:solidFill>
+              <a:srgbClr val="0B67B2"/>
+            </a:solidFill>
+            <a:prstDash val="solid"/>
+            <a:tailEnd type="triangle" w="sm" len="sm"/>
+          </a:ln>
+        </p:spPr>
+      </p:cxnSp>
+      <p:cxnSp>
+        <p:nvCxnSpPr>
+          <p:cNvPr id="17494" name=""/>
+          <p:cNvCxnSpPr>
+            <a:stCxn xmlns:a="http://schemas.openxmlformats.org/drawingml/2006/main" id="17426" idx="3"/>
+            <a:endCxn xmlns:a="http://schemas.openxmlformats.org/drawingml/2006/main" id="17429" idx="1"/>
+          </p:cNvCxnSpPr>
+          <p:nvPr/>
+        </p:nvCxnSpPr>
+        <p:spPr>
+          <a:xfrm xmlns:a="http://schemas.openxmlformats.org/drawingml/2006/main">
+            <a:off x="7905750" y="2714625"/>
+            <a:ext cx="209550" cy="0"/>
+          </a:xfrm>
+          <a:prstGeom xmlns:a="http://schemas.openxmlformats.org/drawingml/2006/main" prst="straightConnector1">
+            <a:avLst/>
+          </a:prstGeom>
+          <a:ln xmlns:a="http://schemas.openxmlformats.org/drawingml/2006/main" w="15240">
+            <a:solidFill>
+              <a:srgbClr val="0B67B2"/>
+            </a:solidFill>
+            <a:prstDash val="solid"/>
+            <a:tailEnd type="triangle" w="sm" len="sm"/>
+          </a:ln>
+        </p:spPr>
+      </p:cxnSp>
+      <p:sp>
+        <p:nvSpPr>
+          <p:cNvPr id="17436" name="">
+            <a:extLst xmlns:a="http://schemas.openxmlformats.org/drawingml/2006/main">
+              <a:ext uri="{FF2B5EF4-FFF2-40B4-BE49-F238E27FC236}">
+                <a16:creationId xmlns:a16="http://schemas.microsoft.com/office/drawing/2014/main" id="{75B2DC0F-EAEE-41D6-A5FB-D6CD323F2CF6}"/>
+              </a:ext>
+            </a:extLst>
+          </p:cNvPr>
+          <p:cNvSpPr>
+            <a:spLocks xmlns:a="http://schemas.openxmlformats.org/drawingml/2006/main" noGrp="1"/>
+          </p:cNvSpPr>
+          <p:nvPr/>
+        </p:nvSpPr>
+        <p:spPr>
+          <a:xfrm xmlns:a="http://schemas.openxmlformats.org/drawingml/2006/main">
+            <a:off x="10115550" y="1847850"/>
+            <a:ext cx="1733550" cy="1733550"/>
+          </a:xfrm>
+          <a:prstGeom xmlns:a="http://schemas.openxmlformats.org/drawingml/2006/main" prst="roundRect">
+            <a:avLst>
+              <a:gd name="adj" fmla="val 6044"/>
+            </a:avLst>
+          </a:prstGeom>
+          <a:solidFill xmlns:a="http://schemas.openxmlformats.org/drawingml/2006/main">
+            <a:srgbClr val="EAF6EF"/>
+          </a:solidFill>
+          <a:ln xmlns:a="http://schemas.openxmlformats.org/drawingml/2006/main" w="12383">
+            <a:solidFill>
+              <a:srgbClr val="92C9AA"/>
+            </a:solidFill>
+            <a:prstDash val="solid"/>
+          </a:ln>
+        </p:spPr>
+        <p:txBody xmlns:a="http://schemas.openxmlformats.org/drawingml/2006/main">
+          <a:bodyPr/>
+          <a:p/>
+        </p:txBody>
+      </p:sp>
+      <p:sp>
+        <p:nvSpPr>
+          <p:cNvPr id="17437" name="">
+            <a:extLst xmlns:a="http://schemas.openxmlformats.org/drawingml/2006/main">
+              <a:ext uri="{FF2B5EF4-FFF2-40B4-BE49-F238E27FC236}">
+                <a16:creationId xmlns:a16="http://schemas.microsoft.com/office/drawing/2014/main" id="{F18AB97F-313E-45CB-A4D1-6779937D0443}"/>
+              </a:ext>
+            </a:extLst>
+          </p:cNvPr>
+          <p:cNvSpPr>
+            <a:spLocks xmlns:a="http://schemas.openxmlformats.org/drawingml/2006/main" noGrp="1"/>
+          </p:cNvSpPr>
+          <p:nvPr/>
+        </p:nvSpPr>
+        <p:spPr>
+          <a:xfrm xmlns:a="http://schemas.openxmlformats.org/drawingml/2006/main">
+            <a:off x="10191750" y="2038350"/>
+            <a:ext cx="1581150" cy="342900"/>
+          </a:xfrm>
+          <a:prstGeom xmlns:a="http://schemas.openxmlformats.org/drawingml/2006/main" prst="rect">
+            <a:avLst/>
+          </a:prstGeom>
+        </p:spPr>
+        <p:txBody>
+          <a:bodyPr xmlns:a="http://schemas.openxmlformats.org/drawingml/2006/main" wrap="square" lIns="0" tIns="0" rIns="0" bIns="0" anchor="ctr">
+            <a:normAutofit fontScale="100000"/>
+          </a:bodyPr>
+          <a:lstStyle xmlns:a="http://schemas.openxmlformats.org/drawingml/2006/main"/>
+          <a:p xmlns:a="http://schemas.openxmlformats.org/drawingml/2006/main">
+            <a:pPr algn="ctr">
+              <a:defRPr sz="1950" b="1">
+                <a:solidFill>
+                  <a:srgbClr val="1B7F4B"/>
+                </a:solidFill>
+                <a:latin typeface="Arial"/>
+                <a:ea typeface="Arial"/>
+                <a:cs typeface="Arial"/>
+              </a:defRPr>
+            </a:pPr>
+            <a:r>
+              <a:rPr sz="1950" b="1">
+                <a:solidFill>
+                  <a:srgbClr val="1B7F4B"/>
+                </a:solidFill>
+                <a:latin typeface="Arial"/>
+                <a:ea typeface="Arial"/>
+                <a:cs typeface="Arial"/>
+              </a:rPr>
+              <a:t>1,431</a:t>
+            </a:r>
+          </a:p>
+        </p:txBody>
+      </p:sp>
+      <p:sp>
+        <p:nvSpPr>
+          <p:cNvPr id="17438" name="">
+            <a:extLst xmlns:a="http://schemas.openxmlformats.org/drawingml/2006/main">
+              <a:ext uri="{FF2B5EF4-FFF2-40B4-BE49-F238E27FC236}">
+                <a16:creationId xmlns:a16="http://schemas.microsoft.com/office/drawing/2014/main" id="{4433F2FD-4350-43A2-826B-5364BB72E403}"/>
+              </a:ext>
+            </a:extLst>
+          </p:cNvPr>
+          <p:cNvSpPr>
+            <a:spLocks xmlns:a="http://schemas.openxmlformats.org/drawingml/2006/main" noGrp="1"/>
+          </p:cNvSpPr>
+          <p:nvPr/>
+        </p:nvSpPr>
+        <p:spPr>
+          <a:xfrm xmlns:a="http://schemas.openxmlformats.org/drawingml/2006/main">
+            <a:off x="10191750" y="2400300"/>
+            <a:ext cx="1581150" cy="400050"/>
+          </a:xfrm>
+          <a:prstGeom xmlns:a="http://schemas.openxmlformats.org/drawingml/2006/main" prst="rect">
+            <a:avLst/>
+          </a:prstGeom>
+        </p:spPr>
+        <p:txBody>
+          <a:bodyPr xmlns:a="http://schemas.openxmlformats.org/drawingml/2006/main" wrap="square" lIns="0" tIns="0" rIns="0" bIns="0" anchor="t">
+            <a:normAutofit fontScale="100000"/>
+          </a:bodyPr>
+          <a:lstStyle xmlns:a="http://schemas.openxmlformats.org/drawingml/2006/main"/>
+          <a:p xmlns:a="http://schemas.openxmlformats.org/drawingml/2006/main">
+            <a:pPr algn="ctr">
+              <a:lnSpc>
+                <a:spcPct val="105000"/>
+              </a:lnSpc>
+              <a:buNone/>
+              <a:defRPr sz="788" b="1">
+                <a:solidFill>
+                  <a:srgbClr val="182230"/>
+                </a:solidFill>
+                <a:latin typeface="Arial"/>
+                <a:ea typeface="Arial"/>
+                <a:cs typeface="Arial"/>
+              </a:defRPr>
+            </a:pPr>
+            <a:r>
+              <a:rPr sz="788" b="1">
+                <a:solidFill>
+                  <a:srgbClr val="182230"/>
+                </a:solidFill>
+                <a:latin typeface="Arial"/>
+                <a:ea typeface="Arial"/>
+                <a:cs typeface="Arial"/>
+              </a:rPr>
+              <a:t>automated tests passing</a:t>
+            </a:r>
+          </a:p>
+          <a:p xmlns:a="http://schemas.openxmlformats.org/drawingml/2006/main">
+            <a:pPr algn="ctr">
+              <a:lnSpc>
+                <a:spcPct val="105000"/>
+              </a:lnSpc>
+              <a:buNone/>
+              <a:defRPr sz="788" b="1">
+                <a:solidFill>
+                  <a:srgbClr val="182230"/>
+                </a:solidFill>
+                <a:latin typeface="Arial"/>
+                <a:ea typeface="Arial"/>
+                <a:cs typeface="Arial"/>
+              </a:defRPr>
+            </a:pPr>
+            <a:r>
+              <a:rPr sz="788" b="1">
+                <a:solidFill>
+                  <a:srgbClr val="182230"/>
+                </a:solidFill>
+                <a:latin typeface="Arial"/>
+                <a:ea typeface="Arial"/>
+                <a:cs typeface="Arial"/>
+              </a:rPr>
+              <a:t>1,202 pytest + 229 vitest</a:t>
+            </a:r>
+          </a:p>
+        </p:txBody>
+      </p:sp>
+      <p:sp>
+        <p:nvSpPr>
+          <p:cNvPr id="17439" name="">
+            <a:extLst xmlns:a="http://schemas.openxmlformats.org/drawingml/2006/main">
+              <a:ext uri="{FF2B5EF4-FFF2-40B4-BE49-F238E27FC236}">
+                <a16:creationId xmlns:a16="http://schemas.microsoft.com/office/drawing/2014/main" id="{57AF56F6-BD62-443D-96C3-0E33F68695F4}"/>
+              </a:ext>
+            </a:extLst>
+          </p:cNvPr>
+          <p:cNvSpPr>
+            <a:spLocks xmlns:a="http://schemas.openxmlformats.org/drawingml/2006/main" noGrp="1"/>
+          </p:cNvSpPr>
+          <p:nvPr/>
+        </p:nvSpPr>
+        <p:spPr>
+          <a:xfrm xmlns:a="http://schemas.openxmlformats.org/drawingml/2006/main">
+            <a:off x="10191750" y="2914650"/>
+            <a:ext cx="1581150" cy="571500"/>
+          </a:xfrm>
+          <a:prstGeom xmlns:a="http://schemas.openxmlformats.org/drawingml/2006/main" prst="rect">
+            <a:avLst/>
+          </a:prstGeom>
+        </p:spPr>
+        <p:txBody>
+          <a:bodyPr xmlns:a="http://schemas.openxmlformats.org/drawingml/2006/main" wrap="square" lIns="0" tIns="0" rIns="0" bIns="0" anchor="t">
+            <a:normAutofit fontScale="100000"/>
+          </a:bodyPr>
+          <a:lstStyle xmlns:a="http://schemas.openxmlformats.org/drawingml/2006/main"/>
+          <a:p xmlns:a="http://schemas.openxmlformats.org/drawingml/2006/main">
+            <a:pPr algn="ctr">
+              <a:lnSpc>
+                <a:spcPct val="110000"/>
+              </a:lnSpc>
+              <a:buNone/>
+              <a:defRPr sz="788">
+                <a:solidFill>
+                  <a:srgbClr val="182230"/>
+                </a:solidFill>
+                <a:latin typeface="Arial"/>
+                <a:ea typeface="Arial"/>
+                <a:cs typeface="Arial"/>
+              </a:defRPr>
+            </a:pPr>
+            <a:r>
+              <a:rPr sz="788">
+                <a:solidFill>
+                  <a:srgbClr val="182230"/>
+                </a:solidFill>
+                <a:latin typeface="Arial"/>
+                <a:ea typeface="Arial"/>
+                <a:cs typeface="Arial"/>
+              </a:rPr>
+              <a:t>Single-command Docker deploy</a:t>
+            </a:r>
+          </a:p>
+          <a:p xmlns:a="http://schemas.openxmlformats.org/drawingml/2006/main">
+            <a:pPr algn="ctr">
+              <a:lnSpc>
+                <a:spcPct val="110000"/>
+              </a:lnSpc>
+              <a:buNone/>
+              <a:defRPr sz="788">
+                <a:solidFill>
+                  <a:srgbClr val="182230"/>
+                </a:solidFill>
+                <a:latin typeface="Arial"/>
+                <a:ea typeface="Arial"/>
+                <a:cs typeface="Arial"/>
+              </a:defRPr>
+            </a:pPr>
+            <a:r>
+              <a:rPr sz="788">
+                <a:solidFill>
+                  <a:srgbClr val="182230"/>
+                </a:solidFill>
+                <a:latin typeface="Arial"/>
+                <a:ea typeface="Arial"/>
+                <a:cs typeface="Arial"/>
+              </a:rPr>
+              <a:t>Laptop CPU, no GPU</a:t>
+            </a:r>
+          </a:p>
+        </p:txBody>
+      </p:sp>
+      <p:sp>
+        <p:nvSpPr>
+          <p:cNvPr id="17440" name="">
+            <a:extLst xmlns:a="http://schemas.openxmlformats.org/drawingml/2006/main">
+              <a:ext uri="{FF2B5EF4-FFF2-40B4-BE49-F238E27FC236}">
+                <a16:creationId xmlns:a16="http://schemas.microsoft.com/office/drawing/2014/main" id="{FA82C77E-BB19-43DF-9839-BA4B3C251A6A}"/>
+              </a:ext>
+            </a:extLst>
+          </p:cNvPr>
+          <p:cNvSpPr>
+            <a:spLocks xmlns:a="http://schemas.openxmlformats.org/drawingml/2006/main" noGrp="1"/>
+          </p:cNvSpPr>
+          <p:nvPr/>
+        </p:nvSpPr>
+        <p:spPr>
+          <a:xfrm xmlns:a="http://schemas.openxmlformats.org/drawingml/2006/main">
+            <a:off x="342900" y="3886200"/>
+            <a:ext cx="4381500" cy="209550"/>
+          </a:xfrm>
+          <a:prstGeom xmlns:a="http://schemas.openxmlformats.org/drawingml/2006/main" prst="rect">
+            <a:avLst/>
+          </a:prstGeom>
+        </p:spPr>
+        <p:txBody>
+          <a:bodyPr xmlns:a="http://schemas.openxmlformats.org/drawingml/2006/main" wrap="square" lIns="0" tIns="0" rIns="0" bIns="0" anchor="ctr">
+            <a:normAutofit fontScale="100000"/>
+          </a:bodyPr>
+          <a:lstStyle xmlns:a="http://schemas.openxmlformats.org/drawingml/2006/main"/>
+          <a:p xmlns:a="http://schemas.openxmlformats.org/drawingml/2006/main">
+            <a:pPr algn="l">
               <a:defRPr sz="975" b="1">
                 <a:solidFill>
                   <a:srgbClr val="B42318"/>
@@ -9569,10 +11077,10 @@
       </p:sp>
       <p:sp>
         <p:nvSpPr>
-          <p:cNvPr id="17417" name="">
-            <a:extLst xmlns:a="http://schemas.openxmlformats.org/drawingml/2006/main">
-              <a:ext uri="{FF2B5EF4-FFF2-40B4-BE49-F238E27FC236}">
-                <a16:creationId xmlns:a16="http://schemas.microsoft.com/office/drawing/2014/main" id="{E8D3E2B0-F87B-4162-9BDC-E6F77A32166A}"/>
+          <p:cNvPr id="17441" name="">
+            <a:extLst xmlns:a="http://schemas.openxmlformats.org/drawingml/2006/main">
+              <a:ext uri="{FF2B5EF4-FFF2-40B4-BE49-F238E27FC236}">
+                <a16:creationId xmlns:a16="http://schemas.microsoft.com/office/drawing/2014/main" id="{86E15C22-FA73-4364-B1D4-353F5DCA14AF}"/>
               </a:ext>
             </a:extLst>
           </p:cNvPr>
@@ -9604,10 +11112,10 @@
       </p:sp>
       <p:sp>
         <p:nvSpPr>
-          <p:cNvPr id="17418" name="">
-            <a:extLst xmlns:a="http://schemas.openxmlformats.org/drawingml/2006/main">
-              <a:ext uri="{FF2B5EF4-FFF2-40B4-BE49-F238E27FC236}">
-                <a16:creationId xmlns:a16="http://schemas.microsoft.com/office/drawing/2014/main" id="{4B2329E1-2D10-482D-8B17-00BEA693FE75}"/>
+          <p:cNvPr id="17442" name="">
+            <a:extLst xmlns:a="http://schemas.openxmlformats.org/drawingml/2006/main">
+              <a:ext uri="{FF2B5EF4-FFF2-40B4-BE49-F238E27FC236}">
+                <a16:creationId xmlns:a16="http://schemas.microsoft.com/office/drawing/2014/main" id="{7CCCA864-EE6F-4822-9F88-EA1E7ABDE5A5}"/>
               </a:ext>
             </a:extLst>
           </p:cNvPr>
@@ -9657,10 +11165,10 @@
       </p:sp>
       <p:sp>
         <p:nvSpPr>
-          <p:cNvPr id="17419" name="">
-            <a:extLst xmlns:a="http://schemas.openxmlformats.org/drawingml/2006/main">
-              <a:ext uri="{FF2B5EF4-FFF2-40B4-BE49-F238E27FC236}">
-                <a16:creationId xmlns:a16="http://schemas.microsoft.com/office/drawing/2014/main" id="{7134E0FC-5F63-435A-8399-8A62243430C9}"/>
+          <p:cNvPr id="17443" name="">
+            <a:extLst xmlns:a="http://schemas.openxmlformats.org/drawingml/2006/main">
+              <a:ext uri="{FF2B5EF4-FFF2-40B4-BE49-F238E27FC236}">
+                <a16:creationId xmlns:a16="http://schemas.microsoft.com/office/drawing/2014/main" id="{813B58AA-2318-4896-A234-A718B043B730}"/>
               </a:ext>
             </a:extLst>
           </p:cNvPr>
@@ -9692,10 +11200,10 @@
       </p:sp>
       <p:sp>
         <p:nvSpPr>
-          <p:cNvPr id="17420" name="">
-            <a:extLst xmlns:a="http://schemas.openxmlformats.org/drawingml/2006/main">
-              <a:ext uri="{FF2B5EF4-FFF2-40B4-BE49-F238E27FC236}">
-                <a16:creationId xmlns:a16="http://schemas.microsoft.com/office/drawing/2014/main" id="{7DBD88F3-B1E4-405E-AEDE-10AF4125E502}"/>
+          <p:cNvPr id="17444" name="">
+            <a:extLst xmlns:a="http://schemas.openxmlformats.org/drawingml/2006/main">
+              <a:ext uri="{FF2B5EF4-FFF2-40B4-BE49-F238E27FC236}">
+                <a16:creationId xmlns:a16="http://schemas.microsoft.com/office/drawing/2014/main" id="{AFB4BCF0-41D0-4D91-88EC-890534947354}"/>
               </a:ext>
             </a:extLst>
           </p:cNvPr>
@@ -9729,10 +11237,10 @@
       </p:sp>
       <p:sp>
         <p:nvSpPr>
-          <p:cNvPr id="17421" name="">
-            <a:extLst xmlns:a="http://schemas.openxmlformats.org/drawingml/2006/main">
-              <a:ext uri="{FF2B5EF4-FFF2-40B4-BE49-F238E27FC236}">
-                <a16:creationId xmlns:a16="http://schemas.microsoft.com/office/drawing/2014/main" id="{1D3311EC-D07F-4D22-B1CB-003C2A328161}"/>
+          <p:cNvPr id="17445" name="">
+            <a:extLst xmlns:a="http://schemas.openxmlformats.org/drawingml/2006/main">
+              <a:ext uri="{FF2B5EF4-FFF2-40B4-BE49-F238E27FC236}">
+                <a16:creationId xmlns:a16="http://schemas.microsoft.com/office/drawing/2014/main" id="{1B364F6E-9E0D-4E62-AFED-914981FD1030}"/>
               </a:ext>
             </a:extLst>
           </p:cNvPr>
@@ -9786,10 +11294,10 @@
       </p:sp>
       <p:sp>
         <p:nvSpPr>
-          <p:cNvPr id="17422" name="">
-            <a:extLst xmlns:a="http://schemas.openxmlformats.org/drawingml/2006/main">
-              <a:ext uri="{FF2B5EF4-FFF2-40B4-BE49-F238E27FC236}">
-                <a16:creationId xmlns:a16="http://schemas.microsoft.com/office/drawing/2014/main" id="{2AABD397-5E1C-407C-B234-ED32478CD733}"/>
+          <p:cNvPr id="17446" name="">
+            <a:extLst xmlns:a="http://schemas.openxmlformats.org/drawingml/2006/main">
+              <a:ext uri="{FF2B5EF4-FFF2-40B4-BE49-F238E27FC236}">
+                <a16:creationId xmlns:a16="http://schemas.microsoft.com/office/drawing/2014/main" id="{9F558969-B647-4FB5-AC1F-A933C67F2B99}"/>
               </a:ext>
             </a:extLst>
           </p:cNvPr>
@@ -9823,10 +11331,10 @@
       </p:sp>
       <p:sp>
         <p:nvSpPr>
-          <p:cNvPr id="17423" name="">
-            <a:extLst xmlns:a="http://schemas.openxmlformats.org/drawingml/2006/main">
-              <a:ext uri="{FF2B5EF4-FFF2-40B4-BE49-F238E27FC236}">
-                <a16:creationId xmlns:a16="http://schemas.microsoft.com/office/drawing/2014/main" id="{F4D8AAE5-80E1-4D2A-A93F-490FBC54C66C}"/>
+          <p:cNvPr id="17447" name="">
+            <a:extLst xmlns:a="http://schemas.openxmlformats.org/drawingml/2006/main">
+              <a:ext uri="{FF2B5EF4-FFF2-40B4-BE49-F238E27FC236}">
+                <a16:creationId xmlns:a16="http://schemas.microsoft.com/office/drawing/2014/main" id="{BC5DCBC5-85D3-422B-AB7B-F619DC968666}"/>
               </a:ext>
             </a:extLst>
           </p:cNvPr>
@@ -9880,10 +11388,10 @@
       </p:sp>
       <p:sp>
         <p:nvSpPr>
-          <p:cNvPr id="17424" name="">
-            <a:extLst xmlns:a="http://schemas.openxmlformats.org/drawingml/2006/main">
-              <a:ext uri="{FF2B5EF4-FFF2-40B4-BE49-F238E27FC236}">
-                <a16:creationId xmlns:a16="http://schemas.microsoft.com/office/drawing/2014/main" id="{B37401A7-9E97-4EDC-80A5-82FC7C0AEC73}"/>
+          <p:cNvPr id="17448" name="">
+            <a:extLst xmlns:a="http://schemas.openxmlformats.org/drawingml/2006/main">
+              <a:ext uri="{FF2B5EF4-FFF2-40B4-BE49-F238E27FC236}">
+                <a16:creationId xmlns:a16="http://schemas.microsoft.com/office/drawing/2014/main" id="{3D45DF93-CFE8-47BB-9DAB-C3D74E7D2DF2}"/>
               </a:ext>
             </a:extLst>
           </p:cNvPr>
@@ -9917,10 +11425,10 @@
       </p:sp>
       <p:sp>
         <p:nvSpPr>
-          <p:cNvPr id="17425" name="">
-            <a:extLst xmlns:a="http://schemas.openxmlformats.org/drawingml/2006/main">
-              <a:ext uri="{FF2B5EF4-FFF2-40B4-BE49-F238E27FC236}">
-                <a16:creationId xmlns:a16="http://schemas.microsoft.com/office/drawing/2014/main" id="{F75F43F0-2EA0-4D13-88E5-853EDF3B280A}"/>
+          <p:cNvPr id="17449" name="">
+            <a:extLst xmlns:a="http://schemas.openxmlformats.org/drawingml/2006/main">
+              <a:ext uri="{FF2B5EF4-FFF2-40B4-BE49-F238E27FC236}">
+                <a16:creationId xmlns:a16="http://schemas.microsoft.com/office/drawing/2014/main" id="{94A93BF1-E1BC-445D-8AF1-3B58EA841BFF}"/>
               </a:ext>
             </a:extLst>
           </p:cNvPr>
@@ -9974,10 +11482,10 @@
       </p:sp>
       <p:sp>
         <p:nvSpPr>
-          <p:cNvPr id="17426" name="">
-            <a:extLst xmlns:a="http://schemas.openxmlformats.org/drawingml/2006/main">
-              <a:ext uri="{FF2B5EF4-FFF2-40B4-BE49-F238E27FC236}">
-                <a16:creationId xmlns:a16="http://schemas.microsoft.com/office/drawing/2014/main" id="{E815ECC0-E99A-48AA-980B-8CF79F7FE40A}"/>
+          <p:cNvPr id="17450" name="">
+            <a:extLst xmlns:a="http://schemas.openxmlformats.org/drawingml/2006/main">
+              <a:ext uri="{FF2B5EF4-FFF2-40B4-BE49-F238E27FC236}">
+                <a16:creationId xmlns:a16="http://schemas.microsoft.com/office/drawing/2014/main" id="{CE0C745D-461E-481F-A7B5-7CFC7EAEAC4B}"/>
               </a:ext>
             </a:extLst>
           </p:cNvPr>
@@ -10011,10 +11519,10 @@
       </p:sp>
       <p:sp>
         <p:nvSpPr>
-          <p:cNvPr id="17427" name="">
-            <a:extLst xmlns:a="http://schemas.openxmlformats.org/drawingml/2006/main">
-              <a:ext uri="{FF2B5EF4-FFF2-40B4-BE49-F238E27FC236}">
-                <a16:creationId xmlns:a16="http://schemas.microsoft.com/office/drawing/2014/main" id="{7ACB58A0-8C44-40A4-8077-5C3A08A10DEF}"/>
+          <p:cNvPr id="17451" name="">
+            <a:extLst xmlns:a="http://schemas.openxmlformats.org/drawingml/2006/main">
+              <a:ext uri="{FF2B5EF4-FFF2-40B4-BE49-F238E27FC236}">
+                <a16:creationId xmlns:a16="http://schemas.microsoft.com/office/drawing/2014/main" id="{28DA2276-C2AA-4D28-846C-5F2E518CA40D}"/>
               </a:ext>
             </a:extLst>
           </p:cNvPr>
@@ -10068,10 +11576,10 @@
       </p:sp>
       <p:sp>
         <p:nvSpPr>
-          <p:cNvPr id="17428" name="">
-            <a:extLst xmlns:a="http://schemas.openxmlformats.org/drawingml/2006/main">
-              <a:ext uri="{FF2B5EF4-FFF2-40B4-BE49-F238E27FC236}">
-                <a16:creationId xmlns:a16="http://schemas.microsoft.com/office/drawing/2014/main" id="{ECA83DFE-DA3E-4A87-8F74-4A394B18BA24}"/>
+          <p:cNvPr id="17452" name="">
+            <a:extLst xmlns:a="http://schemas.openxmlformats.org/drawingml/2006/main">
+              <a:ext uri="{FF2B5EF4-FFF2-40B4-BE49-F238E27FC236}">
+                <a16:creationId xmlns:a16="http://schemas.microsoft.com/office/drawing/2014/main" id="{43A7A325-B77B-4FD4-935A-57E9A2AE5C7E}"/>
               </a:ext>
             </a:extLst>
           </p:cNvPr>
@@ -10105,10 +11613,10 @@
       </p:sp>
       <p:sp>
         <p:nvSpPr>
-          <p:cNvPr id="17429" name="">
-            <a:extLst xmlns:a="http://schemas.openxmlformats.org/drawingml/2006/main">
-              <a:ext uri="{FF2B5EF4-FFF2-40B4-BE49-F238E27FC236}">
-                <a16:creationId xmlns:a16="http://schemas.microsoft.com/office/drawing/2014/main" id="{EED77B60-69F4-4963-92EC-E099B027FA4F}"/>
+          <p:cNvPr id="17453" name="">
+            <a:extLst xmlns:a="http://schemas.openxmlformats.org/drawingml/2006/main">
+              <a:ext uri="{FF2B5EF4-FFF2-40B4-BE49-F238E27FC236}">
+                <a16:creationId xmlns:a16="http://schemas.microsoft.com/office/drawing/2014/main" id="{208B93D8-658A-4289-8F0D-19477887595D}"/>
               </a:ext>
             </a:extLst>
           </p:cNvPr>
@@ -10162,10 +11670,10 @@
       </p:sp>
       <p:sp>
         <p:nvSpPr>
-          <p:cNvPr id="17430" name="">
-            <a:extLst xmlns:a="http://schemas.openxmlformats.org/drawingml/2006/main">
-              <a:ext uri="{FF2B5EF4-FFF2-40B4-BE49-F238E27FC236}">
-                <a16:creationId xmlns:a16="http://schemas.microsoft.com/office/drawing/2014/main" id="{4F22F223-830B-449B-82AF-059654138EF8}"/>
+          <p:cNvPr id="17454" name="">
+            <a:extLst xmlns:a="http://schemas.openxmlformats.org/drawingml/2006/main">
+              <a:ext uri="{FF2B5EF4-FFF2-40B4-BE49-F238E27FC236}">
+                <a16:creationId xmlns:a16="http://schemas.microsoft.com/office/drawing/2014/main" id="{F50CA9BD-A25F-4C18-A936-D52D71FD5A9B}"/>
               </a:ext>
             </a:extLst>
           </p:cNvPr>
@@ -10199,10 +11707,10 @@
       </p:sp>
       <p:sp>
         <p:nvSpPr>
-          <p:cNvPr id="17431" name="">
-            <a:extLst xmlns:a="http://schemas.openxmlformats.org/drawingml/2006/main">
-              <a:ext uri="{FF2B5EF4-FFF2-40B4-BE49-F238E27FC236}">
-                <a16:creationId xmlns:a16="http://schemas.microsoft.com/office/drawing/2014/main" id="{9B74E8FF-554D-4E9A-A0C8-595F4ABA6DAB}"/>
+          <p:cNvPr id="17455" name="">
+            <a:extLst xmlns:a="http://schemas.openxmlformats.org/drawingml/2006/main">
+              <a:ext uri="{FF2B5EF4-FFF2-40B4-BE49-F238E27FC236}">
+                <a16:creationId xmlns:a16="http://schemas.microsoft.com/office/drawing/2014/main" id="{829E673B-56FE-499B-ABB2-D830DDD44E83}"/>
               </a:ext>
             </a:extLst>
           </p:cNvPr>
@@ -10256,10 +11764,10 @@
       </p:sp>
       <p:sp>
         <p:nvSpPr>
-          <p:cNvPr id="17432" name="">
-            <a:extLst xmlns:a="http://schemas.openxmlformats.org/drawingml/2006/main">
-              <a:ext uri="{FF2B5EF4-FFF2-40B4-BE49-F238E27FC236}">
-                <a16:creationId xmlns:a16="http://schemas.microsoft.com/office/drawing/2014/main" id="{3C096779-C157-4EE5-BCCF-1BCFF5FC1455}"/>
+          <p:cNvPr id="17456" name="">
+            <a:extLst xmlns:a="http://schemas.openxmlformats.org/drawingml/2006/main">
+              <a:ext uri="{FF2B5EF4-FFF2-40B4-BE49-F238E27FC236}">
+                <a16:creationId xmlns:a16="http://schemas.microsoft.com/office/drawing/2014/main" id="{0EFC6A07-812B-4EF7-8326-9BC0A86D6839}"/>
               </a:ext>
             </a:extLst>
           </p:cNvPr>
@@ -10293,10 +11801,10 @@
       </p:sp>
       <p:sp>
         <p:nvSpPr>
-          <p:cNvPr id="17433" name="">
-            <a:extLst xmlns:a="http://schemas.openxmlformats.org/drawingml/2006/main">
-              <a:ext uri="{FF2B5EF4-FFF2-40B4-BE49-F238E27FC236}">
-                <a16:creationId xmlns:a16="http://schemas.microsoft.com/office/drawing/2014/main" id="{E3B6C188-C91A-4438-AC43-670228FA37EA}"/>
+          <p:cNvPr id="17457" name="">
+            <a:extLst xmlns:a="http://schemas.openxmlformats.org/drawingml/2006/main">
+              <a:ext uri="{FF2B5EF4-FFF2-40B4-BE49-F238E27FC236}">
+                <a16:creationId xmlns:a16="http://schemas.microsoft.com/office/drawing/2014/main" id="{64E474FF-7959-4C65-9057-FE0E0282F2DA}"/>
               </a:ext>
             </a:extLst>
           </p:cNvPr>
@@ -10350,10 +11858,10 @@
       </p:sp>
       <p:sp>
         <p:nvSpPr>
-          <p:cNvPr id="17434" name="">
-            <a:extLst xmlns:a="http://schemas.openxmlformats.org/drawingml/2006/main">
-              <a:ext uri="{FF2B5EF4-FFF2-40B4-BE49-F238E27FC236}">
-                <a16:creationId xmlns:a16="http://schemas.microsoft.com/office/drawing/2014/main" id="{ECA236AB-4428-41B4-B410-50CBCC90BC97}"/>
+          <p:cNvPr id="17458" name="">
+            <a:extLst xmlns:a="http://schemas.openxmlformats.org/drawingml/2006/main">
+              <a:ext uri="{FF2B5EF4-FFF2-40B4-BE49-F238E27FC236}">
+                <a16:creationId xmlns:a16="http://schemas.microsoft.com/office/drawing/2014/main" id="{DDDFC10B-603A-4C5D-A515-8C784574C51A}"/>
               </a:ext>
             </a:extLst>
           </p:cNvPr>
@@ -10387,10 +11895,10 @@
       </p:sp>
       <p:sp>
         <p:nvSpPr>
-          <p:cNvPr id="17435" name="">
-            <a:extLst xmlns:a="http://schemas.openxmlformats.org/drawingml/2006/main">
-              <a:ext uri="{FF2B5EF4-FFF2-40B4-BE49-F238E27FC236}">
-                <a16:creationId xmlns:a16="http://schemas.microsoft.com/office/drawing/2014/main" id="{DEEA0468-0FBF-4835-A86B-6A0531499CCC}"/>
+          <p:cNvPr id="17459" name="">
+            <a:extLst xmlns:a="http://schemas.openxmlformats.org/drawingml/2006/main">
+              <a:ext uri="{FF2B5EF4-FFF2-40B4-BE49-F238E27FC236}">
+                <a16:creationId xmlns:a16="http://schemas.microsoft.com/office/drawing/2014/main" id="{6B6EE9A8-E5A6-4273-8F80-20316F66FC71}"/>
               </a:ext>
             </a:extLst>
           </p:cNvPr>
@@ -10444,10 +11952,10 @@
       </p:sp>
       <p:sp>
         <p:nvSpPr>
-          <p:cNvPr id="17436" name="">
-            <a:extLst xmlns:a="http://schemas.openxmlformats.org/drawingml/2006/main">
-              <a:ext uri="{FF2B5EF4-FFF2-40B4-BE49-F238E27FC236}">
-                <a16:creationId xmlns:a16="http://schemas.microsoft.com/office/drawing/2014/main" id="{978A9451-0A89-409F-BB55-403E42637691}"/>
+          <p:cNvPr id="17460" name="">
+            <a:extLst xmlns:a="http://schemas.openxmlformats.org/drawingml/2006/main">
+              <a:ext uri="{FF2B5EF4-FFF2-40B4-BE49-F238E27FC236}">
+                <a16:creationId xmlns:a16="http://schemas.microsoft.com/office/drawing/2014/main" id="{223F4A0C-ABB0-48BE-BCC2-C2A2EB88E0FF}"/>
               </a:ext>
             </a:extLst>
           </p:cNvPr>
@@ -10481,10 +11989,10 @@
       </p:sp>
       <p:sp>
         <p:nvSpPr>
-          <p:cNvPr id="17437" name="">
-            <a:extLst xmlns:a="http://schemas.openxmlformats.org/drawingml/2006/main">
-              <a:ext uri="{FF2B5EF4-FFF2-40B4-BE49-F238E27FC236}">
-                <a16:creationId xmlns:a16="http://schemas.microsoft.com/office/drawing/2014/main" id="{027ED6DB-7AED-422C-8589-304D3F83338E}"/>
+          <p:cNvPr id="17461" name="">
+            <a:extLst xmlns:a="http://schemas.openxmlformats.org/drawingml/2006/main">
+              <a:ext uri="{FF2B5EF4-FFF2-40B4-BE49-F238E27FC236}">
+                <a16:creationId xmlns:a16="http://schemas.microsoft.com/office/drawing/2014/main" id="{C9DA072D-2EFC-40AB-B59E-6D0381AA46F4}"/>
               </a:ext>
             </a:extLst>
           </p:cNvPr>
@@ -10538,10 +12046,10 @@
       </p:sp>
       <p:sp>
         <p:nvSpPr>
-          <p:cNvPr id="17438" name="">
-            <a:extLst xmlns:a="http://schemas.openxmlformats.org/drawingml/2006/main">
-              <a:ext uri="{FF2B5EF4-FFF2-40B4-BE49-F238E27FC236}">
-                <a16:creationId xmlns:a16="http://schemas.microsoft.com/office/drawing/2014/main" id="{B0073232-2C6F-478C-B440-D2D7BAE8B834}"/>
+          <p:cNvPr id="17462" name="">
+            <a:extLst xmlns:a="http://schemas.openxmlformats.org/drawingml/2006/main">
+              <a:ext uri="{FF2B5EF4-FFF2-40B4-BE49-F238E27FC236}">
+                <a16:creationId xmlns:a16="http://schemas.microsoft.com/office/drawing/2014/main" id="{2B6F7A89-7403-47D8-A9F1-27E6D3D63F31}"/>
               </a:ext>
             </a:extLst>
           </p:cNvPr>
@@ -10575,10 +12083,10 @@
       </p:sp>
       <p:sp>
         <p:nvSpPr>
-          <p:cNvPr id="17439" name="">
-            <a:extLst xmlns:a="http://schemas.openxmlformats.org/drawingml/2006/main">
-              <a:ext uri="{FF2B5EF4-FFF2-40B4-BE49-F238E27FC236}">
-                <a16:creationId xmlns:a16="http://schemas.microsoft.com/office/drawing/2014/main" id="{B42B5B07-E0B6-439F-84C4-7047E6EC8C3D}"/>
+          <p:cNvPr id="17463" name="">
+            <a:extLst xmlns:a="http://schemas.openxmlformats.org/drawingml/2006/main">
+              <a:ext uri="{FF2B5EF4-FFF2-40B4-BE49-F238E27FC236}">
+                <a16:creationId xmlns:a16="http://schemas.microsoft.com/office/drawing/2014/main" id="{7000DA65-35A9-4204-818D-936451193109}"/>
               </a:ext>
             </a:extLst>
           </p:cNvPr>
@@ -10632,10 +12140,10 @@
       </p:sp>
       <p:sp>
         <p:nvSpPr>
-          <p:cNvPr id="17440" name="">
-            <a:extLst xmlns:a="http://schemas.openxmlformats.org/drawingml/2006/main">
-              <a:ext uri="{FF2B5EF4-FFF2-40B4-BE49-F238E27FC236}">
-                <a16:creationId xmlns:a16="http://schemas.microsoft.com/office/drawing/2014/main" id="{3E31D2A4-FBF4-4C9B-913E-74343BC6A8F6}"/>
+          <p:cNvPr id="17464" name="">
+            <a:extLst xmlns:a="http://schemas.openxmlformats.org/drawingml/2006/main">
+              <a:ext uri="{FF2B5EF4-FFF2-40B4-BE49-F238E27FC236}">
+                <a16:creationId xmlns:a16="http://schemas.microsoft.com/office/drawing/2014/main" id="{06BCC037-8243-4287-BDCC-3F306A439A9E}"/>
               </a:ext>
             </a:extLst>
           </p:cNvPr>
@@ -10781,7 +12289,7 @@
           <p:cNvPr id="17409" name="Title 1">
             <a:extLst xmlns:a="http://schemas.openxmlformats.org/drawingml/2006/main">
               <a:ext uri="{FF2B5EF4-FFF2-40B4-BE49-F238E27FC236}">
-                <a16:creationId xmlns:a16="http://schemas.microsoft.com/office/drawing/2014/main" id="{670CA319-68D2-46C2-A235-47BEB8F41F22}"/>
+                <a16:creationId xmlns:a16="http://schemas.microsoft.com/office/drawing/2014/main" id="{07FD3E74-7138-4BD4-9EA7-AB7878A03CE5}"/>
               </a:ext>
             </a:extLst>
           </p:cNvPr>
@@ -10816,7 +12324,7 @@
           <p:cNvPr id="6" name="Slide Number Placeholder 5">
             <a:extLst xmlns:a="http://schemas.openxmlformats.org/drawingml/2006/main">
               <a:ext uri="{FF2B5EF4-FFF2-40B4-BE49-F238E27FC236}">
-                <a16:creationId xmlns:a16="http://schemas.microsoft.com/office/drawing/2014/main" id="{1FA19EED-F565-46E4-8BF7-0EE59FD0AB84}"/>
+                <a16:creationId xmlns:a16="http://schemas.microsoft.com/office/drawing/2014/main" id="{913E2A57-05CA-4F3A-818D-8C411FCF174D}"/>
               </a:ext>
             </a:extLst>
           </p:cNvPr>
@@ -10880,7 +12388,7 @@
           <p:cNvPr id="7" name="Footer Placeholder 6">
             <a:extLst xmlns:a="http://schemas.openxmlformats.org/drawingml/2006/main">
               <a:ext uri="{FF2B5EF4-FFF2-40B4-BE49-F238E27FC236}">
-                <a16:creationId xmlns:a16="http://schemas.microsoft.com/office/drawing/2014/main" id="{9EA4734D-E473-46C2-A9B7-0E22E95D153F}"/>
+                <a16:creationId xmlns:a16="http://schemas.microsoft.com/office/drawing/2014/main" id="{16148796-595E-4B62-BFEE-59485931BBEE}"/>
               </a:ext>
             </a:extLst>
           </p:cNvPr>
@@ -11005,7 +12513,7 @@
           <p:nvPr/>
         </p:nvPicPr>
         <p:blipFill>
-          <a:blip xmlns:r="http://schemas.openxmlformats.org/officeDocument/2006/relationships" xmlns:a="http://schemas.openxmlformats.org/drawingml/2006/main" r:embed="R7aac89d2b5be415d"/>
+          <a:blip xmlns:r="http://schemas.openxmlformats.org/officeDocument/2006/relationships" xmlns:a="http://schemas.openxmlformats.org/drawingml/2006/main" r:embed="R8f1ecde235af4b17"/>
           <a:stretch xmlns:a="http://schemas.openxmlformats.org/drawingml/2006/main">
             <a:fillRect l="0" t="0" r="0" b="0"/>
           </a:stretch>
@@ -11025,7 +12533,7 @@
           <p:cNvPr id="17412" name="">
             <a:extLst xmlns:a="http://schemas.openxmlformats.org/drawingml/2006/main">
               <a:ext uri="{FF2B5EF4-FFF2-40B4-BE49-F238E27FC236}">
-                <a16:creationId xmlns:a16="http://schemas.microsoft.com/office/drawing/2014/main" id="{5D135CD0-AF63-4B7B-94AE-B755B7D90777}"/>
+                <a16:creationId xmlns:a16="http://schemas.microsoft.com/office/drawing/2014/main" id="{747FE5A8-7308-48F0-AD77-4C5296FC47EF}"/>
               </a:ext>
             </a:extLst>
           </p:cNvPr>
@@ -11078,7 +12586,7 @@
           <p:cNvPr id="17413" name="">
             <a:extLst xmlns:a="http://schemas.openxmlformats.org/drawingml/2006/main">
               <a:ext uri="{FF2B5EF4-FFF2-40B4-BE49-F238E27FC236}">
-                <a16:creationId xmlns:a16="http://schemas.microsoft.com/office/drawing/2014/main" id="{F647F850-CBDC-4B61-B8DD-FE8DEDB52321}"/>
+                <a16:creationId xmlns:a16="http://schemas.microsoft.com/office/drawing/2014/main" id="{797DC435-872F-4D39-9583-718DC34470E3}"/>
               </a:ext>
             </a:extLst>
           </p:cNvPr>
@@ -11113,7 +12621,7 @@
           <p:cNvPr id="17414" name="">
             <a:extLst xmlns:a="http://schemas.openxmlformats.org/drawingml/2006/main">
               <a:ext uri="{FF2B5EF4-FFF2-40B4-BE49-F238E27FC236}">
-                <a16:creationId xmlns:a16="http://schemas.microsoft.com/office/drawing/2014/main" id="{9C1C251C-091D-42E0-A810-66996C8286E8}"/>
+                <a16:creationId xmlns:a16="http://schemas.microsoft.com/office/drawing/2014/main" id="{E68AF32A-7D4C-432D-948E-758B96FB363D}"/>
               </a:ext>
             </a:extLst>
           </p:cNvPr>
@@ -11166,7 +12674,7 @@
           <p:cNvPr id="17415" name="">
             <a:extLst xmlns:a="http://schemas.openxmlformats.org/drawingml/2006/main">
               <a:ext uri="{FF2B5EF4-FFF2-40B4-BE49-F238E27FC236}">
-                <a16:creationId xmlns:a16="http://schemas.microsoft.com/office/drawing/2014/main" id="{1022C3D4-6E9D-40DE-90EB-ACD2CF87577C}"/>
+                <a16:creationId xmlns:a16="http://schemas.microsoft.com/office/drawing/2014/main" id="{D9E55447-3527-48B0-8A78-8F79EB074E7B}"/>
               </a:ext>
             </a:extLst>
           </p:cNvPr>
@@ -11205,7 +12713,7 @@
           <p:cNvPr id="17416" name="">
             <a:extLst xmlns:a="http://schemas.openxmlformats.org/drawingml/2006/main">
               <a:ext uri="{FF2B5EF4-FFF2-40B4-BE49-F238E27FC236}">
-                <a16:creationId xmlns:a16="http://schemas.microsoft.com/office/drawing/2014/main" id="{08F4D503-269F-491E-BC92-D8582FD7FAF1}"/>
+                <a16:creationId xmlns:a16="http://schemas.microsoft.com/office/drawing/2014/main" id="{CB275176-05D8-40C0-92F8-9298988B56E5}"/>
               </a:ext>
             </a:extLst>
           </p:cNvPr>
@@ -11258,7 +12766,7 @@
           <p:cNvPr id="17417" name="">
             <a:extLst xmlns:a="http://schemas.openxmlformats.org/drawingml/2006/main">
               <a:ext uri="{FF2B5EF4-FFF2-40B4-BE49-F238E27FC236}">
-                <a16:creationId xmlns:a16="http://schemas.microsoft.com/office/drawing/2014/main" id="{C7048BFF-3F06-4C9F-8030-CF4EAA1ED6AF}"/>
+                <a16:creationId xmlns:a16="http://schemas.microsoft.com/office/drawing/2014/main" id="{57025044-31FB-47D3-9FF1-A755D2526C55}"/>
               </a:ext>
             </a:extLst>
           </p:cNvPr>
@@ -11342,7 +12850,7 @@
           <p:cNvPr id="17418" name="">
             <a:extLst xmlns:a="http://schemas.openxmlformats.org/drawingml/2006/main">
               <a:ext uri="{FF2B5EF4-FFF2-40B4-BE49-F238E27FC236}">
-                <a16:creationId xmlns:a16="http://schemas.microsoft.com/office/drawing/2014/main" id="{7B4C8CB7-A6DD-4254-92C3-DAE16778742A}"/>
+                <a16:creationId xmlns:a16="http://schemas.microsoft.com/office/drawing/2014/main" id="{90DC38CB-DD00-4942-AD97-484BD9F1757A}"/>
               </a:ext>
             </a:extLst>
           </p:cNvPr>
@@ -11381,7 +12889,7 @@
           <p:cNvPr id="17419" name="">
             <a:extLst xmlns:a="http://schemas.openxmlformats.org/drawingml/2006/main">
               <a:ext uri="{FF2B5EF4-FFF2-40B4-BE49-F238E27FC236}">
-                <a16:creationId xmlns:a16="http://schemas.microsoft.com/office/drawing/2014/main" id="{BD7DAC2A-AAC4-41A3-908B-C9337CD41B0B}"/>
+                <a16:creationId xmlns:a16="http://schemas.microsoft.com/office/drawing/2014/main" id="{2420DFC0-E95A-4F7C-BBD9-18758AC29A30}"/>
               </a:ext>
             </a:extLst>
           </p:cNvPr>
@@ -11434,7 +12942,7 @@
           <p:cNvPr id="17420" name="">
             <a:extLst xmlns:a="http://schemas.openxmlformats.org/drawingml/2006/main">
               <a:ext uri="{FF2B5EF4-FFF2-40B4-BE49-F238E27FC236}">
-                <a16:creationId xmlns:a16="http://schemas.microsoft.com/office/drawing/2014/main" id="{E82A7506-A187-49AE-A8DB-28240CFE51C1}"/>
+                <a16:creationId xmlns:a16="http://schemas.microsoft.com/office/drawing/2014/main" id="{F9E66C68-06C0-4742-84F1-51263A76B535}"/>
               </a:ext>
             </a:extLst>
           </p:cNvPr>
@@ -11518,7 +13026,7 @@
           <p:cNvPr id="17421" name="">
             <a:extLst xmlns:a="http://schemas.openxmlformats.org/drawingml/2006/main">
               <a:ext uri="{FF2B5EF4-FFF2-40B4-BE49-F238E27FC236}">
-                <a16:creationId xmlns:a16="http://schemas.microsoft.com/office/drawing/2014/main" id="{F9DABCA0-183D-4B70-ABBC-4FF832222FA5}"/>
+                <a16:creationId xmlns:a16="http://schemas.microsoft.com/office/drawing/2014/main" id="{543647F9-1020-48E7-8EFD-EB566371B6EA}"/>
               </a:ext>
             </a:extLst>
           </p:cNvPr>
@@ -11557,7 +13065,7 @@
           <p:cNvPr id="17422" name="">
             <a:extLst xmlns:a="http://schemas.openxmlformats.org/drawingml/2006/main">
               <a:ext uri="{FF2B5EF4-FFF2-40B4-BE49-F238E27FC236}">
-                <a16:creationId xmlns:a16="http://schemas.microsoft.com/office/drawing/2014/main" id="{5B504005-4F5D-41EC-A2BD-F82D53322D0B}"/>
+                <a16:creationId xmlns:a16="http://schemas.microsoft.com/office/drawing/2014/main" id="{F55B879D-C79A-4B47-AEE4-5F3D1975B6B1}"/>
               </a:ext>
             </a:extLst>
           </p:cNvPr>
@@ -11610,7 +13118,7 @@
           <p:cNvPr id="17423" name="">
             <a:extLst xmlns:a="http://schemas.openxmlformats.org/drawingml/2006/main">
               <a:ext uri="{FF2B5EF4-FFF2-40B4-BE49-F238E27FC236}">
-                <a16:creationId xmlns:a16="http://schemas.microsoft.com/office/drawing/2014/main" id="{8D74C150-E675-4D1A-ACF9-618DFB855339}"/>
+                <a16:creationId xmlns:a16="http://schemas.microsoft.com/office/drawing/2014/main" id="{1A60C45B-DBA9-4367-9945-227192AA0D79}"/>
               </a:ext>
             </a:extLst>
           </p:cNvPr>
@@ -11694,7 +13202,7 @@
           <p:cNvPr id="17424" name="">
             <a:extLst xmlns:a="http://schemas.openxmlformats.org/drawingml/2006/main">
               <a:ext uri="{FF2B5EF4-FFF2-40B4-BE49-F238E27FC236}">
-                <a16:creationId xmlns:a16="http://schemas.microsoft.com/office/drawing/2014/main" id="{DAABFFCB-9E56-4145-9D79-07775467800D}"/>
+                <a16:creationId xmlns:a16="http://schemas.microsoft.com/office/drawing/2014/main" id="{2E349F44-76E7-4327-8A4C-4EF5D936E521}"/>
               </a:ext>
             </a:extLst>
           </p:cNvPr>
@@ -11733,7 +13241,7 @@
           <p:cNvPr id="17425" name="">
             <a:extLst xmlns:a="http://schemas.openxmlformats.org/drawingml/2006/main">
               <a:ext uri="{FF2B5EF4-FFF2-40B4-BE49-F238E27FC236}">
-                <a16:creationId xmlns:a16="http://schemas.microsoft.com/office/drawing/2014/main" id="{302172D2-0AF9-4CE3-AEBA-0659444611D6}"/>
+                <a16:creationId xmlns:a16="http://schemas.microsoft.com/office/drawing/2014/main" id="{9D607ED9-31C5-4319-BABC-9D032AE0F9F5}"/>
               </a:ext>
             </a:extLst>
           </p:cNvPr>
@@ -11786,7 +13294,7 @@
           <p:cNvPr id="17426" name="">
             <a:extLst xmlns:a="http://schemas.openxmlformats.org/drawingml/2006/main">
               <a:ext uri="{FF2B5EF4-FFF2-40B4-BE49-F238E27FC236}">
-                <a16:creationId xmlns:a16="http://schemas.microsoft.com/office/drawing/2014/main" id="{C19FF7D0-411A-4A52-91DA-D6350E679F71}"/>
+                <a16:creationId xmlns:a16="http://schemas.microsoft.com/office/drawing/2014/main" id="{6CFA9EC0-F2F6-44DB-B104-62ECAA6499AB}"/>
               </a:ext>
             </a:extLst>
           </p:cNvPr>
@@ -11870,7 +13378,7 @@
           <p:cNvPr id="17427" name="">
             <a:extLst xmlns:a="http://schemas.openxmlformats.org/drawingml/2006/main">
               <a:ext uri="{FF2B5EF4-FFF2-40B4-BE49-F238E27FC236}">
-                <a16:creationId xmlns:a16="http://schemas.microsoft.com/office/drawing/2014/main" id="{A3A8D672-AE20-42C2-89E6-DE595C7DCE16}"/>
+                <a16:creationId xmlns:a16="http://schemas.microsoft.com/office/drawing/2014/main" id="{CBCC2343-9395-4873-AF02-C52FACEFAF3A}"/>
               </a:ext>
             </a:extLst>
           </p:cNvPr>
@@ -11909,7 +13417,7 @@
           <p:cNvPr id="17428" name="">
             <a:extLst xmlns:a="http://schemas.openxmlformats.org/drawingml/2006/main">
               <a:ext uri="{FF2B5EF4-FFF2-40B4-BE49-F238E27FC236}">
-                <a16:creationId xmlns:a16="http://schemas.microsoft.com/office/drawing/2014/main" id="{D43D794B-0394-46F8-8EBF-F97580DDD23D}"/>
+                <a16:creationId xmlns:a16="http://schemas.microsoft.com/office/drawing/2014/main" id="{EA3304E6-D6AC-481C-9C42-8CA1601A76B6}"/>
               </a:ext>
             </a:extLst>
           </p:cNvPr>
@@ -11962,7 +13470,7 @@
           <p:cNvPr id="17429" name="">
             <a:extLst xmlns:a="http://schemas.openxmlformats.org/drawingml/2006/main">
               <a:ext uri="{FF2B5EF4-FFF2-40B4-BE49-F238E27FC236}">
-                <a16:creationId xmlns:a16="http://schemas.microsoft.com/office/drawing/2014/main" id="{506A9E28-D78A-4CBA-8B18-72C415D51DBD}"/>
+                <a16:creationId xmlns:a16="http://schemas.microsoft.com/office/drawing/2014/main" id="{2DC41350-CB9D-41FD-9AC7-115DE610E8AD}"/>
               </a:ext>
             </a:extLst>
           </p:cNvPr>
@@ -12176,7 +13684,7 @@
           <p:cNvPr id="17435" name="">
             <a:extLst xmlns:a="http://schemas.openxmlformats.org/drawingml/2006/main">
               <a:ext uri="{FF2B5EF4-FFF2-40B4-BE49-F238E27FC236}">
-                <a16:creationId xmlns:a16="http://schemas.microsoft.com/office/drawing/2014/main" id="{A25DEB54-449C-4D1F-AA70-A64BC579EABC}"/>
+                <a16:creationId xmlns:a16="http://schemas.microsoft.com/office/drawing/2014/main" id="{C02B28C9-2411-4F28-B4A1-CC81D30DAEB6}"/>
               </a:ext>
             </a:extLst>
           </p:cNvPr>
@@ -12229,7 +13737,7 @@
           <p:cNvPr id="17436" name="">
             <a:extLst xmlns:a="http://schemas.openxmlformats.org/drawingml/2006/main">
               <a:ext uri="{FF2B5EF4-FFF2-40B4-BE49-F238E27FC236}">
-                <a16:creationId xmlns:a16="http://schemas.microsoft.com/office/drawing/2014/main" id="{9133E7D0-C16B-4F4F-B25C-A4005D7BC47D}"/>
+                <a16:creationId xmlns:a16="http://schemas.microsoft.com/office/drawing/2014/main" id="{F40C19CF-55B3-468A-84A0-D9E543018183}"/>
               </a:ext>
             </a:extLst>
           </p:cNvPr>
@@ -12282,7 +13790,7 @@
           <p:cNvPr id="17437" name="">
             <a:extLst xmlns:a="http://schemas.openxmlformats.org/drawingml/2006/main">
               <a:ext uri="{FF2B5EF4-FFF2-40B4-BE49-F238E27FC236}">
-                <a16:creationId xmlns:a16="http://schemas.microsoft.com/office/drawing/2014/main" id="{7D041C43-F79F-484C-8BD0-ED8165498B5A}"/>
+                <a16:creationId xmlns:a16="http://schemas.microsoft.com/office/drawing/2014/main" id="{863214EE-70AA-4A86-9B92-63B3ECDA7EE9}"/>
               </a:ext>
             </a:extLst>
           </p:cNvPr>
@@ -12317,7 +13825,7 @@
           <p:cNvPr id="17438" name="">
             <a:extLst xmlns:a="http://schemas.openxmlformats.org/drawingml/2006/main">
               <a:ext uri="{FF2B5EF4-FFF2-40B4-BE49-F238E27FC236}">
-                <a16:creationId xmlns:a16="http://schemas.microsoft.com/office/drawing/2014/main" id="{B3D38CD1-B5B2-43F9-9D27-964512685BD2}"/>
+                <a16:creationId xmlns:a16="http://schemas.microsoft.com/office/drawing/2014/main" id="{5105D971-9F4B-4DBC-97AC-DBFDD610E8B3}"/>
               </a:ext>
             </a:extLst>
           </p:cNvPr>
@@ -12356,7 +13864,7 @@
           <p:cNvPr id="17439" name="">
             <a:extLst xmlns:a="http://schemas.openxmlformats.org/drawingml/2006/main">
               <a:ext uri="{FF2B5EF4-FFF2-40B4-BE49-F238E27FC236}">
-                <a16:creationId xmlns:a16="http://schemas.microsoft.com/office/drawing/2014/main" id="{066946A7-F14A-43E5-AC67-72F8ACBCD38F}"/>
+                <a16:creationId xmlns:a16="http://schemas.microsoft.com/office/drawing/2014/main" id="{324BC9B3-08A1-40C9-BE3B-05D839797DCF}"/>
               </a:ext>
             </a:extLst>
           </p:cNvPr>
@@ -12409,7 +13917,7 @@
           <p:cNvPr id="17440" name="">
             <a:extLst xmlns:a="http://schemas.openxmlformats.org/drawingml/2006/main">
               <a:ext uri="{FF2B5EF4-FFF2-40B4-BE49-F238E27FC236}">
-                <a16:creationId xmlns:a16="http://schemas.microsoft.com/office/drawing/2014/main" id="{9283CD58-F6DF-40DE-B7A9-3047DDD98295}"/>
+                <a16:creationId xmlns:a16="http://schemas.microsoft.com/office/drawing/2014/main" id="{A0286B37-0600-4D4A-9472-B8C3D7233046}"/>
               </a:ext>
             </a:extLst>
           </p:cNvPr>
@@ -12466,7 +13974,7 @@
           <p:cNvPr id="17441" name="">
             <a:extLst xmlns:a="http://schemas.openxmlformats.org/drawingml/2006/main">
               <a:ext uri="{FF2B5EF4-FFF2-40B4-BE49-F238E27FC236}">
-                <a16:creationId xmlns:a16="http://schemas.microsoft.com/office/drawing/2014/main" id="{8B303410-D778-4969-89AD-01A3BDE1D934}"/>
+                <a16:creationId xmlns:a16="http://schemas.microsoft.com/office/drawing/2014/main" id="{71B10463-F599-4E0F-8158-26B3880CBA4C}"/>
               </a:ext>
             </a:extLst>
           </p:cNvPr>
@@ -12505,7 +14013,7 @@
           <p:cNvPr id="17442" name="">
             <a:extLst xmlns:a="http://schemas.openxmlformats.org/drawingml/2006/main">
               <a:ext uri="{FF2B5EF4-FFF2-40B4-BE49-F238E27FC236}">
-                <a16:creationId xmlns:a16="http://schemas.microsoft.com/office/drawing/2014/main" id="{2FB14AB9-2053-4B23-9E05-A474F4830C24}"/>
+                <a16:creationId xmlns:a16="http://schemas.microsoft.com/office/drawing/2014/main" id="{681F5CAF-7E7E-4421-A825-5853F66CBEEA}"/>
               </a:ext>
             </a:extLst>
           </p:cNvPr>
@@ -12558,7 +14066,7 @@
           <p:cNvPr id="17443" name="">
             <a:extLst xmlns:a="http://schemas.openxmlformats.org/drawingml/2006/main">
               <a:ext uri="{FF2B5EF4-FFF2-40B4-BE49-F238E27FC236}">
-                <a16:creationId xmlns:a16="http://schemas.microsoft.com/office/drawing/2014/main" id="{9A152E09-11FD-4D94-8F93-C5FB1B7028F4}"/>
+                <a16:creationId xmlns:a16="http://schemas.microsoft.com/office/drawing/2014/main" id="{674DD35F-C66A-4168-97AC-F717268E7AA9}"/>
               </a:ext>
             </a:extLst>
           </p:cNvPr>
@@ -12615,7 +14123,7 @@
           <p:cNvPr id="17444" name="">
             <a:extLst xmlns:a="http://schemas.openxmlformats.org/drawingml/2006/main">
               <a:ext uri="{FF2B5EF4-FFF2-40B4-BE49-F238E27FC236}">
-                <a16:creationId xmlns:a16="http://schemas.microsoft.com/office/drawing/2014/main" id="{B5C75667-1FC0-48E1-B323-078F28CBD325}"/>
+                <a16:creationId xmlns:a16="http://schemas.microsoft.com/office/drawing/2014/main" id="{0BDC0166-68EB-4FE9-BE22-F1B4C97F225C}"/>
               </a:ext>
             </a:extLst>
           </p:cNvPr>
@@ -12654,7 +14162,7 @@
           <p:cNvPr id="17445" name="">
             <a:extLst xmlns:a="http://schemas.openxmlformats.org/drawingml/2006/main">
               <a:ext uri="{FF2B5EF4-FFF2-40B4-BE49-F238E27FC236}">
-                <a16:creationId xmlns:a16="http://schemas.microsoft.com/office/drawing/2014/main" id="{63E6A228-277F-4ED6-AD3C-DACFBD5136F2}"/>
+                <a16:creationId xmlns:a16="http://schemas.microsoft.com/office/drawing/2014/main" id="{4D352BE6-9F60-47CB-8297-9097E845D87C}"/>
               </a:ext>
             </a:extLst>
           </p:cNvPr>
@@ -12707,7 +14215,7 @@
           <p:cNvPr id="17446" name="">
             <a:extLst xmlns:a="http://schemas.openxmlformats.org/drawingml/2006/main">
               <a:ext uri="{FF2B5EF4-FFF2-40B4-BE49-F238E27FC236}">
-                <a16:creationId xmlns:a16="http://schemas.microsoft.com/office/drawing/2014/main" id="{520A5EE6-9DE0-458D-AA9C-5C0FA2534F17}"/>
+                <a16:creationId xmlns:a16="http://schemas.microsoft.com/office/drawing/2014/main" id="{DE41AD84-8910-40F3-82AE-9B39A3BDAFCD}"/>
               </a:ext>
             </a:extLst>
           </p:cNvPr>
@@ -12764,7 +14272,7 @@
           <p:cNvPr id="17447" name="">
             <a:extLst xmlns:a="http://schemas.openxmlformats.org/drawingml/2006/main">
               <a:ext uri="{FF2B5EF4-FFF2-40B4-BE49-F238E27FC236}">
-                <a16:creationId xmlns:a16="http://schemas.microsoft.com/office/drawing/2014/main" id="{4DA26D0E-621E-4713-B1DE-7E69DC84B69A}"/>
+                <a16:creationId xmlns:a16="http://schemas.microsoft.com/office/drawing/2014/main" id="{7798EDC4-13FF-4873-91B8-D39A75C52D2E}"/>
               </a:ext>
             </a:extLst>
           </p:cNvPr>
@@ -12803,7 +14311,7 @@
           <p:cNvPr id="17448" name="">
             <a:extLst xmlns:a="http://schemas.openxmlformats.org/drawingml/2006/main">
               <a:ext uri="{FF2B5EF4-FFF2-40B4-BE49-F238E27FC236}">
-                <a16:creationId xmlns:a16="http://schemas.microsoft.com/office/drawing/2014/main" id="{D4CE8052-AF92-4801-AA32-64EDECAF0AF9}"/>
+                <a16:creationId xmlns:a16="http://schemas.microsoft.com/office/drawing/2014/main" id="{2847670A-023B-44C6-B829-457369896BD0}"/>
               </a:ext>
             </a:extLst>
           </p:cNvPr>
@@ -12856,7 +14364,7 @@
           <p:cNvPr id="17449" name="">
             <a:extLst xmlns:a="http://schemas.openxmlformats.org/drawingml/2006/main">
               <a:ext uri="{FF2B5EF4-FFF2-40B4-BE49-F238E27FC236}">
-                <a16:creationId xmlns:a16="http://schemas.microsoft.com/office/drawing/2014/main" id="{BD8D9706-0465-439B-99E4-DA859E9403D9}"/>
+                <a16:creationId xmlns:a16="http://schemas.microsoft.com/office/drawing/2014/main" id="{60B6D88E-3562-4695-A5DC-BC0FB176BF18}"/>
               </a:ext>
             </a:extLst>
           </p:cNvPr>
@@ -12913,7 +14421,7 @@
           <p:cNvPr id="17450" name="">
             <a:extLst xmlns:a="http://schemas.openxmlformats.org/drawingml/2006/main">
               <a:ext uri="{FF2B5EF4-FFF2-40B4-BE49-F238E27FC236}">
-                <a16:creationId xmlns:a16="http://schemas.microsoft.com/office/drawing/2014/main" id="{E55EF326-4CDC-4527-96FF-AA496AFFC970}"/>
+                <a16:creationId xmlns:a16="http://schemas.microsoft.com/office/drawing/2014/main" id="{78962EF0-64AC-47A3-A95C-C70DAEA773DE}"/>
               </a:ext>
             </a:extLst>
           </p:cNvPr>
@@ -12952,7 +14460,7 @@
           <p:cNvPr id="17451" name="">
             <a:extLst xmlns:a="http://schemas.openxmlformats.org/drawingml/2006/main">
               <a:ext uri="{FF2B5EF4-FFF2-40B4-BE49-F238E27FC236}">
-                <a16:creationId xmlns:a16="http://schemas.microsoft.com/office/drawing/2014/main" id="{4A3B3420-7AA1-4B30-8212-A6989344101B}"/>
+                <a16:creationId xmlns:a16="http://schemas.microsoft.com/office/drawing/2014/main" id="{8F52DA43-D686-42B5-8886-B1B9E2AABDD0}"/>
               </a:ext>
             </a:extLst>
           </p:cNvPr>
@@ -13005,7 +14513,7 @@
           <p:cNvPr id="17452" name="">
             <a:extLst xmlns:a="http://schemas.openxmlformats.org/drawingml/2006/main">
               <a:ext uri="{FF2B5EF4-FFF2-40B4-BE49-F238E27FC236}">
-                <a16:creationId xmlns:a16="http://schemas.microsoft.com/office/drawing/2014/main" id="{E68E794C-AC73-49BD-84D6-68578ECC1EEB}"/>
+                <a16:creationId xmlns:a16="http://schemas.microsoft.com/office/drawing/2014/main" id="{A0B2FFF3-1CC2-47E6-83E9-BD60528C4601}"/>
               </a:ext>
             </a:extLst>
           </p:cNvPr>
@@ -13058,7 +14566,7 @@
           <p:cNvPr id="17453" name="">
             <a:extLst xmlns:a="http://schemas.openxmlformats.org/drawingml/2006/main">
               <a:ext uri="{FF2B5EF4-FFF2-40B4-BE49-F238E27FC236}">
-                <a16:creationId xmlns:a16="http://schemas.microsoft.com/office/drawing/2014/main" id="{1EAF6071-45C4-49A8-A354-AD5B72044E0E}"/>
+                <a16:creationId xmlns:a16="http://schemas.microsoft.com/office/drawing/2014/main" id="{A8396B67-F387-4A85-80B4-423232597275}"/>
               </a:ext>
             </a:extLst>
           </p:cNvPr>
@@ -13208,7 +14716,7 @@
           <p:cNvPr id="17409" name="Title 1">
             <a:extLst xmlns:a="http://schemas.openxmlformats.org/drawingml/2006/main">
               <a:ext uri="{FF2B5EF4-FFF2-40B4-BE49-F238E27FC236}">
-                <a16:creationId xmlns:a16="http://schemas.microsoft.com/office/drawing/2014/main" id="{D867CC2A-FDDC-4BC7-A0DB-F72E69E73869}"/>
+                <a16:creationId xmlns:a16="http://schemas.microsoft.com/office/drawing/2014/main" id="{AABD50E0-EA69-460E-AFCA-DE538446275A}"/>
               </a:ext>
             </a:extLst>
           </p:cNvPr>
@@ -13243,7 +14751,7 @@
           <p:cNvPr id="6" name="Slide Number Placeholder 5">
             <a:extLst xmlns:a="http://schemas.openxmlformats.org/drawingml/2006/main">
               <a:ext uri="{FF2B5EF4-FFF2-40B4-BE49-F238E27FC236}">
-                <a16:creationId xmlns:a16="http://schemas.microsoft.com/office/drawing/2014/main" id="{0DFF40B7-0A41-4B1A-871B-FD52B745BF83}"/>
+                <a16:creationId xmlns:a16="http://schemas.microsoft.com/office/drawing/2014/main" id="{F2465257-66BA-4E9F-8599-B7D8581AC67E}"/>
               </a:ext>
             </a:extLst>
           </p:cNvPr>
@@ -13307,7 +14815,7 @@
           <p:cNvPr id="7" name="Footer Placeholder 6">
             <a:extLst xmlns:a="http://schemas.openxmlformats.org/drawingml/2006/main">
               <a:ext uri="{FF2B5EF4-FFF2-40B4-BE49-F238E27FC236}">
-                <a16:creationId xmlns:a16="http://schemas.microsoft.com/office/drawing/2014/main" id="{5820371A-D465-48A3-9F3A-6C23ADED3388}"/>
+                <a16:creationId xmlns:a16="http://schemas.microsoft.com/office/drawing/2014/main" id="{7CC46F93-1938-4626-9B9F-366EFB1C94B8}"/>
               </a:ext>
             </a:extLst>
           </p:cNvPr>
@@ -13432,7 +14940,7 @@
           <p:nvPr/>
         </p:nvPicPr>
         <p:blipFill>
-          <a:blip xmlns:r="http://schemas.openxmlformats.org/officeDocument/2006/relationships" xmlns:a="http://schemas.openxmlformats.org/drawingml/2006/main" r:embed="R074ac28dc7ec4a3b"/>
+          <a:blip xmlns:r="http://schemas.openxmlformats.org/officeDocument/2006/relationships" xmlns:a="http://schemas.openxmlformats.org/drawingml/2006/main" r:embed="Rd9a70a2de7624344"/>
           <a:stretch xmlns:a="http://schemas.openxmlformats.org/drawingml/2006/main">
             <a:fillRect l="0" t="0" r="0" b="0"/>
           </a:stretch>
@@ -13452,7 +14960,7 @@
           <p:cNvPr id="17412" name="">
             <a:extLst xmlns:a="http://schemas.openxmlformats.org/drawingml/2006/main">
               <a:ext uri="{FF2B5EF4-FFF2-40B4-BE49-F238E27FC236}">
-                <a16:creationId xmlns:a16="http://schemas.microsoft.com/office/drawing/2014/main" id="{7365B1A2-E802-403E-AB80-59B2E3D3FC3D}"/>
+                <a16:creationId xmlns:a16="http://schemas.microsoft.com/office/drawing/2014/main" id="{6A7DDB0D-3204-4873-97FE-632E6DE1F899}"/>
               </a:ext>
             </a:extLst>
           </p:cNvPr>
@@ -13505,7 +15013,7 @@
           <p:cNvPr id="17413" name="">
             <a:extLst xmlns:a="http://schemas.openxmlformats.org/drawingml/2006/main">
               <a:ext uri="{FF2B5EF4-FFF2-40B4-BE49-F238E27FC236}">
-                <a16:creationId xmlns:a16="http://schemas.microsoft.com/office/drawing/2014/main" id="{4F00FF33-D429-485E-896E-05DE7EDD9F6D}"/>
+                <a16:creationId xmlns:a16="http://schemas.microsoft.com/office/drawing/2014/main" id="{B293E198-0D71-41D3-9266-199814C7B096}"/>
               </a:ext>
             </a:extLst>
           </p:cNvPr>
@@ -13540,7 +15048,7 @@
           <p:cNvPr id="17414" name="">
             <a:extLst xmlns:a="http://schemas.openxmlformats.org/drawingml/2006/main">
               <a:ext uri="{FF2B5EF4-FFF2-40B4-BE49-F238E27FC236}">
-                <a16:creationId xmlns:a16="http://schemas.microsoft.com/office/drawing/2014/main" id="{BB2B7402-581E-47B8-AFDE-A3A93C22CFBF}"/>
+                <a16:creationId xmlns:a16="http://schemas.microsoft.com/office/drawing/2014/main" id="{5F0AD7E1-EF60-4597-9B22-8B2465260239}"/>
               </a:ext>
             </a:extLst>
           </p:cNvPr>
@@ -13579,7 +15087,7 @@
           <p:cNvPr id="17415" name="">
             <a:extLst xmlns:a="http://schemas.openxmlformats.org/drawingml/2006/main">
               <a:ext uri="{FF2B5EF4-FFF2-40B4-BE49-F238E27FC236}">
-                <a16:creationId xmlns:a16="http://schemas.microsoft.com/office/drawing/2014/main" id="{753DEC91-B83B-49CE-B081-F7B14E657BAE}"/>
+                <a16:creationId xmlns:a16="http://schemas.microsoft.com/office/drawing/2014/main" id="{31D9E9B2-B9AA-4D35-8A1E-2745152A74B8}"/>
               </a:ext>
             </a:extLst>
           </p:cNvPr>
@@ -13632,7 +15140,7 @@
           <p:cNvPr id="17416" name="">
             <a:extLst xmlns:a="http://schemas.openxmlformats.org/drawingml/2006/main">
               <a:ext uri="{FF2B5EF4-FFF2-40B4-BE49-F238E27FC236}">
-                <a16:creationId xmlns:a16="http://schemas.microsoft.com/office/drawing/2014/main" id="{EDD7C598-45A2-4471-9B1D-B3233FC700BD}"/>
+                <a16:creationId xmlns:a16="http://schemas.microsoft.com/office/drawing/2014/main" id="{C17AD2DF-527C-43B0-8B6A-44F5B85C651F}"/>
               </a:ext>
             </a:extLst>
           </p:cNvPr>
@@ -13644,7 +15152,7 @@
         <p:spPr>
           <a:xfrm xmlns:a="http://schemas.openxmlformats.org/drawingml/2006/main">
             <a:off x="476250" y="1895475"/>
-            <a:ext cx="2857500" cy="190500"/>
+            <a:ext cx="3238500" cy="190500"/>
           </a:xfrm>
           <a:prstGeom xmlns:a="http://schemas.openxmlformats.org/drawingml/2006/main" prst="rect">
             <a:avLst/>
@@ -13675,7 +15183,7 @@
                 <a:ea typeface="Arial"/>
                 <a:cs typeface="Arial"/>
               </a:rPr>
-              <a:t>Central project monitoring scale</a:t>
+              <a:t>Official central-project monitoring portal</a:t>
             </a:r>
           </a:p>
         </p:txBody>
@@ -13685,19 +15193,19 @@
           <p:cNvPr id="17417" name="">
             <a:extLst xmlns:a="http://schemas.openxmlformats.org/drawingml/2006/main">
               <a:ext uri="{FF2B5EF4-FFF2-40B4-BE49-F238E27FC236}">
-                <a16:creationId xmlns:a16="http://schemas.microsoft.com/office/drawing/2014/main" id="{E21CE6F5-7DD1-49F6-8525-C87B27AB3620}"/>
-              </a:ext>
-            </a:extLst>
-          </p:cNvPr>
-          <p:cNvSpPr>
-            <a:spLocks xmlns:a="http://schemas.openxmlformats.org/drawingml/2006/main" noGrp="1"/>
-          </p:cNvSpPr>
-          <p:nvPr/>
-        </p:nvSpPr>
-        <p:spPr>
-          <a:xfrm xmlns:a="http://schemas.openxmlformats.org/drawingml/2006/main">
-            <a:off x="3390900" y="1895475"/>
-            <a:ext cx="2514600" cy="190500"/>
+                <a16:creationId xmlns:a16="http://schemas.microsoft.com/office/drawing/2014/main" id="{EB5FDD28-5F89-4947-935F-3737E78B999F}"/>
+              </a:ext>
+            </a:extLst>
+          </p:cNvPr>
+          <p:cNvSpPr>
+            <a:spLocks xmlns:a="http://schemas.openxmlformats.org/drawingml/2006/main" noGrp="1"/>
+          </p:cNvSpPr>
+          <p:nvPr/>
+        </p:nvSpPr>
+        <p:spPr>
+          <a:xfrm xmlns:a="http://schemas.openxmlformats.org/drawingml/2006/main">
+            <a:off x="3581400" y="1895475"/>
+            <a:ext cx="2324100" cy="190500"/>
           </a:xfrm>
           <a:prstGeom xmlns:a="http://schemas.openxmlformats.org/drawingml/2006/main" prst="rect">
             <a:avLst/>
@@ -13710,9 +15218,9 @@
           <a:lstStyle xmlns:a="http://schemas.openxmlformats.org/drawingml/2006/main"/>
           <a:p xmlns:a="http://schemas.openxmlformats.org/drawingml/2006/main">
             <a:pPr algn="r">
-              <a:defRPr sz="825">
-                <a:solidFill>
-                  <a:srgbClr val="0B67B2"/>
+              <a:defRPr sz="788">
+                <a:solidFill>
+                  <a:srgbClr val="5A6676"/>
                 </a:solidFill>
                 <a:latin typeface="Arial"/>
                 <a:ea typeface="Arial"/>
@@ -13720,15 +15228,15 @@
               </a:defRPr>
             </a:pPr>
             <a:r>
-              <a:rPr sz="825">
-                <a:solidFill>
-                  <a:srgbClr val="0B67B2"/>
+              <a:rPr sz="788">
+                <a:solidFill>
+                  <a:srgbClr val="5A6676"/>
                 </a:solidFill>
                 <a:latin typeface="Arial"/>
                 <a:ea typeface="Arial"/>
                 <a:cs typeface="Arial"/>
               </a:rPr>
-              <a:t>ipm.mospi.gov.in</a:t>
+              <a:t>used for: the scale figure on slide 5</a:t>
             </a:r>
           </a:p>
         </p:txBody>
@@ -13738,7 +15246,7 @@
           <p:cNvPr id="17418" name="">
             <a:extLst xmlns:a="http://schemas.openxmlformats.org/drawingml/2006/main">
               <a:ext uri="{FF2B5EF4-FFF2-40B4-BE49-F238E27FC236}">
-                <a16:creationId xmlns:a16="http://schemas.microsoft.com/office/drawing/2014/main" id="{71864D79-7E18-4C5A-BC3F-D76F5F0E64DF}"/>
+                <a16:creationId xmlns:a16="http://schemas.microsoft.com/office/drawing/2014/main" id="{736FA416-4B6F-44C8-9593-3AD652342C0D}"/>
               </a:ext>
             </a:extLst>
           </p:cNvPr>
@@ -13777,7 +15285,7 @@
           <p:cNvPr id="17419" name="">
             <a:extLst xmlns:a="http://schemas.openxmlformats.org/drawingml/2006/main">
               <a:ext uri="{FF2B5EF4-FFF2-40B4-BE49-F238E27FC236}">
-                <a16:creationId xmlns:a16="http://schemas.microsoft.com/office/drawing/2014/main" id="{00264DD8-AF3C-4F39-9790-A55D86DE7676}"/>
+                <a16:creationId xmlns:a16="http://schemas.microsoft.com/office/drawing/2014/main" id="{1CB9DABF-7609-4146-BF49-D32B8F4F4FD4}"/>
               </a:ext>
             </a:extLst>
           </p:cNvPr>
@@ -13820,7 +15328,7 @@
                 <a:ea typeface="Arial"/>
                 <a:cs typeface="Arial"/>
               </a:rPr>
-              <a:t>GAO Schedule Assessment Guide</a:t>
+              <a:t>GAO Schedule Assessment Guide (GAO-16-89G)</a:t>
             </a:r>
           </a:p>
         </p:txBody>
@@ -13830,7 +15338,7 @@
           <p:cNvPr id="17420" name="">
             <a:extLst xmlns:a="http://schemas.openxmlformats.org/drawingml/2006/main">
               <a:ext uri="{FF2B5EF4-FFF2-40B4-BE49-F238E27FC236}">
-                <a16:creationId xmlns:a16="http://schemas.microsoft.com/office/drawing/2014/main" id="{22F2C116-8F85-43B6-BC5D-05C0157B77A7}"/>
+                <a16:creationId xmlns:a16="http://schemas.microsoft.com/office/drawing/2014/main" id="{20F015EB-BE00-4AB4-9373-185D46178072}"/>
               </a:ext>
             </a:extLst>
           </p:cNvPr>
@@ -13842,7 +15350,7 @@
         <p:spPr>
           <a:xfrm xmlns:a="http://schemas.openxmlformats.org/drawingml/2006/main">
             <a:off x="476250" y="2600325"/>
-            <a:ext cx="2857500" cy="190500"/>
+            <a:ext cx="3238500" cy="190500"/>
           </a:xfrm>
           <a:prstGeom xmlns:a="http://schemas.openxmlformats.org/drawingml/2006/main" prst="rect">
             <a:avLst/>
@@ -13883,19 +15391,19 @@
           <p:cNvPr id="17421" name="">
             <a:extLst xmlns:a="http://schemas.openxmlformats.org/drawingml/2006/main">
               <a:ext uri="{FF2B5EF4-FFF2-40B4-BE49-F238E27FC236}">
-                <a16:creationId xmlns:a16="http://schemas.microsoft.com/office/drawing/2014/main" id="{8B53A376-31BD-4561-8D7D-B732B08D4B02}"/>
-              </a:ext>
-            </a:extLst>
-          </p:cNvPr>
-          <p:cNvSpPr>
-            <a:spLocks xmlns:a="http://schemas.openxmlformats.org/drawingml/2006/main" noGrp="1"/>
-          </p:cNvSpPr>
-          <p:nvPr/>
-        </p:nvSpPr>
-        <p:spPr>
-          <a:xfrm xmlns:a="http://schemas.openxmlformats.org/drawingml/2006/main">
-            <a:off x="3390900" y="2600325"/>
-            <a:ext cx="2514600" cy="190500"/>
+                <a16:creationId xmlns:a16="http://schemas.microsoft.com/office/drawing/2014/main" id="{928993AD-EE7C-4404-A364-1BDA24DCD51B}"/>
+              </a:ext>
+            </a:extLst>
+          </p:cNvPr>
+          <p:cNvSpPr>
+            <a:spLocks xmlns:a="http://schemas.openxmlformats.org/drawingml/2006/main" noGrp="1"/>
+          </p:cNvSpPr>
+          <p:nvPr/>
+        </p:nvSpPr>
+        <p:spPr>
+          <a:xfrm xmlns:a="http://schemas.openxmlformats.org/drawingml/2006/main">
+            <a:off x="3581400" y="2600325"/>
+            <a:ext cx="2324100" cy="190500"/>
           </a:xfrm>
           <a:prstGeom xmlns:a="http://schemas.openxmlformats.org/drawingml/2006/main" prst="rect">
             <a:avLst/>
@@ -13908,9 +15416,9 @@
           <a:lstStyle xmlns:a="http://schemas.openxmlformats.org/drawingml/2006/main"/>
           <a:p xmlns:a="http://schemas.openxmlformats.org/drawingml/2006/main">
             <a:pPr algn="r">
-              <a:defRPr sz="825">
-                <a:solidFill>
-                  <a:srgbClr val="0B67B2"/>
+              <a:defRPr sz="788">
+                <a:solidFill>
+                  <a:srgbClr val="5A6676"/>
                 </a:solidFill>
                 <a:latin typeface="Arial"/>
                 <a:ea typeface="Arial"/>
@@ -13918,15 +15426,15 @@
               </a:defRPr>
             </a:pPr>
             <a:r>
-              <a:rPr sz="825">
-                <a:solidFill>
-                  <a:srgbClr val="0B67B2"/>
+              <a:rPr sz="788">
+                <a:solidFill>
+                  <a:srgbClr val="5A6676"/>
                 </a:solidFill>
                 <a:latin typeface="Arial"/>
                 <a:ea typeface="Arial"/>
                 <a:cs typeface="Arial"/>
               </a:rPr>
-              <a:t>gao.gov/products/gao-16-89g</a:t>
+              <a:t>used for: why actuals must be traceable</a:t>
             </a:r>
           </a:p>
         </p:txBody>
@@ -13936,7 +15444,7 @@
           <p:cNvPr id="17422" name="">
             <a:extLst xmlns:a="http://schemas.openxmlformats.org/drawingml/2006/main">
               <a:ext uri="{FF2B5EF4-FFF2-40B4-BE49-F238E27FC236}">
-                <a16:creationId xmlns:a16="http://schemas.microsoft.com/office/drawing/2014/main" id="{82AF9415-7938-4DD8-84DA-91E6F5FBC00A}"/>
+                <a16:creationId xmlns:a16="http://schemas.microsoft.com/office/drawing/2014/main" id="{E869345F-DAED-490C-B6FA-B123D375B0E8}"/>
               </a:ext>
             </a:extLst>
           </p:cNvPr>
@@ -13975,7 +15483,7 @@
           <p:cNvPr id="17423" name="">
             <a:extLst xmlns:a="http://schemas.openxmlformats.org/drawingml/2006/main">
               <a:ext uri="{FF2B5EF4-FFF2-40B4-BE49-F238E27FC236}">
-                <a16:creationId xmlns:a16="http://schemas.microsoft.com/office/drawing/2014/main" id="{CB7191A2-49D4-4AA0-8B5C-DDCD9018C354}"/>
+                <a16:creationId xmlns:a16="http://schemas.microsoft.com/office/drawing/2014/main" id="{73E65B2F-01E7-4704-A070-4F44F1E53A53}"/>
               </a:ext>
             </a:extLst>
           </p:cNvPr>
@@ -14028,7 +15536,7 @@
           <p:cNvPr id="17424" name="">
             <a:extLst xmlns:a="http://schemas.openxmlformats.org/drawingml/2006/main">
               <a:ext uri="{FF2B5EF4-FFF2-40B4-BE49-F238E27FC236}">
-                <a16:creationId xmlns:a16="http://schemas.microsoft.com/office/drawing/2014/main" id="{DB4B7F31-3C64-439A-AE63-0CF86BD1C6B4}"/>
+                <a16:creationId xmlns:a16="http://schemas.microsoft.com/office/drawing/2014/main" id="{3D173541-7766-4EFC-99C8-F5A50D5C655F}"/>
               </a:ext>
             </a:extLst>
           </p:cNvPr>
@@ -14040,7 +15548,7 @@
         <p:spPr>
           <a:xfrm xmlns:a="http://schemas.openxmlformats.org/drawingml/2006/main">
             <a:off x="476250" y="3305175"/>
-            <a:ext cx="2857500" cy="190500"/>
+            <a:ext cx="3238500" cy="190500"/>
           </a:xfrm>
           <a:prstGeom xmlns:a="http://schemas.openxmlformats.org/drawingml/2006/main" prst="rect">
             <a:avLst/>
@@ -14081,19 +15589,19 @@
           <p:cNvPr id="17425" name="">
             <a:extLst xmlns:a="http://schemas.openxmlformats.org/drawingml/2006/main">
               <a:ext uri="{FF2B5EF4-FFF2-40B4-BE49-F238E27FC236}">
-                <a16:creationId xmlns:a16="http://schemas.microsoft.com/office/drawing/2014/main" id="{AAFDF025-32F0-4ED4-B623-A1CC5E5AD986}"/>
-              </a:ext>
-            </a:extLst>
-          </p:cNvPr>
-          <p:cNvSpPr>
-            <a:spLocks xmlns:a="http://schemas.openxmlformats.org/drawingml/2006/main" noGrp="1"/>
-          </p:cNvSpPr>
-          <p:nvPr/>
-        </p:nvSpPr>
-        <p:spPr>
-          <a:xfrm xmlns:a="http://schemas.openxmlformats.org/drawingml/2006/main">
-            <a:off x="3390900" y="3305175"/>
-            <a:ext cx="2514600" cy="190500"/>
+                <a16:creationId xmlns:a16="http://schemas.microsoft.com/office/drawing/2014/main" id="{36AF9C28-F749-48FE-87A9-93639724C3C4}"/>
+              </a:ext>
+            </a:extLst>
+          </p:cNvPr>
+          <p:cNvSpPr>
+            <a:spLocks xmlns:a="http://schemas.openxmlformats.org/drawingml/2006/main" noGrp="1"/>
+          </p:cNvSpPr>
+          <p:nvPr/>
+        </p:nvSpPr>
+        <p:spPr>
+          <a:xfrm xmlns:a="http://schemas.openxmlformats.org/drawingml/2006/main">
+            <a:off x="3581400" y="3305175"/>
+            <a:ext cx="2324100" cy="190500"/>
           </a:xfrm>
           <a:prstGeom xmlns:a="http://schemas.openxmlformats.org/drawingml/2006/main" prst="rect">
             <a:avLst/>
@@ -14101,14 +15609,14 @@
         </p:spPr>
         <p:txBody>
           <a:bodyPr xmlns:a="http://schemas.openxmlformats.org/drawingml/2006/main" wrap="square" lIns="0" tIns="0" rIns="0" bIns="0" anchor="ctr">
-            <a:normAutofit fontScale="100000"/>
+            <a:normAutofit fontScale="99894"/>
           </a:bodyPr>
           <a:lstStyle xmlns:a="http://schemas.openxmlformats.org/drawingml/2006/main"/>
           <a:p xmlns:a="http://schemas.openxmlformats.org/drawingml/2006/main">
             <a:pPr algn="r">
-              <a:defRPr sz="825">
-                <a:solidFill>
-                  <a:srgbClr val="0B67B2"/>
+              <a:defRPr sz="788">
+                <a:solidFill>
+                  <a:srgbClr val="5A6676"/>
                 </a:solidFill>
                 <a:latin typeface="Arial"/>
                 <a:ea typeface="Arial"/>
@@ -14116,15 +15624,15 @@
               </a:defRPr>
             </a:pPr>
             <a:r>
-              <a:rPr sz="825">
-                <a:solidFill>
-                  <a:srgbClr val="0B67B2"/>
+              <a:rPr sz="788">
+                <a:solidFill>
+                  <a:srgbClr val="5A6676"/>
                 </a:solidFill>
                 <a:latin typeface="Arial"/>
                 <a:ea typeface="Arial"/>
                 <a:cs typeface="Arial"/>
               </a:rPr>
-              <a:t>nist.gov/itl/ai-risk-management-framework</a:t>
+              <a:t>used for: why a human confirms every uncertain row</a:t>
             </a:r>
           </a:p>
         </p:txBody>
@@ -14134,7 +15642,7 @@
           <p:cNvPr id="17426" name="">
             <a:extLst xmlns:a="http://schemas.openxmlformats.org/drawingml/2006/main">
               <a:ext uri="{FF2B5EF4-FFF2-40B4-BE49-F238E27FC236}">
-                <a16:creationId xmlns:a16="http://schemas.microsoft.com/office/drawing/2014/main" id="{0DF5CC19-AC8F-4279-BE60-9577FC2AF80B}"/>
+                <a16:creationId xmlns:a16="http://schemas.microsoft.com/office/drawing/2014/main" id="{7805F118-A0E9-4F5E-A655-D8DA8D404AEA}"/>
               </a:ext>
             </a:extLst>
           </p:cNvPr>
@@ -14173,7 +15681,7 @@
           <p:cNvPr id="17427" name="">
             <a:extLst xmlns:a="http://schemas.openxmlformats.org/drawingml/2006/main">
               <a:ext uri="{FF2B5EF4-FFF2-40B4-BE49-F238E27FC236}">
-                <a16:creationId xmlns:a16="http://schemas.microsoft.com/office/drawing/2014/main" id="{62A14768-2935-4724-86EF-BEFC5195E2D5}"/>
+                <a16:creationId xmlns:a16="http://schemas.microsoft.com/office/drawing/2014/main" id="{8828EE12-A0AA-4DE7-A565-4337F2AEA51E}"/>
               </a:ext>
             </a:extLst>
           </p:cNvPr>
@@ -14216,7 +15724,7 @@
                 <a:ea typeface="Arial"/>
                 <a:cs typeface="Arial"/>
               </a:rPr>
-              <a:t>Oracle Primavera P6 EPPM docs</a:t>
+              <a:t>Oracle Primavera P6 EPPM documentation</a:t>
             </a:r>
           </a:p>
         </p:txBody>
@@ -14226,7 +15734,7 @@
           <p:cNvPr id="17428" name="">
             <a:extLst xmlns:a="http://schemas.openxmlformats.org/drawingml/2006/main">
               <a:ext uri="{FF2B5EF4-FFF2-40B4-BE49-F238E27FC236}">
-                <a16:creationId xmlns:a16="http://schemas.microsoft.com/office/drawing/2014/main" id="{054C37A3-B951-44B6-A7B8-1007A7A5657F}"/>
+                <a16:creationId xmlns:a16="http://schemas.microsoft.com/office/drawing/2014/main" id="{594DFC2D-BE96-4A5A-9748-7E2751DFE600}"/>
               </a:ext>
             </a:extLst>
           </p:cNvPr>
@@ -14238,7 +15746,7 @@
         <p:spPr>
           <a:xfrm xmlns:a="http://schemas.openxmlformats.org/drawingml/2006/main">
             <a:off x="476250" y="4010025"/>
-            <a:ext cx="2857500" cy="190500"/>
+            <a:ext cx="3238500" cy="190500"/>
           </a:xfrm>
           <a:prstGeom xmlns:a="http://schemas.openxmlformats.org/drawingml/2006/main" prst="rect">
             <a:avLst/>
@@ -14269,7 +15777,7 @@
                 <a:ea typeface="Arial"/>
                 <a:cs typeface="Arial"/>
               </a:rPr>
-              <a:t>PMXML and XER interchange</a:t>
+              <a:t>PMXML and XER interchange formats</a:t>
             </a:r>
           </a:p>
         </p:txBody>
@@ -14279,19 +15787,19 @@
           <p:cNvPr id="17429" name="">
             <a:extLst xmlns:a="http://schemas.openxmlformats.org/drawingml/2006/main">
               <a:ext uri="{FF2B5EF4-FFF2-40B4-BE49-F238E27FC236}">
-                <a16:creationId xmlns:a16="http://schemas.microsoft.com/office/drawing/2014/main" id="{67B63E6F-E595-46E9-9F7F-503E5FF5683F}"/>
-              </a:ext>
-            </a:extLst>
-          </p:cNvPr>
-          <p:cNvSpPr>
-            <a:spLocks xmlns:a="http://schemas.openxmlformats.org/drawingml/2006/main" noGrp="1"/>
-          </p:cNvSpPr>
-          <p:nvPr/>
-        </p:nvSpPr>
-        <p:spPr>
-          <a:xfrm xmlns:a="http://schemas.openxmlformats.org/drawingml/2006/main">
-            <a:off x="3390900" y="4010025"/>
-            <a:ext cx="2514600" cy="190500"/>
+                <a16:creationId xmlns:a16="http://schemas.microsoft.com/office/drawing/2014/main" id="{22295730-D7DE-4E92-8C55-CF32F27FE642}"/>
+              </a:ext>
+            </a:extLst>
+          </p:cNvPr>
+          <p:cNvSpPr>
+            <a:spLocks xmlns:a="http://schemas.openxmlformats.org/drawingml/2006/main" noGrp="1"/>
+          </p:cNvSpPr>
+          <p:nvPr/>
+        </p:nvSpPr>
+        <p:spPr>
+          <a:xfrm xmlns:a="http://schemas.openxmlformats.org/drawingml/2006/main">
+            <a:off x="3581400" y="4010025"/>
+            <a:ext cx="2324100" cy="190500"/>
           </a:xfrm>
           <a:prstGeom xmlns:a="http://schemas.openxmlformats.org/drawingml/2006/main" prst="rect">
             <a:avLst/>
@@ -14304,9 +15812,9 @@
           <a:lstStyle xmlns:a="http://schemas.openxmlformats.org/drawingml/2006/main"/>
           <a:p xmlns:a="http://schemas.openxmlformats.org/drawingml/2006/main">
             <a:pPr algn="r">
-              <a:defRPr sz="825">
-                <a:solidFill>
-                  <a:srgbClr val="0B67B2"/>
+              <a:defRPr sz="788">
+                <a:solidFill>
+                  <a:srgbClr val="5A6676"/>
                 </a:solidFill>
                 <a:latin typeface="Arial"/>
                 <a:ea typeface="Arial"/>
@@ -14314,15 +15822,15 @@
               </a:defRPr>
             </a:pPr>
             <a:r>
-              <a:rPr sz="825">
-                <a:solidFill>
-                  <a:srgbClr val="0B67B2"/>
+              <a:rPr sz="788">
+                <a:solidFill>
+                  <a:srgbClr val="5A6676"/>
                 </a:solidFill>
                 <a:latin typeface="Arial"/>
                 <a:ea typeface="Arial"/>
                 <a:cs typeface="Arial"/>
               </a:rPr>
-              <a:t>docs.oracle.com - primavera-p6</a:t>
+              <a:t>used for: our pure-Python parsers</a:t>
             </a:r>
           </a:p>
         </p:txBody>
@@ -14332,7 +15840,7 @@
           <p:cNvPr id="17430" name="">
             <a:extLst xmlns:a="http://schemas.openxmlformats.org/drawingml/2006/main">
               <a:ext uri="{FF2B5EF4-FFF2-40B4-BE49-F238E27FC236}">
-                <a16:creationId xmlns:a16="http://schemas.microsoft.com/office/drawing/2014/main" id="{098ADEFA-C841-47D0-8864-7F87CC0ED59B}"/>
+                <a16:creationId xmlns:a16="http://schemas.microsoft.com/office/drawing/2014/main" id="{A083E34A-12E4-4AF1-83C7-A3537C6891E1}"/>
               </a:ext>
             </a:extLst>
           </p:cNvPr>
@@ -14371,7 +15879,7 @@
           <p:cNvPr id="17431" name="">
             <a:extLst xmlns:a="http://schemas.openxmlformats.org/drawingml/2006/main">
               <a:ext uri="{FF2B5EF4-FFF2-40B4-BE49-F238E27FC236}">
-                <a16:creationId xmlns:a16="http://schemas.microsoft.com/office/drawing/2014/main" id="{E73795D8-0316-43FB-9A95-F6308EAE0FCC}"/>
+                <a16:creationId xmlns:a16="http://schemas.microsoft.com/office/drawing/2014/main" id="{0C176F63-4DCC-4C93-96D7-F6F3EEF6B08C}"/>
               </a:ext>
             </a:extLst>
           </p:cNvPr>
@@ -14424,7 +15932,7 @@
           <p:cNvPr id="17432" name="">
             <a:extLst xmlns:a="http://schemas.openxmlformats.org/drawingml/2006/main">
               <a:ext uri="{FF2B5EF4-FFF2-40B4-BE49-F238E27FC236}">
-                <a16:creationId xmlns:a16="http://schemas.microsoft.com/office/drawing/2014/main" id="{2061AD34-997C-4F34-A920-D15B97E56C17}"/>
+                <a16:creationId xmlns:a16="http://schemas.microsoft.com/office/drawing/2014/main" id="{C9D545B5-C199-4B43-81A9-87FA357CCC7D}"/>
               </a:ext>
             </a:extLst>
           </p:cNvPr>
@@ -14436,7 +15944,7 @@
         <p:spPr>
           <a:xfrm xmlns:a="http://schemas.openxmlformats.org/drawingml/2006/main">
             <a:off x="476250" y="4714875"/>
-            <a:ext cx="2857500" cy="190500"/>
+            <a:ext cx="3238500" cy="190500"/>
           </a:xfrm>
           <a:prstGeom xmlns:a="http://schemas.openxmlformats.org/drawingml/2006/main" prst="rect">
             <a:avLst/>
@@ -14467,7 +15975,7 @@
                 <a:ea typeface="Arial"/>
                 <a:cs typeface="Arial"/>
               </a:rPr>
-              <a:t>Structure behind the synthetic schedule</a:t>
+              <a:t>Public equipment and discipline taxonomy</a:t>
             </a:r>
           </a:p>
         </p:txBody>
@@ -14477,19 +15985,19 @@
           <p:cNvPr id="17433" name="">
             <a:extLst xmlns:a="http://schemas.openxmlformats.org/drawingml/2006/main">
               <a:ext uri="{FF2B5EF4-FFF2-40B4-BE49-F238E27FC236}">
-                <a16:creationId xmlns:a16="http://schemas.microsoft.com/office/drawing/2014/main" id="{D154E658-9781-4129-99B4-F25AA2C7079A}"/>
-              </a:ext>
-            </a:extLst>
-          </p:cNvPr>
-          <p:cNvSpPr>
-            <a:spLocks xmlns:a="http://schemas.openxmlformats.org/drawingml/2006/main" noGrp="1"/>
-          </p:cNvSpPr>
-          <p:nvPr/>
-        </p:nvSpPr>
-        <p:spPr>
-          <a:xfrm xmlns:a="http://schemas.openxmlformats.org/drawingml/2006/main">
-            <a:off x="3390900" y="4714875"/>
-            <a:ext cx="2514600" cy="190500"/>
+                <a16:creationId xmlns:a16="http://schemas.microsoft.com/office/drawing/2014/main" id="{00E9D1AC-B6D1-4AE9-8209-816F17FC45C0}"/>
+              </a:ext>
+            </a:extLst>
+          </p:cNvPr>
+          <p:cNvSpPr>
+            <a:spLocks xmlns:a="http://schemas.openxmlformats.org/drawingml/2006/main" noGrp="1"/>
+          </p:cNvSpPr>
+          <p:nvPr/>
+        </p:nvSpPr>
+        <p:spPr>
+          <a:xfrm xmlns:a="http://schemas.openxmlformats.org/drawingml/2006/main">
+            <a:off x="3581400" y="4714875"/>
+            <a:ext cx="2324100" cy="190500"/>
           </a:xfrm>
           <a:prstGeom xmlns:a="http://schemas.openxmlformats.org/drawingml/2006/main" prst="rect">
             <a:avLst/>
@@ -14502,9 +16010,9 @@
           <a:lstStyle xmlns:a="http://schemas.openxmlformats.org/drawingml/2006/main"/>
           <a:p xmlns:a="http://schemas.openxmlformats.org/drawingml/2006/main">
             <a:pPr algn="r">
-              <a:defRPr sz="825">
-                <a:solidFill>
-                  <a:srgbClr val="0B67B2"/>
+              <a:defRPr sz="788">
+                <a:solidFill>
+                  <a:srgbClr val="5A6676"/>
                 </a:solidFill>
                 <a:latin typeface="Arial"/>
                 <a:ea typeface="Arial"/>
@@ -14512,15 +16020,15 @@
               </a:defRPr>
             </a:pPr>
             <a:r>
-              <a:rPr sz="825">
-                <a:solidFill>
-                  <a:srgbClr val="0B67B2"/>
+              <a:rPr sz="788">
+                <a:solidFill>
+                  <a:srgbClr val="5A6676"/>
                 </a:solidFill>
                 <a:latin typeface="Arial"/>
                 <a:ea typeface="Arial"/>
                 <a:cs typeface="Arial"/>
               </a:rPr>
-              <a:t>public specification, datasets/real/</a:t>
+              <a:t>used for: the structure of the synthetic schedule</a:t>
             </a:r>
           </a:p>
         </p:txBody>
@@ -14530,7 +16038,7 @@
           <p:cNvPr id="17434" name="">
             <a:extLst xmlns:a="http://schemas.openxmlformats.org/drawingml/2006/main">
               <a:ext uri="{FF2B5EF4-FFF2-40B4-BE49-F238E27FC236}">
-                <a16:creationId xmlns:a16="http://schemas.microsoft.com/office/drawing/2014/main" id="{C727907A-F60C-445A-AAD5-22362135782D}"/>
+                <a16:creationId xmlns:a16="http://schemas.microsoft.com/office/drawing/2014/main" id="{D52E71E4-8D11-4C12-99D8-29368316C566}"/>
               </a:ext>
             </a:extLst>
           </p:cNvPr>
@@ -14583,7 +16091,7 @@
           <p:cNvPr id="17435" name="">
             <a:extLst xmlns:a="http://schemas.openxmlformats.org/drawingml/2006/main">
               <a:ext uri="{FF2B5EF4-FFF2-40B4-BE49-F238E27FC236}">
-                <a16:creationId xmlns:a16="http://schemas.microsoft.com/office/drawing/2014/main" id="{C443CEBC-25D3-4A30-BBAB-8729344841CD}"/>
+                <a16:creationId xmlns:a16="http://schemas.microsoft.com/office/drawing/2014/main" id="{5820577F-3C4D-4679-8C00-7F9570FA4114}"/>
               </a:ext>
             </a:extLst>
           </p:cNvPr>
@@ -14618,7 +16126,7 @@
           <p:cNvPr id="17436" name="">
             <a:extLst xmlns:a="http://schemas.openxmlformats.org/drawingml/2006/main">
               <a:ext uri="{FF2B5EF4-FFF2-40B4-BE49-F238E27FC236}">
-                <a16:creationId xmlns:a16="http://schemas.microsoft.com/office/drawing/2014/main" id="{0456A1F5-C6A9-455E-860C-7AD42A1B499E}"/>
+                <a16:creationId xmlns:a16="http://schemas.microsoft.com/office/drawing/2014/main" id="{B4E2EE2F-D9F2-48D3-876B-0F2C72B3D4B5}"/>
               </a:ext>
             </a:extLst>
           </p:cNvPr>
@@ -14657,7 +16165,7 @@
           <p:cNvPr id="17437" name="">
             <a:extLst xmlns:a="http://schemas.openxmlformats.org/drawingml/2006/main">
               <a:ext uri="{FF2B5EF4-FFF2-40B4-BE49-F238E27FC236}">
-                <a16:creationId xmlns:a16="http://schemas.microsoft.com/office/drawing/2014/main" id="{A5FD9B10-2254-4DB3-9008-E98F1CA2603B}"/>
+                <a16:creationId xmlns:a16="http://schemas.microsoft.com/office/drawing/2014/main" id="{0AB7B50E-039C-4C2B-A086-DF432208D0BB}"/>
               </a:ext>
             </a:extLst>
           </p:cNvPr>
@@ -14710,7 +16218,7 @@
           <p:cNvPr id="17438" name="">
             <a:extLst xmlns:a="http://schemas.openxmlformats.org/drawingml/2006/main">
               <a:ext uri="{FF2B5EF4-FFF2-40B4-BE49-F238E27FC236}">
-                <a16:creationId xmlns:a16="http://schemas.microsoft.com/office/drawing/2014/main" id="{A66C7BC1-F609-4234-A5F1-C76CE1D4BA7C}"/>
+                <a16:creationId xmlns:a16="http://schemas.microsoft.com/office/drawing/2014/main" id="{2FCF3145-9744-4726-BB4B-AD2E3D4B00ED}"/>
               </a:ext>
             </a:extLst>
           </p:cNvPr>
@@ -14763,7 +16271,7 @@
           <p:cNvPr id="17439" name="">
             <a:extLst xmlns:a="http://schemas.openxmlformats.org/drawingml/2006/main">
               <a:ext uri="{FF2B5EF4-FFF2-40B4-BE49-F238E27FC236}">
-                <a16:creationId xmlns:a16="http://schemas.microsoft.com/office/drawing/2014/main" id="{235F22A6-8675-40A6-968D-76F5FAEB4CD0}"/>
+                <a16:creationId xmlns:a16="http://schemas.microsoft.com/office/drawing/2014/main" id="{9410AE3C-5A9B-4077-83D7-7053390B8E24}"/>
               </a:ext>
             </a:extLst>
           </p:cNvPr>
@@ -14816,7 +16324,7 @@
           <p:cNvPr id="17440" name="">
             <a:extLst xmlns:a="http://schemas.openxmlformats.org/drawingml/2006/main">
               <a:ext uri="{FF2B5EF4-FFF2-40B4-BE49-F238E27FC236}">
-                <a16:creationId xmlns:a16="http://schemas.microsoft.com/office/drawing/2014/main" id="{C45FC526-D0A4-49A2-964A-707548BBCFCA}"/>
+                <a16:creationId xmlns:a16="http://schemas.microsoft.com/office/drawing/2014/main" id="{3B2F3D6B-4E61-487C-A606-436BFF1C21F9}"/>
               </a:ext>
             </a:extLst>
           </p:cNvPr>
@@ -14855,7 +16363,7 @@
           <p:cNvPr id="17441" name="">
             <a:extLst xmlns:a="http://schemas.openxmlformats.org/drawingml/2006/main">
               <a:ext uri="{FF2B5EF4-FFF2-40B4-BE49-F238E27FC236}">
-                <a16:creationId xmlns:a16="http://schemas.microsoft.com/office/drawing/2014/main" id="{59ADE905-F26F-4B04-9839-681A8932FAAF}"/>
+                <a16:creationId xmlns:a16="http://schemas.microsoft.com/office/drawing/2014/main" id="{F7758273-7FFF-401B-BF2E-68450B752248}"/>
               </a:ext>
             </a:extLst>
           </p:cNvPr>
@@ -14908,7 +16416,7 @@
           <p:cNvPr id="17442" name="">
             <a:extLst xmlns:a="http://schemas.openxmlformats.org/drawingml/2006/main">
               <a:ext uri="{FF2B5EF4-FFF2-40B4-BE49-F238E27FC236}">
-                <a16:creationId xmlns:a16="http://schemas.microsoft.com/office/drawing/2014/main" id="{58AE2441-D4E7-4BF0-821A-CF88DEE11AC1}"/>
+                <a16:creationId xmlns:a16="http://schemas.microsoft.com/office/drawing/2014/main" id="{37C6212A-A3C4-4794-9953-B5329F87FB6D}"/>
               </a:ext>
             </a:extLst>
           </p:cNvPr>
@@ -14961,7 +16469,7 @@
           <p:cNvPr id="17443" name="">
             <a:extLst xmlns:a="http://schemas.openxmlformats.org/drawingml/2006/main">
               <a:ext uri="{FF2B5EF4-FFF2-40B4-BE49-F238E27FC236}">
-                <a16:creationId xmlns:a16="http://schemas.microsoft.com/office/drawing/2014/main" id="{F77DDCA4-4F59-4226-B5FF-508B0C492500}"/>
+                <a16:creationId xmlns:a16="http://schemas.microsoft.com/office/drawing/2014/main" id="{46BB3968-2E89-4C16-A151-F274FF170F60}"/>
               </a:ext>
             </a:extLst>
           </p:cNvPr>
@@ -15014,7 +16522,7 @@
           <p:cNvPr id="17444" name="">
             <a:extLst xmlns:a="http://schemas.openxmlformats.org/drawingml/2006/main">
               <a:ext uri="{FF2B5EF4-FFF2-40B4-BE49-F238E27FC236}">
-                <a16:creationId xmlns:a16="http://schemas.microsoft.com/office/drawing/2014/main" id="{CF06693A-317F-4C2A-B364-70FEB2268B8B}"/>
+                <a16:creationId xmlns:a16="http://schemas.microsoft.com/office/drawing/2014/main" id="{D24FA405-8F35-48D2-A07E-82010D425CED}"/>
               </a:ext>
             </a:extLst>
           </p:cNvPr>
@@ -15053,7 +16561,7 @@
           <p:cNvPr id="17445" name="">
             <a:extLst xmlns:a="http://schemas.openxmlformats.org/drawingml/2006/main">
               <a:ext uri="{FF2B5EF4-FFF2-40B4-BE49-F238E27FC236}">
-                <a16:creationId xmlns:a16="http://schemas.microsoft.com/office/drawing/2014/main" id="{D364FBF4-36CB-4F82-98E7-7373CBA75E65}"/>
+                <a16:creationId xmlns:a16="http://schemas.microsoft.com/office/drawing/2014/main" id="{4B7742F3-A001-4308-B4C9-4AA2AB184855}"/>
               </a:ext>
             </a:extLst>
           </p:cNvPr>
@@ -15106,7 +16614,7 @@
           <p:cNvPr id="17446" name="">
             <a:extLst xmlns:a="http://schemas.openxmlformats.org/drawingml/2006/main">
               <a:ext uri="{FF2B5EF4-FFF2-40B4-BE49-F238E27FC236}">
-                <a16:creationId xmlns:a16="http://schemas.microsoft.com/office/drawing/2014/main" id="{C7B15911-E538-45E7-B3FC-60E80FF31744}"/>
+                <a16:creationId xmlns:a16="http://schemas.microsoft.com/office/drawing/2014/main" id="{DF73E379-782B-4909-980D-FC54146B4955}"/>
               </a:ext>
             </a:extLst>
           </p:cNvPr>
@@ -15159,7 +16667,7 @@
           <p:cNvPr id="17447" name="">
             <a:extLst xmlns:a="http://schemas.openxmlformats.org/drawingml/2006/main">
               <a:ext uri="{FF2B5EF4-FFF2-40B4-BE49-F238E27FC236}">
-                <a16:creationId xmlns:a16="http://schemas.microsoft.com/office/drawing/2014/main" id="{D993219B-6354-485B-87DE-1AEC2CF882CD}"/>
+                <a16:creationId xmlns:a16="http://schemas.microsoft.com/office/drawing/2014/main" id="{2763BE19-3776-40C3-BD8F-C3AAC3FCDEE8}"/>
               </a:ext>
             </a:extLst>
           </p:cNvPr>
@@ -15198,7 +16706,7 @@
           <p:cNvPr id="17448" name="">
             <a:extLst xmlns:a="http://schemas.openxmlformats.org/drawingml/2006/main">
               <a:ext uri="{FF2B5EF4-FFF2-40B4-BE49-F238E27FC236}">
-                <a16:creationId xmlns:a16="http://schemas.microsoft.com/office/drawing/2014/main" id="{124E169C-F289-447F-944A-2981AAA97525}"/>
+                <a16:creationId xmlns:a16="http://schemas.microsoft.com/office/drawing/2014/main" id="{D0079512-4A91-4BFB-B940-B100F7509ACA}"/>
               </a:ext>
             </a:extLst>
           </p:cNvPr>
@@ -15251,7 +16759,7 @@
           <p:cNvPr id="17449" name="">
             <a:extLst xmlns:a="http://schemas.openxmlformats.org/drawingml/2006/main">
               <a:ext uri="{FF2B5EF4-FFF2-40B4-BE49-F238E27FC236}">
-                <a16:creationId xmlns:a16="http://schemas.microsoft.com/office/drawing/2014/main" id="{D64D85E1-0038-4FF1-BDBE-316C875C4087}"/>
+                <a16:creationId xmlns:a16="http://schemas.microsoft.com/office/drawing/2014/main" id="{2DA3C480-8A80-4953-839D-2458577C4426}"/>
               </a:ext>
             </a:extLst>
           </p:cNvPr>
@@ -15304,7 +16812,7 @@
           <p:cNvPr id="17450" name="">
             <a:extLst xmlns:a="http://schemas.openxmlformats.org/drawingml/2006/main">
               <a:ext uri="{FF2B5EF4-FFF2-40B4-BE49-F238E27FC236}">
-                <a16:creationId xmlns:a16="http://schemas.microsoft.com/office/drawing/2014/main" id="{39EB3EE0-AEEA-42B8-8585-406A824C4B3A}"/>
+                <a16:creationId xmlns:a16="http://schemas.microsoft.com/office/drawing/2014/main" id="{6D7C8DE0-F6D5-49B3-A17A-C71F36D358FB}"/>
               </a:ext>
             </a:extLst>
           </p:cNvPr>
@@ -15343,7 +16851,7 @@
           <p:cNvPr id="17451" name="">
             <a:extLst xmlns:a="http://schemas.openxmlformats.org/drawingml/2006/main">
               <a:ext uri="{FF2B5EF4-FFF2-40B4-BE49-F238E27FC236}">
-                <a16:creationId xmlns:a16="http://schemas.microsoft.com/office/drawing/2014/main" id="{B6E8113A-A51F-4F62-8097-DBE138CE0473}"/>
+                <a16:creationId xmlns:a16="http://schemas.microsoft.com/office/drawing/2014/main" id="{DC71AE4E-36E1-4E0F-AB68-11BF391D89F0}"/>
               </a:ext>
             </a:extLst>
           </p:cNvPr>
@@ -15396,7 +16904,7 @@
           <p:cNvPr id="17452" name="">
             <a:extLst xmlns:a="http://schemas.openxmlformats.org/drawingml/2006/main">
               <a:ext uri="{FF2B5EF4-FFF2-40B4-BE49-F238E27FC236}">
-                <a16:creationId xmlns:a16="http://schemas.microsoft.com/office/drawing/2014/main" id="{7ED835B5-218F-4467-9A40-824D83D289E0}"/>
+                <a16:creationId xmlns:a16="http://schemas.microsoft.com/office/drawing/2014/main" id="{CFC895EA-D47D-4E0A-BC02-790804EBAD77}"/>
               </a:ext>
             </a:extLst>
           </p:cNvPr>
@@ -15449,7 +16957,7 @@
           <p:cNvPr id="17453" name="">
             <a:extLst xmlns:a="http://schemas.openxmlformats.org/drawingml/2006/main">
               <a:ext uri="{FF2B5EF4-FFF2-40B4-BE49-F238E27FC236}">
-                <a16:creationId xmlns:a16="http://schemas.microsoft.com/office/drawing/2014/main" id="{D2360340-329A-4D21-86C8-49A7B01E3BF9}"/>
+                <a16:creationId xmlns:a16="http://schemas.microsoft.com/office/drawing/2014/main" id="{72F4E212-0D44-4C8E-B370-8B64443CFECB}"/>
               </a:ext>
             </a:extLst>
           </p:cNvPr>
@@ -15502,7 +17010,7 @@
           <p:cNvPr id="17454" name="">
             <a:extLst xmlns:a="http://schemas.openxmlformats.org/drawingml/2006/main">
               <a:ext uri="{FF2B5EF4-FFF2-40B4-BE49-F238E27FC236}">
-                <a16:creationId xmlns:a16="http://schemas.microsoft.com/office/drawing/2014/main" id="{5AD20F6A-F5BE-4DAA-AD1C-57D3FD840468}"/>
+                <a16:creationId xmlns:a16="http://schemas.microsoft.com/office/drawing/2014/main" id="{7E81F295-FF5D-460B-87E4-1E0A995C8690}"/>
               </a:ext>
             </a:extLst>
           </p:cNvPr>
@@ -15541,7 +17049,7 @@
           <p:cNvPr id="17455" name="">
             <a:extLst xmlns:a="http://schemas.openxmlformats.org/drawingml/2006/main">
               <a:ext uri="{FF2B5EF4-FFF2-40B4-BE49-F238E27FC236}">
-                <a16:creationId xmlns:a16="http://schemas.microsoft.com/office/drawing/2014/main" id="{FF0E5F42-E897-40DF-B98F-3CE11D113A4B}"/>
+                <a16:creationId xmlns:a16="http://schemas.microsoft.com/office/drawing/2014/main" id="{4B583A06-6AB9-4002-BBA9-C664E5D1E369}"/>
               </a:ext>
             </a:extLst>
           </p:cNvPr>
@@ -15594,7 +17102,7 @@
           <p:cNvPr id="17456" name="">
             <a:extLst xmlns:a="http://schemas.openxmlformats.org/drawingml/2006/main">
               <a:ext uri="{FF2B5EF4-FFF2-40B4-BE49-F238E27FC236}">
-                <a16:creationId xmlns:a16="http://schemas.microsoft.com/office/drawing/2014/main" id="{388C05A0-572B-4A85-B45D-9EEC48B9FA61}"/>
+                <a16:creationId xmlns:a16="http://schemas.microsoft.com/office/drawing/2014/main" id="{45078D87-52C6-40BD-8F1B-492AC34F960B}"/>
               </a:ext>
             </a:extLst>
           </p:cNvPr>
@@ -15658,7 +17166,7 @@
           <p:cNvPr id="17457" name="">
             <a:extLst xmlns:a="http://schemas.openxmlformats.org/drawingml/2006/main">
               <a:ext uri="{FF2B5EF4-FFF2-40B4-BE49-F238E27FC236}">
-                <a16:creationId xmlns:a16="http://schemas.microsoft.com/office/drawing/2014/main" id="{97C48AF5-279E-4DDF-BD30-023AF702596D}"/>
+                <a16:creationId xmlns:a16="http://schemas.microsoft.com/office/drawing/2014/main" id="{FDF928F0-4D0A-4E6F-953A-353BD8945FB6}"/>
               </a:ext>
             </a:extLst>
           </p:cNvPr>
@@ -15722,7 +17230,7 @@
           <p:cNvPr id="17458" name="">
             <a:extLst xmlns:a="http://schemas.openxmlformats.org/drawingml/2006/main">
               <a:ext uri="{FF2B5EF4-FFF2-40B4-BE49-F238E27FC236}">
-                <a16:creationId xmlns:a16="http://schemas.microsoft.com/office/drawing/2014/main" id="{09EE2E2F-9B6A-4818-A505-8D541E46E233}"/>
+                <a16:creationId xmlns:a16="http://schemas.microsoft.com/office/drawing/2014/main" id="{249652A8-6D21-4EA9-8565-645644A9CA9D}"/>
               </a:ext>
             </a:extLst>
           </p:cNvPr>
@@ -15786,7 +17294,7 @@
           <p:cNvPr id="17459" name="">
             <a:extLst xmlns:a="http://schemas.openxmlformats.org/drawingml/2006/main">
               <a:ext uri="{FF2B5EF4-FFF2-40B4-BE49-F238E27FC236}">
-                <a16:creationId xmlns:a16="http://schemas.microsoft.com/office/drawing/2014/main" id="{9DDE6DD0-04FF-4C9C-953B-D31DF3F68B93}"/>
+                <a16:creationId xmlns:a16="http://schemas.microsoft.com/office/drawing/2014/main" id="{59FE9E61-6D11-40F6-8CF3-DE6571D3EEB9}"/>
               </a:ext>
             </a:extLst>
           </p:cNvPr>
@@ -15840,7 +17348,7 @@
                 <a:ea typeface="Arial"/>
                 <a:cs typeface="Arial"/>
               </a:rPr>
-              <a:t>1,426 tests - 1,202 pytest, 224 vitest</a:t>
+              <a:t>1,431 tests - 1,202 pytest, 229 vitest</a:t>
             </a:r>
           </a:p>
         </p:txBody>
